--- a/Documentation/Character Controller Architecture.pptx
+++ b/Documentation/Character Controller Architecture.pptx
@@ -108,6 +108,11 @@
       </a:defRPr>
     </a:lvl9pPr>
   </p:defaultTextStyle>
+  <p:extLst>
+    <p:ext uri="{EFAFB233-063F-42B5-8137-9DF3F51BA10A}">
+      <p15:sldGuideLst xmlns:p15="http://schemas.microsoft.com/office/powerpoint/2012/main"/>
+    </p:ext>
+  </p:extLst>
 </p:presentation>
 </file>
 
@@ -4282,6 +4287,7 @@
           <a:bodyPr/>
           <a:lstStyle/>
           <a:p>
+            <a:pPr algn="ctr"/>
             <a:r>
               <a:rPr lang="en-GB" dirty="0"/>
               <a:t>Interface Modules</a:t>
@@ -4289,361 +4295,759 @@
           </a:p>
         </p:txBody>
       </p:sp>
-      <p:sp>
-        <p:nvSpPr>
-          <p:cNvPr id="3" name="Rectangle: Rounded Corners 2">
-            <a:extLst>
-              <a:ext uri="{FF2B5EF4-FFF2-40B4-BE49-F238E27FC236}">
-                <a16:creationId xmlns:a16="http://schemas.microsoft.com/office/drawing/2014/main" id="{AE63B0B4-B004-5177-5C7C-F5759D77E806}"/>
-              </a:ext>
-            </a:extLst>
-          </p:cNvPr>
-          <p:cNvSpPr/>
+      <p:grpSp>
+        <p:nvGrpSpPr>
+          <p:cNvPr id="20" name="Group 19">
+            <a:extLst>
+              <a:ext uri="{FF2B5EF4-FFF2-40B4-BE49-F238E27FC236}">
+                <a16:creationId xmlns:a16="http://schemas.microsoft.com/office/drawing/2014/main" id="{A7FB910F-D064-BE13-AECD-AF89EE6C7A25}"/>
+              </a:ext>
+            </a:extLst>
+          </p:cNvPr>
+          <p:cNvGrpSpPr/>
+          <p:nvPr/>
+        </p:nvGrpSpPr>
+        <p:grpSpPr>
+          <a:xfrm>
+            <a:off x="886981" y="2461943"/>
+            <a:ext cx="4647501" cy="3484726"/>
+            <a:chOff x="880844" y="2369889"/>
+            <a:chExt cx="4647501" cy="3484726"/>
+          </a:xfrm>
+        </p:grpSpPr>
+        <p:sp>
+          <p:nvSpPr>
+            <p:cNvPr id="3" name="Rectangle: Rounded Corners 2">
+              <a:extLst>
+                <a:ext uri="{FF2B5EF4-FFF2-40B4-BE49-F238E27FC236}">
+                  <a16:creationId xmlns:a16="http://schemas.microsoft.com/office/drawing/2014/main" id="{AE63B0B4-B004-5177-5C7C-F5759D77E806}"/>
+                </a:ext>
+              </a:extLst>
+            </p:cNvPr>
+            <p:cNvSpPr/>
+            <p:nvPr/>
+          </p:nvSpPr>
+          <p:spPr>
+            <a:xfrm>
+              <a:off x="880844" y="2369889"/>
+              <a:ext cx="4647501" cy="3484725"/>
+            </a:xfrm>
+            <a:prstGeom prst="roundRect">
+              <a:avLst/>
+            </a:prstGeom>
+          </p:spPr>
+          <p:style>
+            <a:lnRef idx="2">
+              <a:schemeClr val="accent1">
+                <a:shade val="15000"/>
+              </a:schemeClr>
+            </a:lnRef>
+            <a:fillRef idx="1">
+              <a:schemeClr val="accent1"/>
+            </a:fillRef>
+            <a:effectRef idx="0">
+              <a:schemeClr val="accent1"/>
+            </a:effectRef>
+            <a:fontRef idx="minor">
+              <a:schemeClr val="lt1"/>
+            </a:fontRef>
+          </p:style>
+          <p:txBody>
+            <a:bodyPr rtlCol="0" anchor="ctr"/>
+            <a:lstStyle/>
+            <a:p>
+              <a:pPr algn="ctr"/>
+              <a:r>
+                <a:rPr lang="en-GB" dirty="0"/>
+                <a:t>Character Controller</a:t>
+              </a:r>
+            </a:p>
+            <a:p>
+              <a:pPr algn="ctr"/>
+              <a:r>
+                <a:rPr lang="en-GB" sz="1400" dirty="0"/>
+                <a:t>Functions as a signal and variable hub</a:t>
+              </a:r>
+            </a:p>
+            <a:p>
+              <a:pPr algn="ctr"/>
+              <a:endParaRPr lang="en-GB" dirty="0"/>
+            </a:p>
+            <a:p>
+              <a:pPr algn="ctr"/>
+              <a:endParaRPr lang="en-GB" dirty="0"/>
+            </a:p>
+            <a:p>
+              <a:pPr algn="ctr"/>
+              <a:endParaRPr lang="en-GB" dirty="0"/>
+            </a:p>
+            <a:p>
+              <a:pPr algn="ctr"/>
+              <a:endParaRPr lang="en-GB" dirty="0"/>
+            </a:p>
+            <a:p>
+              <a:pPr algn="ctr"/>
+              <a:endParaRPr lang="en-GB" dirty="0"/>
+            </a:p>
+            <a:p>
+              <a:pPr algn="ctr"/>
+              <a:endParaRPr lang="en-GB" dirty="0"/>
+            </a:p>
+            <a:p>
+              <a:pPr algn="ctr"/>
+              <a:endParaRPr lang="en-GB" dirty="0"/>
+            </a:p>
+            <a:p>
+              <a:pPr algn="ctr"/>
+              <a:endParaRPr lang="en-GB" dirty="0"/>
+            </a:p>
+            <a:p>
+              <a:pPr algn="ctr"/>
+              <a:endParaRPr lang="en-GB" dirty="0"/>
+            </a:p>
+            <a:p>
+              <a:pPr algn="ctr"/>
+              <a:endParaRPr lang="en-GB" dirty="0"/>
+            </a:p>
+            <a:p>
+              <a:pPr algn="ctr"/>
+              <a:endParaRPr lang="en-GB" dirty="0"/>
+            </a:p>
+          </p:txBody>
+        </p:sp>
+        <p:sp>
+          <p:nvSpPr>
+            <p:cNvPr id="4" name="Rectangle 3">
+              <a:extLst>
+                <a:ext uri="{FF2B5EF4-FFF2-40B4-BE49-F238E27FC236}">
+                  <a16:creationId xmlns:a16="http://schemas.microsoft.com/office/drawing/2014/main" id="{CAC3E813-E830-F1D7-4EEB-94A4C53E5151}"/>
+                </a:ext>
+              </a:extLst>
+            </p:cNvPr>
+            <p:cNvSpPr/>
+            <p:nvPr/>
+          </p:nvSpPr>
+          <p:spPr>
+            <a:xfrm>
+              <a:off x="885038" y="2886119"/>
+              <a:ext cx="4643307" cy="851261"/>
+            </a:xfrm>
+            <a:prstGeom prst="rect">
+              <a:avLst/>
+            </a:prstGeom>
+          </p:spPr>
+          <p:style>
+            <a:lnRef idx="1">
+              <a:schemeClr val="accent1"/>
+            </a:lnRef>
+            <a:fillRef idx="2">
+              <a:schemeClr val="accent1"/>
+            </a:fillRef>
+            <a:effectRef idx="1">
+              <a:schemeClr val="accent1"/>
+            </a:effectRef>
+            <a:fontRef idx="minor">
+              <a:schemeClr val="dk1"/>
+            </a:fontRef>
+          </p:style>
+          <p:txBody>
+            <a:bodyPr rtlCol="0" anchor="ctr"/>
+            <a:lstStyle/>
+            <a:p>
+              <a:pPr algn="ctr"/>
+              <a:r>
+                <a:rPr lang="en-GB" dirty="0"/>
+                <a:t>Interface Layer</a:t>
+              </a:r>
+            </a:p>
+            <a:p>
+              <a:pPr algn="ctr"/>
+              <a:r>
+                <a:rPr lang="en-GB" sz="1200" dirty="0"/>
+                <a:t>Common interfaces, </a:t>
+              </a:r>
+              <a:r>
+                <a:rPr lang="en-GB" sz="1200" dirty="0" err="1"/>
+                <a:t>Initisalize</a:t>
+              </a:r>
+              <a:r>
+                <a:rPr lang="en-GB" sz="1200" dirty="0"/>
+                <a:t>  (Runs on CC Start), </a:t>
+              </a:r>
+            </a:p>
+            <a:p>
+              <a:pPr algn="ctr"/>
+              <a:r>
+                <a:rPr lang="en-GB" sz="1200" dirty="0"/>
+                <a:t>Tick (runs on CC Update), </a:t>
+              </a:r>
+              <a:r>
+                <a:rPr lang="en-GB" sz="1200" dirty="0" err="1"/>
+                <a:t>FixedTick</a:t>
+              </a:r>
+              <a:r>
+                <a:rPr lang="en-GB" sz="1200" dirty="0"/>
+                <a:t> (Runs on CC </a:t>
+              </a:r>
+              <a:r>
+                <a:rPr lang="en-GB" sz="1200" dirty="0" err="1"/>
+                <a:t>FixedUpdate</a:t>
+              </a:r>
+              <a:r>
+                <a:rPr lang="en-GB" sz="1200" dirty="0"/>
+                <a:t>), Dispose(runs on CC Disable)</a:t>
+              </a:r>
+            </a:p>
+          </p:txBody>
+        </p:sp>
+        <p:sp>
+          <p:nvSpPr>
+            <p:cNvPr id="5" name="Rectangle 4">
+              <a:extLst>
+                <a:ext uri="{FF2B5EF4-FFF2-40B4-BE49-F238E27FC236}">
+                  <a16:creationId xmlns:a16="http://schemas.microsoft.com/office/drawing/2014/main" id="{9554C1D2-6827-531C-0A8A-2E8C9E45ACE8}"/>
+                </a:ext>
+              </a:extLst>
+            </p:cNvPr>
+            <p:cNvSpPr/>
+            <p:nvPr/>
+          </p:nvSpPr>
+          <p:spPr>
+            <a:xfrm>
+              <a:off x="1724099" y="3737381"/>
+              <a:ext cx="591423" cy="2117234"/>
+            </a:xfrm>
+            <a:prstGeom prst="rect">
+              <a:avLst/>
+            </a:prstGeom>
+          </p:spPr>
+          <p:style>
+            <a:lnRef idx="2">
+              <a:schemeClr val="accent2">
+                <a:shade val="15000"/>
+              </a:schemeClr>
+            </a:lnRef>
+            <a:fillRef idx="1">
+              <a:schemeClr val="accent2"/>
+            </a:fillRef>
+            <a:effectRef idx="0">
+              <a:schemeClr val="accent2"/>
+            </a:effectRef>
+            <a:fontRef idx="minor">
+              <a:schemeClr val="lt1"/>
+            </a:fontRef>
+          </p:style>
+          <p:txBody>
+            <a:bodyPr vert="vert270" rtlCol="0" anchor="ctr"/>
+            <a:lstStyle/>
+            <a:p>
+              <a:pPr algn="ctr"/>
+              <a:r>
+                <a:rPr lang="en-GB" dirty="0"/>
+                <a:t>Movement Module</a:t>
+              </a:r>
+            </a:p>
+          </p:txBody>
+        </p:sp>
+        <p:sp>
+          <p:nvSpPr>
+            <p:cNvPr id="8" name="Rectangle 7">
+              <a:extLst>
+                <a:ext uri="{FF2B5EF4-FFF2-40B4-BE49-F238E27FC236}">
+                  <a16:creationId xmlns:a16="http://schemas.microsoft.com/office/drawing/2014/main" id="{F34483B6-BE12-3A0B-8BDF-755173DF0D81}"/>
+                </a:ext>
+              </a:extLst>
+            </p:cNvPr>
+            <p:cNvSpPr/>
+            <p:nvPr/>
+          </p:nvSpPr>
+          <p:spPr>
+            <a:xfrm>
+              <a:off x="2525247" y="3737381"/>
+              <a:ext cx="591423" cy="2117234"/>
+            </a:xfrm>
+            <a:prstGeom prst="rect">
+              <a:avLst/>
+            </a:prstGeom>
+          </p:spPr>
+          <p:style>
+            <a:lnRef idx="2">
+              <a:schemeClr val="accent5">
+                <a:shade val="15000"/>
+              </a:schemeClr>
+            </a:lnRef>
+            <a:fillRef idx="1">
+              <a:schemeClr val="accent5"/>
+            </a:fillRef>
+            <a:effectRef idx="0">
+              <a:schemeClr val="accent5"/>
+            </a:effectRef>
+            <a:fontRef idx="minor">
+              <a:schemeClr val="lt1"/>
+            </a:fontRef>
+          </p:style>
+          <p:txBody>
+            <a:bodyPr vert="vert270" rtlCol="0" anchor="ctr"/>
+            <a:lstStyle/>
+            <a:p>
+              <a:pPr algn="ctr"/>
+              <a:r>
+                <a:rPr lang="en-GB" dirty="0"/>
+                <a:t>Animation Module</a:t>
+              </a:r>
+            </a:p>
+          </p:txBody>
+        </p:sp>
+        <p:sp>
+          <p:nvSpPr>
+            <p:cNvPr id="9" name="Rectangle 8">
+              <a:extLst>
+                <a:ext uri="{FF2B5EF4-FFF2-40B4-BE49-F238E27FC236}">
+                  <a16:creationId xmlns:a16="http://schemas.microsoft.com/office/drawing/2014/main" id="{61840801-3A1D-7D6C-9CC7-4DE3677CA004}"/>
+                </a:ext>
+              </a:extLst>
+            </p:cNvPr>
+            <p:cNvSpPr/>
+            <p:nvPr/>
+          </p:nvSpPr>
+          <p:spPr>
+            <a:xfrm>
+              <a:off x="3290044" y="3737381"/>
+              <a:ext cx="591423" cy="2117234"/>
+            </a:xfrm>
+            <a:prstGeom prst="rect">
+              <a:avLst/>
+            </a:prstGeom>
+          </p:spPr>
+          <p:style>
+            <a:lnRef idx="3">
+              <a:schemeClr val="lt1"/>
+            </a:lnRef>
+            <a:fillRef idx="1">
+              <a:schemeClr val="accent6"/>
+            </a:fillRef>
+            <a:effectRef idx="1">
+              <a:schemeClr val="accent6"/>
+            </a:effectRef>
+            <a:fontRef idx="minor">
+              <a:schemeClr val="lt1"/>
+            </a:fontRef>
+          </p:style>
+          <p:txBody>
+            <a:bodyPr vert="vert270" rtlCol="0" anchor="ctr"/>
+            <a:lstStyle/>
+            <a:p>
+              <a:pPr algn="ctr"/>
+              <a:r>
+                <a:rPr lang="en-GB" dirty="0"/>
+                <a:t>VFX Module</a:t>
+              </a:r>
+            </a:p>
+          </p:txBody>
+        </p:sp>
+        <p:sp>
+          <p:nvSpPr>
+            <p:cNvPr id="10" name="Rectangle 9">
+              <a:extLst>
+                <a:ext uri="{FF2B5EF4-FFF2-40B4-BE49-F238E27FC236}">
+                  <a16:creationId xmlns:a16="http://schemas.microsoft.com/office/drawing/2014/main" id="{DE47CD9B-08C1-CFD0-E7AA-C8776EF167E8}"/>
+                </a:ext>
+              </a:extLst>
+            </p:cNvPr>
+            <p:cNvSpPr/>
+            <p:nvPr/>
+          </p:nvSpPr>
+          <p:spPr>
+            <a:xfrm>
+              <a:off x="4117758" y="3737381"/>
+              <a:ext cx="591423" cy="2117234"/>
+            </a:xfrm>
+            <a:prstGeom prst="rect">
+              <a:avLst/>
+            </a:prstGeom>
+            <a:solidFill>
+              <a:srgbClr val="CB5A51"/>
+            </a:solidFill>
+          </p:spPr>
+          <p:style>
+            <a:lnRef idx="2">
+              <a:schemeClr val="accent2">
+                <a:shade val="15000"/>
+              </a:schemeClr>
+            </a:lnRef>
+            <a:fillRef idx="1">
+              <a:schemeClr val="accent2"/>
+            </a:fillRef>
+            <a:effectRef idx="0">
+              <a:schemeClr val="accent2"/>
+            </a:effectRef>
+            <a:fontRef idx="minor">
+              <a:schemeClr val="lt1"/>
+            </a:fontRef>
+          </p:style>
+          <p:txBody>
+            <a:bodyPr vert="vert270" rtlCol="0" anchor="ctr"/>
+            <a:lstStyle/>
+            <a:p>
+              <a:pPr algn="ctr"/>
+              <a:r>
+                <a:rPr lang="en-GB" dirty="0"/>
+                <a:t>Flight Module</a:t>
+              </a:r>
+            </a:p>
+          </p:txBody>
+        </p:sp>
+      </p:grpSp>
+      <p:grpSp>
+        <p:nvGrpSpPr>
+          <p:cNvPr id="21" name="Group 20">
+            <a:extLst>
+              <a:ext uri="{FF2B5EF4-FFF2-40B4-BE49-F238E27FC236}">
+                <a16:creationId xmlns:a16="http://schemas.microsoft.com/office/drawing/2014/main" id="{48B74F62-3BBB-F695-F8BC-895176CACC23}"/>
+              </a:ext>
+            </a:extLst>
+          </p:cNvPr>
+          <p:cNvGrpSpPr/>
+          <p:nvPr/>
+        </p:nvGrpSpPr>
+        <p:grpSpPr>
+          <a:xfrm>
+            <a:off x="7759326" y="2456309"/>
+            <a:ext cx="2415637" cy="3495992"/>
+            <a:chOff x="7863654" y="2355543"/>
+            <a:chExt cx="2415637" cy="3495992"/>
+          </a:xfrm>
+        </p:grpSpPr>
+        <p:sp>
+          <p:nvSpPr>
+            <p:cNvPr id="6" name="Rectangle 5">
+              <a:extLst>
+                <a:ext uri="{FF2B5EF4-FFF2-40B4-BE49-F238E27FC236}">
+                  <a16:creationId xmlns:a16="http://schemas.microsoft.com/office/drawing/2014/main" id="{5B226339-F00F-2CA2-DB61-68848BEE995B}"/>
+                </a:ext>
+              </a:extLst>
+            </p:cNvPr>
+            <p:cNvSpPr/>
+            <p:nvPr/>
+          </p:nvSpPr>
+          <p:spPr>
+            <a:xfrm>
+              <a:off x="7863655" y="3087741"/>
+              <a:ext cx="2415635" cy="608576"/>
+            </a:xfrm>
+            <a:prstGeom prst="rect">
+              <a:avLst/>
+            </a:prstGeom>
+            <a:solidFill>
+              <a:schemeClr val="accent2">
+                <a:lumMod val="40000"/>
+                <a:lumOff val="60000"/>
+              </a:schemeClr>
+            </a:solidFill>
+          </p:spPr>
+          <p:style>
+            <a:lnRef idx="2">
+              <a:schemeClr val="accent2">
+                <a:shade val="15000"/>
+              </a:schemeClr>
+            </a:lnRef>
+            <a:fillRef idx="1">
+              <a:schemeClr val="accent2"/>
+            </a:fillRef>
+            <a:effectRef idx="0">
+              <a:schemeClr val="accent2"/>
+            </a:effectRef>
+            <a:fontRef idx="minor">
+              <a:schemeClr val="lt1"/>
+            </a:fontRef>
+          </p:style>
+          <p:txBody>
+            <a:bodyPr vert="horz" rtlCol="0" anchor="ctr"/>
+            <a:lstStyle/>
+            <a:p>
+              <a:pPr algn="ctr"/>
+              <a:r>
+                <a:rPr lang="en-GB" dirty="0">
+                  <a:solidFill>
+                    <a:schemeClr val="tx1"/>
+                  </a:solidFill>
+                </a:rPr>
+                <a:t>Rotation Module</a:t>
+              </a:r>
+            </a:p>
+          </p:txBody>
+        </p:sp>
+        <p:sp>
+          <p:nvSpPr>
+            <p:cNvPr id="7" name="Rectangle 6">
+              <a:extLst>
+                <a:ext uri="{FF2B5EF4-FFF2-40B4-BE49-F238E27FC236}">
+                  <a16:creationId xmlns:a16="http://schemas.microsoft.com/office/drawing/2014/main" id="{362BD48C-A52A-7B9E-7550-9FE77FA7AA4C}"/>
+                </a:ext>
+              </a:extLst>
+            </p:cNvPr>
+            <p:cNvSpPr/>
+            <p:nvPr/>
+          </p:nvSpPr>
+          <p:spPr>
+            <a:xfrm>
+              <a:off x="7863655" y="3799251"/>
+              <a:ext cx="2415635" cy="608576"/>
+            </a:xfrm>
+            <a:prstGeom prst="rect">
+              <a:avLst/>
+            </a:prstGeom>
+          </p:spPr>
+          <p:style>
+            <a:lnRef idx="2">
+              <a:schemeClr val="accent5">
+                <a:shade val="15000"/>
+              </a:schemeClr>
+            </a:lnRef>
+            <a:fillRef idx="1">
+              <a:schemeClr val="accent5"/>
+            </a:fillRef>
+            <a:effectRef idx="0">
+              <a:schemeClr val="accent5"/>
+            </a:effectRef>
+            <a:fontRef idx="minor">
+              <a:schemeClr val="lt1"/>
+            </a:fontRef>
+          </p:style>
+          <p:txBody>
+            <a:bodyPr vert="horz" rtlCol="0" anchor="ctr"/>
+            <a:lstStyle/>
+            <a:p>
+              <a:pPr algn="ctr"/>
+              <a:r>
+                <a:rPr lang="en-GB" dirty="0"/>
+                <a:t>Particle Module</a:t>
+              </a:r>
+            </a:p>
+          </p:txBody>
+        </p:sp>
+        <p:sp>
+          <p:nvSpPr>
+            <p:cNvPr id="11" name="Rectangle 10">
+              <a:extLst>
+                <a:ext uri="{FF2B5EF4-FFF2-40B4-BE49-F238E27FC236}">
+                  <a16:creationId xmlns:a16="http://schemas.microsoft.com/office/drawing/2014/main" id="{A0D169A4-C506-FD35-A501-50BE51C13C27}"/>
+                </a:ext>
+              </a:extLst>
+            </p:cNvPr>
+            <p:cNvSpPr/>
+            <p:nvPr/>
+          </p:nvSpPr>
+          <p:spPr>
+            <a:xfrm>
+              <a:off x="7863656" y="4571990"/>
+              <a:ext cx="2415635" cy="608576"/>
+            </a:xfrm>
+            <a:prstGeom prst="rect">
+              <a:avLst/>
+            </a:prstGeom>
+          </p:spPr>
+          <p:style>
+            <a:lnRef idx="3">
+              <a:schemeClr val="lt1"/>
+            </a:lnRef>
+            <a:fillRef idx="1">
+              <a:schemeClr val="accent6"/>
+            </a:fillRef>
+            <a:effectRef idx="1">
+              <a:schemeClr val="accent6"/>
+            </a:effectRef>
+            <a:fontRef idx="minor">
+              <a:schemeClr val="lt1"/>
+            </a:fontRef>
+          </p:style>
+          <p:txBody>
+            <a:bodyPr vert="horz" rtlCol="0" anchor="ctr"/>
+            <a:lstStyle/>
+            <a:p>
+              <a:pPr algn="ctr"/>
+              <a:r>
+                <a:rPr lang="en-GB" dirty="0"/>
+                <a:t>Audio Module</a:t>
+              </a:r>
+            </a:p>
+          </p:txBody>
+        </p:sp>
+        <p:sp>
+          <p:nvSpPr>
+            <p:cNvPr id="12" name="Rectangle 11">
+              <a:extLst>
+                <a:ext uri="{FF2B5EF4-FFF2-40B4-BE49-F238E27FC236}">
+                  <a16:creationId xmlns:a16="http://schemas.microsoft.com/office/drawing/2014/main" id="{96D33FD7-8E20-FA0F-D176-329A23B460E1}"/>
+                </a:ext>
+              </a:extLst>
+            </p:cNvPr>
+            <p:cNvSpPr/>
+            <p:nvPr/>
+          </p:nvSpPr>
+          <p:spPr>
+            <a:xfrm>
+              <a:off x="7863656" y="5242959"/>
+              <a:ext cx="2415635" cy="608576"/>
+            </a:xfrm>
+            <a:prstGeom prst="rect">
+              <a:avLst/>
+            </a:prstGeom>
+            <a:solidFill>
+              <a:srgbClr val="CB5A51"/>
+            </a:solidFill>
+          </p:spPr>
+          <p:style>
+            <a:lnRef idx="2">
+              <a:schemeClr val="accent2">
+                <a:shade val="15000"/>
+              </a:schemeClr>
+            </a:lnRef>
+            <a:fillRef idx="1">
+              <a:schemeClr val="accent2"/>
+            </a:fillRef>
+            <a:effectRef idx="0">
+              <a:schemeClr val="accent2"/>
+            </a:effectRef>
+            <a:fontRef idx="minor">
+              <a:schemeClr val="lt1"/>
+            </a:fontRef>
+          </p:style>
+          <p:txBody>
+            <a:bodyPr vert="horz" rtlCol="0" anchor="ctr"/>
+            <a:lstStyle/>
+            <a:p>
+              <a:pPr algn="ctr"/>
+              <a:r>
+                <a:rPr lang="en-GB" dirty="0"/>
+                <a:t>Swimming Module</a:t>
+              </a:r>
+            </a:p>
+          </p:txBody>
+        </p:sp>
+        <p:sp>
+          <p:nvSpPr>
+            <p:cNvPr id="17" name="Rectangle 16">
+              <a:extLst>
+                <a:ext uri="{FF2B5EF4-FFF2-40B4-BE49-F238E27FC236}">
+                  <a16:creationId xmlns:a16="http://schemas.microsoft.com/office/drawing/2014/main" id="{9E2ABB31-7B71-718D-C8F2-559FF3066183}"/>
+                </a:ext>
+              </a:extLst>
+            </p:cNvPr>
+            <p:cNvSpPr/>
+            <p:nvPr/>
+          </p:nvSpPr>
+          <p:spPr>
+            <a:xfrm>
+              <a:off x="7863654" y="2355543"/>
+              <a:ext cx="2415635" cy="608576"/>
+            </a:xfrm>
+            <a:prstGeom prst="rect">
+              <a:avLst/>
+            </a:prstGeom>
+            <a:solidFill>
+              <a:srgbClr val="EAE5BA"/>
+            </a:solidFill>
+          </p:spPr>
+          <p:style>
+            <a:lnRef idx="2">
+              <a:schemeClr val="accent2">
+                <a:shade val="15000"/>
+              </a:schemeClr>
+            </a:lnRef>
+            <a:fillRef idx="1">
+              <a:schemeClr val="accent2"/>
+            </a:fillRef>
+            <a:effectRef idx="0">
+              <a:schemeClr val="accent2"/>
+            </a:effectRef>
+            <a:fontRef idx="minor">
+              <a:schemeClr val="lt1"/>
+            </a:fontRef>
+          </p:style>
+          <p:txBody>
+            <a:bodyPr vert="horz" rtlCol="0" anchor="ctr"/>
+            <a:lstStyle/>
+            <a:p>
+              <a:pPr algn="ctr"/>
+              <a:r>
+                <a:rPr lang="en-GB" dirty="0">
+                  <a:solidFill>
+                    <a:schemeClr val="tx1"/>
+                  </a:solidFill>
+                </a:rPr>
+                <a:t>Flight Module</a:t>
+              </a:r>
+            </a:p>
+          </p:txBody>
+        </p:sp>
+      </p:grpSp>
+      <p:sp>
+        <p:nvSpPr>
+          <p:cNvPr id="18" name="TextBox 17">
+            <a:extLst>
+              <a:ext uri="{FF2B5EF4-FFF2-40B4-BE49-F238E27FC236}">
+                <a16:creationId xmlns:a16="http://schemas.microsoft.com/office/drawing/2014/main" id="{05D27B06-6813-E9D9-068F-3D3191116008}"/>
+              </a:ext>
+            </a:extLst>
+          </p:cNvPr>
+          <p:cNvSpPr txBox="1"/>
           <p:nvPr/>
         </p:nvSpPr>
         <p:spPr>
           <a:xfrm>
-            <a:off x="880844" y="2369890"/>
-            <a:ext cx="4647501" cy="3165764"/>
-          </a:xfrm>
-          <a:prstGeom prst="roundRect">
-            <a:avLst/>
-          </a:prstGeom>
-        </p:spPr>
-        <p:style>
-          <a:lnRef idx="2">
-            <a:schemeClr val="accent1">
-              <a:shade val="15000"/>
-            </a:schemeClr>
-          </a:lnRef>
-          <a:fillRef idx="1">
-            <a:schemeClr val="accent1"/>
-          </a:fillRef>
-          <a:effectRef idx="0">
-            <a:schemeClr val="accent1"/>
-          </a:effectRef>
-          <a:fontRef idx="minor">
-            <a:schemeClr val="lt1"/>
-          </a:fontRef>
-        </p:style>
-        <p:txBody>
-          <a:bodyPr rtlCol="0" anchor="ctr"/>
-          <a:lstStyle/>
-          <a:p>
-            <a:pPr algn="ctr"/>
-            <a:r>
-              <a:rPr lang="en-GB" dirty="0"/>
-              <a:t>Character Controller</a:t>
-            </a:r>
-          </a:p>
-          <a:p>
-            <a:pPr algn="ctr"/>
-            <a:r>
-              <a:rPr lang="en-GB" sz="1400" dirty="0"/>
-              <a:t>Functions as a signal and variable hub</a:t>
-            </a:r>
-          </a:p>
-          <a:p>
-            <a:pPr algn="ctr"/>
-            <a:endParaRPr lang="en-GB" dirty="0"/>
-          </a:p>
-          <a:p>
-            <a:pPr algn="ctr"/>
-            <a:endParaRPr lang="en-GB" dirty="0"/>
-          </a:p>
-          <a:p>
-            <a:pPr algn="ctr"/>
-            <a:endParaRPr lang="en-GB" dirty="0"/>
-          </a:p>
-          <a:p>
-            <a:pPr algn="ctr"/>
-            <a:endParaRPr lang="en-GB" dirty="0"/>
-          </a:p>
-          <a:p>
-            <a:pPr algn="ctr"/>
-            <a:endParaRPr lang="en-GB" dirty="0"/>
-          </a:p>
-          <a:p>
-            <a:pPr algn="ctr"/>
-            <a:endParaRPr lang="en-GB" dirty="0"/>
-          </a:p>
-          <a:p>
-            <a:pPr algn="ctr"/>
-            <a:endParaRPr lang="en-GB" dirty="0"/>
-          </a:p>
-          <a:p>
-            <a:pPr algn="ctr"/>
-            <a:endParaRPr lang="en-GB" dirty="0"/>
-          </a:p>
-          <a:p>
-            <a:pPr algn="ctr"/>
-            <a:endParaRPr lang="en-GB" dirty="0"/>
-          </a:p>
-        </p:txBody>
-      </p:sp>
-      <p:sp>
-        <p:nvSpPr>
-          <p:cNvPr id="4" name="Rectangle 3">
-            <a:extLst>
-              <a:ext uri="{FF2B5EF4-FFF2-40B4-BE49-F238E27FC236}">
-                <a16:creationId xmlns:a16="http://schemas.microsoft.com/office/drawing/2014/main" id="{CAC3E813-E830-F1D7-4EEB-94A4C53E5151}"/>
-              </a:ext>
-            </a:extLst>
-          </p:cNvPr>
-          <p:cNvSpPr/>
-          <p:nvPr/>
-        </p:nvSpPr>
-        <p:spPr>
-          <a:xfrm>
-            <a:off x="885038" y="3010269"/>
-            <a:ext cx="4643307" cy="555052"/>
+            <a:off x="1853349" y="1828800"/>
+            <a:ext cx="1791978" cy="378118"/>
           </a:xfrm>
           <a:prstGeom prst="rect">
             <a:avLst/>
           </a:prstGeom>
+          <a:noFill/>
         </p:spPr>
-        <p:style>
-          <a:lnRef idx="1">
-            <a:schemeClr val="accent1"/>
-          </a:lnRef>
-          <a:fillRef idx="2">
-            <a:schemeClr val="accent1"/>
-          </a:fillRef>
-          <a:effectRef idx="1">
-            <a:schemeClr val="accent1"/>
-          </a:effectRef>
-          <a:fontRef idx="minor">
-            <a:schemeClr val="dk1"/>
-          </a:fontRef>
-        </p:style>
-        <p:txBody>
-          <a:bodyPr rtlCol="0" anchor="ctr"/>
-          <a:lstStyle/>
-          <a:p>
-            <a:pPr algn="ctr"/>
+        <p:txBody>
+          <a:bodyPr wrap="square" rtlCol="0">
+            <a:spAutoFit/>
+          </a:bodyPr>
+          <a:lstStyle/>
+          <a:p>
             <a:r>
               <a:rPr lang="en-GB" dirty="0"/>
-              <a:t>Interface Layer</a:t>
-            </a:r>
-          </a:p>
-          <a:p>
-            <a:pPr algn="ctr"/>
-            <a:r>
-              <a:rPr lang="en-GB" sz="1200" dirty="0"/>
-              <a:t>Common interfaces, </a:t>
-            </a:r>
-            <a:r>
-              <a:rPr lang="en-GB" sz="1200" dirty="0" err="1"/>
-              <a:t>Initisalise</a:t>
-            </a:r>
-            <a:r>
-              <a:rPr lang="en-GB" sz="1200" dirty="0"/>
-              <a:t>, Tick, </a:t>
-            </a:r>
-            <a:r>
-              <a:rPr lang="en-GB" sz="1200" dirty="0" err="1"/>
-              <a:t>FixedTick</a:t>
-            </a:r>
-            <a:r>
-              <a:rPr lang="en-GB" sz="1200" dirty="0"/>
-              <a:t>, Dispose</a:t>
-            </a:r>
-          </a:p>
-        </p:txBody>
-      </p:sp>
-      <p:sp>
-        <p:nvSpPr>
-          <p:cNvPr id="5" name="Rectangle 4">
-            <a:extLst>
-              <a:ext uri="{FF2B5EF4-FFF2-40B4-BE49-F238E27FC236}">
-                <a16:creationId xmlns:a16="http://schemas.microsoft.com/office/drawing/2014/main" id="{9554C1D2-6827-531C-0A8A-2E8C9E45ACE8}"/>
-              </a:ext>
-            </a:extLst>
-          </p:cNvPr>
-          <p:cNvSpPr/>
+              <a:t>Sample Setup</a:t>
+            </a:r>
+          </a:p>
+        </p:txBody>
+      </p:sp>
+      <p:sp>
+        <p:nvSpPr>
+          <p:cNvPr id="19" name="TextBox 18">
+            <a:extLst>
+              <a:ext uri="{FF2B5EF4-FFF2-40B4-BE49-F238E27FC236}">
+                <a16:creationId xmlns:a16="http://schemas.microsoft.com/office/drawing/2014/main" id="{4AE0DDA6-7F99-9C66-DF24-CB77587504DD}"/>
+              </a:ext>
+            </a:extLst>
+          </p:cNvPr>
+          <p:cNvSpPr txBox="1"/>
           <p:nvPr/>
         </p:nvSpPr>
         <p:spPr>
           <a:xfrm>
-            <a:off x="1675004" y="3565321"/>
-            <a:ext cx="591423" cy="1970333"/>
+            <a:off x="7935028" y="1804071"/>
+            <a:ext cx="2344261" cy="369332"/>
           </a:xfrm>
           <a:prstGeom prst="rect">
             <a:avLst/>
           </a:prstGeom>
+          <a:noFill/>
         </p:spPr>
-        <p:style>
-          <a:lnRef idx="2">
-            <a:schemeClr val="accent2">
-              <a:shade val="15000"/>
-            </a:schemeClr>
-          </a:lnRef>
-          <a:fillRef idx="1">
-            <a:schemeClr val="accent2"/>
-          </a:fillRef>
-          <a:effectRef idx="0">
-            <a:schemeClr val="accent2"/>
-          </a:effectRef>
-          <a:fontRef idx="minor">
-            <a:schemeClr val="lt1"/>
-          </a:fontRef>
-        </p:style>
-        <p:txBody>
-          <a:bodyPr vert="vert270" rtlCol="0" anchor="ctr"/>
-          <a:lstStyle/>
-          <a:p>
-            <a:pPr algn="ctr"/>
+        <p:txBody>
+          <a:bodyPr wrap="square" rtlCol="0">
+            <a:spAutoFit/>
+          </a:bodyPr>
+          <a:lstStyle/>
+          <a:p>
             <a:r>
               <a:rPr lang="en-GB" dirty="0"/>
-              <a:t>Movement Module</a:t>
-            </a:r>
-          </a:p>
-        </p:txBody>
-      </p:sp>
-      <p:sp>
-        <p:nvSpPr>
-          <p:cNvPr id="8" name="Rectangle 7">
-            <a:extLst>
-              <a:ext uri="{FF2B5EF4-FFF2-40B4-BE49-F238E27FC236}">
-                <a16:creationId xmlns:a16="http://schemas.microsoft.com/office/drawing/2014/main" id="{F34483B6-BE12-3A0B-8BDF-755173DF0D81}"/>
-              </a:ext>
-            </a:extLst>
-          </p:cNvPr>
-          <p:cNvSpPr/>
-          <p:nvPr/>
-        </p:nvSpPr>
-        <p:spPr>
-          <a:xfrm>
-            <a:off x="2476152" y="3565321"/>
-            <a:ext cx="591423" cy="1970333"/>
-          </a:xfrm>
-          <a:prstGeom prst="rect">
-            <a:avLst/>
-          </a:prstGeom>
-        </p:spPr>
-        <p:style>
-          <a:lnRef idx="2">
-            <a:schemeClr val="accent5">
-              <a:shade val="15000"/>
-            </a:schemeClr>
-          </a:lnRef>
-          <a:fillRef idx="1">
-            <a:schemeClr val="accent5"/>
-          </a:fillRef>
-          <a:effectRef idx="0">
-            <a:schemeClr val="accent5"/>
-          </a:effectRef>
-          <a:fontRef idx="minor">
-            <a:schemeClr val="lt1"/>
-          </a:fontRef>
-        </p:style>
-        <p:txBody>
-          <a:bodyPr vert="vert270" rtlCol="0" anchor="ctr"/>
-          <a:lstStyle/>
-          <a:p>
-            <a:pPr algn="ctr"/>
-            <a:r>
-              <a:rPr lang="en-GB" dirty="0"/>
-              <a:t>Animation Module</a:t>
-            </a:r>
-          </a:p>
-        </p:txBody>
-      </p:sp>
-      <p:sp>
-        <p:nvSpPr>
-          <p:cNvPr id="9" name="Rectangle 8">
-            <a:extLst>
-              <a:ext uri="{FF2B5EF4-FFF2-40B4-BE49-F238E27FC236}">
-                <a16:creationId xmlns:a16="http://schemas.microsoft.com/office/drawing/2014/main" id="{61840801-3A1D-7D6C-9CC7-4DE3677CA004}"/>
-              </a:ext>
-            </a:extLst>
-          </p:cNvPr>
-          <p:cNvSpPr/>
-          <p:nvPr/>
-        </p:nvSpPr>
-        <p:spPr>
-          <a:xfrm>
-            <a:off x="3240949" y="3565321"/>
-            <a:ext cx="591423" cy="1970333"/>
-          </a:xfrm>
-          <a:prstGeom prst="rect">
-            <a:avLst/>
-          </a:prstGeom>
-        </p:spPr>
-        <p:style>
-          <a:lnRef idx="3">
-            <a:schemeClr val="lt1"/>
-          </a:lnRef>
-          <a:fillRef idx="1">
-            <a:schemeClr val="accent6"/>
-          </a:fillRef>
-          <a:effectRef idx="1">
-            <a:schemeClr val="accent6"/>
-          </a:effectRef>
-          <a:fontRef idx="minor">
-            <a:schemeClr val="lt1"/>
-          </a:fontRef>
-        </p:style>
-        <p:txBody>
-          <a:bodyPr vert="vert270" rtlCol="0" anchor="ctr"/>
-          <a:lstStyle/>
-          <a:p>
-            <a:pPr algn="ctr"/>
-            <a:r>
-              <a:rPr lang="en-GB" dirty="0"/>
-              <a:t>VFX Module</a:t>
-            </a:r>
-          </a:p>
-        </p:txBody>
-      </p:sp>
-      <p:sp>
-        <p:nvSpPr>
-          <p:cNvPr id="10" name="Rectangle 9">
-            <a:extLst>
-              <a:ext uri="{FF2B5EF4-FFF2-40B4-BE49-F238E27FC236}">
-                <a16:creationId xmlns:a16="http://schemas.microsoft.com/office/drawing/2014/main" id="{DE47CD9B-08C1-CFD0-E7AA-C8776EF167E8}"/>
-              </a:ext>
-            </a:extLst>
-          </p:cNvPr>
-          <p:cNvSpPr/>
-          <p:nvPr/>
-        </p:nvSpPr>
-        <p:spPr>
-          <a:xfrm>
-            <a:off x="4068663" y="3565321"/>
-            <a:ext cx="591423" cy="1970333"/>
-          </a:xfrm>
-          <a:prstGeom prst="rect">
-            <a:avLst/>
-          </a:prstGeom>
-          <a:solidFill>
-            <a:srgbClr val="CB5A51"/>
-          </a:solidFill>
-        </p:spPr>
-        <p:style>
-          <a:lnRef idx="2">
-            <a:schemeClr val="accent2">
-              <a:shade val="15000"/>
-            </a:schemeClr>
-          </a:lnRef>
-          <a:fillRef idx="1">
-            <a:schemeClr val="accent2"/>
-          </a:fillRef>
-          <a:effectRef idx="0">
-            <a:schemeClr val="accent2"/>
-          </a:effectRef>
-          <a:fontRef idx="minor">
-            <a:schemeClr val="lt1"/>
-          </a:fontRef>
-        </p:style>
-        <p:txBody>
-          <a:bodyPr vert="vert270" rtlCol="0" anchor="ctr"/>
-          <a:lstStyle/>
-          <a:p>
-            <a:pPr algn="ctr"/>
-            <a:r>
-              <a:rPr lang="en-GB" dirty="0"/>
-              <a:t>Flight Module</a:t>
+              <a:t>Additional Modules</a:t>
             </a:r>
           </a:p>
         </p:txBody>
@@ -4721,8 +5125,8 @@
         </p:nvSpPr>
         <p:spPr>
           <a:xfrm>
-            <a:off x="1325461" y="2260833"/>
-            <a:ext cx="9466976" cy="3586294"/>
+            <a:off x="2780021" y="2260833"/>
+            <a:ext cx="6554223" cy="3586294"/>
           </a:xfrm>
           <a:prstGeom prst="rect">
             <a:avLst/>
@@ -4749,7 +5153,7 @@
             <a:pPr algn="ctr"/>
             <a:r>
               <a:rPr lang="en-GB" dirty="0"/>
-              <a:t>Character Game Object</a:t>
+              <a:t>Player Game Object</a:t>
             </a:r>
           </a:p>
           <a:p>
@@ -4799,6 +5203,328 @@
           <a:p>
             <a:pPr algn="ctr"/>
             <a:endParaRPr lang="en-GB" dirty="0"/>
+          </a:p>
+        </p:txBody>
+      </p:sp>
+      <p:sp>
+        <p:nvSpPr>
+          <p:cNvPr id="5" name="Rectangle: Rounded Corners 4">
+            <a:extLst>
+              <a:ext uri="{FF2B5EF4-FFF2-40B4-BE49-F238E27FC236}">
+                <a16:creationId xmlns:a16="http://schemas.microsoft.com/office/drawing/2014/main" id="{B2261ED9-82CF-B8F4-2B0C-3BA4E05429D5}"/>
+              </a:ext>
+            </a:extLst>
+          </p:cNvPr>
+          <p:cNvSpPr/>
+          <p:nvPr/>
+        </p:nvSpPr>
+        <p:spPr>
+          <a:xfrm>
+            <a:off x="5265902" y="2947335"/>
+            <a:ext cx="1586094" cy="1153569"/>
+          </a:xfrm>
+          <a:prstGeom prst="roundRect">
+            <a:avLst/>
+          </a:prstGeom>
+        </p:spPr>
+        <p:style>
+          <a:lnRef idx="2">
+            <a:schemeClr val="accent1">
+              <a:shade val="15000"/>
+            </a:schemeClr>
+          </a:lnRef>
+          <a:fillRef idx="1">
+            <a:schemeClr val="accent1"/>
+          </a:fillRef>
+          <a:effectRef idx="0">
+            <a:schemeClr val="accent1"/>
+          </a:effectRef>
+          <a:fontRef idx="minor">
+            <a:schemeClr val="lt1"/>
+          </a:fontRef>
+        </p:style>
+        <p:txBody>
+          <a:bodyPr rtlCol="0" anchor="ctr"/>
+          <a:lstStyle/>
+          <a:p>
+            <a:pPr algn="ctr"/>
+            <a:r>
+              <a:rPr lang="en-GB" dirty="0"/>
+              <a:t>Player Controller</a:t>
+            </a:r>
+          </a:p>
+        </p:txBody>
+      </p:sp>
+      <p:sp>
+        <p:nvSpPr>
+          <p:cNvPr id="6" name="Rectangle: Rounded Corners 5">
+            <a:extLst>
+              <a:ext uri="{FF2B5EF4-FFF2-40B4-BE49-F238E27FC236}">
+                <a16:creationId xmlns:a16="http://schemas.microsoft.com/office/drawing/2014/main" id="{F5712A53-5352-7E24-B805-3785A4DF5004}"/>
+              </a:ext>
+            </a:extLst>
+          </p:cNvPr>
+          <p:cNvSpPr/>
+          <p:nvPr/>
+        </p:nvSpPr>
+        <p:spPr>
+          <a:xfrm>
+            <a:off x="3265699" y="2947335"/>
+            <a:ext cx="1586094" cy="1153569"/>
+          </a:xfrm>
+          <a:prstGeom prst="roundRect">
+            <a:avLst/>
+          </a:prstGeom>
+        </p:spPr>
+        <p:style>
+          <a:lnRef idx="2">
+            <a:schemeClr val="accent1">
+              <a:shade val="15000"/>
+            </a:schemeClr>
+          </a:lnRef>
+          <a:fillRef idx="1">
+            <a:schemeClr val="accent1"/>
+          </a:fillRef>
+          <a:effectRef idx="0">
+            <a:schemeClr val="accent1"/>
+          </a:effectRef>
+          <a:fontRef idx="minor">
+            <a:schemeClr val="lt1"/>
+          </a:fontRef>
+        </p:style>
+        <p:txBody>
+          <a:bodyPr rtlCol="0" anchor="ctr"/>
+          <a:lstStyle/>
+          <a:p>
+            <a:pPr algn="ctr"/>
+            <a:r>
+              <a:rPr lang="en-GB" dirty="0"/>
+              <a:t>Player</a:t>
+            </a:r>
+          </a:p>
+        </p:txBody>
+      </p:sp>
+      <p:sp>
+        <p:nvSpPr>
+          <p:cNvPr id="7" name="Rectangle: Rounded Corners 6">
+            <a:extLst>
+              <a:ext uri="{FF2B5EF4-FFF2-40B4-BE49-F238E27FC236}">
+                <a16:creationId xmlns:a16="http://schemas.microsoft.com/office/drawing/2014/main" id="{EA94644A-FE4C-8E30-15E1-24F1C003D6AB}"/>
+              </a:ext>
+            </a:extLst>
+          </p:cNvPr>
+          <p:cNvSpPr/>
+          <p:nvPr/>
+        </p:nvSpPr>
+        <p:spPr>
+          <a:xfrm>
+            <a:off x="7266105" y="2947335"/>
+            <a:ext cx="1586094" cy="1153569"/>
+          </a:xfrm>
+          <a:prstGeom prst="roundRect">
+            <a:avLst/>
+          </a:prstGeom>
+        </p:spPr>
+        <p:style>
+          <a:lnRef idx="2">
+            <a:schemeClr val="accent1">
+              <a:shade val="15000"/>
+            </a:schemeClr>
+          </a:lnRef>
+          <a:fillRef idx="1">
+            <a:schemeClr val="accent1"/>
+          </a:fillRef>
+          <a:effectRef idx="0">
+            <a:schemeClr val="accent1"/>
+          </a:effectRef>
+          <a:fontRef idx="minor">
+            <a:schemeClr val="lt1"/>
+          </a:fontRef>
+        </p:style>
+        <p:txBody>
+          <a:bodyPr rtlCol="0" anchor="ctr"/>
+          <a:lstStyle/>
+          <a:p>
+            <a:pPr algn="ctr"/>
+            <a:r>
+              <a:rPr lang="en-GB" dirty="0"/>
+              <a:t>Health</a:t>
+            </a:r>
+          </a:p>
+        </p:txBody>
+      </p:sp>
+      <p:sp>
+        <p:nvSpPr>
+          <p:cNvPr id="8" name="Rectangle: Rounded Corners 7">
+            <a:extLst>
+              <a:ext uri="{FF2B5EF4-FFF2-40B4-BE49-F238E27FC236}">
+                <a16:creationId xmlns:a16="http://schemas.microsoft.com/office/drawing/2014/main" id="{F8A87ACF-D590-7A3F-342F-4DD0068CD30C}"/>
+              </a:ext>
+            </a:extLst>
+          </p:cNvPr>
+          <p:cNvSpPr/>
+          <p:nvPr/>
+        </p:nvSpPr>
+        <p:spPr>
+          <a:xfrm>
+            <a:off x="3265699" y="4397231"/>
+            <a:ext cx="1586094" cy="1153569"/>
+          </a:xfrm>
+          <a:prstGeom prst="roundRect">
+            <a:avLst/>
+          </a:prstGeom>
+        </p:spPr>
+        <p:style>
+          <a:lnRef idx="2">
+            <a:schemeClr val="accent1">
+              <a:shade val="15000"/>
+            </a:schemeClr>
+          </a:lnRef>
+          <a:fillRef idx="1">
+            <a:schemeClr val="accent1"/>
+          </a:fillRef>
+          <a:effectRef idx="0">
+            <a:schemeClr val="accent1"/>
+          </a:effectRef>
+          <a:fontRef idx="minor">
+            <a:schemeClr val="lt1"/>
+          </a:fontRef>
+        </p:style>
+        <p:txBody>
+          <a:bodyPr rtlCol="0" anchor="ctr"/>
+          <a:lstStyle/>
+          <a:p>
+            <a:pPr algn="ctr"/>
+            <a:r>
+              <a:rPr lang="en-GB" dirty="0"/>
+              <a:t>Inventory</a:t>
+            </a:r>
+          </a:p>
+        </p:txBody>
+      </p:sp>
+      <p:sp>
+        <p:nvSpPr>
+          <p:cNvPr id="9" name="Rectangle: Rounded Corners 8">
+            <a:extLst>
+              <a:ext uri="{FF2B5EF4-FFF2-40B4-BE49-F238E27FC236}">
+                <a16:creationId xmlns:a16="http://schemas.microsoft.com/office/drawing/2014/main" id="{3CF5EF90-1623-7A89-91AB-3BC5C9069B14}"/>
+              </a:ext>
+            </a:extLst>
+          </p:cNvPr>
+          <p:cNvSpPr/>
+          <p:nvPr/>
+        </p:nvSpPr>
+        <p:spPr>
+          <a:xfrm>
+            <a:off x="7266105" y="4397231"/>
+            <a:ext cx="1586094" cy="1153569"/>
+          </a:xfrm>
+          <a:prstGeom prst="roundRect">
+            <a:avLst/>
+          </a:prstGeom>
+        </p:spPr>
+        <p:style>
+          <a:lnRef idx="2">
+            <a:schemeClr val="accent1">
+              <a:shade val="15000"/>
+            </a:schemeClr>
+          </a:lnRef>
+          <a:fillRef idx="1">
+            <a:schemeClr val="accent1"/>
+          </a:fillRef>
+          <a:effectRef idx="0">
+            <a:schemeClr val="accent1"/>
+          </a:effectRef>
+          <a:fontRef idx="minor">
+            <a:schemeClr val="lt1"/>
+          </a:fontRef>
+        </p:style>
+        <p:txBody>
+          <a:bodyPr rtlCol="0" anchor="ctr"/>
+          <a:lstStyle/>
+          <a:p>
+            <a:pPr algn="ctr"/>
+            <a:r>
+              <a:rPr lang="en-GB" dirty="0"/>
+              <a:t>Player Stats Manager</a:t>
+            </a:r>
+          </a:p>
+        </p:txBody>
+      </p:sp>
+      <p:cxnSp>
+        <p:nvCxnSpPr>
+          <p:cNvPr id="11" name="Straight Arrow Connector 10">
+            <a:extLst>
+              <a:ext uri="{FF2B5EF4-FFF2-40B4-BE49-F238E27FC236}">
+                <a16:creationId xmlns:a16="http://schemas.microsoft.com/office/drawing/2014/main" id="{60175994-7E24-B723-63B1-9E5DC15C2F9E}"/>
+              </a:ext>
+            </a:extLst>
+          </p:cNvPr>
+          <p:cNvCxnSpPr>
+            <a:stCxn id="8" idx="3"/>
+            <a:endCxn id="5" idx="2"/>
+          </p:cNvCxnSpPr>
+          <p:nvPr/>
+        </p:nvCxnSpPr>
+        <p:spPr>
+          <a:xfrm flipV="1">
+            <a:off x="4851793" y="4100904"/>
+            <a:ext cx="1207156" cy="873112"/>
+          </a:xfrm>
+          <a:prstGeom prst="straightConnector1">
+            <a:avLst/>
+          </a:prstGeom>
+          <a:ln>
+            <a:tailEnd type="triangle"/>
+          </a:ln>
+        </p:spPr>
+        <p:style>
+          <a:lnRef idx="2">
+            <a:schemeClr val="accent1"/>
+          </a:lnRef>
+          <a:fillRef idx="0">
+            <a:schemeClr val="accent1"/>
+          </a:fillRef>
+          <a:effectRef idx="1">
+            <a:schemeClr val="accent1"/>
+          </a:effectRef>
+          <a:fontRef idx="minor">
+            <a:schemeClr val="tx1"/>
+          </a:fontRef>
+        </p:style>
+      </p:cxnSp>
+      <p:sp>
+        <p:nvSpPr>
+          <p:cNvPr id="12" name="TextBox 11">
+            <a:extLst>
+              <a:ext uri="{FF2B5EF4-FFF2-40B4-BE49-F238E27FC236}">
+                <a16:creationId xmlns:a16="http://schemas.microsoft.com/office/drawing/2014/main" id="{333CA1F4-13DE-615A-22A0-ED6849169DE1}"/>
+              </a:ext>
+            </a:extLst>
+          </p:cNvPr>
+          <p:cNvSpPr txBox="1"/>
+          <p:nvPr/>
+        </p:nvSpPr>
+        <p:spPr>
+          <a:xfrm>
+            <a:off x="5023494" y="4719286"/>
+            <a:ext cx="1276478" cy="646331"/>
+          </a:xfrm>
+          <a:prstGeom prst="rect">
+            <a:avLst/>
+          </a:prstGeom>
+          <a:noFill/>
+        </p:spPr>
+        <p:txBody>
+          <a:bodyPr wrap="square" rtlCol="0">
+            <a:spAutoFit/>
+          </a:bodyPr>
+          <a:lstStyle/>
+          <a:p>
+            <a:r>
+              <a:rPr lang="en-GB" dirty="0"/>
+              <a:t>Subscribe to signal</a:t>
+            </a:r>
           </a:p>
         </p:txBody>
       </p:sp>

--- a/Documentation/Character Controller Architecture.pptx
+++ b/Documentation/Character Controller Architecture.pptx
@@ -4183,55 +4183,6 @@
             <a:r>
               <a:rPr lang="en-GB" dirty="0"/>
               <a:t>on the CC.</a:t>
-            </a:r>
-          </a:p>
-        </p:txBody>
-      </p:sp>
-      <p:sp>
-        <p:nvSpPr>
-          <p:cNvPr id="31" name="Rectangle: Rounded Corners 30">
-            <a:extLst>
-              <a:ext uri="{FF2B5EF4-FFF2-40B4-BE49-F238E27FC236}">
-                <a16:creationId xmlns:a16="http://schemas.microsoft.com/office/drawing/2014/main" id="{3B7176A7-3B3E-57E7-F6B8-01749F85BC96}"/>
-              </a:ext>
-            </a:extLst>
-          </p:cNvPr>
-          <p:cNvSpPr/>
-          <p:nvPr/>
-        </p:nvSpPr>
-        <p:spPr>
-          <a:xfrm>
-            <a:off x="8966681" y="3823889"/>
-            <a:ext cx="1586094" cy="1153569"/>
-          </a:xfrm>
-          <a:prstGeom prst="roundRect">
-            <a:avLst/>
-          </a:prstGeom>
-        </p:spPr>
-        <p:style>
-          <a:lnRef idx="2">
-            <a:schemeClr val="accent1">
-              <a:shade val="15000"/>
-            </a:schemeClr>
-          </a:lnRef>
-          <a:fillRef idx="1">
-            <a:schemeClr val="accent1"/>
-          </a:fillRef>
-          <a:effectRef idx="0">
-            <a:schemeClr val="accent1"/>
-          </a:effectRef>
-          <a:fontRef idx="minor">
-            <a:schemeClr val="lt1"/>
-          </a:fontRef>
-        </p:style>
-        <p:txBody>
-          <a:bodyPr rtlCol="0" anchor="ctr"/>
-          <a:lstStyle/>
-          <a:p>
-            <a:pPr algn="ctr"/>
-            <a:r>
-              <a:rPr lang="en-GB" dirty="0"/>
-              <a:t>Enemy Controller</a:t>
             </a:r>
           </a:p>
         </p:txBody>

--- a/Documentation/Character Controller Architecture.pptx
+++ b/Documentation/Character Controller Architecture.pptx
@@ -114,6 +114,5461 @@
     </p:ext>
   </p:extLst>
 </p:presentation>
+</file>
+
+<file path=ppt/diagrams/colors1.xml><?xml version="1.0" encoding="utf-8"?>
+<dgm:colorsDef xmlns:dgm="http://schemas.openxmlformats.org/drawingml/2006/diagram" xmlns:a="http://schemas.openxmlformats.org/drawingml/2006/main" uniqueId="urn:microsoft.com/office/officeart/2005/8/colors/accent5_2">
+  <dgm:title val=""/>
+  <dgm:desc val=""/>
+  <dgm:catLst>
+    <dgm:cat type="accent5" pri="11200"/>
+  </dgm:catLst>
+  <dgm:styleLbl name="node0">
+    <dgm:fillClrLst meth="repeat">
+      <a:schemeClr val="accent5"/>
+    </dgm:fillClrLst>
+    <dgm:linClrLst meth="repeat">
+      <a:schemeClr val="lt1"/>
+    </dgm:linClrLst>
+    <dgm:effectClrLst/>
+    <dgm:txLinClrLst/>
+    <dgm:txFillClrLst/>
+    <dgm:txEffectClrLst/>
+  </dgm:styleLbl>
+  <dgm:styleLbl name="node1">
+    <dgm:fillClrLst meth="repeat">
+      <a:schemeClr val="accent5"/>
+    </dgm:fillClrLst>
+    <dgm:linClrLst meth="repeat">
+      <a:schemeClr val="lt1"/>
+    </dgm:linClrLst>
+    <dgm:effectClrLst/>
+    <dgm:txLinClrLst/>
+    <dgm:txFillClrLst/>
+    <dgm:txEffectClrLst/>
+  </dgm:styleLbl>
+  <dgm:styleLbl name="alignNode1">
+    <dgm:fillClrLst meth="repeat">
+      <a:schemeClr val="accent5"/>
+    </dgm:fillClrLst>
+    <dgm:linClrLst meth="repeat">
+      <a:schemeClr val="accent5"/>
+    </dgm:linClrLst>
+    <dgm:effectClrLst/>
+    <dgm:txLinClrLst/>
+    <dgm:txFillClrLst/>
+    <dgm:txEffectClrLst/>
+  </dgm:styleLbl>
+  <dgm:styleLbl name="lnNode1">
+    <dgm:fillClrLst meth="repeat">
+      <a:schemeClr val="accent5"/>
+    </dgm:fillClrLst>
+    <dgm:linClrLst meth="repeat">
+      <a:schemeClr val="lt1"/>
+    </dgm:linClrLst>
+    <dgm:effectClrLst/>
+    <dgm:txLinClrLst/>
+    <dgm:txFillClrLst/>
+    <dgm:txEffectClrLst/>
+  </dgm:styleLbl>
+  <dgm:styleLbl name="vennNode1">
+    <dgm:fillClrLst meth="repeat">
+      <a:schemeClr val="accent5">
+        <a:alpha val="50000"/>
+      </a:schemeClr>
+    </dgm:fillClrLst>
+    <dgm:linClrLst meth="repeat">
+      <a:schemeClr val="lt1"/>
+    </dgm:linClrLst>
+    <dgm:effectClrLst/>
+    <dgm:txLinClrLst/>
+    <dgm:txFillClrLst/>
+    <dgm:txEffectClrLst/>
+  </dgm:styleLbl>
+  <dgm:styleLbl name="node2">
+    <dgm:fillClrLst meth="repeat">
+      <a:schemeClr val="accent5"/>
+    </dgm:fillClrLst>
+    <dgm:linClrLst meth="repeat">
+      <a:schemeClr val="lt1"/>
+    </dgm:linClrLst>
+    <dgm:effectClrLst/>
+    <dgm:txLinClrLst/>
+    <dgm:txFillClrLst/>
+    <dgm:txEffectClrLst/>
+  </dgm:styleLbl>
+  <dgm:styleLbl name="node3">
+    <dgm:fillClrLst meth="repeat">
+      <a:schemeClr val="accent5"/>
+    </dgm:fillClrLst>
+    <dgm:linClrLst meth="repeat">
+      <a:schemeClr val="lt1"/>
+    </dgm:linClrLst>
+    <dgm:effectClrLst/>
+    <dgm:txLinClrLst/>
+    <dgm:txFillClrLst/>
+    <dgm:txEffectClrLst/>
+  </dgm:styleLbl>
+  <dgm:styleLbl name="node4">
+    <dgm:fillClrLst meth="repeat">
+      <a:schemeClr val="accent5"/>
+    </dgm:fillClrLst>
+    <dgm:linClrLst meth="repeat">
+      <a:schemeClr val="lt1"/>
+    </dgm:linClrLst>
+    <dgm:effectClrLst/>
+    <dgm:txLinClrLst/>
+    <dgm:txFillClrLst/>
+    <dgm:txEffectClrLst/>
+  </dgm:styleLbl>
+  <dgm:styleLbl name="fgImgPlace1">
+    <dgm:fillClrLst meth="repeat">
+      <a:schemeClr val="accent5">
+        <a:tint val="50000"/>
+      </a:schemeClr>
+    </dgm:fillClrLst>
+    <dgm:linClrLst meth="repeat">
+      <a:schemeClr val="lt1"/>
+    </dgm:linClrLst>
+    <dgm:effectClrLst/>
+    <dgm:txLinClrLst/>
+    <dgm:txFillClrLst meth="repeat">
+      <a:schemeClr val="lt1"/>
+    </dgm:txFillClrLst>
+    <dgm:txEffectClrLst/>
+  </dgm:styleLbl>
+  <dgm:styleLbl name="alignImgPlace1">
+    <dgm:fillClrLst meth="repeat">
+      <a:schemeClr val="accent5">
+        <a:tint val="50000"/>
+      </a:schemeClr>
+    </dgm:fillClrLst>
+    <dgm:linClrLst meth="repeat">
+      <a:schemeClr val="lt1"/>
+    </dgm:linClrLst>
+    <dgm:effectClrLst/>
+    <dgm:txLinClrLst/>
+    <dgm:txFillClrLst meth="repeat">
+      <a:schemeClr val="lt1"/>
+    </dgm:txFillClrLst>
+    <dgm:txEffectClrLst/>
+  </dgm:styleLbl>
+  <dgm:styleLbl name="bgImgPlace1">
+    <dgm:fillClrLst meth="repeat">
+      <a:schemeClr val="accent5">
+        <a:tint val="50000"/>
+      </a:schemeClr>
+    </dgm:fillClrLst>
+    <dgm:linClrLst meth="repeat">
+      <a:schemeClr val="lt1"/>
+    </dgm:linClrLst>
+    <dgm:effectClrLst/>
+    <dgm:txLinClrLst/>
+    <dgm:txFillClrLst meth="repeat">
+      <a:schemeClr val="lt1"/>
+    </dgm:txFillClrLst>
+    <dgm:txEffectClrLst/>
+  </dgm:styleLbl>
+  <dgm:styleLbl name="sibTrans2D1">
+    <dgm:fillClrLst meth="repeat">
+      <a:schemeClr val="accent5">
+        <a:tint val="60000"/>
+      </a:schemeClr>
+    </dgm:fillClrLst>
+    <dgm:linClrLst meth="repeat">
+      <a:schemeClr val="accent5">
+        <a:tint val="60000"/>
+      </a:schemeClr>
+    </dgm:linClrLst>
+    <dgm:effectClrLst/>
+    <dgm:txLinClrLst/>
+    <dgm:txFillClrLst/>
+    <dgm:txEffectClrLst/>
+  </dgm:styleLbl>
+  <dgm:styleLbl name="fgSibTrans2D1">
+    <dgm:fillClrLst meth="repeat">
+      <a:schemeClr val="accent5">
+        <a:tint val="60000"/>
+      </a:schemeClr>
+    </dgm:fillClrLst>
+    <dgm:linClrLst meth="repeat">
+      <a:schemeClr val="accent5">
+        <a:tint val="60000"/>
+      </a:schemeClr>
+    </dgm:linClrLst>
+    <dgm:effectClrLst/>
+    <dgm:txLinClrLst/>
+    <dgm:txFillClrLst/>
+    <dgm:txEffectClrLst/>
+  </dgm:styleLbl>
+  <dgm:styleLbl name="bgSibTrans2D1">
+    <dgm:fillClrLst meth="repeat">
+      <a:schemeClr val="accent5">
+        <a:tint val="60000"/>
+      </a:schemeClr>
+    </dgm:fillClrLst>
+    <dgm:linClrLst meth="repeat">
+      <a:schemeClr val="accent5">
+        <a:tint val="60000"/>
+      </a:schemeClr>
+    </dgm:linClrLst>
+    <dgm:effectClrLst/>
+    <dgm:txLinClrLst/>
+    <dgm:txFillClrLst/>
+    <dgm:txEffectClrLst/>
+  </dgm:styleLbl>
+  <dgm:styleLbl name="sibTrans1D1">
+    <dgm:fillClrLst meth="repeat">
+      <a:schemeClr val="accent5"/>
+    </dgm:fillClrLst>
+    <dgm:linClrLst meth="repeat">
+      <a:schemeClr val="accent5"/>
+    </dgm:linClrLst>
+    <dgm:effectClrLst/>
+    <dgm:txLinClrLst/>
+    <dgm:txFillClrLst meth="repeat">
+      <a:schemeClr val="tx1"/>
+    </dgm:txFillClrLst>
+    <dgm:txEffectClrLst/>
+  </dgm:styleLbl>
+  <dgm:styleLbl name="callout">
+    <dgm:fillClrLst meth="repeat">
+      <a:schemeClr val="accent5"/>
+    </dgm:fillClrLst>
+    <dgm:linClrLst meth="repeat">
+      <a:schemeClr val="accent5">
+        <a:tint val="50000"/>
+      </a:schemeClr>
+    </dgm:linClrLst>
+    <dgm:effectClrLst/>
+    <dgm:txLinClrLst/>
+    <dgm:txFillClrLst meth="repeat">
+      <a:schemeClr val="tx1"/>
+    </dgm:txFillClrLst>
+    <dgm:txEffectClrLst/>
+  </dgm:styleLbl>
+  <dgm:styleLbl name="asst0">
+    <dgm:fillClrLst meth="repeat">
+      <a:schemeClr val="accent5"/>
+    </dgm:fillClrLst>
+    <dgm:linClrLst meth="repeat">
+      <a:schemeClr val="lt1"/>
+    </dgm:linClrLst>
+    <dgm:effectClrLst/>
+    <dgm:txLinClrLst/>
+    <dgm:txFillClrLst/>
+    <dgm:txEffectClrLst/>
+  </dgm:styleLbl>
+  <dgm:styleLbl name="asst1">
+    <dgm:fillClrLst meth="repeat">
+      <a:schemeClr val="accent5"/>
+    </dgm:fillClrLst>
+    <dgm:linClrLst meth="repeat">
+      <a:schemeClr val="lt1"/>
+    </dgm:linClrLst>
+    <dgm:effectClrLst/>
+    <dgm:txLinClrLst/>
+    <dgm:txFillClrLst/>
+    <dgm:txEffectClrLst/>
+  </dgm:styleLbl>
+  <dgm:styleLbl name="asst2">
+    <dgm:fillClrLst meth="repeat">
+      <a:schemeClr val="accent5"/>
+    </dgm:fillClrLst>
+    <dgm:linClrLst meth="repeat">
+      <a:schemeClr val="lt1"/>
+    </dgm:linClrLst>
+    <dgm:effectClrLst/>
+    <dgm:txLinClrLst/>
+    <dgm:txFillClrLst/>
+    <dgm:txEffectClrLst/>
+  </dgm:styleLbl>
+  <dgm:styleLbl name="asst3">
+    <dgm:fillClrLst meth="repeat">
+      <a:schemeClr val="accent5"/>
+    </dgm:fillClrLst>
+    <dgm:linClrLst meth="repeat">
+      <a:schemeClr val="lt1"/>
+    </dgm:linClrLst>
+    <dgm:effectClrLst/>
+    <dgm:txLinClrLst/>
+    <dgm:txFillClrLst/>
+    <dgm:txEffectClrLst/>
+  </dgm:styleLbl>
+  <dgm:styleLbl name="asst4">
+    <dgm:fillClrLst meth="repeat">
+      <a:schemeClr val="accent5"/>
+    </dgm:fillClrLst>
+    <dgm:linClrLst meth="repeat">
+      <a:schemeClr val="lt1"/>
+    </dgm:linClrLst>
+    <dgm:effectClrLst/>
+    <dgm:txLinClrLst/>
+    <dgm:txFillClrLst/>
+    <dgm:txEffectClrLst/>
+  </dgm:styleLbl>
+  <dgm:styleLbl name="parChTrans2D1">
+    <dgm:fillClrLst meth="repeat">
+      <a:schemeClr val="accent5">
+        <a:tint val="60000"/>
+      </a:schemeClr>
+    </dgm:fillClrLst>
+    <dgm:linClrLst meth="repeat">
+      <a:schemeClr val="accent5">
+        <a:tint val="60000"/>
+      </a:schemeClr>
+    </dgm:linClrLst>
+    <dgm:effectClrLst/>
+    <dgm:txLinClrLst/>
+    <dgm:txFillClrLst meth="repeat">
+      <a:schemeClr val="lt1"/>
+    </dgm:txFillClrLst>
+    <dgm:txEffectClrLst/>
+  </dgm:styleLbl>
+  <dgm:styleLbl name="parChTrans2D2">
+    <dgm:fillClrLst meth="repeat">
+      <a:schemeClr val="accent5"/>
+    </dgm:fillClrLst>
+    <dgm:linClrLst meth="repeat">
+      <a:schemeClr val="accent5"/>
+    </dgm:linClrLst>
+    <dgm:effectClrLst/>
+    <dgm:txLinClrLst/>
+    <dgm:txFillClrLst meth="repeat">
+      <a:schemeClr val="lt1"/>
+    </dgm:txFillClrLst>
+    <dgm:txEffectClrLst/>
+  </dgm:styleLbl>
+  <dgm:styleLbl name="parChTrans2D3">
+    <dgm:fillClrLst meth="repeat">
+      <a:schemeClr val="accent5"/>
+    </dgm:fillClrLst>
+    <dgm:linClrLst meth="repeat">
+      <a:schemeClr val="accent5"/>
+    </dgm:linClrLst>
+    <dgm:effectClrLst/>
+    <dgm:txLinClrLst/>
+    <dgm:txFillClrLst meth="repeat">
+      <a:schemeClr val="lt1"/>
+    </dgm:txFillClrLst>
+    <dgm:txEffectClrLst/>
+  </dgm:styleLbl>
+  <dgm:styleLbl name="parChTrans2D4">
+    <dgm:fillClrLst meth="repeat">
+      <a:schemeClr val="accent5"/>
+    </dgm:fillClrLst>
+    <dgm:linClrLst meth="repeat">
+      <a:schemeClr val="accent5"/>
+    </dgm:linClrLst>
+    <dgm:effectClrLst/>
+    <dgm:txLinClrLst/>
+    <dgm:txFillClrLst meth="repeat">
+      <a:schemeClr val="lt1"/>
+    </dgm:txFillClrLst>
+    <dgm:txEffectClrLst/>
+  </dgm:styleLbl>
+  <dgm:styleLbl name="parChTrans1D1">
+    <dgm:fillClrLst meth="repeat">
+      <a:schemeClr val="accent5"/>
+    </dgm:fillClrLst>
+    <dgm:linClrLst meth="repeat">
+      <a:schemeClr val="accent5">
+        <a:shade val="60000"/>
+      </a:schemeClr>
+    </dgm:linClrLst>
+    <dgm:effectClrLst/>
+    <dgm:txLinClrLst/>
+    <dgm:txFillClrLst meth="repeat">
+      <a:schemeClr val="tx1"/>
+    </dgm:txFillClrLst>
+    <dgm:txEffectClrLst/>
+  </dgm:styleLbl>
+  <dgm:styleLbl name="parChTrans1D2">
+    <dgm:fillClrLst meth="repeat">
+      <a:schemeClr val="accent5"/>
+    </dgm:fillClrLst>
+    <dgm:linClrLst meth="repeat">
+      <a:schemeClr val="accent5">
+        <a:shade val="60000"/>
+      </a:schemeClr>
+    </dgm:linClrLst>
+    <dgm:effectClrLst/>
+    <dgm:txLinClrLst/>
+    <dgm:txFillClrLst meth="repeat">
+      <a:schemeClr val="tx1"/>
+    </dgm:txFillClrLst>
+    <dgm:txEffectClrLst/>
+  </dgm:styleLbl>
+  <dgm:styleLbl name="parChTrans1D3">
+    <dgm:fillClrLst meth="repeat">
+      <a:schemeClr val="accent5"/>
+    </dgm:fillClrLst>
+    <dgm:linClrLst meth="repeat">
+      <a:schemeClr val="accent5">
+        <a:shade val="80000"/>
+      </a:schemeClr>
+    </dgm:linClrLst>
+    <dgm:effectClrLst/>
+    <dgm:txLinClrLst/>
+    <dgm:txFillClrLst meth="repeat">
+      <a:schemeClr val="tx1"/>
+    </dgm:txFillClrLst>
+    <dgm:txEffectClrLst/>
+  </dgm:styleLbl>
+  <dgm:styleLbl name="parChTrans1D4">
+    <dgm:fillClrLst meth="repeat">
+      <a:schemeClr val="accent5"/>
+    </dgm:fillClrLst>
+    <dgm:linClrLst meth="repeat">
+      <a:schemeClr val="accent5">
+        <a:shade val="80000"/>
+      </a:schemeClr>
+    </dgm:linClrLst>
+    <dgm:effectClrLst/>
+    <dgm:txLinClrLst/>
+    <dgm:txFillClrLst meth="repeat">
+      <a:schemeClr val="tx1"/>
+    </dgm:txFillClrLst>
+    <dgm:txEffectClrLst/>
+  </dgm:styleLbl>
+  <dgm:styleLbl name="fgAcc1">
+    <dgm:fillClrLst meth="repeat">
+      <a:schemeClr val="lt1">
+        <a:alpha val="90000"/>
+      </a:schemeClr>
+    </dgm:fillClrLst>
+    <dgm:linClrLst meth="repeat">
+      <a:schemeClr val="accent5"/>
+    </dgm:linClrLst>
+    <dgm:effectClrLst/>
+    <dgm:txLinClrLst/>
+    <dgm:txFillClrLst meth="repeat">
+      <a:schemeClr val="dk1"/>
+    </dgm:txFillClrLst>
+    <dgm:txEffectClrLst/>
+  </dgm:styleLbl>
+  <dgm:styleLbl name="conFgAcc1">
+    <dgm:fillClrLst meth="repeat">
+      <a:schemeClr val="lt1">
+        <a:alpha val="90000"/>
+      </a:schemeClr>
+    </dgm:fillClrLst>
+    <dgm:linClrLst meth="repeat">
+      <a:schemeClr val="accent5"/>
+    </dgm:linClrLst>
+    <dgm:effectClrLst/>
+    <dgm:txLinClrLst/>
+    <dgm:txFillClrLst meth="repeat">
+      <a:schemeClr val="dk1"/>
+    </dgm:txFillClrLst>
+    <dgm:txEffectClrLst/>
+  </dgm:styleLbl>
+  <dgm:styleLbl name="alignAcc1">
+    <dgm:fillClrLst meth="repeat">
+      <a:schemeClr val="lt1">
+        <a:alpha val="90000"/>
+      </a:schemeClr>
+    </dgm:fillClrLst>
+    <dgm:linClrLst meth="repeat">
+      <a:schemeClr val="accent5"/>
+    </dgm:linClrLst>
+    <dgm:effectClrLst/>
+    <dgm:txLinClrLst/>
+    <dgm:txFillClrLst meth="repeat">
+      <a:schemeClr val="dk1"/>
+    </dgm:txFillClrLst>
+    <dgm:txEffectClrLst/>
+  </dgm:styleLbl>
+  <dgm:styleLbl name="trAlignAcc1">
+    <dgm:fillClrLst meth="repeat">
+      <a:schemeClr val="lt1">
+        <a:alpha val="40000"/>
+      </a:schemeClr>
+    </dgm:fillClrLst>
+    <dgm:linClrLst meth="repeat">
+      <a:schemeClr val="accent5"/>
+    </dgm:linClrLst>
+    <dgm:effectClrLst/>
+    <dgm:txLinClrLst/>
+    <dgm:txFillClrLst meth="repeat">
+      <a:schemeClr val="dk1"/>
+    </dgm:txFillClrLst>
+    <dgm:txEffectClrLst/>
+  </dgm:styleLbl>
+  <dgm:styleLbl name="bgAcc1">
+    <dgm:fillClrLst meth="repeat">
+      <a:schemeClr val="lt1">
+        <a:alpha val="90000"/>
+      </a:schemeClr>
+    </dgm:fillClrLst>
+    <dgm:linClrLst meth="repeat">
+      <a:schemeClr val="accent5"/>
+    </dgm:linClrLst>
+    <dgm:effectClrLst/>
+    <dgm:txLinClrLst/>
+    <dgm:txFillClrLst meth="repeat">
+      <a:schemeClr val="dk1"/>
+    </dgm:txFillClrLst>
+    <dgm:txEffectClrLst/>
+  </dgm:styleLbl>
+  <dgm:styleLbl name="solidFgAcc1">
+    <dgm:fillClrLst meth="repeat">
+      <a:schemeClr val="lt1"/>
+    </dgm:fillClrLst>
+    <dgm:linClrLst meth="repeat">
+      <a:schemeClr val="accent5"/>
+    </dgm:linClrLst>
+    <dgm:effectClrLst/>
+    <dgm:txLinClrLst/>
+    <dgm:txFillClrLst meth="repeat">
+      <a:schemeClr val="dk1"/>
+    </dgm:txFillClrLst>
+    <dgm:txEffectClrLst/>
+  </dgm:styleLbl>
+  <dgm:styleLbl name="solidAlignAcc1">
+    <dgm:fillClrLst meth="repeat">
+      <a:schemeClr val="lt1"/>
+    </dgm:fillClrLst>
+    <dgm:linClrLst meth="repeat">
+      <a:schemeClr val="accent5"/>
+    </dgm:linClrLst>
+    <dgm:effectClrLst/>
+    <dgm:txLinClrLst/>
+    <dgm:txFillClrLst meth="repeat">
+      <a:schemeClr val="dk1"/>
+    </dgm:txFillClrLst>
+    <dgm:txEffectClrLst/>
+  </dgm:styleLbl>
+  <dgm:styleLbl name="solidBgAcc1">
+    <dgm:fillClrLst meth="repeat">
+      <a:schemeClr val="lt1"/>
+    </dgm:fillClrLst>
+    <dgm:linClrLst meth="repeat">
+      <a:schemeClr val="accent5"/>
+    </dgm:linClrLst>
+    <dgm:effectClrLst/>
+    <dgm:txLinClrLst/>
+    <dgm:txFillClrLst meth="repeat">
+      <a:schemeClr val="dk1"/>
+    </dgm:txFillClrLst>
+    <dgm:txEffectClrLst/>
+  </dgm:styleLbl>
+  <dgm:styleLbl name="fgAccFollowNode1">
+    <dgm:fillClrLst meth="repeat">
+      <a:schemeClr val="accent5">
+        <a:alpha val="90000"/>
+        <a:tint val="40000"/>
+      </a:schemeClr>
+    </dgm:fillClrLst>
+    <dgm:linClrLst meth="repeat">
+      <a:schemeClr val="accent5">
+        <a:alpha val="90000"/>
+        <a:tint val="40000"/>
+      </a:schemeClr>
+    </dgm:linClrLst>
+    <dgm:effectClrLst/>
+    <dgm:txLinClrLst/>
+    <dgm:txFillClrLst meth="repeat">
+      <a:schemeClr val="dk1"/>
+    </dgm:txFillClrLst>
+    <dgm:txEffectClrLst/>
+  </dgm:styleLbl>
+  <dgm:styleLbl name="alignAccFollowNode1">
+    <dgm:fillClrLst meth="repeat">
+      <a:schemeClr val="accent5">
+        <a:alpha val="90000"/>
+        <a:tint val="40000"/>
+      </a:schemeClr>
+    </dgm:fillClrLst>
+    <dgm:linClrLst meth="repeat">
+      <a:schemeClr val="accent5">
+        <a:alpha val="90000"/>
+        <a:tint val="40000"/>
+      </a:schemeClr>
+    </dgm:linClrLst>
+    <dgm:effectClrLst/>
+    <dgm:txLinClrLst/>
+    <dgm:txFillClrLst meth="repeat">
+      <a:schemeClr val="dk1"/>
+    </dgm:txFillClrLst>
+    <dgm:txEffectClrLst/>
+  </dgm:styleLbl>
+  <dgm:styleLbl name="bgAccFollowNode1">
+    <dgm:fillClrLst meth="repeat">
+      <a:schemeClr val="accent5">
+        <a:alpha val="90000"/>
+        <a:tint val="40000"/>
+      </a:schemeClr>
+    </dgm:fillClrLst>
+    <dgm:linClrLst meth="repeat">
+      <a:schemeClr val="accent5">
+        <a:alpha val="90000"/>
+        <a:tint val="40000"/>
+      </a:schemeClr>
+    </dgm:linClrLst>
+    <dgm:effectClrLst/>
+    <dgm:txLinClrLst/>
+    <dgm:txFillClrLst meth="repeat">
+      <a:schemeClr val="dk1"/>
+    </dgm:txFillClrLst>
+    <dgm:txEffectClrLst/>
+  </dgm:styleLbl>
+  <dgm:styleLbl name="fgAcc0">
+    <dgm:fillClrLst meth="repeat">
+      <a:schemeClr val="lt1">
+        <a:alpha val="90000"/>
+      </a:schemeClr>
+    </dgm:fillClrLst>
+    <dgm:linClrLst meth="repeat">
+      <a:schemeClr val="accent5"/>
+    </dgm:linClrLst>
+    <dgm:effectClrLst/>
+    <dgm:txLinClrLst/>
+    <dgm:txFillClrLst meth="repeat">
+      <a:schemeClr val="dk1"/>
+    </dgm:txFillClrLst>
+    <dgm:txEffectClrLst/>
+  </dgm:styleLbl>
+  <dgm:styleLbl name="fgAcc2">
+    <dgm:fillClrLst meth="repeat">
+      <a:schemeClr val="lt1">
+        <a:alpha val="90000"/>
+      </a:schemeClr>
+    </dgm:fillClrLst>
+    <dgm:linClrLst meth="repeat">
+      <a:schemeClr val="accent5"/>
+    </dgm:linClrLst>
+    <dgm:effectClrLst/>
+    <dgm:txLinClrLst/>
+    <dgm:txFillClrLst meth="repeat">
+      <a:schemeClr val="dk1"/>
+    </dgm:txFillClrLst>
+    <dgm:txEffectClrLst/>
+  </dgm:styleLbl>
+  <dgm:styleLbl name="fgAcc3">
+    <dgm:fillClrLst meth="repeat">
+      <a:schemeClr val="lt1">
+        <a:alpha val="90000"/>
+      </a:schemeClr>
+    </dgm:fillClrLst>
+    <dgm:linClrLst meth="repeat">
+      <a:schemeClr val="accent5"/>
+    </dgm:linClrLst>
+    <dgm:effectClrLst/>
+    <dgm:txLinClrLst/>
+    <dgm:txFillClrLst meth="repeat">
+      <a:schemeClr val="dk1"/>
+    </dgm:txFillClrLst>
+    <dgm:txEffectClrLst/>
+  </dgm:styleLbl>
+  <dgm:styleLbl name="fgAcc4">
+    <dgm:fillClrLst meth="repeat">
+      <a:schemeClr val="lt1">
+        <a:alpha val="90000"/>
+      </a:schemeClr>
+    </dgm:fillClrLst>
+    <dgm:linClrLst meth="repeat">
+      <a:schemeClr val="accent5"/>
+    </dgm:linClrLst>
+    <dgm:effectClrLst/>
+    <dgm:txLinClrLst/>
+    <dgm:txFillClrLst meth="repeat">
+      <a:schemeClr val="dk1"/>
+    </dgm:txFillClrLst>
+    <dgm:txEffectClrLst/>
+  </dgm:styleLbl>
+  <dgm:styleLbl name="bgShp">
+    <dgm:fillClrLst meth="repeat">
+      <a:schemeClr val="accent5">
+        <a:tint val="40000"/>
+      </a:schemeClr>
+    </dgm:fillClrLst>
+    <dgm:linClrLst meth="repeat">
+      <a:schemeClr val="accent5"/>
+    </dgm:linClrLst>
+    <dgm:effectClrLst/>
+    <dgm:txLinClrLst/>
+    <dgm:txFillClrLst meth="repeat">
+      <a:schemeClr val="dk1"/>
+    </dgm:txFillClrLst>
+    <dgm:txEffectClrLst/>
+  </dgm:styleLbl>
+  <dgm:styleLbl name="dkBgShp">
+    <dgm:fillClrLst meth="repeat">
+      <a:schemeClr val="accent5">
+        <a:shade val="80000"/>
+      </a:schemeClr>
+    </dgm:fillClrLst>
+    <dgm:linClrLst meth="repeat">
+      <a:schemeClr val="accent5"/>
+    </dgm:linClrLst>
+    <dgm:effectClrLst/>
+    <dgm:txLinClrLst/>
+    <dgm:txFillClrLst meth="repeat">
+      <a:schemeClr val="lt1"/>
+    </dgm:txFillClrLst>
+    <dgm:txEffectClrLst/>
+  </dgm:styleLbl>
+  <dgm:styleLbl name="trBgShp">
+    <dgm:fillClrLst meth="repeat">
+      <a:schemeClr val="accent5">
+        <a:tint val="50000"/>
+        <a:alpha val="40000"/>
+      </a:schemeClr>
+    </dgm:fillClrLst>
+    <dgm:linClrLst meth="repeat">
+      <a:schemeClr val="accent5"/>
+    </dgm:linClrLst>
+    <dgm:effectClrLst/>
+    <dgm:txLinClrLst/>
+    <dgm:txFillClrLst meth="repeat">
+      <a:schemeClr val="lt1"/>
+    </dgm:txFillClrLst>
+    <dgm:txEffectClrLst/>
+  </dgm:styleLbl>
+  <dgm:styleLbl name="fgShp">
+    <dgm:fillClrLst meth="repeat">
+      <a:schemeClr val="accent5">
+        <a:tint val="60000"/>
+      </a:schemeClr>
+    </dgm:fillClrLst>
+    <dgm:linClrLst meth="repeat">
+      <a:schemeClr val="lt1"/>
+    </dgm:linClrLst>
+    <dgm:effectClrLst/>
+    <dgm:txLinClrLst/>
+    <dgm:txFillClrLst meth="repeat">
+      <a:schemeClr val="dk1"/>
+    </dgm:txFillClrLst>
+    <dgm:txEffectClrLst/>
+  </dgm:styleLbl>
+  <dgm:styleLbl name="revTx">
+    <dgm:fillClrLst meth="repeat">
+      <a:schemeClr val="lt1">
+        <a:alpha val="0"/>
+      </a:schemeClr>
+    </dgm:fillClrLst>
+    <dgm:linClrLst meth="repeat">
+      <a:schemeClr val="dk1">
+        <a:alpha val="0"/>
+      </a:schemeClr>
+    </dgm:linClrLst>
+    <dgm:effectClrLst/>
+    <dgm:txLinClrLst/>
+    <dgm:txFillClrLst meth="repeat">
+      <a:schemeClr val="tx1"/>
+    </dgm:txFillClrLst>
+    <dgm:txEffectClrLst/>
+  </dgm:styleLbl>
+</dgm:colorsDef>
+</file>
+
+<file path=ppt/diagrams/colors2.xml><?xml version="1.0" encoding="utf-8"?>
+<dgm:colorsDef xmlns:dgm="http://schemas.openxmlformats.org/drawingml/2006/diagram" xmlns:a="http://schemas.openxmlformats.org/drawingml/2006/main" uniqueId="urn:microsoft.com/office/officeart/2005/8/colors/colorful2">
+  <dgm:title val=""/>
+  <dgm:desc val=""/>
+  <dgm:catLst>
+    <dgm:cat type="colorful" pri="10200"/>
+  </dgm:catLst>
+  <dgm:styleLbl name="node0">
+    <dgm:fillClrLst meth="repeat">
+      <a:schemeClr val="accent1"/>
+    </dgm:fillClrLst>
+    <dgm:linClrLst meth="repeat">
+      <a:schemeClr val="lt1"/>
+    </dgm:linClrLst>
+    <dgm:effectClrLst/>
+    <dgm:txLinClrLst/>
+    <dgm:txFillClrLst/>
+    <dgm:txEffectClrLst/>
+  </dgm:styleLbl>
+  <dgm:styleLbl name="node1">
+    <dgm:fillClrLst>
+      <a:schemeClr val="accent2"/>
+      <a:schemeClr val="accent3"/>
+    </dgm:fillClrLst>
+    <dgm:linClrLst meth="repeat">
+      <a:schemeClr val="lt1"/>
+    </dgm:linClrLst>
+    <dgm:effectClrLst/>
+    <dgm:txLinClrLst/>
+    <dgm:txFillClrLst/>
+    <dgm:txEffectClrLst/>
+  </dgm:styleLbl>
+  <dgm:styleLbl name="alignNode1">
+    <dgm:fillClrLst>
+      <a:schemeClr val="accent2"/>
+      <a:schemeClr val="accent3"/>
+    </dgm:fillClrLst>
+    <dgm:linClrLst>
+      <a:schemeClr val="accent2"/>
+      <a:schemeClr val="accent3"/>
+    </dgm:linClrLst>
+    <dgm:effectClrLst/>
+    <dgm:txLinClrLst/>
+    <dgm:txFillClrLst/>
+    <dgm:txEffectClrLst/>
+  </dgm:styleLbl>
+  <dgm:styleLbl name="lnNode1">
+    <dgm:fillClrLst>
+      <a:schemeClr val="accent2"/>
+      <a:schemeClr val="accent3"/>
+    </dgm:fillClrLst>
+    <dgm:linClrLst meth="repeat">
+      <a:schemeClr val="lt1"/>
+    </dgm:linClrLst>
+    <dgm:effectClrLst/>
+    <dgm:txLinClrLst/>
+    <dgm:txFillClrLst/>
+    <dgm:txEffectClrLst/>
+  </dgm:styleLbl>
+  <dgm:styleLbl name="vennNode1">
+    <dgm:fillClrLst>
+      <a:schemeClr val="accent2">
+        <a:alpha val="50000"/>
+      </a:schemeClr>
+      <a:schemeClr val="accent3">
+        <a:alpha val="50000"/>
+      </a:schemeClr>
+    </dgm:fillClrLst>
+    <dgm:linClrLst meth="repeat">
+      <a:schemeClr val="lt1"/>
+    </dgm:linClrLst>
+    <dgm:effectClrLst/>
+    <dgm:txLinClrLst/>
+    <dgm:txFillClrLst/>
+    <dgm:txEffectClrLst/>
+  </dgm:styleLbl>
+  <dgm:styleLbl name="node2">
+    <dgm:fillClrLst>
+      <a:schemeClr val="accent3"/>
+    </dgm:fillClrLst>
+    <dgm:linClrLst meth="repeat">
+      <a:schemeClr val="lt1"/>
+    </dgm:linClrLst>
+    <dgm:effectClrLst/>
+    <dgm:txLinClrLst/>
+    <dgm:txFillClrLst/>
+    <dgm:txEffectClrLst/>
+  </dgm:styleLbl>
+  <dgm:styleLbl name="node3">
+    <dgm:fillClrLst>
+      <a:schemeClr val="accent4"/>
+    </dgm:fillClrLst>
+    <dgm:linClrLst meth="repeat">
+      <a:schemeClr val="lt1"/>
+    </dgm:linClrLst>
+    <dgm:effectClrLst/>
+    <dgm:txLinClrLst/>
+    <dgm:txFillClrLst/>
+    <dgm:txEffectClrLst/>
+  </dgm:styleLbl>
+  <dgm:styleLbl name="node4">
+    <dgm:fillClrLst>
+      <a:schemeClr val="accent5"/>
+    </dgm:fillClrLst>
+    <dgm:linClrLst meth="repeat">
+      <a:schemeClr val="lt1"/>
+    </dgm:linClrLst>
+    <dgm:effectClrLst/>
+    <dgm:txLinClrLst/>
+    <dgm:txFillClrLst/>
+    <dgm:txEffectClrLst/>
+  </dgm:styleLbl>
+  <dgm:styleLbl name="fgImgPlace1">
+    <dgm:fillClrLst>
+      <a:schemeClr val="accent2">
+        <a:tint val="50000"/>
+      </a:schemeClr>
+      <a:schemeClr val="accent3">
+        <a:tint val="50000"/>
+      </a:schemeClr>
+    </dgm:fillClrLst>
+    <dgm:linClrLst meth="repeat">
+      <a:schemeClr val="lt1"/>
+    </dgm:linClrLst>
+    <dgm:effectClrLst/>
+    <dgm:txLinClrLst/>
+    <dgm:txFillClrLst meth="repeat">
+      <a:schemeClr val="lt1"/>
+    </dgm:txFillClrLst>
+    <dgm:txEffectClrLst/>
+  </dgm:styleLbl>
+  <dgm:styleLbl name="alignImgPlace1">
+    <dgm:fillClrLst>
+      <a:schemeClr val="accent2">
+        <a:tint val="50000"/>
+      </a:schemeClr>
+      <a:schemeClr val="accent3">
+        <a:tint val="20000"/>
+      </a:schemeClr>
+    </dgm:fillClrLst>
+    <dgm:linClrLst meth="repeat">
+      <a:schemeClr val="lt1"/>
+    </dgm:linClrLst>
+    <dgm:effectClrLst/>
+    <dgm:txLinClrLst/>
+    <dgm:txFillClrLst meth="repeat">
+      <a:schemeClr val="lt1"/>
+    </dgm:txFillClrLst>
+    <dgm:txEffectClrLst/>
+  </dgm:styleLbl>
+  <dgm:styleLbl name="bgImgPlace1">
+    <dgm:fillClrLst>
+      <a:schemeClr val="accent2">
+        <a:tint val="50000"/>
+      </a:schemeClr>
+      <a:schemeClr val="accent3">
+        <a:tint val="20000"/>
+      </a:schemeClr>
+    </dgm:fillClrLst>
+    <dgm:linClrLst meth="repeat">
+      <a:schemeClr val="lt1"/>
+    </dgm:linClrLst>
+    <dgm:effectClrLst/>
+    <dgm:txLinClrLst/>
+    <dgm:txFillClrLst meth="repeat">
+      <a:schemeClr val="lt1"/>
+    </dgm:txFillClrLst>
+    <dgm:txEffectClrLst/>
+  </dgm:styleLbl>
+  <dgm:styleLbl name="sibTrans2D1">
+    <dgm:fillClrLst>
+      <a:schemeClr val="accent2"/>
+      <a:schemeClr val="accent3"/>
+    </dgm:fillClrLst>
+    <dgm:linClrLst meth="repeat">
+      <a:schemeClr val="lt1"/>
+    </dgm:linClrLst>
+    <dgm:effectClrLst/>
+    <dgm:txLinClrLst/>
+    <dgm:txFillClrLst/>
+    <dgm:txEffectClrLst/>
+  </dgm:styleLbl>
+  <dgm:styleLbl name="fgSibTrans2D1">
+    <dgm:fillClrLst>
+      <a:schemeClr val="accent2"/>
+      <a:schemeClr val="accent3"/>
+    </dgm:fillClrLst>
+    <dgm:linClrLst meth="repeat">
+      <a:schemeClr val="lt1"/>
+    </dgm:linClrLst>
+    <dgm:effectClrLst/>
+    <dgm:txLinClrLst/>
+    <dgm:txFillClrLst meth="repeat">
+      <a:schemeClr val="lt1"/>
+    </dgm:txFillClrLst>
+    <dgm:txEffectClrLst/>
+  </dgm:styleLbl>
+  <dgm:styleLbl name="bgSibTrans2D1">
+    <dgm:fillClrLst>
+      <a:schemeClr val="accent2"/>
+      <a:schemeClr val="accent3"/>
+    </dgm:fillClrLst>
+    <dgm:linClrLst meth="repeat">
+      <a:schemeClr val="lt1"/>
+    </dgm:linClrLst>
+    <dgm:effectClrLst/>
+    <dgm:txLinClrLst/>
+    <dgm:txFillClrLst meth="repeat">
+      <a:schemeClr val="lt1"/>
+    </dgm:txFillClrLst>
+    <dgm:txEffectClrLst/>
+  </dgm:styleLbl>
+  <dgm:styleLbl name="sibTrans1D1">
+    <dgm:fillClrLst/>
+    <dgm:linClrLst>
+      <a:schemeClr val="accent2"/>
+      <a:schemeClr val="accent3"/>
+    </dgm:linClrLst>
+    <dgm:effectClrLst/>
+    <dgm:txLinClrLst/>
+    <dgm:txFillClrLst meth="repeat">
+      <a:schemeClr val="tx1"/>
+    </dgm:txFillClrLst>
+    <dgm:txEffectClrLst/>
+  </dgm:styleLbl>
+  <dgm:styleLbl name="callout">
+    <dgm:fillClrLst meth="repeat">
+      <a:schemeClr val="accent2"/>
+    </dgm:fillClrLst>
+    <dgm:linClrLst meth="repeat">
+      <a:schemeClr val="accent2">
+        <a:tint val="50000"/>
+      </a:schemeClr>
+    </dgm:linClrLst>
+    <dgm:effectClrLst/>
+    <dgm:txLinClrLst/>
+    <dgm:txFillClrLst meth="repeat">
+      <a:schemeClr val="tx1"/>
+    </dgm:txFillClrLst>
+    <dgm:txEffectClrLst/>
+  </dgm:styleLbl>
+  <dgm:styleLbl name="asst0">
+    <dgm:fillClrLst meth="repeat">
+      <a:schemeClr val="accent2"/>
+    </dgm:fillClrLst>
+    <dgm:linClrLst meth="repeat">
+      <a:schemeClr val="lt1">
+        <a:shade val="80000"/>
+      </a:schemeClr>
+    </dgm:linClrLst>
+    <dgm:effectClrLst/>
+    <dgm:txLinClrLst/>
+    <dgm:txFillClrLst/>
+    <dgm:txEffectClrLst/>
+  </dgm:styleLbl>
+  <dgm:styleLbl name="asst1">
+    <dgm:fillClrLst meth="repeat">
+      <a:schemeClr val="accent3"/>
+    </dgm:fillClrLst>
+    <dgm:linClrLst meth="repeat">
+      <a:schemeClr val="lt1">
+        <a:shade val="80000"/>
+      </a:schemeClr>
+    </dgm:linClrLst>
+    <dgm:effectClrLst/>
+    <dgm:txLinClrLst/>
+    <dgm:txFillClrLst/>
+    <dgm:txEffectClrLst/>
+  </dgm:styleLbl>
+  <dgm:styleLbl name="asst2">
+    <dgm:fillClrLst>
+      <a:schemeClr val="accent4"/>
+    </dgm:fillClrLst>
+    <dgm:linClrLst meth="repeat">
+      <a:schemeClr val="lt1"/>
+    </dgm:linClrLst>
+    <dgm:effectClrLst/>
+    <dgm:txLinClrLst/>
+    <dgm:txFillClrLst/>
+    <dgm:txEffectClrLst/>
+  </dgm:styleLbl>
+  <dgm:styleLbl name="asst3">
+    <dgm:fillClrLst>
+      <a:schemeClr val="accent5"/>
+    </dgm:fillClrLst>
+    <dgm:linClrLst meth="repeat">
+      <a:schemeClr val="lt1"/>
+    </dgm:linClrLst>
+    <dgm:effectClrLst/>
+    <dgm:txLinClrLst/>
+    <dgm:txFillClrLst/>
+    <dgm:txEffectClrLst/>
+  </dgm:styleLbl>
+  <dgm:styleLbl name="asst4">
+    <dgm:fillClrLst>
+      <a:schemeClr val="accent6"/>
+    </dgm:fillClrLst>
+    <dgm:linClrLst meth="repeat">
+      <a:schemeClr val="lt1"/>
+    </dgm:linClrLst>
+    <dgm:effectClrLst/>
+    <dgm:txLinClrLst/>
+    <dgm:txFillClrLst/>
+    <dgm:txEffectClrLst/>
+  </dgm:styleLbl>
+  <dgm:styleLbl name="parChTrans2D1">
+    <dgm:fillClrLst meth="repeat">
+      <a:schemeClr val="accent2"/>
+    </dgm:fillClrLst>
+    <dgm:linClrLst meth="repeat">
+      <a:schemeClr val="lt1"/>
+    </dgm:linClrLst>
+    <dgm:effectClrLst/>
+    <dgm:txLinClrLst/>
+    <dgm:txFillClrLst meth="repeat">
+      <a:schemeClr val="lt1"/>
+    </dgm:txFillClrLst>
+    <dgm:txEffectClrLst/>
+  </dgm:styleLbl>
+  <dgm:styleLbl name="parChTrans2D2">
+    <dgm:fillClrLst meth="repeat">
+      <a:schemeClr val="accent3"/>
+    </dgm:fillClrLst>
+    <dgm:linClrLst meth="repeat">
+      <a:schemeClr val="lt1"/>
+    </dgm:linClrLst>
+    <dgm:effectClrLst/>
+    <dgm:txLinClrLst/>
+    <dgm:txFillClrLst/>
+    <dgm:txEffectClrLst/>
+  </dgm:styleLbl>
+  <dgm:styleLbl name="parChTrans2D3">
+    <dgm:fillClrLst meth="repeat">
+      <a:schemeClr val="accent4"/>
+    </dgm:fillClrLst>
+    <dgm:linClrLst meth="repeat">
+      <a:schemeClr val="lt1"/>
+    </dgm:linClrLst>
+    <dgm:effectClrLst/>
+    <dgm:txLinClrLst/>
+    <dgm:txFillClrLst/>
+    <dgm:txEffectClrLst/>
+  </dgm:styleLbl>
+  <dgm:styleLbl name="parChTrans2D4">
+    <dgm:fillClrLst meth="repeat">
+      <a:schemeClr val="accent5"/>
+    </dgm:fillClrLst>
+    <dgm:linClrLst meth="repeat">
+      <a:schemeClr val="lt1"/>
+    </dgm:linClrLst>
+    <dgm:effectClrLst/>
+    <dgm:txLinClrLst/>
+    <dgm:txFillClrLst meth="repeat">
+      <a:schemeClr val="lt1"/>
+    </dgm:txFillClrLst>
+    <dgm:txEffectClrLst/>
+  </dgm:styleLbl>
+  <dgm:styleLbl name="parChTrans1D1">
+    <dgm:fillClrLst meth="repeat">
+      <a:schemeClr val="accent2"/>
+    </dgm:fillClrLst>
+    <dgm:linClrLst meth="repeat">
+      <a:schemeClr val="accent2"/>
+    </dgm:linClrLst>
+    <dgm:effectClrLst/>
+    <dgm:txLinClrLst/>
+    <dgm:txFillClrLst meth="repeat">
+      <a:schemeClr val="tx1"/>
+    </dgm:txFillClrLst>
+    <dgm:txEffectClrLst/>
+  </dgm:styleLbl>
+  <dgm:styleLbl name="parChTrans1D2">
+    <dgm:fillClrLst meth="repeat">
+      <a:schemeClr val="accent2">
+        <a:tint val="90000"/>
+      </a:schemeClr>
+    </dgm:fillClrLst>
+    <dgm:linClrLst meth="repeat">
+      <a:schemeClr val="accent3"/>
+    </dgm:linClrLst>
+    <dgm:effectClrLst/>
+    <dgm:txLinClrLst/>
+    <dgm:txFillClrLst meth="repeat">
+      <a:schemeClr val="tx1"/>
+    </dgm:txFillClrLst>
+    <dgm:txEffectClrLst/>
+  </dgm:styleLbl>
+  <dgm:styleLbl name="parChTrans1D3">
+    <dgm:fillClrLst meth="repeat">
+      <a:schemeClr val="accent2">
+        <a:tint val="70000"/>
+      </a:schemeClr>
+    </dgm:fillClrLst>
+    <dgm:linClrLst meth="repeat">
+      <a:schemeClr val="accent4"/>
+    </dgm:linClrLst>
+    <dgm:effectClrLst/>
+    <dgm:txLinClrLst/>
+    <dgm:txFillClrLst meth="repeat">
+      <a:schemeClr val="tx1"/>
+    </dgm:txFillClrLst>
+    <dgm:txEffectClrLst/>
+  </dgm:styleLbl>
+  <dgm:styleLbl name="parChTrans1D4">
+    <dgm:fillClrLst meth="repeat">
+      <a:schemeClr val="accent2">
+        <a:tint val="50000"/>
+      </a:schemeClr>
+    </dgm:fillClrLst>
+    <dgm:linClrLst meth="repeat">
+      <a:schemeClr val="accent5"/>
+    </dgm:linClrLst>
+    <dgm:effectClrLst/>
+    <dgm:txLinClrLst/>
+    <dgm:txFillClrLst meth="repeat">
+      <a:schemeClr val="tx1"/>
+    </dgm:txFillClrLst>
+    <dgm:txEffectClrLst/>
+  </dgm:styleLbl>
+  <dgm:styleLbl name="fgAcc1">
+    <dgm:fillClrLst meth="repeat">
+      <a:schemeClr val="lt1">
+        <a:alpha val="90000"/>
+      </a:schemeClr>
+    </dgm:fillClrLst>
+    <dgm:linClrLst>
+      <a:schemeClr val="accent2"/>
+      <a:schemeClr val="accent3"/>
+    </dgm:linClrLst>
+    <dgm:effectClrLst/>
+    <dgm:txLinClrLst/>
+    <dgm:txFillClrLst meth="repeat">
+      <a:schemeClr val="dk1"/>
+    </dgm:txFillClrLst>
+    <dgm:txEffectClrLst/>
+  </dgm:styleLbl>
+  <dgm:styleLbl name="conFgAcc1">
+    <dgm:fillClrLst meth="repeat">
+      <a:schemeClr val="lt1">
+        <a:alpha val="90000"/>
+      </a:schemeClr>
+    </dgm:fillClrLst>
+    <dgm:linClrLst>
+      <a:schemeClr val="accent2"/>
+      <a:schemeClr val="accent3"/>
+    </dgm:linClrLst>
+    <dgm:effectClrLst/>
+    <dgm:txLinClrLst/>
+    <dgm:txFillClrLst meth="repeat">
+      <a:schemeClr val="dk1"/>
+    </dgm:txFillClrLst>
+    <dgm:txEffectClrLst/>
+  </dgm:styleLbl>
+  <dgm:styleLbl name="alignAcc1">
+    <dgm:fillClrLst meth="repeat">
+      <a:schemeClr val="lt1">
+        <a:alpha val="90000"/>
+      </a:schemeClr>
+    </dgm:fillClrLst>
+    <dgm:linClrLst>
+      <a:schemeClr val="accent2"/>
+      <a:schemeClr val="accent3"/>
+    </dgm:linClrLst>
+    <dgm:effectClrLst/>
+    <dgm:txLinClrLst/>
+    <dgm:txFillClrLst meth="repeat">
+      <a:schemeClr val="dk1"/>
+    </dgm:txFillClrLst>
+    <dgm:txEffectClrLst/>
+  </dgm:styleLbl>
+  <dgm:styleLbl name="trAlignAcc1">
+    <dgm:fillClrLst meth="repeat">
+      <a:schemeClr val="lt1">
+        <a:alpha val="40000"/>
+      </a:schemeClr>
+    </dgm:fillClrLst>
+    <dgm:linClrLst meth="repeat">
+      <a:schemeClr val="accent2"/>
+    </dgm:linClrLst>
+    <dgm:effectClrLst/>
+    <dgm:txLinClrLst/>
+    <dgm:txFillClrLst meth="repeat">
+      <a:schemeClr val="dk1"/>
+    </dgm:txFillClrLst>
+    <dgm:txEffectClrLst/>
+  </dgm:styleLbl>
+  <dgm:styleLbl name="bgAcc1">
+    <dgm:fillClrLst meth="repeat">
+      <a:schemeClr val="lt1">
+        <a:alpha val="90000"/>
+      </a:schemeClr>
+    </dgm:fillClrLst>
+    <dgm:linClrLst>
+      <a:schemeClr val="accent2"/>
+      <a:schemeClr val="accent3"/>
+    </dgm:linClrLst>
+    <dgm:effectClrLst/>
+    <dgm:txLinClrLst/>
+    <dgm:txFillClrLst meth="repeat">
+      <a:schemeClr val="dk1"/>
+    </dgm:txFillClrLst>
+    <dgm:txEffectClrLst/>
+  </dgm:styleLbl>
+  <dgm:styleLbl name="solidFgAcc1">
+    <dgm:fillClrLst meth="repeat">
+      <a:schemeClr val="lt1"/>
+    </dgm:fillClrLst>
+    <dgm:linClrLst>
+      <a:schemeClr val="accent2"/>
+      <a:schemeClr val="accent3"/>
+    </dgm:linClrLst>
+    <dgm:effectClrLst/>
+    <dgm:txLinClrLst/>
+    <dgm:txFillClrLst meth="repeat">
+      <a:schemeClr val="dk1"/>
+    </dgm:txFillClrLst>
+    <dgm:txEffectClrLst/>
+  </dgm:styleLbl>
+  <dgm:styleLbl name="solidAlignAcc1">
+    <dgm:fillClrLst meth="repeat">
+      <a:schemeClr val="lt1"/>
+    </dgm:fillClrLst>
+    <dgm:linClrLst>
+      <a:schemeClr val="accent2"/>
+      <a:schemeClr val="accent3"/>
+    </dgm:linClrLst>
+    <dgm:effectClrLst/>
+    <dgm:txLinClrLst/>
+    <dgm:txFillClrLst meth="repeat">
+      <a:schemeClr val="dk1"/>
+    </dgm:txFillClrLst>
+    <dgm:txEffectClrLst/>
+  </dgm:styleLbl>
+  <dgm:styleLbl name="solidBgAcc1">
+    <dgm:fillClrLst meth="repeat">
+      <a:schemeClr val="lt1"/>
+    </dgm:fillClrLst>
+    <dgm:linClrLst>
+      <a:schemeClr val="accent2"/>
+      <a:schemeClr val="accent3"/>
+    </dgm:linClrLst>
+    <dgm:effectClrLst/>
+    <dgm:txLinClrLst/>
+    <dgm:txFillClrLst meth="repeat">
+      <a:schemeClr val="dk1"/>
+    </dgm:txFillClrLst>
+    <dgm:txEffectClrLst/>
+  </dgm:styleLbl>
+  <dgm:styleLbl name="fgAccFollowNode1">
+    <dgm:fillClrLst>
+      <a:schemeClr val="accent2">
+        <a:tint val="40000"/>
+        <a:alpha val="90000"/>
+      </a:schemeClr>
+      <a:schemeClr val="accent3">
+        <a:tint val="40000"/>
+        <a:alpha val="90000"/>
+      </a:schemeClr>
+    </dgm:fillClrLst>
+    <dgm:linClrLst>
+      <a:schemeClr val="accent2">
+        <a:tint val="40000"/>
+        <a:alpha val="90000"/>
+      </a:schemeClr>
+      <a:schemeClr val="accent3">
+        <a:tint val="40000"/>
+        <a:alpha val="90000"/>
+      </a:schemeClr>
+    </dgm:linClrLst>
+    <dgm:effectClrLst/>
+    <dgm:txLinClrLst/>
+    <dgm:txFillClrLst meth="repeat">
+      <a:schemeClr val="dk1"/>
+    </dgm:txFillClrLst>
+    <dgm:txEffectClrLst/>
+  </dgm:styleLbl>
+  <dgm:styleLbl name="alignAccFollowNode1">
+    <dgm:fillClrLst>
+      <a:schemeClr val="accent2">
+        <a:tint val="40000"/>
+        <a:alpha val="90000"/>
+      </a:schemeClr>
+      <a:schemeClr val="accent3">
+        <a:tint val="40000"/>
+        <a:alpha val="90000"/>
+      </a:schemeClr>
+    </dgm:fillClrLst>
+    <dgm:linClrLst>
+      <a:schemeClr val="accent2">
+        <a:tint val="40000"/>
+        <a:alpha val="90000"/>
+      </a:schemeClr>
+      <a:schemeClr val="accent3">
+        <a:tint val="40000"/>
+        <a:alpha val="90000"/>
+      </a:schemeClr>
+    </dgm:linClrLst>
+    <dgm:effectClrLst/>
+    <dgm:txLinClrLst/>
+    <dgm:txFillClrLst meth="repeat">
+      <a:schemeClr val="dk1"/>
+    </dgm:txFillClrLst>
+    <dgm:txEffectClrLst/>
+  </dgm:styleLbl>
+  <dgm:styleLbl name="bgAccFollowNode1">
+    <dgm:fillClrLst>
+      <a:schemeClr val="accent2">
+        <a:tint val="40000"/>
+        <a:alpha val="90000"/>
+      </a:schemeClr>
+      <a:schemeClr val="accent3">
+        <a:tint val="40000"/>
+        <a:alpha val="90000"/>
+      </a:schemeClr>
+    </dgm:fillClrLst>
+    <dgm:linClrLst>
+      <a:schemeClr val="accent2">
+        <a:tint val="40000"/>
+        <a:alpha val="90000"/>
+      </a:schemeClr>
+      <a:schemeClr val="accent3">
+        <a:tint val="40000"/>
+        <a:alpha val="90000"/>
+      </a:schemeClr>
+    </dgm:linClrLst>
+    <dgm:effectClrLst/>
+    <dgm:txLinClrLst/>
+    <dgm:txFillClrLst meth="repeat">
+      <a:schemeClr val="dk1"/>
+    </dgm:txFillClrLst>
+    <dgm:txEffectClrLst/>
+  </dgm:styleLbl>
+  <dgm:styleLbl name="fgAcc0">
+    <dgm:fillClrLst meth="repeat">
+      <a:schemeClr val="lt1">
+        <a:alpha val="90000"/>
+      </a:schemeClr>
+    </dgm:fillClrLst>
+    <dgm:linClrLst>
+      <a:schemeClr val="accent1"/>
+    </dgm:linClrLst>
+    <dgm:effectClrLst/>
+    <dgm:txLinClrLst/>
+    <dgm:txFillClrLst meth="repeat">
+      <a:schemeClr val="dk1"/>
+    </dgm:txFillClrLst>
+    <dgm:txEffectClrLst/>
+  </dgm:styleLbl>
+  <dgm:styleLbl name="fgAcc2">
+    <dgm:fillClrLst meth="repeat">
+      <a:schemeClr val="lt1">
+        <a:alpha val="90000"/>
+      </a:schemeClr>
+    </dgm:fillClrLst>
+    <dgm:linClrLst>
+      <a:schemeClr val="accent3"/>
+    </dgm:linClrLst>
+    <dgm:effectClrLst/>
+    <dgm:txLinClrLst/>
+    <dgm:txFillClrLst meth="repeat">
+      <a:schemeClr val="dk1"/>
+    </dgm:txFillClrLst>
+    <dgm:txEffectClrLst/>
+  </dgm:styleLbl>
+  <dgm:styleLbl name="fgAcc3">
+    <dgm:fillClrLst meth="repeat">
+      <a:schemeClr val="lt1">
+        <a:alpha val="90000"/>
+      </a:schemeClr>
+    </dgm:fillClrLst>
+    <dgm:linClrLst>
+      <a:schemeClr val="accent4"/>
+    </dgm:linClrLst>
+    <dgm:effectClrLst/>
+    <dgm:txLinClrLst/>
+    <dgm:txFillClrLst meth="repeat">
+      <a:schemeClr val="dk1"/>
+    </dgm:txFillClrLst>
+    <dgm:txEffectClrLst/>
+  </dgm:styleLbl>
+  <dgm:styleLbl name="fgAcc4">
+    <dgm:fillClrLst meth="repeat">
+      <a:schemeClr val="lt1">
+        <a:alpha val="90000"/>
+      </a:schemeClr>
+    </dgm:fillClrLst>
+    <dgm:linClrLst>
+      <a:schemeClr val="accent5"/>
+    </dgm:linClrLst>
+    <dgm:effectClrLst/>
+    <dgm:txLinClrLst/>
+    <dgm:txFillClrLst meth="repeat">
+      <a:schemeClr val="dk1"/>
+    </dgm:txFillClrLst>
+    <dgm:txEffectClrLst/>
+  </dgm:styleLbl>
+  <dgm:styleLbl name="bgShp">
+    <dgm:fillClrLst meth="repeat">
+      <a:schemeClr val="accent2">
+        <a:tint val="40000"/>
+      </a:schemeClr>
+    </dgm:fillClrLst>
+    <dgm:linClrLst meth="repeat">
+      <a:schemeClr val="dk1"/>
+    </dgm:linClrLst>
+    <dgm:effectClrLst/>
+    <dgm:txLinClrLst/>
+    <dgm:txFillClrLst meth="repeat">
+      <a:schemeClr val="dk1"/>
+    </dgm:txFillClrLst>
+    <dgm:txEffectClrLst/>
+  </dgm:styleLbl>
+  <dgm:styleLbl name="dkBgShp">
+    <dgm:fillClrLst meth="repeat">
+      <a:schemeClr val="accent2">
+        <a:shade val="90000"/>
+      </a:schemeClr>
+    </dgm:fillClrLst>
+    <dgm:linClrLst meth="repeat">
+      <a:schemeClr val="dk1"/>
+    </dgm:linClrLst>
+    <dgm:effectClrLst/>
+    <dgm:txLinClrLst/>
+    <dgm:txFillClrLst meth="repeat">
+      <a:schemeClr val="lt1"/>
+    </dgm:txFillClrLst>
+    <dgm:txEffectClrLst/>
+  </dgm:styleLbl>
+  <dgm:styleLbl name="trBgShp">
+    <dgm:fillClrLst meth="repeat">
+      <a:schemeClr val="accent2">
+        <a:tint val="50000"/>
+        <a:alpha val="40000"/>
+      </a:schemeClr>
+    </dgm:fillClrLst>
+    <dgm:linClrLst meth="repeat">
+      <a:schemeClr val="accent2"/>
+    </dgm:linClrLst>
+    <dgm:effectClrLst/>
+    <dgm:txLinClrLst/>
+    <dgm:txFillClrLst meth="repeat">
+      <a:schemeClr val="lt1"/>
+    </dgm:txFillClrLst>
+    <dgm:txEffectClrLst/>
+  </dgm:styleLbl>
+  <dgm:styleLbl name="fgShp">
+    <dgm:fillClrLst meth="repeat">
+      <a:schemeClr val="accent2">
+        <a:tint val="40000"/>
+      </a:schemeClr>
+    </dgm:fillClrLst>
+    <dgm:linClrLst meth="repeat">
+      <a:schemeClr val="lt1"/>
+    </dgm:linClrLst>
+    <dgm:effectClrLst/>
+    <dgm:txLinClrLst/>
+    <dgm:txFillClrLst meth="repeat">
+      <a:schemeClr val="dk1"/>
+    </dgm:txFillClrLst>
+    <dgm:txEffectClrLst/>
+  </dgm:styleLbl>
+  <dgm:styleLbl name="revTx">
+    <dgm:fillClrLst meth="repeat">
+      <a:schemeClr val="lt1">
+        <a:alpha val="0"/>
+      </a:schemeClr>
+    </dgm:fillClrLst>
+    <dgm:linClrLst meth="repeat">
+      <a:schemeClr val="dk1">
+        <a:alpha val="0"/>
+      </a:schemeClr>
+    </dgm:linClrLst>
+    <dgm:effectClrLst/>
+    <dgm:txLinClrLst/>
+    <dgm:txFillClrLst meth="repeat">
+      <a:schemeClr val="tx1"/>
+    </dgm:txFillClrLst>
+    <dgm:txEffectClrLst/>
+  </dgm:styleLbl>
+</dgm:colorsDef>
+</file>
+
+<file path=ppt/diagrams/data1.xml><?xml version="1.0" encoding="utf-8"?>
+<dgm:dataModel xmlns:dgm="http://schemas.openxmlformats.org/drawingml/2006/diagram" xmlns:a="http://schemas.openxmlformats.org/drawingml/2006/main">
+  <dgm:ptLst>
+    <dgm:pt modelId="{F4EED8CA-27AA-4559-A001-60DC17BDB606}" type="doc">
+      <dgm:prSet loTypeId="urn:microsoft.com/office/officeart/2005/8/layout/hierarchy3" loCatId="hierarchy" qsTypeId="urn:microsoft.com/office/officeart/2005/8/quickstyle/simple5" qsCatId="simple" csTypeId="urn:microsoft.com/office/officeart/2005/8/colors/accent5_2" csCatId="accent5"/>
+      <dgm:spPr/>
+      <dgm:t>
+        <a:bodyPr/>
+        <a:lstStyle/>
+        <a:p>
+          <a:endParaRPr lang="en-US"/>
+        </a:p>
+      </dgm:t>
+    </dgm:pt>
+    <dgm:pt modelId="{290B0775-12A9-4CFC-81F8-5897D7EFBEC4}">
+      <dgm:prSet/>
+      <dgm:spPr/>
+      <dgm:t>
+        <a:bodyPr/>
+        <a:lstStyle/>
+        <a:p>
+          <a:r>
+            <a:rPr lang="en-GB"/>
+            <a:t>Composition using components</a:t>
+          </a:r>
+          <a:endParaRPr lang="en-US"/>
+        </a:p>
+      </dgm:t>
+    </dgm:pt>
+    <dgm:pt modelId="{67B9DE7E-8090-452F-BD65-DB5885D972CB}" type="parTrans" cxnId="{AE6C244F-CA4A-464C-B624-F263DB78EB12}">
+      <dgm:prSet/>
+      <dgm:spPr/>
+      <dgm:t>
+        <a:bodyPr/>
+        <a:lstStyle/>
+        <a:p>
+          <a:endParaRPr lang="en-US"/>
+        </a:p>
+      </dgm:t>
+    </dgm:pt>
+    <dgm:pt modelId="{BEDC31EA-B739-4646-AF0F-243E684C68BB}" type="sibTrans" cxnId="{AE6C244F-CA4A-464C-B624-F263DB78EB12}">
+      <dgm:prSet/>
+      <dgm:spPr/>
+      <dgm:t>
+        <a:bodyPr/>
+        <a:lstStyle/>
+        <a:p>
+          <a:endParaRPr lang="en-US"/>
+        </a:p>
+      </dgm:t>
+    </dgm:pt>
+    <dgm:pt modelId="{5CFCD2C3-15FD-4192-8F4E-1EE46235FE26}">
+      <dgm:prSet/>
+      <dgm:spPr/>
+      <dgm:t>
+        <a:bodyPr/>
+        <a:lstStyle/>
+        <a:p>
+          <a:r>
+            <a:rPr lang="en-GB"/>
+            <a:t>Class inheritance</a:t>
+          </a:r>
+          <a:endParaRPr lang="en-US"/>
+        </a:p>
+      </dgm:t>
+    </dgm:pt>
+    <dgm:pt modelId="{108451B3-09EB-4D29-945E-97EA60B76F77}" type="parTrans" cxnId="{48CA92CB-F833-4DC5-A3B9-8A1E56EAFBD6}">
+      <dgm:prSet/>
+      <dgm:spPr/>
+      <dgm:t>
+        <a:bodyPr/>
+        <a:lstStyle/>
+        <a:p>
+          <a:endParaRPr lang="en-US"/>
+        </a:p>
+      </dgm:t>
+    </dgm:pt>
+    <dgm:pt modelId="{379C86F5-A77E-4DB3-A877-0B619E57C08C}" type="sibTrans" cxnId="{48CA92CB-F833-4DC5-A3B9-8A1E56EAFBD6}">
+      <dgm:prSet/>
+      <dgm:spPr/>
+      <dgm:t>
+        <a:bodyPr/>
+        <a:lstStyle/>
+        <a:p>
+          <a:endParaRPr lang="en-US"/>
+        </a:p>
+      </dgm:t>
+    </dgm:pt>
+    <dgm:pt modelId="{DAAA5BDC-51B5-4BA8-BD1A-F90F7B596902}">
+      <dgm:prSet/>
+      <dgm:spPr/>
+      <dgm:t>
+        <a:bodyPr/>
+        <a:lstStyle/>
+        <a:p>
+          <a:r>
+            <a:rPr lang="en-GB"/>
+            <a:t>Uses interface module system</a:t>
+          </a:r>
+          <a:endParaRPr lang="en-US"/>
+        </a:p>
+      </dgm:t>
+    </dgm:pt>
+    <dgm:pt modelId="{508345FA-4FF4-417E-A5F9-69CD6EDAB061}" type="parTrans" cxnId="{848EAF0D-8B6E-4C38-BA2C-6B969CC7698B}">
+      <dgm:prSet/>
+      <dgm:spPr/>
+      <dgm:t>
+        <a:bodyPr/>
+        <a:lstStyle/>
+        <a:p>
+          <a:endParaRPr lang="en-US"/>
+        </a:p>
+      </dgm:t>
+    </dgm:pt>
+    <dgm:pt modelId="{4C92282C-9A73-4BC9-9E1F-CC51563A1EA8}" type="sibTrans" cxnId="{848EAF0D-8B6E-4C38-BA2C-6B969CC7698B}">
+      <dgm:prSet/>
+      <dgm:spPr/>
+      <dgm:t>
+        <a:bodyPr/>
+        <a:lstStyle/>
+        <a:p>
+          <a:endParaRPr lang="en-US"/>
+        </a:p>
+      </dgm:t>
+    </dgm:pt>
+    <dgm:pt modelId="{D805B79A-BDAD-4CEF-B2D2-604339F41C5C}" type="pres">
+      <dgm:prSet presAssocID="{F4EED8CA-27AA-4559-A001-60DC17BDB606}" presName="diagram" presStyleCnt="0">
+        <dgm:presLayoutVars>
+          <dgm:chPref val="1"/>
+          <dgm:dir/>
+          <dgm:animOne val="branch"/>
+          <dgm:animLvl val="lvl"/>
+          <dgm:resizeHandles/>
+        </dgm:presLayoutVars>
+      </dgm:prSet>
+      <dgm:spPr/>
+    </dgm:pt>
+    <dgm:pt modelId="{E1D160E4-8398-4751-82B6-DA17ACD1B9FB}" type="pres">
+      <dgm:prSet presAssocID="{290B0775-12A9-4CFC-81F8-5897D7EFBEC4}" presName="root" presStyleCnt="0"/>
+      <dgm:spPr/>
+    </dgm:pt>
+    <dgm:pt modelId="{CB302F83-9678-45F3-8E78-AC9C0A1F20B1}" type="pres">
+      <dgm:prSet presAssocID="{290B0775-12A9-4CFC-81F8-5897D7EFBEC4}" presName="rootComposite" presStyleCnt="0"/>
+      <dgm:spPr/>
+    </dgm:pt>
+    <dgm:pt modelId="{20633519-04F5-4C8E-8875-5439FCD2D5C9}" type="pres">
+      <dgm:prSet presAssocID="{290B0775-12A9-4CFC-81F8-5897D7EFBEC4}" presName="rootText" presStyleLbl="node1" presStyleIdx="0" presStyleCnt="3"/>
+      <dgm:spPr/>
+    </dgm:pt>
+    <dgm:pt modelId="{39033134-F8FA-49E4-854F-5E8E825DFDAC}" type="pres">
+      <dgm:prSet presAssocID="{290B0775-12A9-4CFC-81F8-5897D7EFBEC4}" presName="rootConnector" presStyleLbl="node1" presStyleIdx="0" presStyleCnt="3"/>
+      <dgm:spPr/>
+    </dgm:pt>
+    <dgm:pt modelId="{DBD71231-663D-4D94-A962-00F88FB4B628}" type="pres">
+      <dgm:prSet presAssocID="{290B0775-12A9-4CFC-81F8-5897D7EFBEC4}" presName="childShape" presStyleCnt="0"/>
+      <dgm:spPr/>
+    </dgm:pt>
+    <dgm:pt modelId="{A0352F17-407F-4F02-8436-56805A32D41C}" type="pres">
+      <dgm:prSet presAssocID="{5CFCD2C3-15FD-4192-8F4E-1EE46235FE26}" presName="root" presStyleCnt="0"/>
+      <dgm:spPr/>
+    </dgm:pt>
+    <dgm:pt modelId="{B646E02F-DB88-4CD3-9FF9-738C0C2A00A9}" type="pres">
+      <dgm:prSet presAssocID="{5CFCD2C3-15FD-4192-8F4E-1EE46235FE26}" presName="rootComposite" presStyleCnt="0"/>
+      <dgm:spPr/>
+    </dgm:pt>
+    <dgm:pt modelId="{C5340843-8F3E-4BCA-AEEC-E093344E4B02}" type="pres">
+      <dgm:prSet presAssocID="{5CFCD2C3-15FD-4192-8F4E-1EE46235FE26}" presName="rootText" presStyleLbl="node1" presStyleIdx="1" presStyleCnt="3"/>
+      <dgm:spPr/>
+    </dgm:pt>
+    <dgm:pt modelId="{5E921147-43A8-401D-98FD-A5ABCBE0C238}" type="pres">
+      <dgm:prSet presAssocID="{5CFCD2C3-15FD-4192-8F4E-1EE46235FE26}" presName="rootConnector" presStyleLbl="node1" presStyleIdx="1" presStyleCnt="3"/>
+      <dgm:spPr/>
+    </dgm:pt>
+    <dgm:pt modelId="{8C7A7AB2-17B6-43E4-AE5F-DD808C97C002}" type="pres">
+      <dgm:prSet presAssocID="{5CFCD2C3-15FD-4192-8F4E-1EE46235FE26}" presName="childShape" presStyleCnt="0"/>
+      <dgm:spPr/>
+    </dgm:pt>
+    <dgm:pt modelId="{FB0CBD58-5166-4279-A26B-9C6C1DDEB0FA}" type="pres">
+      <dgm:prSet presAssocID="{DAAA5BDC-51B5-4BA8-BD1A-F90F7B596902}" presName="root" presStyleCnt="0"/>
+      <dgm:spPr/>
+    </dgm:pt>
+    <dgm:pt modelId="{352F67E0-CC40-4D43-9AAF-BFB260DF401C}" type="pres">
+      <dgm:prSet presAssocID="{DAAA5BDC-51B5-4BA8-BD1A-F90F7B596902}" presName="rootComposite" presStyleCnt="0"/>
+      <dgm:spPr/>
+    </dgm:pt>
+    <dgm:pt modelId="{4C90C00B-D201-46F9-A2A8-A6F332D3EDDC}" type="pres">
+      <dgm:prSet presAssocID="{DAAA5BDC-51B5-4BA8-BD1A-F90F7B596902}" presName="rootText" presStyleLbl="node1" presStyleIdx="2" presStyleCnt="3"/>
+      <dgm:spPr/>
+    </dgm:pt>
+    <dgm:pt modelId="{569A38DE-D24D-4C92-BBDD-F83B0850D2C1}" type="pres">
+      <dgm:prSet presAssocID="{DAAA5BDC-51B5-4BA8-BD1A-F90F7B596902}" presName="rootConnector" presStyleLbl="node1" presStyleIdx="2" presStyleCnt="3"/>
+      <dgm:spPr/>
+    </dgm:pt>
+    <dgm:pt modelId="{63064CCA-E368-46A4-9E63-4C4DE036B8E0}" type="pres">
+      <dgm:prSet presAssocID="{DAAA5BDC-51B5-4BA8-BD1A-F90F7B596902}" presName="childShape" presStyleCnt="0"/>
+      <dgm:spPr/>
+    </dgm:pt>
+  </dgm:ptLst>
+  <dgm:cxnLst>
+    <dgm:cxn modelId="{848EAF0D-8B6E-4C38-BA2C-6B969CC7698B}" srcId="{F4EED8CA-27AA-4559-A001-60DC17BDB606}" destId="{DAAA5BDC-51B5-4BA8-BD1A-F90F7B596902}" srcOrd="2" destOrd="0" parTransId="{508345FA-4FF4-417E-A5F9-69CD6EDAB061}" sibTransId="{4C92282C-9A73-4BC9-9E1F-CC51563A1EA8}"/>
+    <dgm:cxn modelId="{D01B192C-EFE0-4D53-9EAE-119321A276D2}" type="presOf" srcId="{290B0775-12A9-4CFC-81F8-5897D7EFBEC4}" destId="{20633519-04F5-4C8E-8875-5439FCD2D5C9}" srcOrd="0" destOrd="0" presId="urn:microsoft.com/office/officeart/2005/8/layout/hierarchy3"/>
+    <dgm:cxn modelId="{AE6C244F-CA4A-464C-B624-F263DB78EB12}" srcId="{F4EED8CA-27AA-4559-A001-60DC17BDB606}" destId="{290B0775-12A9-4CFC-81F8-5897D7EFBEC4}" srcOrd="0" destOrd="0" parTransId="{67B9DE7E-8090-452F-BD65-DB5885D972CB}" sibTransId="{BEDC31EA-B739-4646-AF0F-243E684C68BB}"/>
+    <dgm:cxn modelId="{7152444F-9D77-44D1-BC38-E8BBC894D8D9}" type="presOf" srcId="{5CFCD2C3-15FD-4192-8F4E-1EE46235FE26}" destId="{5E921147-43A8-401D-98FD-A5ABCBE0C238}" srcOrd="1" destOrd="0" presId="urn:microsoft.com/office/officeart/2005/8/layout/hierarchy3"/>
+    <dgm:cxn modelId="{C534FC6F-6808-403F-9D74-0D3D129D1C20}" type="presOf" srcId="{DAAA5BDC-51B5-4BA8-BD1A-F90F7B596902}" destId="{4C90C00B-D201-46F9-A2A8-A6F332D3EDDC}" srcOrd="0" destOrd="0" presId="urn:microsoft.com/office/officeart/2005/8/layout/hierarchy3"/>
+    <dgm:cxn modelId="{C4E2CE57-ECFD-4E45-996E-88864C9C5DFC}" type="presOf" srcId="{F4EED8CA-27AA-4559-A001-60DC17BDB606}" destId="{D805B79A-BDAD-4CEF-B2D2-604339F41C5C}" srcOrd="0" destOrd="0" presId="urn:microsoft.com/office/officeart/2005/8/layout/hierarchy3"/>
+    <dgm:cxn modelId="{48CA92CB-F833-4DC5-A3B9-8A1E56EAFBD6}" srcId="{F4EED8CA-27AA-4559-A001-60DC17BDB606}" destId="{5CFCD2C3-15FD-4192-8F4E-1EE46235FE26}" srcOrd="1" destOrd="0" parTransId="{108451B3-09EB-4D29-945E-97EA60B76F77}" sibTransId="{379C86F5-A77E-4DB3-A877-0B619E57C08C}"/>
+    <dgm:cxn modelId="{9CF893D5-AE0F-471B-B785-2B5F2A9AF196}" type="presOf" srcId="{DAAA5BDC-51B5-4BA8-BD1A-F90F7B596902}" destId="{569A38DE-D24D-4C92-BBDD-F83B0850D2C1}" srcOrd="1" destOrd="0" presId="urn:microsoft.com/office/officeart/2005/8/layout/hierarchy3"/>
+    <dgm:cxn modelId="{A80564E7-3498-4110-BE78-035D91D51D55}" type="presOf" srcId="{290B0775-12A9-4CFC-81F8-5897D7EFBEC4}" destId="{39033134-F8FA-49E4-854F-5E8E825DFDAC}" srcOrd="1" destOrd="0" presId="urn:microsoft.com/office/officeart/2005/8/layout/hierarchy3"/>
+    <dgm:cxn modelId="{C27B9DEA-4182-4E51-97AF-BE77F11E3721}" type="presOf" srcId="{5CFCD2C3-15FD-4192-8F4E-1EE46235FE26}" destId="{C5340843-8F3E-4BCA-AEEC-E093344E4B02}" srcOrd="0" destOrd="0" presId="urn:microsoft.com/office/officeart/2005/8/layout/hierarchy3"/>
+    <dgm:cxn modelId="{5E341598-F76C-4D67-8D8C-32F4D7CBCD81}" type="presParOf" srcId="{D805B79A-BDAD-4CEF-B2D2-604339F41C5C}" destId="{E1D160E4-8398-4751-82B6-DA17ACD1B9FB}" srcOrd="0" destOrd="0" presId="urn:microsoft.com/office/officeart/2005/8/layout/hierarchy3"/>
+    <dgm:cxn modelId="{5E2C6F1D-A728-4B8E-8AC4-8B7E47605B57}" type="presParOf" srcId="{E1D160E4-8398-4751-82B6-DA17ACD1B9FB}" destId="{CB302F83-9678-45F3-8E78-AC9C0A1F20B1}" srcOrd="0" destOrd="0" presId="urn:microsoft.com/office/officeart/2005/8/layout/hierarchy3"/>
+    <dgm:cxn modelId="{0B82A051-C048-4447-9191-6500AC396D04}" type="presParOf" srcId="{CB302F83-9678-45F3-8E78-AC9C0A1F20B1}" destId="{20633519-04F5-4C8E-8875-5439FCD2D5C9}" srcOrd="0" destOrd="0" presId="urn:microsoft.com/office/officeart/2005/8/layout/hierarchy3"/>
+    <dgm:cxn modelId="{BB2BAE85-BA17-490B-8670-BF0753295F4E}" type="presParOf" srcId="{CB302F83-9678-45F3-8E78-AC9C0A1F20B1}" destId="{39033134-F8FA-49E4-854F-5E8E825DFDAC}" srcOrd="1" destOrd="0" presId="urn:microsoft.com/office/officeart/2005/8/layout/hierarchy3"/>
+    <dgm:cxn modelId="{6DBFE9E1-F65A-41BA-A1D8-0E9A3A6DB94B}" type="presParOf" srcId="{E1D160E4-8398-4751-82B6-DA17ACD1B9FB}" destId="{DBD71231-663D-4D94-A962-00F88FB4B628}" srcOrd="1" destOrd="0" presId="urn:microsoft.com/office/officeart/2005/8/layout/hierarchy3"/>
+    <dgm:cxn modelId="{6023E03B-2AD3-49D9-818F-12B26654ACB8}" type="presParOf" srcId="{D805B79A-BDAD-4CEF-B2D2-604339F41C5C}" destId="{A0352F17-407F-4F02-8436-56805A32D41C}" srcOrd="1" destOrd="0" presId="urn:microsoft.com/office/officeart/2005/8/layout/hierarchy3"/>
+    <dgm:cxn modelId="{114CA7D9-2596-4629-962F-BE788796B6BD}" type="presParOf" srcId="{A0352F17-407F-4F02-8436-56805A32D41C}" destId="{B646E02F-DB88-4CD3-9FF9-738C0C2A00A9}" srcOrd="0" destOrd="0" presId="urn:microsoft.com/office/officeart/2005/8/layout/hierarchy3"/>
+    <dgm:cxn modelId="{746BFD91-7B15-4165-B3FB-514BBD03E0A9}" type="presParOf" srcId="{B646E02F-DB88-4CD3-9FF9-738C0C2A00A9}" destId="{C5340843-8F3E-4BCA-AEEC-E093344E4B02}" srcOrd="0" destOrd="0" presId="urn:microsoft.com/office/officeart/2005/8/layout/hierarchy3"/>
+    <dgm:cxn modelId="{AA414F09-B45A-4685-B3EC-F11F711CBD87}" type="presParOf" srcId="{B646E02F-DB88-4CD3-9FF9-738C0C2A00A9}" destId="{5E921147-43A8-401D-98FD-A5ABCBE0C238}" srcOrd="1" destOrd="0" presId="urn:microsoft.com/office/officeart/2005/8/layout/hierarchy3"/>
+    <dgm:cxn modelId="{75DCBC4E-7725-48B6-B4B3-198B024B8456}" type="presParOf" srcId="{A0352F17-407F-4F02-8436-56805A32D41C}" destId="{8C7A7AB2-17B6-43E4-AE5F-DD808C97C002}" srcOrd="1" destOrd="0" presId="urn:microsoft.com/office/officeart/2005/8/layout/hierarchy3"/>
+    <dgm:cxn modelId="{86433690-D0E8-4AC5-AAE8-1C09E7B59CF9}" type="presParOf" srcId="{D805B79A-BDAD-4CEF-B2D2-604339F41C5C}" destId="{FB0CBD58-5166-4279-A26B-9C6C1DDEB0FA}" srcOrd="2" destOrd="0" presId="urn:microsoft.com/office/officeart/2005/8/layout/hierarchy3"/>
+    <dgm:cxn modelId="{658315A1-F5F0-4BF1-B621-3B022A7313C0}" type="presParOf" srcId="{FB0CBD58-5166-4279-A26B-9C6C1DDEB0FA}" destId="{352F67E0-CC40-4D43-9AAF-BFB260DF401C}" srcOrd="0" destOrd="0" presId="urn:microsoft.com/office/officeart/2005/8/layout/hierarchy3"/>
+    <dgm:cxn modelId="{4D504C7D-5671-4C93-A134-A2ABD16B8CD4}" type="presParOf" srcId="{352F67E0-CC40-4D43-9AAF-BFB260DF401C}" destId="{4C90C00B-D201-46F9-A2A8-A6F332D3EDDC}" srcOrd="0" destOrd="0" presId="urn:microsoft.com/office/officeart/2005/8/layout/hierarchy3"/>
+    <dgm:cxn modelId="{342A051E-7895-4514-95ED-931A866825DC}" type="presParOf" srcId="{352F67E0-CC40-4D43-9AAF-BFB260DF401C}" destId="{569A38DE-D24D-4C92-BBDD-F83B0850D2C1}" srcOrd="1" destOrd="0" presId="urn:microsoft.com/office/officeart/2005/8/layout/hierarchy3"/>
+    <dgm:cxn modelId="{01BFD7DB-188B-463F-A332-5817D0BF5FA0}" type="presParOf" srcId="{FB0CBD58-5166-4279-A26B-9C6C1DDEB0FA}" destId="{63064CCA-E368-46A4-9E63-4C4DE036B8E0}" srcOrd="1" destOrd="0" presId="urn:microsoft.com/office/officeart/2005/8/layout/hierarchy3"/>
+  </dgm:cxnLst>
+  <dgm:bg/>
+  <dgm:whole/>
+  <dgm:extLst>
+    <a:ext uri="http://schemas.microsoft.com/office/drawing/2008/diagram">
+      <dsp:dataModelExt xmlns:dsp="http://schemas.microsoft.com/office/drawing/2008/diagram" relId="rId7" minVer="http://schemas.openxmlformats.org/drawingml/2006/diagram"/>
+    </a:ext>
+  </dgm:extLst>
+</dgm:dataModel>
+</file>
+
+<file path=ppt/diagrams/data2.xml><?xml version="1.0" encoding="utf-8"?>
+<dgm:dataModel xmlns:dgm="http://schemas.openxmlformats.org/drawingml/2006/diagram" xmlns:a="http://schemas.openxmlformats.org/drawingml/2006/main">
+  <dgm:ptLst>
+    <dgm:pt modelId="{705FA889-2D7E-4B02-8EBA-35A600213028}" type="doc">
+      <dgm:prSet loTypeId="urn:microsoft.com/office/officeart/2016/7/layout/HorizontalActionList" loCatId="List" qsTypeId="urn:microsoft.com/office/officeart/2005/8/quickstyle/simple2" qsCatId="simple" csTypeId="urn:microsoft.com/office/officeart/2005/8/colors/colorful2" csCatId="colorful"/>
+      <dgm:spPr/>
+      <dgm:t>
+        <a:bodyPr/>
+        <a:lstStyle/>
+        <a:p>
+          <a:endParaRPr lang="en-US"/>
+        </a:p>
+      </dgm:t>
+    </dgm:pt>
+    <dgm:pt modelId="{1B43F224-E626-45FB-85BA-5185EABE1144}">
+      <dgm:prSet/>
+      <dgm:spPr/>
+      <dgm:t>
+        <a:bodyPr/>
+        <a:lstStyle/>
+        <a:p>
+          <a:r>
+            <a:rPr lang="en-US"/>
+            <a:t>Build</a:t>
+          </a:r>
+        </a:p>
+      </dgm:t>
+    </dgm:pt>
+    <dgm:pt modelId="{2585FC57-70B4-45FD-BEF0-AAD6DD6CC279}" type="parTrans" cxnId="{A6DA2DC9-3F58-4781-8BE1-873383D4DF15}">
+      <dgm:prSet/>
+      <dgm:spPr/>
+      <dgm:t>
+        <a:bodyPr/>
+        <a:lstStyle/>
+        <a:p>
+          <a:endParaRPr lang="en-US"/>
+        </a:p>
+      </dgm:t>
+    </dgm:pt>
+    <dgm:pt modelId="{CE9B5065-DF81-4D23-836C-5792B4C1A297}" type="sibTrans" cxnId="{A6DA2DC9-3F58-4781-8BE1-873383D4DF15}">
+      <dgm:prSet/>
+      <dgm:spPr/>
+      <dgm:t>
+        <a:bodyPr/>
+        <a:lstStyle/>
+        <a:p>
+          <a:endParaRPr lang="en-US"/>
+        </a:p>
+      </dgm:t>
+    </dgm:pt>
+    <dgm:pt modelId="{D1B67D24-9CA1-47F7-977C-FB89D44A9221}">
+      <dgm:prSet/>
+      <dgm:spPr/>
+      <dgm:t>
+        <a:bodyPr/>
+        <a:lstStyle/>
+        <a:p>
+          <a:r>
+            <a:rPr lang="en-US"/>
+            <a:t>Build a Character controller with modular functionality capable of fitting the vast majority of use cases</a:t>
+          </a:r>
+        </a:p>
+      </dgm:t>
+    </dgm:pt>
+    <dgm:pt modelId="{A78F3488-F6C8-43CE-AD44-8543C1329017}" type="parTrans" cxnId="{C784FE92-05BA-4B1F-BA8D-8E064BEABFA9}">
+      <dgm:prSet/>
+      <dgm:spPr/>
+      <dgm:t>
+        <a:bodyPr/>
+        <a:lstStyle/>
+        <a:p>
+          <a:endParaRPr lang="en-US"/>
+        </a:p>
+      </dgm:t>
+    </dgm:pt>
+    <dgm:pt modelId="{870BA894-819F-405E-BB93-39AA8846D748}" type="sibTrans" cxnId="{C784FE92-05BA-4B1F-BA8D-8E064BEABFA9}">
+      <dgm:prSet/>
+      <dgm:spPr/>
+      <dgm:t>
+        <a:bodyPr/>
+        <a:lstStyle/>
+        <a:p>
+          <a:endParaRPr lang="en-US"/>
+        </a:p>
+      </dgm:t>
+    </dgm:pt>
+    <dgm:pt modelId="{59F24160-3DF5-4302-9827-20439AB6C445}">
+      <dgm:prSet/>
+      <dgm:spPr/>
+      <dgm:t>
+        <a:bodyPr/>
+        <a:lstStyle/>
+        <a:p>
+          <a:r>
+            <a:rPr lang="en-US"/>
+            <a:t>Avoid</a:t>
+          </a:r>
+        </a:p>
+      </dgm:t>
+    </dgm:pt>
+    <dgm:pt modelId="{79BBF150-A7DE-4EC9-AD4D-53668E009D04}" type="parTrans" cxnId="{C52F7B5A-85FB-4D94-97AE-51765A4D7CEE}">
+      <dgm:prSet/>
+      <dgm:spPr/>
+      <dgm:t>
+        <a:bodyPr/>
+        <a:lstStyle/>
+        <a:p>
+          <a:endParaRPr lang="en-US"/>
+        </a:p>
+      </dgm:t>
+    </dgm:pt>
+    <dgm:pt modelId="{23DECA8D-2B71-47C9-AE6D-919A8FE8FDDF}" type="sibTrans" cxnId="{C52F7B5A-85FB-4D94-97AE-51765A4D7CEE}">
+      <dgm:prSet/>
+      <dgm:spPr/>
+      <dgm:t>
+        <a:bodyPr/>
+        <a:lstStyle/>
+        <a:p>
+          <a:endParaRPr lang="en-US"/>
+        </a:p>
+      </dgm:t>
+    </dgm:pt>
+    <dgm:pt modelId="{8DBE9729-A729-4138-BEFF-EF84DA0318AA}">
+      <dgm:prSet/>
+      <dgm:spPr/>
+      <dgm:t>
+        <a:bodyPr/>
+        <a:lstStyle/>
+        <a:p>
+          <a:r>
+            <a:rPr lang="en-US"/>
+            <a:t>Avoid load large, unnecessary code, for maintainability and efficiency</a:t>
+          </a:r>
+        </a:p>
+      </dgm:t>
+    </dgm:pt>
+    <dgm:pt modelId="{172CD3D6-382D-4832-A68F-6AFE018CCE3A}" type="parTrans" cxnId="{328F766E-F22D-44EC-B888-726E92D03158}">
+      <dgm:prSet/>
+      <dgm:spPr/>
+      <dgm:t>
+        <a:bodyPr/>
+        <a:lstStyle/>
+        <a:p>
+          <a:endParaRPr lang="en-US"/>
+        </a:p>
+      </dgm:t>
+    </dgm:pt>
+    <dgm:pt modelId="{9AC75B62-31EA-472C-A504-74D82A9E47BF}" type="sibTrans" cxnId="{328F766E-F22D-44EC-B888-726E92D03158}">
+      <dgm:prSet/>
+      <dgm:spPr/>
+      <dgm:t>
+        <a:bodyPr/>
+        <a:lstStyle/>
+        <a:p>
+          <a:endParaRPr lang="en-US"/>
+        </a:p>
+      </dgm:t>
+    </dgm:pt>
+    <dgm:pt modelId="{B5AF45B7-606A-4431-943D-38EFE5C96554}">
+      <dgm:prSet/>
+      <dgm:spPr/>
+      <dgm:t>
+        <a:bodyPr/>
+        <a:lstStyle/>
+        <a:p>
+          <a:r>
+            <a:rPr lang="en-US"/>
+            <a:t>Reduce</a:t>
+          </a:r>
+        </a:p>
+      </dgm:t>
+    </dgm:pt>
+    <dgm:pt modelId="{8C62DC20-AEAC-4BEB-9808-79B2C595A60A}" type="parTrans" cxnId="{B118EBAA-73BA-44F9-8618-FA2E0F6EA1D8}">
+      <dgm:prSet/>
+      <dgm:spPr/>
+      <dgm:t>
+        <a:bodyPr/>
+        <a:lstStyle/>
+        <a:p>
+          <a:endParaRPr lang="en-US"/>
+        </a:p>
+      </dgm:t>
+    </dgm:pt>
+    <dgm:pt modelId="{10C66B9F-6F3F-4C5C-9D73-4B065E499AFF}" type="sibTrans" cxnId="{B118EBAA-73BA-44F9-8618-FA2E0F6EA1D8}">
+      <dgm:prSet/>
+      <dgm:spPr/>
+      <dgm:t>
+        <a:bodyPr/>
+        <a:lstStyle/>
+        <a:p>
+          <a:endParaRPr lang="en-US"/>
+        </a:p>
+      </dgm:t>
+    </dgm:pt>
+    <dgm:pt modelId="{1DA2DA03-B4BE-4717-B9A8-F263FFBEC725}">
+      <dgm:prSet/>
+      <dgm:spPr/>
+      <dgm:t>
+        <a:bodyPr/>
+        <a:lstStyle/>
+        <a:p>
+          <a:r>
+            <a:rPr lang="en-US"/>
+            <a:t>Reduce complex state-switching logic</a:t>
+          </a:r>
+        </a:p>
+      </dgm:t>
+    </dgm:pt>
+    <dgm:pt modelId="{E133B476-1F13-4C58-9339-D31DFD081A8C}" type="parTrans" cxnId="{5E7D0BF9-D948-4FC2-BB5E-FF77B629372A}">
+      <dgm:prSet/>
+      <dgm:spPr/>
+      <dgm:t>
+        <a:bodyPr/>
+        <a:lstStyle/>
+        <a:p>
+          <a:endParaRPr lang="en-US"/>
+        </a:p>
+      </dgm:t>
+    </dgm:pt>
+    <dgm:pt modelId="{38229721-9D52-4C06-A152-E3C7971B633F}" type="sibTrans" cxnId="{5E7D0BF9-D948-4FC2-BB5E-FF77B629372A}">
+      <dgm:prSet/>
+      <dgm:spPr/>
+      <dgm:t>
+        <a:bodyPr/>
+        <a:lstStyle/>
+        <a:p>
+          <a:endParaRPr lang="en-US"/>
+        </a:p>
+      </dgm:t>
+    </dgm:pt>
+    <dgm:pt modelId="{F0DC16FE-5A47-4C19-9B2A-688CD9871AD2}" type="pres">
+      <dgm:prSet presAssocID="{705FA889-2D7E-4B02-8EBA-35A600213028}" presName="Name0" presStyleCnt="0">
+        <dgm:presLayoutVars>
+          <dgm:dir/>
+          <dgm:animLvl val="lvl"/>
+          <dgm:resizeHandles val="exact"/>
+        </dgm:presLayoutVars>
+      </dgm:prSet>
+      <dgm:spPr/>
+    </dgm:pt>
+    <dgm:pt modelId="{0FED2257-0900-40F7-A516-A22AC5E32254}" type="pres">
+      <dgm:prSet presAssocID="{1B43F224-E626-45FB-85BA-5185EABE1144}" presName="composite" presStyleCnt="0"/>
+      <dgm:spPr/>
+    </dgm:pt>
+    <dgm:pt modelId="{6AC0A17E-3527-4E0A-A7B7-4A6983E7430B}" type="pres">
+      <dgm:prSet presAssocID="{1B43F224-E626-45FB-85BA-5185EABE1144}" presName="parTx" presStyleLbl="alignNode1" presStyleIdx="0" presStyleCnt="3">
+        <dgm:presLayoutVars>
+          <dgm:chMax val="0"/>
+          <dgm:chPref val="0"/>
+        </dgm:presLayoutVars>
+      </dgm:prSet>
+      <dgm:spPr/>
+    </dgm:pt>
+    <dgm:pt modelId="{20354FBC-F68B-4954-BEAD-72FC05D59779}" type="pres">
+      <dgm:prSet presAssocID="{1B43F224-E626-45FB-85BA-5185EABE1144}" presName="desTx" presStyleLbl="alignAccFollowNode1" presStyleIdx="0" presStyleCnt="3">
+        <dgm:presLayoutVars/>
+      </dgm:prSet>
+      <dgm:spPr/>
+    </dgm:pt>
+    <dgm:pt modelId="{113FCFD3-9A59-4065-818B-CEDA7AB489F8}" type="pres">
+      <dgm:prSet presAssocID="{CE9B5065-DF81-4D23-836C-5792B4C1A297}" presName="space" presStyleCnt="0"/>
+      <dgm:spPr/>
+    </dgm:pt>
+    <dgm:pt modelId="{801D71FB-199C-4127-B1D9-02F0E835BD6C}" type="pres">
+      <dgm:prSet presAssocID="{59F24160-3DF5-4302-9827-20439AB6C445}" presName="composite" presStyleCnt="0"/>
+      <dgm:spPr/>
+    </dgm:pt>
+    <dgm:pt modelId="{2B1271AF-7F14-4F09-8FB4-CF8E68BA77F3}" type="pres">
+      <dgm:prSet presAssocID="{59F24160-3DF5-4302-9827-20439AB6C445}" presName="parTx" presStyleLbl="alignNode1" presStyleIdx="1" presStyleCnt="3">
+        <dgm:presLayoutVars>
+          <dgm:chMax val="0"/>
+          <dgm:chPref val="0"/>
+        </dgm:presLayoutVars>
+      </dgm:prSet>
+      <dgm:spPr/>
+    </dgm:pt>
+    <dgm:pt modelId="{85D5B357-83BD-43CD-960B-9AC3F60205AB}" type="pres">
+      <dgm:prSet presAssocID="{59F24160-3DF5-4302-9827-20439AB6C445}" presName="desTx" presStyleLbl="alignAccFollowNode1" presStyleIdx="1" presStyleCnt="3">
+        <dgm:presLayoutVars/>
+      </dgm:prSet>
+      <dgm:spPr/>
+    </dgm:pt>
+    <dgm:pt modelId="{9D8BE918-8DEA-45E4-A6E8-066544F2E43E}" type="pres">
+      <dgm:prSet presAssocID="{23DECA8D-2B71-47C9-AE6D-919A8FE8FDDF}" presName="space" presStyleCnt="0"/>
+      <dgm:spPr/>
+    </dgm:pt>
+    <dgm:pt modelId="{6F7DB258-2A22-43A6-8395-72A1A64EDA0D}" type="pres">
+      <dgm:prSet presAssocID="{B5AF45B7-606A-4431-943D-38EFE5C96554}" presName="composite" presStyleCnt="0"/>
+      <dgm:spPr/>
+    </dgm:pt>
+    <dgm:pt modelId="{CA1AC0B1-6FAA-4343-BFEE-DFF5A54A8BF4}" type="pres">
+      <dgm:prSet presAssocID="{B5AF45B7-606A-4431-943D-38EFE5C96554}" presName="parTx" presStyleLbl="alignNode1" presStyleIdx="2" presStyleCnt="3">
+        <dgm:presLayoutVars>
+          <dgm:chMax val="0"/>
+          <dgm:chPref val="0"/>
+        </dgm:presLayoutVars>
+      </dgm:prSet>
+      <dgm:spPr/>
+    </dgm:pt>
+    <dgm:pt modelId="{2B431359-5C71-48E4-83C0-E1828AFE6C83}" type="pres">
+      <dgm:prSet presAssocID="{B5AF45B7-606A-4431-943D-38EFE5C96554}" presName="desTx" presStyleLbl="alignAccFollowNode1" presStyleIdx="2" presStyleCnt="3">
+        <dgm:presLayoutVars/>
+      </dgm:prSet>
+      <dgm:spPr/>
+    </dgm:pt>
+  </dgm:ptLst>
+  <dgm:cxnLst>
+    <dgm:cxn modelId="{BDE64406-0F36-4E28-92FD-C99595030F5F}" type="presOf" srcId="{D1B67D24-9CA1-47F7-977C-FB89D44A9221}" destId="{20354FBC-F68B-4954-BEAD-72FC05D59779}" srcOrd="0" destOrd="0" presId="urn:microsoft.com/office/officeart/2016/7/layout/HorizontalActionList"/>
+    <dgm:cxn modelId="{9267B11A-F919-441A-94A6-2AE58E42572D}" type="presOf" srcId="{705FA889-2D7E-4B02-8EBA-35A600213028}" destId="{F0DC16FE-5A47-4C19-9B2A-688CD9871AD2}" srcOrd="0" destOrd="0" presId="urn:microsoft.com/office/officeart/2016/7/layout/HorizontalActionList"/>
+    <dgm:cxn modelId="{9EE4705B-3223-4967-BAF1-B85F22D44447}" type="presOf" srcId="{59F24160-3DF5-4302-9827-20439AB6C445}" destId="{2B1271AF-7F14-4F09-8FB4-CF8E68BA77F3}" srcOrd="0" destOrd="0" presId="urn:microsoft.com/office/officeart/2016/7/layout/HorizontalActionList"/>
+    <dgm:cxn modelId="{AF72145C-6DD7-4AF6-9516-86CB746A5BB0}" type="presOf" srcId="{8DBE9729-A729-4138-BEFF-EF84DA0318AA}" destId="{85D5B357-83BD-43CD-960B-9AC3F60205AB}" srcOrd="0" destOrd="0" presId="urn:microsoft.com/office/officeart/2016/7/layout/HorizontalActionList"/>
+    <dgm:cxn modelId="{328F766E-F22D-44EC-B888-726E92D03158}" srcId="{59F24160-3DF5-4302-9827-20439AB6C445}" destId="{8DBE9729-A729-4138-BEFF-EF84DA0318AA}" srcOrd="0" destOrd="0" parTransId="{172CD3D6-382D-4832-A68F-6AFE018CCE3A}" sibTransId="{9AC75B62-31EA-472C-A504-74D82A9E47BF}"/>
+    <dgm:cxn modelId="{DFC9105A-9530-47CF-B254-FFA7CF5EDC3D}" type="presOf" srcId="{1B43F224-E626-45FB-85BA-5185EABE1144}" destId="{6AC0A17E-3527-4E0A-A7B7-4A6983E7430B}" srcOrd="0" destOrd="0" presId="urn:microsoft.com/office/officeart/2016/7/layout/HorizontalActionList"/>
+    <dgm:cxn modelId="{C52F7B5A-85FB-4D94-97AE-51765A4D7CEE}" srcId="{705FA889-2D7E-4B02-8EBA-35A600213028}" destId="{59F24160-3DF5-4302-9827-20439AB6C445}" srcOrd="1" destOrd="0" parTransId="{79BBF150-A7DE-4EC9-AD4D-53668E009D04}" sibTransId="{23DECA8D-2B71-47C9-AE6D-919A8FE8FDDF}"/>
+    <dgm:cxn modelId="{C784FE92-05BA-4B1F-BA8D-8E064BEABFA9}" srcId="{1B43F224-E626-45FB-85BA-5185EABE1144}" destId="{D1B67D24-9CA1-47F7-977C-FB89D44A9221}" srcOrd="0" destOrd="0" parTransId="{A78F3488-F6C8-43CE-AD44-8543C1329017}" sibTransId="{870BA894-819F-405E-BB93-39AA8846D748}"/>
+    <dgm:cxn modelId="{B118EBAA-73BA-44F9-8618-FA2E0F6EA1D8}" srcId="{705FA889-2D7E-4B02-8EBA-35A600213028}" destId="{B5AF45B7-606A-4431-943D-38EFE5C96554}" srcOrd="2" destOrd="0" parTransId="{8C62DC20-AEAC-4BEB-9808-79B2C595A60A}" sibTransId="{10C66B9F-6F3F-4C5C-9D73-4B065E499AFF}"/>
+    <dgm:cxn modelId="{A6DA2DC9-3F58-4781-8BE1-873383D4DF15}" srcId="{705FA889-2D7E-4B02-8EBA-35A600213028}" destId="{1B43F224-E626-45FB-85BA-5185EABE1144}" srcOrd="0" destOrd="0" parTransId="{2585FC57-70B4-45FD-BEF0-AAD6DD6CC279}" sibTransId="{CE9B5065-DF81-4D23-836C-5792B4C1A297}"/>
+    <dgm:cxn modelId="{530721D4-E0EF-4BF4-9027-FBEA418272BA}" type="presOf" srcId="{1DA2DA03-B4BE-4717-B9A8-F263FFBEC725}" destId="{2B431359-5C71-48E4-83C0-E1828AFE6C83}" srcOrd="0" destOrd="0" presId="urn:microsoft.com/office/officeart/2016/7/layout/HorizontalActionList"/>
+    <dgm:cxn modelId="{FF8790F4-F0E6-43CA-8A4E-7639E066767D}" type="presOf" srcId="{B5AF45B7-606A-4431-943D-38EFE5C96554}" destId="{CA1AC0B1-6FAA-4343-BFEE-DFF5A54A8BF4}" srcOrd="0" destOrd="0" presId="urn:microsoft.com/office/officeart/2016/7/layout/HorizontalActionList"/>
+    <dgm:cxn modelId="{5E7D0BF9-D948-4FC2-BB5E-FF77B629372A}" srcId="{B5AF45B7-606A-4431-943D-38EFE5C96554}" destId="{1DA2DA03-B4BE-4717-B9A8-F263FFBEC725}" srcOrd="0" destOrd="0" parTransId="{E133B476-1F13-4C58-9339-D31DFD081A8C}" sibTransId="{38229721-9D52-4C06-A152-E3C7971B633F}"/>
+    <dgm:cxn modelId="{6EA27346-589E-48F9-884F-C9AAEDDC196C}" type="presParOf" srcId="{F0DC16FE-5A47-4C19-9B2A-688CD9871AD2}" destId="{0FED2257-0900-40F7-A516-A22AC5E32254}" srcOrd="0" destOrd="0" presId="urn:microsoft.com/office/officeart/2016/7/layout/HorizontalActionList"/>
+    <dgm:cxn modelId="{8ED504A5-6221-4FAF-8BD6-F3FA1565DC78}" type="presParOf" srcId="{0FED2257-0900-40F7-A516-A22AC5E32254}" destId="{6AC0A17E-3527-4E0A-A7B7-4A6983E7430B}" srcOrd="0" destOrd="0" presId="urn:microsoft.com/office/officeart/2016/7/layout/HorizontalActionList"/>
+    <dgm:cxn modelId="{2B4EA7E5-D92B-41E7-AEC8-E4EC136D652C}" type="presParOf" srcId="{0FED2257-0900-40F7-A516-A22AC5E32254}" destId="{20354FBC-F68B-4954-BEAD-72FC05D59779}" srcOrd="1" destOrd="0" presId="urn:microsoft.com/office/officeart/2016/7/layout/HorizontalActionList"/>
+    <dgm:cxn modelId="{4CCCD269-1AAF-48F9-8F14-743B82DAE432}" type="presParOf" srcId="{F0DC16FE-5A47-4C19-9B2A-688CD9871AD2}" destId="{113FCFD3-9A59-4065-818B-CEDA7AB489F8}" srcOrd="1" destOrd="0" presId="urn:microsoft.com/office/officeart/2016/7/layout/HorizontalActionList"/>
+    <dgm:cxn modelId="{F7E383DA-0AB9-462C-B2D5-02B683D43ED0}" type="presParOf" srcId="{F0DC16FE-5A47-4C19-9B2A-688CD9871AD2}" destId="{801D71FB-199C-4127-B1D9-02F0E835BD6C}" srcOrd="2" destOrd="0" presId="urn:microsoft.com/office/officeart/2016/7/layout/HorizontalActionList"/>
+    <dgm:cxn modelId="{352D3A73-C5A7-46D6-8569-BD86E8B194F8}" type="presParOf" srcId="{801D71FB-199C-4127-B1D9-02F0E835BD6C}" destId="{2B1271AF-7F14-4F09-8FB4-CF8E68BA77F3}" srcOrd="0" destOrd="0" presId="urn:microsoft.com/office/officeart/2016/7/layout/HorizontalActionList"/>
+    <dgm:cxn modelId="{1AFBB8A8-DD82-4588-927E-6BEEA4513837}" type="presParOf" srcId="{801D71FB-199C-4127-B1D9-02F0E835BD6C}" destId="{85D5B357-83BD-43CD-960B-9AC3F60205AB}" srcOrd="1" destOrd="0" presId="urn:microsoft.com/office/officeart/2016/7/layout/HorizontalActionList"/>
+    <dgm:cxn modelId="{F7B9EA36-A8C7-4745-8532-993B228C639A}" type="presParOf" srcId="{F0DC16FE-5A47-4C19-9B2A-688CD9871AD2}" destId="{9D8BE918-8DEA-45E4-A6E8-066544F2E43E}" srcOrd="3" destOrd="0" presId="urn:microsoft.com/office/officeart/2016/7/layout/HorizontalActionList"/>
+    <dgm:cxn modelId="{A385523C-1C90-4C3E-8A52-F70BA5A51D3C}" type="presParOf" srcId="{F0DC16FE-5A47-4C19-9B2A-688CD9871AD2}" destId="{6F7DB258-2A22-43A6-8395-72A1A64EDA0D}" srcOrd="4" destOrd="0" presId="urn:microsoft.com/office/officeart/2016/7/layout/HorizontalActionList"/>
+    <dgm:cxn modelId="{DEC17B89-6D4E-40D8-B509-4A0DFB0FDC16}" type="presParOf" srcId="{6F7DB258-2A22-43A6-8395-72A1A64EDA0D}" destId="{CA1AC0B1-6FAA-4343-BFEE-DFF5A54A8BF4}" srcOrd="0" destOrd="0" presId="urn:microsoft.com/office/officeart/2016/7/layout/HorizontalActionList"/>
+    <dgm:cxn modelId="{AAF2CC21-6646-452C-9F84-ED34A08A8BFC}" type="presParOf" srcId="{6F7DB258-2A22-43A6-8395-72A1A64EDA0D}" destId="{2B431359-5C71-48E4-83C0-E1828AFE6C83}" srcOrd="1" destOrd="0" presId="urn:microsoft.com/office/officeart/2016/7/layout/HorizontalActionList"/>
+  </dgm:cxnLst>
+  <dgm:bg/>
+  <dgm:whole/>
+  <dgm:extLst>
+    <a:ext uri="http://schemas.microsoft.com/office/drawing/2008/diagram">
+      <dsp:dataModelExt xmlns:dsp="http://schemas.microsoft.com/office/drawing/2008/diagram" relId="rId7" minVer="http://schemas.openxmlformats.org/drawingml/2006/diagram"/>
+    </a:ext>
+  </dgm:extLst>
+</dgm:dataModel>
+</file>
+
+<file path=ppt/diagrams/drawing1.xml><?xml version="1.0" encoding="utf-8"?>
+<dsp:drawing xmlns:dgm="http://schemas.openxmlformats.org/drawingml/2006/diagram" xmlns:dsp="http://schemas.microsoft.com/office/drawing/2008/diagram" xmlns:a="http://schemas.openxmlformats.org/drawingml/2006/main">
+  <dsp:spTree>
+    <dsp:nvGrpSpPr>
+      <dsp:cNvPr id="0" name=""/>
+      <dsp:cNvGrpSpPr/>
+    </dsp:nvGrpSpPr>
+    <dsp:grpSpPr/>
+    <dsp:sp modelId="{20633519-04F5-4C8E-8875-5439FCD2D5C9}">
+      <dsp:nvSpPr>
+        <dsp:cNvPr id="0" name=""/>
+        <dsp:cNvSpPr/>
+      </dsp:nvSpPr>
+      <dsp:spPr>
+        <a:xfrm>
+          <a:off x="1283" y="1424738"/>
+          <a:ext cx="3003723" cy="1501861"/>
+        </a:xfrm>
+        <a:prstGeom prst="roundRect">
+          <a:avLst>
+            <a:gd name="adj" fmla="val 10000"/>
+          </a:avLst>
+        </a:prstGeom>
+        <a:gradFill rotWithShape="0">
+          <a:gsLst>
+            <a:gs pos="0">
+              <a:schemeClr val="accent5">
+                <a:hueOff val="0"/>
+                <a:satOff val="0"/>
+                <a:lumOff val="0"/>
+                <a:alphaOff val="0"/>
+                <a:satMod val="103000"/>
+                <a:lumMod val="102000"/>
+                <a:tint val="94000"/>
+              </a:schemeClr>
+            </a:gs>
+            <a:gs pos="50000">
+              <a:schemeClr val="accent5">
+                <a:hueOff val="0"/>
+                <a:satOff val="0"/>
+                <a:lumOff val="0"/>
+                <a:alphaOff val="0"/>
+                <a:satMod val="110000"/>
+                <a:lumMod val="100000"/>
+                <a:shade val="100000"/>
+              </a:schemeClr>
+            </a:gs>
+            <a:gs pos="100000">
+              <a:schemeClr val="accent5">
+                <a:hueOff val="0"/>
+                <a:satOff val="0"/>
+                <a:lumOff val="0"/>
+                <a:alphaOff val="0"/>
+                <a:lumMod val="99000"/>
+                <a:satMod val="120000"/>
+                <a:shade val="78000"/>
+              </a:schemeClr>
+            </a:gs>
+          </a:gsLst>
+          <a:lin ang="5400000" scaled="0"/>
+        </a:gradFill>
+        <a:ln>
+          <a:noFill/>
+        </a:ln>
+        <a:effectLst>
+          <a:outerShdw blurRad="57150" dist="19050" dir="5400000" algn="ctr" rotWithShape="0">
+            <a:srgbClr val="000000">
+              <a:alpha val="63000"/>
+            </a:srgbClr>
+          </a:outerShdw>
+        </a:effectLst>
+      </dsp:spPr>
+      <dsp:style>
+        <a:lnRef idx="0">
+          <a:scrgbClr r="0" g="0" b="0"/>
+        </a:lnRef>
+        <a:fillRef idx="3">
+          <a:scrgbClr r="0" g="0" b="0"/>
+        </a:fillRef>
+        <a:effectRef idx="3">
+          <a:scrgbClr r="0" g="0" b="0"/>
+        </a:effectRef>
+        <a:fontRef idx="minor">
+          <a:schemeClr val="lt1"/>
+        </a:fontRef>
+      </dsp:style>
+      <dsp:txBody>
+        <a:bodyPr spcFirstLastPara="0" vert="horz" wrap="square" lIns="59055" tIns="39370" rIns="59055" bIns="39370" numCol="1" spcCol="1270" anchor="ctr" anchorCtr="0">
+          <a:noAutofit/>
+        </a:bodyPr>
+        <a:lstStyle/>
+        <a:p>
+          <a:pPr marL="0" lvl="0" indent="0" algn="ctr" defTabSz="1377950">
+            <a:lnSpc>
+              <a:spcPct val="90000"/>
+            </a:lnSpc>
+            <a:spcBef>
+              <a:spcPct val="0"/>
+            </a:spcBef>
+            <a:spcAft>
+              <a:spcPct val="35000"/>
+            </a:spcAft>
+            <a:buNone/>
+          </a:pPr>
+          <a:r>
+            <a:rPr lang="en-GB" sz="3100" kern="1200"/>
+            <a:t>Composition using components</a:t>
+          </a:r>
+          <a:endParaRPr lang="en-US" sz="3100" kern="1200"/>
+        </a:p>
+      </dsp:txBody>
+      <dsp:txXfrm>
+        <a:off x="45271" y="1468726"/>
+        <a:ext cx="2915747" cy="1413885"/>
+      </dsp:txXfrm>
+    </dsp:sp>
+    <dsp:sp modelId="{C5340843-8F3E-4BCA-AEEC-E093344E4B02}">
+      <dsp:nvSpPr>
+        <dsp:cNvPr id="0" name=""/>
+        <dsp:cNvSpPr/>
+      </dsp:nvSpPr>
+      <dsp:spPr>
+        <a:xfrm>
+          <a:off x="3755938" y="1424738"/>
+          <a:ext cx="3003723" cy="1501861"/>
+        </a:xfrm>
+        <a:prstGeom prst="roundRect">
+          <a:avLst>
+            <a:gd name="adj" fmla="val 10000"/>
+          </a:avLst>
+        </a:prstGeom>
+        <a:gradFill rotWithShape="0">
+          <a:gsLst>
+            <a:gs pos="0">
+              <a:schemeClr val="accent5">
+                <a:hueOff val="0"/>
+                <a:satOff val="0"/>
+                <a:lumOff val="0"/>
+                <a:alphaOff val="0"/>
+                <a:satMod val="103000"/>
+                <a:lumMod val="102000"/>
+                <a:tint val="94000"/>
+              </a:schemeClr>
+            </a:gs>
+            <a:gs pos="50000">
+              <a:schemeClr val="accent5">
+                <a:hueOff val="0"/>
+                <a:satOff val="0"/>
+                <a:lumOff val="0"/>
+                <a:alphaOff val="0"/>
+                <a:satMod val="110000"/>
+                <a:lumMod val="100000"/>
+                <a:shade val="100000"/>
+              </a:schemeClr>
+            </a:gs>
+            <a:gs pos="100000">
+              <a:schemeClr val="accent5">
+                <a:hueOff val="0"/>
+                <a:satOff val="0"/>
+                <a:lumOff val="0"/>
+                <a:alphaOff val="0"/>
+                <a:lumMod val="99000"/>
+                <a:satMod val="120000"/>
+                <a:shade val="78000"/>
+              </a:schemeClr>
+            </a:gs>
+          </a:gsLst>
+          <a:lin ang="5400000" scaled="0"/>
+        </a:gradFill>
+        <a:ln>
+          <a:noFill/>
+        </a:ln>
+        <a:effectLst>
+          <a:outerShdw blurRad="57150" dist="19050" dir="5400000" algn="ctr" rotWithShape="0">
+            <a:srgbClr val="000000">
+              <a:alpha val="63000"/>
+            </a:srgbClr>
+          </a:outerShdw>
+        </a:effectLst>
+      </dsp:spPr>
+      <dsp:style>
+        <a:lnRef idx="0">
+          <a:scrgbClr r="0" g="0" b="0"/>
+        </a:lnRef>
+        <a:fillRef idx="3">
+          <a:scrgbClr r="0" g="0" b="0"/>
+        </a:fillRef>
+        <a:effectRef idx="3">
+          <a:scrgbClr r="0" g="0" b="0"/>
+        </a:effectRef>
+        <a:fontRef idx="minor">
+          <a:schemeClr val="lt1"/>
+        </a:fontRef>
+      </dsp:style>
+      <dsp:txBody>
+        <a:bodyPr spcFirstLastPara="0" vert="horz" wrap="square" lIns="59055" tIns="39370" rIns="59055" bIns="39370" numCol="1" spcCol="1270" anchor="ctr" anchorCtr="0">
+          <a:noAutofit/>
+        </a:bodyPr>
+        <a:lstStyle/>
+        <a:p>
+          <a:pPr marL="0" lvl="0" indent="0" algn="ctr" defTabSz="1377950">
+            <a:lnSpc>
+              <a:spcPct val="90000"/>
+            </a:lnSpc>
+            <a:spcBef>
+              <a:spcPct val="0"/>
+            </a:spcBef>
+            <a:spcAft>
+              <a:spcPct val="35000"/>
+            </a:spcAft>
+            <a:buNone/>
+          </a:pPr>
+          <a:r>
+            <a:rPr lang="en-GB" sz="3100" kern="1200"/>
+            <a:t>Class inheritance</a:t>
+          </a:r>
+          <a:endParaRPr lang="en-US" sz="3100" kern="1200"/>
+        </a:p>
+      </dsp:txBody>
+      <dsp:txXfrm>
+        <a:off x="3799926" y="1468726"/>
+        <a:ext cx="2915747" cy="1413885"/>
+      </dsp:txXfrm>
+    </dsp:sp>
+    <dsp:sp modelId="{4C90C00B-D201-46F9-A2A8-A6F332D3EDDC}">
+      <dsp:nvSpPr>
+        <dsp:cNvPr id="0" name=""/>
+        <dsp:cNvSpPr/>
+      </dsp:nvSpPr>
+      <dsp:spPr>
+        <a:xfrm>
+          <a:off x="7510592" y="1424738"/>
+          <a:ext cx="3003723" cy="1501861"/>
+        </a:xfrm>
+        <a:prstGeom prst="roundRect">
+          <a:avLst>
+            <a:gd name="adj" fmla="val 10000"/>
+          </a:avLst>
+        </a:prstGeom>
+        <a:gradFill rotWithShape="0">
+          <a:gsLst>
+            <a:gs pos="0">
+              <a:schemeClr val="accent5">
+                <a:hueOff val="0"/>
+                <a:satOff val="0"/>
+                <a:lumOff val="0"/>
+                <a:alphaOff val="0"/>
+                <a:satMod val="103000"/>
+                <a:lumMod val="102000"/>
+                <a:tint val="94000"/>
+              </a:schemeClr>
+            </a:gs>
+            <a:gs pos="50000">
+              <a:schemeClr val="accent5">
+                <a:hueOff val="0"/>
+                <a:satOff val="0"/>
+                <a:lumOff val="0"/>
+                <a:alphaOff val="0"/>
+                <a:satMod val="110000"/>
+                <a:lumMod val="100000"/>
+                <a:shade val="100000"/>
+              </a:schemeClr>
+            </a:gs>
+            <a:gs pos="100000">
+              <a:schemeClr val="accent5">
+                <a:hueOff val="0"/>
+                <a:satOff val="0"/>
+                <a:lumOff val="0"/>
+                <a:alphaOff val="0"/>
+                <a:lumMod val="99000"/>
+                <a:satMod val="120000"/>
+                <a:shade val="78000"/>
+              </a:schemeClr>
+            </a:gs>
+          </a:gsLst>
+          <a:lin ang="5400000" scaled="0"/>
+        </a:gradFill>
+        <a:ln>
+          <a:noFill/>
+        </a:ln>
+        <a:effectLst>
+          <a:outerShdw blurRad="57150" dist="19050" dir="5400000" algn="ctr" rotWithShape="0">
+            <a:srgbClr val="000000">
+              <a:alpha val="63000"/>
+            </a:srgbClr>
+          </a:outerShdw>
+        </a:effectLst>
+      </dsp:spPr>
+      <dsp:style>
+        <a:lnRef idx="0">
+          <a:scrgbClr r="0" g="0" b="0"/>
+        </a:lnRef>
+        <a:fillRef idx="3">
+          <a:scrgbClr r="0" g="0" b="0"/>
+        </a:fillRef>
+        <a:effectRef idx="3">
+          <a:scrgbClr r="0" g="0" b="0"/>
+        </a:effectRef>
+        <a:fontRef idx="minor">
+          <a:schemeClr val="lt1"/>
+        </a:fontRef>
+      </dsp:style>
+      <dsp:txBody>
+        <a:bodyPr spcFirstLastPara="0" vert="horz" wrap="square" lIns="59055" tIns="39370" rIns="59055" bIns="39370" numCol="1" spcCol="1270" anchor="ctr" anchorCtr="0">
+          <a:noAutofit/>
+        </a:bodyPr>
+        <a:lstStyle/>
+        <a:p>
+          <a:pPr marL="0" lvl="0" indent="0" algn="ctr" defTabSz="1377950">
+            <a:lnSpc>
+              <a:spcPct val="90000"/>
+            </a:lnSpc>
+            <a:spcBef>
+              <a:spcPct val="0"/>
+            </a:spcBef>
+            <a:spcAft>
+              <a:spcPct val="35000"/>
+            </a:spcAft>
+            <a:buNone/>
+          </a:pPr>
+          <a:r>
+            <a:rPr lang="en-GB" sz="3100" kern="1200"/>
+            <a:t>Uses interface module system</a:t>
+          </a:r>
+          <a:endParaRPr lang="en-US" sz="3100" kern="1200"/>
+        </a:p>
+      </dsp:txBody>
+      <dsp:txXfrm>
+        <a:off x="7554580" y="1468726"/>
+        <a:ext cx="2915747" cy="1413885"/>
+      </dsp:txXfrm>
+    </dsp:sp>
+  </dsp:spTree>
+</dsp:drawing>
+</file>
+
+<file path=ppt/diagrams/drawing2.xml><?xml version="1.0" encoding="utf-8"?>
+<dsp:drawing xmlns:dgm="http://schemas.openxmlformats.org/drawingml/2006/diagram" xmlns:dsp="http://schemas.microsoft.com/office/drawing/2008/diagram" xmlns:a="http://schemas.openxmlformats.org/drawingml/2006/main">
+  <dsp:spTree>
+    <dsp:nvGrpSpPr>
+      <dsp:cNvPr id="0" name=""/>
+      <dsp:cNvGrpSpPr/>
+    </dsp:nvGrpSpPr>
+    <dsp:grpSpPr/>
+    <dsp:sp modelId="{6AC0A17E-3527-4E0A-A7B7-4A6983E7430B}">
+      <dsp:nvSpPr>
+        <dsp:cNvPr id="0" name=""/>
+        <dsp:cNvSpPr/>
+      </dsp:nvSpPr>
+      <dsp:spPr>
+        <a:xfrm>
+          <a:off x="10090" y="29383"/>
+          <a:ext cx="3426543" cy="1027963"/>
+        </a:xfrm>
+        <a:prstGeom prst="rect">
+          <a:avLst/>
+        </a:prstGeom>
+        <a:solidFill>
+          <a:schemeClr val="accent2">
+            <a:hueOff val="0"/>
+            <a:satOff val="0"/>
+            <a:lumOff val="0"/>
+            <a:alphaOff val="0"/>
+          </a:schemeClr>
+        </a:solidFill>
+        <a:ln w="19050" cap="flat" cmpd="sng" algn="ctr">
+          <a:solidFill>
+            <a:schemeClr val="accent2">
+              <a:hueOff val="0"/>
+              <a:satOff val="0"/>
+              <a:lumOff val="0"/>
+              <a:alphaOff val="0"/>
+            </a:schemeClr>
+          </a:solidFill>
+          <a:prstDash val="solid"/>
+          <a:miter lim="800000"/>
+        </a:ln>
+        <a:effectLst/>
+      </dsp:spPr>
+      <dsp:style>
+        <a:lnRef idx="2">
+          <a:scrgbClr r="0" g="0" b="0"/>
+        </a:lnRef>
+        <a:fillRef idx="1">
+          <a:scrgbClr r="0" g="0" b="0"/>
+        </a:fillRef>
+        <a:effectRef idx="1">
+          <a:scrgbClr r="0" g="0" b="0"/>
+        </a:effectRef>
+        <a:fontRef idx="minor">
+          <a:schemeClr val="lt1"/>
+        </a:fontRef>
+      </dsp:style>
+      <dsp:txBody>
+        <a:bodyPr spcFirstLastPara="0" vert="horz" wrap="square" lIns="270773" tIns="270773" rIns="270773" bIns="270773" numCol="1" spcCol="1270" anchor="ctr" anchorCtr="0">
+          <a:noAutofit/>
+        </a:bodyPr>
+        <a:lstStyle/>
+        <a:p>
+          <a:pPr marL="0" lvl="0" indent="0" algn="ctr" defTabSz="1511300">
+            <a:lnSpc>
+              <a:spcPct val="90000"/>
+            </a:lnSpc>
+            <a:spcBef>
+              <a:spcPct val="0"/>
+            </a:spcBef>
+            <a:spcAft>
+              <a:spcPct val="35000"/>
+            </a:spcAft>
+            <a:buNone/>
+          </a:pPr>
+          <a:r>
+            <a:rPr lang="en-US" sz="3400" kern="1200"/>
+            <a:t>Build</a:t>
+          </a:r>
+        </a:p>
+      </dsp:txBody>
+      <dsp:txXfrm>
+        <a:off x="10090" y="29383"/>
+        <a:ext cx="3426543" cy="1027963"/>
+      </dsp:txXfrm>
+    </dsp:sp>
+    <dsp:sp modelId="{20354FBC-F68B-4954-BEAD-72FC05D59779}">
+      <dsp:nvSpPr>
+        <dsp:cNvPr id="0" name=""/>
+        <dsp:cNvSpPr/>
+      </dsp:nvSpPr>
+      <dsp:spPr>
+        <a:xfrm>
+          <a:off x="10090" y="1057347"/>
+          <a:ext cx="3426543" cy="3264607"/>
+        </a:xfrm>
+        <a:prstGeom prst="rect">
+          <a:avLst/>
+        </a:prstGeom>
+        <a:solidFill>
+          <a:schemeClr val="accent2">
+            <a:tint val="40000"/>
+            <a:alpha val="90000"/>
+            <a:hueOff val="0"/>
+            <a:satOff val="0"/>
+            <a:lumOff val="0"/>
+            <a:alphaOff val="0"/>
+          </a:schemeClr>
+        </a:solidFill>
+        <a:ln w="19050" cap="flat" cmpd="sng" algn="ctr">
+          <a:solidFill>
+            <a:schemeClr val="accent2">
+              <a:tint val="40000"/>
+              <a:alpha val="90000"/>
+              <a:hueOff val="0"/>
+              <a:satOff val="0"/>
+              <a:lumOff val="0"/>
+              <a:alphaOff val="0"/>
+            </a:schemeClr>
+          </a:solidFill>
+          <a:prstDash val="solid"/>
+          <a:miter lim="800000"/>
+        </a:ln>
+        <a:effectLst/>
+      </dsp:spPr>
+      <dsp:style>
+        <a:lnRef idx="2">
+          <a:scrgbClr r="0" g="0" b="0"/>
+        </a:lnRef>
+        <a:fillRef idx="1">
+          <a:scrgbClr r="0" g="0" b="0"/>
+        </a:fillRef>
+        <a:effectRef idx="0">
+          <a:scrgbClr r="0" g="0" b="0"/>
+        </a:effectRef>
+        <a:fontRef idx="minor"/>
+      </dsp:style>
+      <dsp:txBody>
+        <a:bodyPr spcFirstLastPara="0" vert="horz" wrap="square" lIns="338466" tIns="338466" rIns="338466" bIns="338466" numCol="1" spcCol="1270" anchor="t" anchorCtr="0">
+          <a:noAutofit/>
+        </a:bodyPr>
+        <a:lstStyle/>
+        <a:p>
+          <a:pPr marL="0" lvl="0" indent="0" algn="l" defTabSz="1155700">
+            <a:lnSpc>
+              <a:spcPct val="90000"/>
+            </a:lnSpc>
+            <a:spcBef>
+              <a:spcPct val="0"/>
+            </a:spcBef>
+            <a:spcAft>
+              <a:spcPct val="35000"/>
+            </a:spcAft>
+            <a:buNone/>
+          </a:pPr>
+          <a:r>
+            <a:rPr lang="en-US" sz="2600" kern="1200"/>
+            <a:t>Build a Character controller with modular functionality capable of fitting the vast majority of use cases</a:t>
+          </a:r>
+        </a:p>
+      </dsp:txBody>
+      <dsp:txXfrm>
+        <a:off x="10090" y="1057347"/>
+        <a:ext cx="3426543" cy="3264607"/>
+      </dsp:txXfrm>
+    </dsp:sp>
+    <dsp:sp modelId="{2B1271AF-7F14-4F09-8FB4-CF8E68BA77F3}">
+      <dsp:nvSpPr>
+        <dsp:cNvPr id="0" name=""/>
+        <dsp:cNvSpPr/>
+      </dsp:nvSpPr>
+      <dsp:spPr>
+        <a:xfrm>
+          <a:off x="3544528" y="29383"/>
+          <a:ext cx="3426543" cy="1027963"/>
+        </a:xfrm>
+        <a:prstGeom prst="rect">
+          <a:avLst/>
+        </a:prstGeom>
+        <a:solidFill>
+          <a:schemeClr val="accent2">
+            <a:hueOff val="3221807"/>
+            <a:satOff val="-9246"/>
+            <a:lumOff val="-14805"/>
+            <a:alphaOff val="0"/>
+          </a:schemeClr>
+        </a:solidFill>
+        <a:ln w="19050" cap="flat" cmpd="sng" algn="ctr">
+          <a:solidFill>
+            <a:schemeClr val="accent2">
+              <a:hueOff val="3221807"/>
+              <a:satOff val="-9246"/>
+              <a:lumOff val="-14805"/>
+              <a:alphaOff val="0"/>
+            </a:schemeClr>
+          </a:solidFill>
+          <a:prstDash val="solid"/>
+          <a:miter lim="800000"/>
+        </a:ln>
+        <a:effectLst/>
+      </dsp:spPr>
+      <dsp:style>
+        <a:lnRef idx="2">
+          <a:scrgbClr r="0" g="0" b="0"/>
+        </a:lnRef>
+        <a:fillRef idx="1">
+          <a:scrgbClr r="0" g="0" b="0"/>
+        </a:fillRef>
+        <a:effectRef idx="1">
+          <a:scrgbClr r="0" g="0" b="0"/>
+        </a:effectRef>
+        <a:fontRef idx="minor">
+          <a:schemeClr val="lt1"/>
+        </a:fontRef>
+      </dsp:style>
+      <dsp:txBody>
+        <a:bodyPr spcFirstLastPara="0" vert="horz" wrap="square" lIns="270773" tIns="270773" rIns="270773" bIns="270773" numCol="1" spcCol="1270" anchor="ctr" anchorCtr="0">
+          <a:noAutofit/>
+        </a:bodyPr>
+        <a:lstStyle/>
+        <a:p>
+          <a:pPr marL="0" lvl="0" indent="0" algn="ctr" defTabSz="1511300">
+            <a:lnSpc>
+              <a:spcPct val="90000"/>
+            </a:lnSpc>
+            <a:spcBef>
+              <a:spcPct val="0"/>
+            </a:spcBef>
+            <a:spcAft>
+              <a:spcPct val="35000"/>
+            </a:spcAft>
+            <a:buNone/>
+          </a:pPr>
+          <a:r>
+            <a:rPr lang="en-US" sz="3400" kern="1200"/>
+            <a:t>Avoid</a:t>
+          </a:r>
+        </a:p>
+      </dsp:txBody>
+      <dsp:txXfrm>
+        <a:off x="3544528" y="29383"/>
+        <a:ext cx="3426543" cy="1027963"/>
+      </dsp:txXfrm>
+    </dsp:sp>
+    <dsp:sp modelId="{85D5B357-83BD-43CD-960B-9AC3F60205AB}">
+      <dsp:nvSpPr>
+        <dsp:cNvPr id="0" name=""/>
+        <dsp:cNvSpPr/>
+      </dsp:nvSpPr>
+      <dsp:spPr>
+        <a:xfrm>
+          <a:off x="3544528" y="1057347"/>
+          <a:ext cx="3426543" cy="3264607"/>
+        </a:xfrm>
+        <a:prstGeom prst="rect">
+          <a:avLst/>
+        </a:prstGeom>
+        <a:solidFill>
+          <a:schemeClr val="accent2">
+            <a:tint val="40000"/>
+            <a:alpha val="90000"/>
+            <a:hueOff val="3367359"/>
+            <a:satOff val="-31116"/>
+            <a:lumOff val="-3508"/>
+            <a:alphaOff val="0"/>
+          </a:schemeClr>
+        </a:solidFill>
+        <a:ln w="19050" cap="flat" cmpd="sng" algn="ctr">
+          <a:solidFill>
+            <a:schemeClr val="accent2">
+              <a:tint val="40000"/>
+              <a:alpha val="90000"/>
+              <a:hueOff val="3367359"/>
+              <a:satOff val="-31116"/>
+              <a:lumOff val="-3508"/>
+              <a:alphaOff val="0"/>
+            </a:schemeClr>
+          </a:solidFill>
+          <a:prstDash val="solid"/>
+          <a:miter lim="800000"/>
+        </a:ln>
+        <a:effectLst/>
+      </dsp:spPr>
+      <dsp:style>
+        <a:lnRef idx="2">
+          <a:scrgbClr r="0" g="0" b="0"/>
+        </a:lnRef>
+        <a:fillRef idx="1">
+          <a:scrgbClr r="0" g="0" b="0"/>
+        </a:fillRef>
+        <a:effectRef idx="0">
+          <a:scrgbClr r="0" g="0" b="0"/>
+        </a:effectRef>
+        <a:fontRef idx="minor"/>
+      </dsp:style>
+      <dsp:txBody>
+        <a:bodyPr spcFirstLastPara="0" vert="horz" wrap="square" lIns="338466" tIns="338466" rIns="338466" bIns="338466" numCol="1" spcCol="1270" anchor="t" anchorCtr="0">
+          <a:noAutofit/>
+        </a:bodyPr>
+        <a:lstStyle/>
+        <a:p>
+          <a:pPr marL="0" lvl="0" indent="0" algn="l" defTabSz="1155700">
+            <a:lnSpc>
+              <a:spcPct val="90000"/>
+            </a:lnSpc>
+            <a:spcBef>
+              <a:spcPct val="0"/>
+            </a:spcBef>
+            <a:spcAft>
+              <a:spcPct val="35000"/>
+            </a:spcAft>
+            <a:buNone/>
+          </a:pPr>
+          <a:r>
+            <a:rPr lang="en-US" sz="2600" kern="1200"/>
+            <a:t>Avoid load large, unnecessary code, for maintainability and efficiency</a:t>
+          </a:r>
+        </a:p>
+      </dsp:txBody>
+      <dsp:txXfrm>
+        <a:off x="3544528" y="1057347"/>
+        <a:ext cx="3426543" cy="3264607"/>
+      </dsp:txXfrm>
+    </dsp:sp>
+    <dsp:sp modelId="{CA1AC0B1-6FAA-4343-BFEE-DFF5A54A8BF4}">
+      <dsp:nvSpPr>
+        <dsp:cNvPr id="0" name=""/>
+        <dsp:cNvSpPr/>
+      </dsp:nvSpPr>
+      <dsp:spPr>
+        <a:xfrm>
+          <a:off x="7078966" y="29383"/>
+          <a:ext cx="3426543" cy="1027963"/>
+        </a:xfrm>
+        <a:prstGeom prst="rect">
+          <a:avLst/>
+        </a:prstGeom>
+        <a:solidFill>
+          <a:schemeClr val="accent2">
+            <a:hueOff val="6443614"/>
+            <a:satOff val="-18493"/>
+            <a:lumOff val="-29609"/>
+            <a:alphaOff val="0"/>
+          </a:schemeClr>
+        </a:solidFill>
+        <a:ln w="19050" cap="flat" cmpd="sng" algn="ctr">
+          <a:solidFill>
+            <a:schemeClr val="accent2">
+              <a:hueOff val="6443614"/>
+              <a:satOff val="-18493"/>
+              <a:lumOff val="-29609"/>
+              <a:alphaOff val="0"/>
+            </a:schemeClr>
+          </a:solidFill>
+          <a:prstDash val="solid"/>
+          <a:miter lim="800000"/>
+        </a:ln>
+        <a:effectLst/>
+      </dsp:spPr>
+      <dsp:style>
+        <a:lnRef idx="2">
+          <a:scrgbClr r="0" g="0" b="0"/>
+        </a:lnRef>
+        <a:fillRef idx="1">
+          <a:scrgbClr r="0" g="0" b="0"/>
+        </a:fillRef>
+        <a:effectRef idx="1">
+          <a:scrgbClr r="0" g="0" b="0"/>
+        </a:effectRef>
+        <a:fontRef idx="minor">
+          <a:schemeClr val="lt1"/>
+        </a:fontRef>
+      </dsp:style>
+      <dsp:txBody>
+        <a:bodyPr spcFirstLastPara="0" vert="horz" wrap="square" lIns="270773" tIns="270773" rIns="270773" bIns="270773" numCol="1" spcCol="1270" anchor="ctr" anchorCtr="0">
+          <a:noAutofit/>
+        </a:bodyPr>
+        <a:lstStyle/>
+        <a:p>
+          <a:pPr marL="0" lvl="0" indent="0" algn="ctr" defTabSz="1511300">
+            <a:lnSpc>
+              <a:spcPct val="90000"/>
+            </a:lnSpc>
+            <a:spcBef>
+              <a:spcPct val="0"/>
+            </a:spcBef>
+            <a:spcAft>
+              <a:spcPct val="35000"/>
+            </a:spcAft>
+            <a:buNone/>
+          </a:pPr>
+          <a:r>
+            <a:rPr lang="en-US" sz="3400" kern="1200"/>
+            <a:t>Reduce</a:t>
+          </a:r>
+        </a:p>
+      </dsp:txBody>
+      <dsp:txXfrm>
+        <a:off x="7078966" y="29383"/>
+        <a:ext cx="3426543" cy="1027963"/>
+      </dsp:txXfrm>
+    </dsp:sp>
+    <dsp:sp modelId="{2B431359-5C71-48E4-83C0-E1828AFE6C83}">
+      <dsp:nvSpPr>
+        <dsp:cNvPr id="0" name=""/>
+        <dsp:cNvSpPr/>
+      </dsp:nvSpPr>
+      <dsp:spPr>
+        <a:xfrm>
+          <a:off x="7078966" y="1057347"/>
+          <a:ext cx="3426543" cy="3264607"/>
+        </a:xfrm>
+        <a:prstGeom prst="rect">
+          <a:avLst/>
+        </a:prstGeom>
+        <a:solidFill>
+          <a:schemeClr val="accent2">
+            <a:tint val="40000"/>
+            <a:alpha val="90000"/>
+            <a:hueOff val="6734718"/>
+            <a:satOff val="-62232"/>
+            <a:lumOff val="-7015"/>
+            <a:alphaOff val="0"/>
+          </a:schemeClr>
+        </a:solidFill>
+        <a:ln w="19050" cap="flat" cmpd="sng" algn="ctr">
+          <a:solidFill>
+            <a:schemeClr val="accent2">
+              <a:tint val="40000"/>
+              <a:alpha val="90000"/>
+              <a:hueOff val="6734718"/>
+              <a:satOff val="-62232"/>
+              <a:lumOff val="-7015"/>
+              <a:alphaOff val="0"/>
+            </a:schemeClr>
+          </a:solidFill>
+          <a:prstDash val="solid"/>
+          <a:miter lim="800000"/>
+        </a:ln>
+        <a:effectLst/>
+      </dsp:spPr>
+      <dsp:style>
+        <a:lnRef idx="2">
+          <a:scrgbClr r="0" g="0" b="0"/>
+        </a:lnRef>
+        <a:fillRef idx="1">
+          <a:scrgbClr r="0" g="0" b="0"/>
+        </a:fillRef>
+        <a:effectRef idx="0">
+          <a:scrgbClr r="0" g="0" b="0"/>
+        </a:effectRef>
+        <a:fontRef idx="minor"/>
+      </dsp:style>
+      <dsp:txBody>
+        <a:bodyPr spcFirstLastPara="0" vert="horz" wrap="square" lIns="338466" tIns="338466" rIns="338466" bIns="338466" numCol="1" spcCol="1270" anchor="t" anchorCtr="0">
+          <a:noAutofit/>
+        </a:bodyPr>
+        <a:lstStyle/>
+        <a:p>
+          <a:pPr marL="0" lvl="0" indent="0" algn="l" defTabSz="1155700">
+            <a:lnSpc>
+              <a:spcPct val="90000"/>
+            </a:lnSpc>
+            <a:spcBef>
+              <a:spcPct val="0"/>
+            </a:spcBef>
+            <a:spcAft>
+              <a:spcPct val="35000"/>
+            </a:spcAft>
+            <a:buNone/>
+          </a:pPr>
+          <a:r>
+            <a:rPr lang="en-US" sz="2600" kern="1200"/>
+            <a:t>Reduce complex state-switching logic</a:t>
+          </a:r>
+        </a:p>
+      </dsp:txBody>
+      <dsp:txXfrm>
+        <a:off x="7078966" y="1057347"/>
+        <a:ext cx="3426543" cy="3264607"/>
+      </dsp:txXfrm>
+    </dsp:sp>
+  </dsp:spTree>
+</dsp:drawing>
+</file>
+
+<file path=ppt/diagrams/layout1.xml><?xml version="1.0" encoding="utf-8"?>
+<dgm:layoutDef xmlns:dgm="http://schemas.openxmlformats.org/drawingml/2006/diagram" xmlns:a="http://schemas.openxmlformats.org/drawingml/2006/main" uniqueId="urn:microsoft.com/office/officeart/2005/8/layout/hierarchy3">
+  <dgm:title val=""/>
+  <dgm:desc val=""/>
+  <dgm:catLst>
+    <dgm:cat type="hierarchy" pri="7000"/>
+    <dgm:cat type="list" pri="23000"/>
+    <dgm:cat type="relationship" pri="15000"/>
+    <dgm:cat type="convert" pri="7000"/>
+  </dgm:catLst>
+  <dgm:sampData>
+    <dgm:dataModel>
+      <dgm:ptLst>
+        <dgm:pt modelId="0" type="doc"/>
+        <dgm:pt modelId="1">
+          <dgm:prSet phldr="1"/>
+        </dgm:pt>
+        <dgm:pt modelId="11">
+          <dgm:prSet phldr="1"/>
+        </dgm:pt>
+        <dgm:pt modelId="12">
+          <dgm:prSet phldr="1"/>
+        </dgm:pt>
+        <dgm:pt modelId="2">
+          <dgm:prSet phldr="1"/>
+        </dgm:pt>
+        <dgm:pt modelId="21">
+          <dgm:prSet phldr="1"/>
+        </dgm:pt>
+        <dgm:pt modelId="22">
+          <dgm:prSet phldr="1"/>
+        </dgm:pt>
+      </dgm:ptLst>
+      <dgm:cxnLst>
+        <dgm:cxn modelId="4" srcId="0" destId="1" srcOrd="0" destOrd="0"/>
+        <dgm:cxn modelId="5" srcId="1" destId="11" srcOrd="0" destOrd="0"/>
+        <dgm:cxn modelId="6" srcId="1" destId="12" srcOrd="1" destOrd="0"/>
+        <dgm:cxn modelId="7" srcId="0" destId="2" srcOrd="1" destOrd="0"/>
+        <dgm:cxn modelId="8" srcId="2" destId="21" srcOrd="0" destOrd="0"/>
+        <dgm:cxn modelId="9" srcId="2" destId="22" srcOrd="1" destOrd="0"/>
+      </dgm:cxnLst>
+      <dgm:bg/>
+      <dgm:whole/>
+    </dgm:dataModel>
+  </dgm:sampData>
+  <dgm:styleData>
+    <dgm:dataModel>
+      <dgm:ptLst>
+        <dgm:pt modelId="0" type="doc"/>
+        <dgm:pt modelId="1"/>
+        <dgm:pt modelId="11"/>
+        <dgm:pt modelId="2"/>
+        <dgm:pt modelId="21"/>
+      </dgm:ptLst>
+      <dgm:cxnLst>
+        <dgm:cxn modelId="4" srcId="0" destId="1" srcOrd="0" destOrd="0"/>
+        <dgm:cxn modelId="5" srcId="0" destId="2" srcOrd="1" destOrd="0"/>
+        <dgm:cxn modelId="13" srcId="1" destId="11" srcOrd="0" destOrd="0"/>
+        <dgm:cxn modelId="23" srcId="2" destId="21" srcOrd="0" destOrd="0"/>
+      </dgm:cxnLst>
+      <dgm:bg/>
+      <dgm:whole/>
+    </dgm:dataModel>
+  </dgm:styleData>
+  <dgm:clrData>
+    <dgm:dataModel>
+      <dgm:ptLst>
+        <dgm:pt modelId="0" type="doc"/>
+        <dgm:pt modelId="1"/>
+        <dgm:pt modelId="11"/>
+        <dgm:pt modelId="2"/>
+        <dgm:pt modelId="21"/>
+        <dgm:pt modelId="3"/>
+        <dgm:pt modelId="31"/>
+        <dgm:pt modelId="4"/>
+        <dgm:pt modelId="41"/>
+      </dgm:ptLst>
+      <dgm:cxnLst>
+        <dgm:cxn modelId="5" srcId="0" destId="1" srcOrd="0" destOrd="0"/>
+        <dgm:cxn modelId="6" srcId="0" destId="2" srcOrd="1" destOrd="0"/>
+        <dgm:cxn modelId="7" srcId="0" destId="3" srcOrd="2" destOrd="0"/>
+        <dgm:cxn modelId="8" srcId="0" destId="4" srcOrd="3" destOrd="0"/>
+        <dgm:cxn modelId="13" srcId="1" destId="11" srcOrd="0" destOrd="0"/>
+        <dgm:cxn modelId="23" srcId="2" destId="21" srcOrd="0" destOrd="0"/>
+        <dgm:cxn modelId="33" srcId="3" destId="31" srcOrd="0" destOrd="0"/>
+        <dgm:cxn modelId="43" srcId="4" destId="41" srcOrd="0" destOrd="0"/>
+      </dgm:cxnLst>
+      <dgm:bg/>
+      <dgm:whole/>
+    </dgm:dataModel>
+  </dgm:clrData>
+  <dgm:layoutNode name="diagram">
+    <dgm:varLst>
+      <dgm:chPref val="1"/>
+      <dgm:dir/>
+      <dgm:animOne val="branch"/>
+      <dgm:animLvl val="lvl"/>
+      <dgm:resizeHandles/>
+    </dgm:varLst>
+    <dgm:choose name="Name0">
+      <dgm:if name="Name1" func="var" arg="dir" op="equ" val="norm">
+        <dgm:alg type="hierChild">
+          <dgm:param type="linDir" val="fromL"/>
+        </dgm:alg>
+      </dgm:if>
+      <dgm:else name="Name2">
+        <dgm:alg type="hierChild">
+          <dgm:param type="linDir" val="fromR"/>
+        </dgm:alg>
+      </dgm:else>
+    </dgm:choose>
+    <dgm:shape xmlns:r="http://schemas.openxmlformats.org/officeDocument/2006/relationships" r:blip="">
+      <dgm:adjLst/>
+    </dgm:shape>
+    <dgm:presOf/>
+    <dgm:constrLst>
+      <dgm:constr type="primFontSz" for="des" forName="rootText" op="equ" val="65"/>
+      <dgm:constr type="primFontSz" for="des" forName="childText" op="equ" val="65"/>
+      <dgm:constr type="w" for="des" forName="rootComposite" refType="w"/>
+      <dgm:constr type="h" for="des" forName="rootComposite" refType="w" fact="0.5"/>
+      <dgm:constr type="w" for="des" forName="childText" refType="w" refFor="des" refForName="rootComposite" fact="0.8"/>
+      <dgm:constr type="h" for="des" forName="childText" refType="h" refFor="des" refForName="rootComposite"/>
+      <dgm:constr type="sibSp" refType="w" refFor="des" refForName="rootComposite" fact="0.25"/>
+      <dgm:constr type="sibSp" for="des" forName="childShape" refType="h" refFor="des" refForName="childText" fact="0.25"/>
+      <dgm:constr type="sp" for="des" forName="root" refType="h" refFor="des" refForName="childText" fact="0.25"/>
+    </dgm:constrLst>
+    <dgm:ruleLst/>
+    <dgm:forEach name="Name3" axis="ch">
+      <dgm:forEach name="Name4" axis="self" ptType="node" cnt="1">
+        <dgm:layoutNode name="root">
+          <dgm:choose name="Name5">
+            <dgm:if name="Name6" func="var" arg="dir" op="equ" val="norm">
+              <dgm:alg type="hierRoot">
+                <dgm:param type="hierAlign" val="tL"/>
+              </dgm:alg>
+            </dgm:if>
+            <dgm:else name="Name7">
+              <dgm:alg type="hierRoot">
+                <dgm:param type="hierAlign" val="tR"/>
+              </dgm:alg>
+            </dgm:else>
+          </dgm:choose>
+          <dgm:shape xmlns:r="http://schemas.openxmlformats.org/officeDocument/2006/relationships" r:blip="">
+            <dgm:adjLst/>
+          </dgm:shape>
+          <dgm:presOf/>
+          <dgm:constrLst>
+            <dgm:constr type="alignOff" val="0.2"/>
+          </dgm:constrLst>
+          <dgm:ruleLst/>
+          <dgm:layoutNode name="rootComposite">
+            <dgm:alg type="composite"/>
+            <dgm:shape xmlns:r="http://schemas.openxmlformats.org/officeDocument/2006/relationships" r:blip="">
+              <dgm:adjLst/>
+            </dgm:shape>
+            <dgm:presOf axis="self" ptType="node" cnt="1"/>
+            <dgm:choose name="Name8">
+              <dgm:if name="Name9" func="var" arg="dir" op="equ" val="norm">
+                <dgm:constrLst>
+                  <dgm:constr type="l" for="ch" forName="rootText"/>
+                  <dgm:constr type="t" for="ch" forName="rootText"/>
+                  <dgm:constr type="w" for="ch" forName="rootText" refType="w"/>
+                  <dgm:constr type="h" for="ch" forName="rootText" refType="h"/>
+                  <dgm:constr type="l" for="ch" forName="rootConnector"/>
+                  <dgm:constr type="t" for="ch" forName="rootConnector"/>
+                  <dgm:constr type="w" for="ch" forName="rootConnector" refType="w" refFor="ch" refForName="rootText" fact="0.2"/>
+                  <dgm:constr type="h" for="ch" forName="rootConnector" refType="h" refFor="ch" refForName="rootText"/>
+                </dgm:constrLst>
+              </dgm:if>
+              <dgm:else name="Name10">
+                <dgm:constrLst>
+                  <dgm:constr type="l" for="ch" forName="rootText"/>
+                  <dgm:constr type="t" for="ch" forName="rootText"/>
+                  <dgm:constr type="w" for="ch" forName="rootText" refType="w"/>
+                  <dgm:constr type="h" for="ch" forName="rootText" refType="h"/>
+                  <dgm:constr type="r" for="ch" forName="rootConnector" refType="w"/>
+                  <dgm:constr type="t" for="ch" forName="rootConnector"/>
+                  <dgm:constr type="w" for="ch" forName="rootConnector" refType="w" refFor="ch" refForName="rootText" fact="0.2"/>
+                  <dgm:constr type="h" for="ch" forName="rootConnector" refType="h" refFor="ch" refForName="rootText"/>
+                </dgm:constrLst>
+              </dgm:else>
+            </dgm:choose>
+            <dgm:ruleLst/>
+            <dgm:layoutNode name="rootText" styleLbl="node1">
+              <dgm:alg type="tx"/>
+              <dgm:shape xmlns:r="http://schemas.openxmlformats.org/officeDocument/2006/relationships" type="roundRect" r:blip="">
+                <dgm:adjLst>
+                  <dgm:adj idx="1" val="0.1"/>
+                </dgm:adjLst>
+              </dgm:shape>
+              <dgm:presOf axis="self" ptType="node" cnt="1"/>
+              <dgm:constrLst>
+                <dgm:constr type="tMarg" refType="primFontSz" fact="0.1"/>
+                <dgm:constr type="bMarg" refType="primFontSz" fact="0.1"/>
+                <dgm:constr type="lMarg" refType="primFontSz" fact="0.15"/>
+                <dgm:constr type="rMarg" refType="primFontSz" fact="0.15"/>
+              </dgm:constrLst>
+              <dgm:ruleLst>
+                <dgm:rule type="primFontSz" val="5" fact="NaN" max="NaN"/>
+              </dgm:ruleLst>
+            </dgm:layoutNode>
+            <dgm:layoutNode name="rootConnector" moveWith="rootText">
+              <dgm:alg type="sp"/>
+              <dgm:shape xmlns:r="http://schemas.openxmlformats.org/officeDocument/2006/relationships" type="roundRect" r:blip="" hideGeom="1">
+                <dgm:adjLst>
+                  <dgm:adj idx="1" val="0.1"/>
+                </dgm:adjLst>
+              </dgm:shape>
+              <dgm:presOf axis="self" ptType="node" cnt="1"/>
+              <dgm:constrLst/>
+              <dgm:ruleLst/>
+            </dgm:layoutNode>
+          </dgm:layoutNode>
+          <dgm:layoutNode name="childShape">
+            <dgm:alg type="hierChild">
+              <dgm:param type="chAlign" val="l"/>
+              <dgm:param type="linDir" val="fromT"/>
+            </dgm:alg>
+            <dgm:shape xmlns:r="http://schemas.openxmlformats.org/officeDocument/2006/relationships" r:blip="">
+              <dgm:adjLst/>
+            </dgm:shape>
+            <dgm:presOf/>
+            <dgm:constrLst/>
+            <dgm:ruleLst/>
+            <dgm:forEach name="Name11" axis="ch">
+              <dgm:forEach name="Name12" axis="self" ptType="parTrans" cnt="1">
+                <dgm:layoutNode name="Name13">
+                  <dgm:choose name="Name14">
+                    <dgm:if name="Name15" func="var" arg="dir" op="equ" val="norm">
+                      <dgm:alg type="conn">
+                        <dgm:param type="dim" val="1D"/>
+                        <dgm:param type="endSty" val="noArr"/>
+                        <dgm:param type="connRout" val="bend"/>
+                        <dgm:param type="srcNode" val="rootConnector"/>
+                        <dgm:param type="begPts" val="bCtr"/>
+                        <dgm:param type="endPts" val="midL"/>
+                      </dgm:alg>
+                    </dgm:if>
+                    <dgm:else name="Name16">
+                      <dgm:alg type="conn">
+                        <dgm:param type="dim" val="1D"/>
+                        <dgm:param type="endSty" val="noArr"/>
+                        <dgm:param type="connRout" val="bend"/>
+                        <dgm:param type="srcNode" val="rootConnector"/>
+                        <dgm:param type="begPts" val="bCtr"/>
+                        <dgm:param type="endPts" val="midR"/>
+                      </dgm:alg>
+                    </dgm:else>
+                  </dgm:choose>
+                  <dgm:shape xmlns:r="http://schemas.openxmlformats.org/officeDocument/2006/relationships" type="conn" r:blip="">
+                    <dgm:adjLst/>
+                  </dgm:shape>
+                  <dgm:presOf axis="self"/>
+                  <dgm:constrLst>
+                    <dgm:constr type="begPad"/>
+                    <dgm:constr type="endPad"/>
+                  </dgm:constrLst>
+                  <dgm:ruleLst/>
+                </dgm:layoutNode>
+              </dgm:forEach>
+              <dgm:forEach name="Name17" axis="self" ptType="node">
+                <dgm:layoutNode name="childText" styleLbl="bgAcc1">
+                  <dgm:varLst>
+                    <dgm:bulletEnabled val="1"/>
+                  </dgm:varLst>
+                  <dgm:alg type="tx"/>
+                  <dgm:shape xmlns:r="http://schemas.openxmlformats.org/officeDocument/2006/relationships" type="roundRect" r:blip="">
+                    <dgm:adjLst>
+                      <dgm:adj idx="1" val="0.1"/>
+                    </dgm:adjLst>
+                  </dgm:shape>
+                  <dgm:presOf axis="self desOrSelf" ptType="node node" st="1 1" cnt="1 0"/>
+                  <dgm:constrLst>
+                    <dgm:constr type="tMarg" refType="primFontSz" fact="0.1"/>
+                    <dgm:constr type="bMarg" refType="primFontSz" fact="0.1"/>
+                    <dgm:constr type="lMarg" refType="primFontSz" fact="0.15"/>
+                    <dgm:constr type="rMarg" refType="primFontSz" fact="0.15"/>
+                  </dgm:constrLst>
+                  <dgm:ruleLst>
+                    <dgm:rule type="primFontSz" val="5" fact="NaN" max="NaN"/>
+                  </dgm:ruleLst>
+                </dgm:layoutNode>
+              </dgm:forEach>
+            </dgm:forEach>
+          </dgm:layoutNode>
+        </dgm:layoutNode>
+      </dgm:forEach>
+    </dgm:forEach>
+  </dgm:layoutNode>
+</dgm:layoutDef>
+</file>
+
+<file path=ppt/diagrams/layout2.xml><?xml version="1.0" encoding="utf-8"?>
+<dgm:layoutDef xmlns:dgm="http://schemas.openxmlformats.org/drawingml/2006/diagram" xmlns:a="http://schemas.openxmlformats.org/drawingml/2006/main" uniqueId="urn:microsoft.com/office/officeart/2016/7/layout/HorizontalActionList">
+  <dgm:title val="Horizontal Action List"/>
+  <dgm:desc val="Used to show non-sequential or grouped lists of information. Works well with large amounts of text. All text has the same level of emphasis, and direction is not implied."/>
+  <dgm:catLst>
+    <dgm:cat type="list" pri="500"/>
+  </dgm:catLst>
+  <dgm:sampData useDef="1">
+    <dgm:dataModel>
+      <dgm:ptLst/>
+      <dgm:bg/>
+      <dgm:whole/>
+    </dgm:dataModel>
+  </dgm:sampData>
+  <dgm:styleData>
+    <dgm:dataModel>
+      <dgm:ptLst>
+        <dgm:pt modelId="0" type="doc"/>
+        <dgm:pt modelId="1"/>
+        <dgm:pt modelId="2"/>
+      </dgm:ptLst>
+      <dgm:cxnLst>
+        <dgm:cxn modelId="3" srcId="0" destId="1" srcOrd="0" destOrd="0"/>
+        <dgm:cxn modelId="4" srcId="0" destId="2" srcOrd="1" destOrd="0"/>
+      </dgm:cxnLst>
+      <dgm:bg/>
+      <dgm:whole/>
+    </dgm:dataModel>
+  </dgm:styleData>
+  <dgm:clrData>
+    <dgm:dataModel>
+      <dgm:ptLst>
+        <dgm:pt modelId="0" type="doc"/>
+        <dgm:pt modelId="1"/>
+        <dgm:pt modelId="2"/>
+        <dgm:pt modelId="3"/>
+        <dgm:pt modelId="4"/>
+      </dgm:ptLst>
+      <dgm:cxnLst>
+        <dgm:cxn modelId="5" srcId="0" destId="1" srcOrd="0" destOrd="0"/>
+        <dgm:cxn modelId="6" srcId="0" destId="2" srcOrd="1" destOrd="0"/>
+        <dgm:cxn modelId="7" srcId="0" destId="3" srcOrd="2" destOrd="0"/>
+        <dgm:cxn modelId="8" srcId="0" destId="4" srcOrd="3" destOrd="0"/>
+      </dgm:cxnLst>
+      <dgm:bg/>
+      <dgm:whole/>
+    </dgm:dataModel>
+  </dgm:clrData>
+  <dgm:layoutNode name="Name0">
+    <dgm:varLst>
+      <dgm:dir/>
+      <dgm:animLvl val="lvl"/>
+      <dgm:resizeHandles val="exact"/>
+    </dgm:varLst>
+    <dgm:choose name="Name1">
+      <dgm:if name="Name2" func="var" arg="dir" op="equ" val="norm">
+        <dgm:alg type="lin"/>
+      </dgm:if>
+      <dgm:else name="Name3">
+        <dgm:alg type="lin">
+          <dgm:param type="linDir" val="fromR"/>
+        </dgm:alg>
+      </dgm:else>
+    </dgm:choose>
+    <dgm:shape xmlns:r="http://schemas.openxmlformats.org/officeDocument/2006/relationships" r:blip="">
+      <dgm:adjLst/>
+    </dgm:shape>
+    <dgm:presOf/>
+    <dgm:constrLst>
+      <dgm:constr type="h" for="ch" forName="composite" refType="h" fact="0.6"/>
+      <dgm:constr type="h" for="des" forName="composite" op="equ"/>
+      <dgm:constr type="w" for="ch" forName="composite" refType="w"/>
+      <dgm:constr type="w" for="des" forName="parTx"/>
+      <dgm:constr type="h" for="des" forName="parTx" op="equ"/>
+      <dgm:constr type="w" for="des" forName="desTx"/>
+      <dgm:constr type="primFontSz" for="des" forName="parTx" val="54"/>
+      <dgm:constr type="primFontSz" for="des" forName="desTx" refType="primFontSz" refFor="des" refForName="parTx" op="lte" fact="0.75"/>
+      <dgm:constr type="h" for="des" forName="desTx" op="equ"/>
+      <dgm:constr type="w" for="ch" forName="space" op="equ" val="3"/>
+    </dgm:constrLst>
+    <dgm:ruleLst>
+      <dgm:rule type="w" for="ch" forName="composite" val="0" fact="NaN" max="NaN"/>
+    </dgm:ruleLst>
+    <dgm:forEach name="Name6" axis="ch" ptType="node">
+      <dgm:layoutNode name="composite">
+        <dgm:alg type="composite"/>
+        <dgm:shape xmlns:r="http://schemas.openxmlformats.org/officeDocument/2006/relationships" r:blip="">
+          <dgm:adjLst/>
+        </dgm:shape>
+        <dgm:presOf/>
+        <dgm:constrLst>
+          <dgm:constr type="l" for="ch" forName="parTx"/>
+          <dgm:constr type="w" for="ch" forName="parTx" refType="w"/>
+          <dgm:constr type="t" for="ch" forName="parTx"/>
+          <dgm:constr type="l" for="ch" forName="desTx"/>
+          <dgm:constr type="w" for="ch" forName="desTx" refType="w" refFor="ch" refForName="parTx"/>
+          <dgm:constr type="t" for="ch" forName="desTx" refType="h" refFor="ch" refForName="parTx"/>
+        </dgm:constrLst>
+        <dgm:ruleLst>
+          <dgm:rule type="h" val="INF" fact="NaN" max="NaN"/>
+        </dgm:ruleLst>
+        <dgm:layoutNode name="parTx" styleLbl="alignNode1">
+          <dgm:varLst>
+            <dgm:chMax val="0"/>
+            <dgm:chPref val="0"/>
+          </dgm:varLst>
+          <dgm:alg type="tx"/>
+          <dgm:shape xmlns:r="http://schemas.openxmlformats.org/officeDocument/2006/relationships" type="rect" r:blip="">
+            <dgm:adjLst/>
+          </dgm:shape>
+          <dgm:presOf axis="self" ptType="node"/>
+          <dgm:constrLst>
+            <dgm:constr type="h" refType="w" op="lte" fact="0.3"/>
+            <dgm:constr type="h"/>
+            <dgm:constr type="tMarg" refType="w" fact="0.224"/>
+            <dgm:constr type="bMarg" refType="w" fact="0.224"/>
+            <dgm:constr type="lMarg" refType="w" fact="0.224"/>
+            <dgm:constr type="rMarg" refType="w" fact="0.224"/>
+          </dgm:constrLst>
+          <dgm:ruleLst>
+            <dgm:rule type="h" val="INF" fact="NaN" max="NaN"/>
+            <dgm:rule type="primFontSz" val="14" fact="NaN" max="NaN"/>
+          </dgm:ruleLst>
+        </dgm:layoutNode>
+        <dgm:layoutNode name="desTx" styleLbl="alignAccFollowNode1">
+          <dgm:varLst/>
+          <dgm:alg type="tx">
+            <dgm:param type="stBulletLvl" val="0"/>
+            <dgm:param type="txAnchorVert" val="t"/>
+            <dgm:param type="parTxLTRAlign" val="l"/>
+            <dgm:param type="shpTxLTRAlignCh" val="l"/>
+            <dgm:param type="parTxRTLAlign" val="r"/>
+            <dgm:param type="shpTxRTLAlignCh" val="r"/>
+          </dgm:alg>
+          <dgm:shape xmlns:r="http://schemas.openxmlformats.org/officeDocument/2006/relationships" type="rect" r:blip="">
+            <dgm:adjLst/>
+          </dgm:shape>
+          <dgm:presOf axis="des" ptType="node"/>
+          <dgm:constrLst>
+            <dgm:constr type="primFontSz" val="28"/>
+            <dgm:constr type="tMarg" refType="w" fact="0.28"/>
+            <dgm:constr type="bMarg" refType="w" fact="0.28"/>
+            <dgm:constr type="lMarg" refType="w" fact="0.28"/>
+            <dgm:constr type="rMarg" refType="w" fact="0.28"/>
+          </dgm:constrLst>
+          <dgm:ruleLst>
+            <dgm:rule type="h" val="INF" fact="NaN" max="NaN"/>
+            <dgm:rule type="primFontSz" val="11" fact="NaN" max="NaN"/>
+          </dgm:ruleLst>
+        </dgm:layoutNode>
+      </dgm:layoutNode>
+      <dgm:forEach name="Name19" axis="followSib" ptType="sibTrans" cnt="1">
+        <dgm:layoutNode name="space">
+          <dgm:alg type="sp"/>
+          <dgm:shape xmlns:r="http://schemas.openxmlformats.org/officeDocument/2006/relationships" r:blip="">
+            <dgm:adjLst/>
+          </dgm:shape>
+          <dgm:presOf/>
+          <dgm:constrLst/>
+          <dgm:ruleLst/>
+        </dgm:layoutNode>
+      </dgm:forEach>
+    </dgm:forEach>
+  </dgm:layoutNode>
+</dgm:layoutDef>
+</file>
+
+<file path=ppt/diagrams/quickStyle1.xml><?xml version="1.0" encoding="utf-8"?>
+<dgm:styleDef xmlns:dgm="http://schemas.openxmlformats.org/drawingml/2006/diagram" xmlns:a="http://schemas.openxmlformats.org/drawingml/2006/main" uniqueId="urn:microsoft.com/office/officeart/2005/8/quickstyle/simple5">
+  <dgm:title val=""/>
+  <dgm:desc val=""/>
+  <dgm:catLst>
+    <dgm:cat type="simple" pri="10500"/>
+  </dgm:catLst>
+  <dgm:scene3d>
+    <a:camera prst="orthographicFront"/>
+    <a:lightRig rig="threePt" dir="t"/>
+  </dgm:scene3d>
+  <dgm:styleLbl name="node0">
+    <dgm:scene3d>
+      <a:camera prst="orthographicFront"/>
+      <a:lightRig rig="threePt" dir="t"/>
+    </dgm:scene3d>
+    <dgm:sp3d/>
+    <dgm:txPr/>
+    <dgm:style>
+      <a:lnRef idx="0">
+        <a:scrgbClr r="0" g="0" b="0"/>
+      </a:lnRef>
+      <a:fillRef idx="3">
+        <a:scrgbClr r="0" g="0" b="0"/>
+      </a:fillRef>
+      <a:effectRef idx="3">
+        <a:scrgbClr r="0" g="0" b="0"/>
+      </a:effectRef>
+      <a:fontRef idx="minor">
+        <a:schemeClr val="lt1"/>
+      </a:fontRef>
+    </dgm:style>
+  </dgm:styleLbl>
+  <dgm:styleLbl name="lnNode1">
+    <dgm:scene3d>
+      <a:camera prst="orthographicFront"/>
+      <a:lightRig rig="threePt" dir="t"/>
+    </dgm:scene3d>
+    <dgm:sp3d/>
+    <dgm:txPr/>
+    <dgm:style>
+      <a:lnRef idx="0">
+        <a:scrgbClr r="0" g="0" b="0"/>
+      </a:lnRef>
+      <a:fillRef idx="3">
+        <a:scrgbClr r="0" g="0" b="0"/>
+      </a:fillRef>
+      <a:effectRef idx="3">
+        <a:scrgbClr r="0" g="0" b="0"/>
+      </a:effectRef>
+      <a:fontRef idx="minor">
+        <a:schemeClr val="lt1"/>
+      </a:fontRef>
+    </dgm:style>
+  </dgm:styleLbl>
+  <dgm:styleLbl name="vennNode1">
+    <dgm:scene3d>
+      <a:camera prst="orthographicFront"/>
+      <a:lightRig rig="threePt" dir="t"/>
+    </dgm:scene3d>
+    <dgm:sp3d/>
+    <dgm:txPr/>
+    <dgm:style>
+      <a:lnRef idx="0">
+        <a:scrgbClr r="0" g="0" b="0"/>
+      </a:lnRef>
+      <a:fillRef idx="3">
+        <a:scrgbClr r="0" g="0" b="0"/>
+      </a:fillRef>
+      <a:effectRef idx="3">
+        <a:scrgbClr r="0" g="0" b="0"/>
+      </a:effectRef>
+      <a:fontRef idx="minor">
+        <a:schemeClr val="tx1"/>
+      </a:fontRef>
+    </dgm:style>
+  </dgm:styleLbl>
+  <dgm:styleLbl name="alignNode1">
+    <dgm:scene3d>
+      <a:camera prst="orthographicFront"/>
+      <a:lightRig rig="threePt" dir="t"/>
+    </dgm:scene3d>
+    <dgm:sp3d/>
+    <dgm:txPr/>
+    <dgm:style>
+      <a:lnRef idx="1">
+        <a:scrgbClr r="0" g="0" b="0"/>
+      </a:lnRef>
+      <a:fillRef idx="3">
+        <a:scrgbClr r="0" g="0" b="0"/>
+      </a:fillRef>
+      <a:effectRef idx="3">
+        <a:scrgbClr r="0" g="0" b="0"/>
+      </a:effectRef>
+      <a:fontRef idx="minor">
+        <a:schemeClr val="lt1"/>
+      </a:fontRef>
+    </dgm:style>
+  </dgm:styleLbl>
+  <dgm:styleLbl name="node1">
+    <dgm:scene3d>
+      <a:camera prst="orthographicFront"/>
+      <a:lightRig rig="threePt" dir="t"/>
+    </dgm:scene3d>
+    <dgm:sp3d/>
+    <dgm:txPr/>
+    <dgm:style>
+      <a:lnRef idx="0">
+        <a:scrgbClr r="0" g="0" b="0"/>
+      </a:lnRef>
+      <a:fillRef idx="3">
+        <a:scrgbClr r="0" g="0" b="0"/>
+      </a:fillRef>
+      <a:effectRef idx="3">
+        <a:scrgbClr r="0" g="0" b="0"/>
+      </a:effectRef>
+      <a:fontRef idx="minor">
+        <a:schemeClr val="lt1"/>
+      </a:fontRef>
+    </dgm:style>
+  </dgm:styleLbl>
+  <dgm:styleLbl name="node2">
+    <dgm:scene3d>
+      <a:camera prst="orthographicFront"/>
+      <a:lightRig rig="threePt" dir="t"/>
+    </dgm:scene3d>
+    <dgm:sp3d/>
+    <dgm:txPr/>
+    <dgm:style>
+      <a:lnRef idx="0">
+        <a:scrgbClr r="0" g="0" b="0"/>
+      </a:lnRef>
+      <a:fillRef idx="3">
+        <a:scrgbClr r="0" g="0" b="0"/>
+      </a:fillRef>
+      <a:effectRef idx="3">
+        <a:scrgbClr r="0" g="0" b="0"/>
+      </a:effectRef>
+      <a:fontRef idx="minor">
+        <a:schemeClr val="lt1"/>
+      </a:fontRef>
+    </dgm:style>
+  </dgm:styleLbl>
+  <dgm:styleLbl name="node3">
+    <dgm:scene3d>
+      <a:camera prst="orthographicFront"/>
+      <a:lightRig rig="threePt" dir="t"/>
+    </dgm:scene3d>
+    <dgm:sp3d/>
+    <dgm:txPr/>
+    <dgm:style>
+      <a:lnRef idx="0">
+        <a:scrgbClr r="0" g="0" b="0"/>
+      </a:lnRef>
+      <a:fillRef idx="3">
+        <a:scrgbClr r="0" g="0" b="0"/>
+      </a:fillRef>
+      <a:effectRef idx="3">
+        <a:scrgbClr r="0" g="0" b="0"/>
+      </a:effectRef>
+      <a:fontRef idx="minor">
+        <a:schemeClr val="lt1"/>
+      </a:fontRef>
+    </dgm:style>
+  </dgm:styleLbl>
+  <dgm:styleLbl name="node4">
+    <dgm:scene3d>
+      <a:camera prst="orthographicFront"/>
+      <a:lightRig rig="threePt" dir="t"/>
+    </dgm:scene3d>
+    <dgm:sp3d/>
+    <dgm:txPr/>
+    <dgm:style>
+      <a:lnRef idx="0">
+        <a:scrgbClr r="0" g="0" b="0"/>
+      </a:lnRef>
+      <a:fillRef idx="3">
+        <a:scrgbClr r="0" g="0" b="0"/>
+      </a:fillRef>
+      <a:effectRef idx="3">
+        <a:scrgbClr r="0" g="0" b="0"/>
+      </a:effectRef>
+      <a:fontRef idx="minor">
+        <a:schemeClr val="lt1"/>
+      </a:fontRef>
+    </dgm:style>
+  </dgm:styleLbl>
+  <dgm:styleLbl name="fgImgPlace1">
+    <dgm:scene3d>
+      <a:camera prst="orthographicFront"/>
+      <a:lightRig rig="threePt" dir="t"/>
+    </dgm:scene3d>
+    <dgm:sp3d/>
+    <dgm:txPr/>
+    <dgm:style>
+      <a:lnRef idx="0">
+        <a:scrgbClr r="0" g="0" b="0"/>
+      </a:lnRef>
+      <a:fillRef idx="1">
+        <a:scrgbClr r="0" g="0" b="0"/>
+      </a:fillRef>
+      <a:effectRef idx="3">
+        <a:scrgbClr r="0" g="0" b="0"/>
+      </a:effectRef>
+      <a:fontRef idx="minor"/>
+    </dgm:style>
+  </dgm:styleLbl>
+  <dgm:styleLbl name="alignImgPlace1">
+    <dgm:scene3d>
+      <a:camera prst="orthographicFront"/>
+      <a:lightRig rig="threePt" dir="t"/>
+    </dgm:scene3d>
+    <dgm:sp3d/>
+    <dgm:txPr/>
+    <dgm:style>
+      <a:lnRef idx="0">
+        <a:scrgbClr r="0" g="0" b="0"/>
+      </a:lnRef>
+      <a:fillRef idx="1">
+        <a:scrgbClr r="0" g="0" b="0"/>
+      </a:fillRef>
+      <a:effectRef idx="3">
+        <a:scrgbClr r="0" g="0" b="0"/>
+      </a:effectRef>
+      <a:fontRef idx="minor"/>
+    </dgm:style>
+  </dgm:styleLbl>
+  <dgm:styleLbl name="bgImgPlace1">
+    <dgm:scene3d>
+      <a:camera prst="orthographicFront"/>
+      <a:lightRig rig="threePt" dir="t"/>
+    </dgm:scene3d>
+    <dgm:sp3d/>
+    <dgm:txPr/>
+    <dgm:style>
+      <a:lnRef idx="0">
+        <a:scrgbClr r="0" g="0" b="0"/>
+      </a:lnRef>
+      <a:fillRef idx="1">
+        <a:scrgbClr r="0" g="0" b="0"/>
+      </a:fillRef>
+      <a:effectRef idx="3">
+        <a:scrgbClr r="0" g="0" b="0"/>
+      </a:effectRef>
+      <a:fontRef idx="minor"/>
+    </dgm:style>
+  </dgm:styleLbl>
+  <dgm:styleLbl name="sibTrans2D1">
+    <dgm:scene3d>
+      <a:camera prst="orthographicFront"/>
+      <a:lightRig rig="threePt" dir="t"/>
+    </dgm:scene3d>
+    <dgm:sp3d/>
+    <dgm:txPr/>
+    <dgm:style>
+      <a:lnRef idx="0">
+        <a:scrgbClr r="0" g="0" b="0"/>
+      </a:lnRef>
+      <a:fillRef idx="3">
+        <a:scrgbClr r="0" g="0" b="0"/>
+      </a:fillRef>
+      <a:effectRef idx="3">
+        <a:scrgbClr r="0" g="0" b="0"/>
+      </a:effectRef>
+      <a:fontRef idx="minor">
+        <a:schemeClr val="lt1"/>
+      </a:fontRef>
+    </dgm:style>
+  </dgm:styleLbl>
+  <dgm:styleLbl name="fgSibTrans2D1">
+    <dgm:scene3d>
+      <a:camera prst="orthographicFront"/>
+      <a:lightRig rig="threePt" dir="t"/>
+    </dgm:scene3d>
+    <dgm:sp3d/>
+    <dgm:txPr/>
+    <dgm:style>
+      <a:lnRef idx="0">
+        <a:scrgbClr r="0" g="0" b="0"/>
+      </a:lnRef>
+      <a:fillRef idx="3">
+        <a:scrgbClr r="0" g="0" b="0"/>
+      </a:fillRef>
+      <a:effectRef idx="3">
+        <a:scrgbClr r="0" g="0" b="0"/>
+      </a:effectRef>
+      <a:fontRef idx="minor">
+        <a:schemeClr val="lt1"/>
+      </a:fontRef>
+    </dgm:style>
+  </dgm:styleLbl>
+  <dgm:styleLbl name="bgSibTrans2D1">
+    <dgm:scene3d>
+      <a:camera prst="orthographicFront"/>
+      <a:lightRig rig="threePt" dir="t"/>
+    </dgm:scene3d>
+    <dgm:sp3d/>
+    <dgm:txPr/>
+    <dgm:style>
+      <a:lnRef idx="0">
+        <a:scrgbClr r="0" g="0" b="0"/>
+      </a:lnRef>
+      <a:fillRef idx="3">
+        <a:scrgbClr r="0" g="0" b="0"/>
+      </a:fillRef>
+      <a:effectRef idx="3">
+        <a:scrgbClr r="0" g="0" b="0"/>
+      </a:effectRef>
+      <a:fontRef idx="minor">
+        <a:schemeClr val="lt1"/>
+      </a:fontRef>
+    </dgm:style>
+  </dgm:styleLbl>
+  <dgm:styleLbl name="sibTrans1D1">
+    <dgm:scene3d>
+      <a:camera prst="orthographicFront"/>
+      <a:lightRig rig="threePt" dir="t"/>
+    </dgm:scene3d>
+    <dgm:sp3d/>
+    <dgm:txPr/>
+    <dgm:style>
+      <a:lnRef idx="1">
+        <a:scrgbClr r="0" g="0" b="0"/>
+      </a:lnRef>
+      <a:fillRef idx="0">
+        <a:scrgbClr r="0" g="0" b="0"/>
+      </a:fillRef>
+      <a:effectRef idx="0">
+        <a:scrgbClr r="0" g="0" b="0"/>
+      </a:effectRef>
+      <a:fontRef idx="minor"/>
+    </dgm:style>
+  </dgm:styleLbl>
+  <dgm:styleLbl name="callout">
+    <dgm:scene3d>
+      <a:camera prst="orthographicFront"/>
+      <a:lightRig rig="threePt" dir="t"/>
+    </dgm:scene3d>
+    <dgm:sp3d/>
+    <dgm:txPr/>
+    <dgm:style>
+      <a:lnRef idx="1">
+        <a:scrgbClr r="0" g="0" b="0"/>
+      </a:lnRef>
+      <a:fillRef idx="0">
+        <a:scrgbClr r="0" g="0" b="0"/>
+      </a:fillRef>
+      <a:effectRef idx="1">
+        <a:scrgbClr r="0" g="0" b="0"/>
+      </a:effectRef>
+      <a:fontRef idx="minor"/>
+    </dgm:style>
+  </dgm:styleLbl>
+  <dgm:styleLbl name="asst0">
+    <dgm:scene3d>
+      <a:camera prst="orthographicFront"/>
+      <a:lightRig rig="threePt" dir="t"/>
+    </dgm:scene3d>
+    <dgm:sp3d/>
+    <dgm:txPr/>
+    <dgm:style>
+      <a:lnRef idx="0">
+        <a:scrgbClr r="0" g="0" b="0"/>
+      </a:lnRef>
+      <a:fillRef idx="3">
+        <a:scrgbClr r="0" g="0" b="0"/>
+      </a:fillRef>
+      <a:effectRef idx="3">
+        <a:scrgbClr r="0" g="0" b="0"/>
+      </a:effectRef>
+      <a:fontRef idx="minor">
+        <a:schemeClr val="lt1"/>
+      </a:fontRef>
+    </dgm:style>
+  </dgm:styleLbl>
+  <dgm:styleLbl name="asst1">
+    <dgm:scene3d>
+      <a:camera prst="orthographicFront"/>
+      <a:lightRig rig="threePt" dir="t"/>
+    </dgm:scene3d>
+    <dgm:sp3d/>
+    <dgm:txPr/>
+    <dgm:style>
+      <a:lnRef idx="0">
+        <a:scrgbClr r="0" g="0" b="0"/>
+      </a:lnRef>
+      <a:fillRef idx="3">
+        <a:scrgbClr r="0" g="0" b="0"/>
+      </a:fillRef>
+      <a:effectRef idx="3">
+        <a:scrgbClr r="0" g="0" b="0"/>
+      </a:effectRef>
+      <a:fontRef idx="minor">
+        <a:schemeClr val="lt1"/>
+      </a:fontRef>
+    </dgm:style>
+  </dgm:styleLbl>
+  <dgm:styleLbl name="asst2">
+    <dgm:scene3d>
+      <a:camera prst="orthographicFront"/>
+      <a:lightRig rig="threePt" dir="t"/>
+    </dgm:scene3d>
+    <dgm:sp3d/>
+    <dgm:txPr/>
+    <dgm:style>
+      <a:lnRef idx="0">
+        <a:scrgbClr r="0" g="0" b="0"/>
+      </a:lnRef>
+      <a:fillRef idx="3">
+        <a:scrgbClr r="0" g="0" b="0"/>
+      </a:fillRef>
+      <a:effectRef idx="3">
+        <a:scrgbClr r="0" g="0" b="0"/>
+      </a:effectRef>
+      <a:fontRef idx="minor">
+        <a:schemeClr val="lt1"/>
+      </a:fontRef>
+    </dgm:style>
+  </dgm:styleLbl>
+  <dgm:styleLbl name="asst3">
+    <dgm:scene3d>
+      <a:camera prst="orthographicFront"/>
+      <a:lightRig rig="threePt" dir="t"/>
+    </dgm:scene3d>
+    <dgm:sp3d/>
+    <dgm:txPr/>
+    <dgm:style>
+      <a:lnRef idx="0">
+        <a:scrgbClr r="0" g="0" b="0"/>
+      </a:lnRef>
+      <a:fillRef idx="3">
+        <a:scrgbClr r="0" g="0" b="0"/>
+      </a:fillRef>
+      <a:effectRef idx="3">
+        <a:scrgbClr r="0" g="0" b="0"/>
+      </a:effectRef>
+      <a:fontRef idx="minor">
+        <a:schemeClr val="lt1"/>
+      </a:fontRef>
+    </dgm:style>
+  </dgm:styleLbl>
+  <dgm:styleLbl name="asst4">
+    <dgm:scene3d>
+      <a:camera prst="orthographicFront"/>
+      <a:lightRig rig="threePt" dir="t"/>
+    </dgm:scene3d>
+    <dgm:sp3d/>
+    <dgm:txPr/>
+    <dgm:style>
+      <a:lnRef idx="0">
+        <a:scrgbClr r="0" g="0" b="0"/>
+      </a:lnRef>
+      <a:fillRef idx="3">
+        <a:scrgbClr r="0" g="0" b="0"/>
+      </a:fillRef>
+      <a:effectRef idx="3">
+        <a:scrgbClr r="0" g="0" b="0"/>
+      </a:effectRef>
+      <a:fontRef idx="minor">
+        <a:schemeClr val="lt1"/>
+      </a:fontRef>
+    </dgm:style>
+  </dgm:styleLbl>
+  <dgm:styleLbl name="parChTrans2D1">
+    <dgm:scene3d>
+      <a:camera prst="orthographicFront"/>
+      <a:lightRig rig="threePt" dir="t"/>
+    </dgm:scene3d>
+    <dgm:sp3d/>
+    <dgm:txPr/>
+    <dgm:style>
+      <a:lnRef idx="0">
+        <a:scrgbClr r="0" g="0" b="0"/>
+      </a:lnRef>
+      <a:fillRef idx="3">
+        <a:scrgbClr r="0" g="0" b="0"/>
+      </a:fillRef>
+      <a:effectRef idx="3">
+        <a:scrgbClr r="0" g="0" b="0"/>
+      </a:effectRef>
+      <a:fontRef idx="minor">
+        <a:schemeClr val="lt1"/>
+      </a:fontRef>
+    </dgm:style>
+  </dgm:styleLbl>
+  <dgm:styleLbl name="parChTrans2D2">
+    <dgm:scene3d>
+      <a:camera prst="orthographicFront"/>
+      <a:lightRig rig="threePt" dir="t"/>
+    </dgm:scene3d>
+    <dgm:sp3d/>
+    <dgm:txPr/>
+    <dgm:style>
+      <a:lnRef idx="0">
+        <a:scrgbClr r="0" g="0" b="0"/>
+      </a:lnRef>
+      <a:fillRef idx="3">
+        <a:scrgbClr r="0" g="0" b="0"/>
+      </a:fillRef>
+      <a:effectRef idx="3">
+        <a:scrgbClr r="0" g="0" b="0"/>
+      </a:effectRef>
+      <a:fontRef idx="minor">
+        <a:schemeClr val="lt1"/>
+      </a:fontRef>
+    </dgm:style>
+  </dgm:styleLbl>
+  <dgm:styleLbl name="parChTrans2D3">
+    <dgm:scene3d>
+      <a:camera prst="orthographicFront"/>
+      <a:lightRig rig="threePt" dir="t"/>
+    </dgm:scene3d>
+    <dgm:sp3d/>
+    <dgm:txPr/>
+    <dgm:style>
+      <a:lnRef idx="0">
+        <a:scrgbClr r="0" g="0" b="0"/>
+      </a:lnRef>
+      <a:fillRef idx="3">
+        <a:scrgbClr r="0" g="0" b="0"/>
+      </a:fillRef>
+      <a:effectRef idx="3">
+        <a:scrgbClr r="0" g="0" b="0"/>
+      </a:effectRef>
+      <a:fontRef idx="minor">
+        <a:schemeClr val="lt1"/>
+      </a:fontRef>
+    </dgm:style>
+  </dgm:styleLbl>
+  <dgm:styleLbl name="parChTrans2D4">
+    <dgm:scene3d>
+      <a:camera prst="orthographicFront"/>
+      <a:lightRig rig="threePt" dir="t"/>
+    </dgm:scene3d>
+    <dgm:sp3d/>
+    <dgm:txPr/>
+    <dgm:style>
+      <a:lnRef idx="0">
+        <a:scrgbClr r="0" g="0" b="0"/>
+      </a:lnRef>
+      <a:fillRef idx="3">
+        <a:scrgbClr r="0" g="0" b="0"/>
+      </a:fillRef>
+      <a:effectRef idx="3">
+        <a:scrgbClr r="0" g="0" b="0"/>
+      </a:effectRef>
+      <a:fontRef idx="minor">
+        <a:schemeClr val="lt1"/>
+      </a:fontRef>
+    </dgm:style>
+  </dgm:styleLbl>
+  <dgm:styleLbl name="parChTrans1D1">
+    <dgm:scene3d>
+      <a:camera prst="orthographicFront"/>
+      <a:lightRig rig="threePt" dir="t"/>
+    </dgm:scene3d>
+    <dgm:sp3d/>
+    <dgm:txPr/>
+    <dgm:style>
+      <a:lnRef idx="2">
+        <a:scrgbClr r="0" g="0" b="0"/>
+      </a:lnRef>
+      <a:fillRef idx="0">
+        <a:scrgbClr r="0" g="0" b="0"/>
+      </a:fillRef>
+      <a:effectRef idx="0">
+        <a:scrgbClr r="0" g="0" b="0"/>
+      </a:effectRef>
+      <a:fontRef idx="minor"/>
+    </dgm:style>
+  </dgm:styleLbl>
+  <dgm:styleLbl name="parChTrans1D2">
+    <dgm:scene3d>
+      <a:camera prst="orthographicFront"/>
+      <a:lightRig rig="threePt" dir="t"/>
+    </dgm:scene3d>
+    <dgm:sp3d/>
+    <dgm:txPr/>
+    <dgm:style>
+      <a:lnRef idx="2">
+        <a:scrgbClr r="0" g="0" b="0"/>
+      </a:lnRef>
+      <a:fillRef idx="0">
+        <a:scrgbClr r="0" g="0" b="0"/>
+      </a:fillRef>
+      <a:effectRef idx="0">
+        <a:scrgbClr r="0" g="0" b="0"/>
+      </a:effectRef>
+      <a:fontRef idx="minor"/>
+    </dgm:style>
+  </dgm:styleLbl>
+  <dgm:styleLbl name="parChTrans1D3">
+    <dgm:scene3d>
+      <a:camera prst="orthographicFront"/>
+      <a:lightRig rig="threePt" dir="t"/>
+    </dgm:scene3d>
+    <dgm:sp3d/>
+    <dgm:txPr/>
+    <dgm:style>
+      <a:lnRef idx="2">
+        <a:scrgbClr r="0" g="0" b="0"/>
+      </a:lnRef>
+      <a:fillRef idx="0">
+        <a:scrgbClr r="0" g="0" b="0"/>
+      </a:fillRef>
+      <a:effectRef idx="0">
+        <a:scrgbClr r="0" g="0" b="0"/>
+      </a:effectRef>
+      <a:fontRef idx="minor"/>
+    </dgm:style>
+  </dgm:styleLbl>
+  <dgm:styleLbl name="parChTrans1D4">
+    <dgm:scene3d>
+      <a:camera prst="orthographicFront"/>
+      <a:lightRig rig="threePt" dir="t"/>
+    </dgm:scene3d>
+    <dgm:sp3d/>
+    <dgm:txPr/>
+    <dgm:style>
+      <a:lnRef idx="2">
+        <a:scrgbClr r="0" g="0" b="0"/>
+      </a:lnRef>
+      <a:fillRef idx="0">
+        <a:scrgbClr r="0" g="0" b="0"/>
+      </a:fillRef>
+      <a:effectRef idx="0">
+        <a:scrgbClr r="0" g="0" b="0"/>
+      </a:effectRef>
+      <a:fontRef idx="minor"/>
+    </dgm:style>
+  </dgm:styleLbl>
+  <dgm:styleLbl name="fgAcc1">
+    <dgm:scene3d>
+      <a:camera prst="orthographicFront"/>
+      <a:lightRig rig="threePt" dir="t"/>
+    </dgm:scene3d>
+    <dgm:sp3d/>
+    <dgm:txPr/>
+    <dgm:style>
+      <a:lnRef idx="1">
+        <a:scrgbClr r="0" g="0" b="0"/>
+      </a:lnRef>
+      <a:fillRef idx="1">
+        <a:scrgbClr r="0" g="0" b="0"/>
+      </a:fillRef>
+      <a:effectRef idx="2">
+        <a:scrgbClr r="0" g="0" b="0"/>
+      </a:effectRef>
+      <a:fontRef idx="minor"/>
+    </dgm:style>
+  </dgm:styleLbl>
+  <dgm:styleLbl name="conFgAcc1">
+    <dgm:scene3d>
+      <a:camera prst="orthographicFront"/>
+      <a:lightRig rig="threePt" dir="t"/>
+    </dgm:scene3d>
+    <dgm:sp3d/>
+    <dgm:txPr/>
+    <dgm:style>
+      <a:lnRef idx="1">
+        <a:scrgbClr r="0" g="0" b="0"/>
+      </a:lnRef>
+      <a:fillRef idx="1">
+        <a:scrgbClr r="0" g="0" b="0"/>
+      </a:fillRef>
+      <a:effectRef idx="2">
+        <a:scrgbClr r="0" g="0" b="0"/>
+      </a:effectRef>
+      <a:fontRef idx="minor"/>
+    </dgm:style>
+  </dgm:styleLbl>
+  <dgm:styleLbl name="alignAcc1">
+    <dgm:scene3d>
+      <a:camera prst="orthographicFront"/>
+      <a:lightRig rig="threePt" dir="t"/>
+    </dgm:scene3d>
+    <dgm:sp3d/>
+    <dgm:txPr/>
+    <dgm:style>
+      <a:lnRef idx="1">
+        <a:scrgbClr r="0" g="0" b="0"/>
+      </a:lnRef>
+      <a:fillRef idx="1">
+        <a:scrgbClr r="0" g="0" b="0"/>
+      </a:fillRef>
+      <a:effectRef idx="2">
+        <a:scrgbClr r="0" g="0" b="0"/>
+      </a:effectRef>
+      <a:fontRef idx="minor"/>
+    </dgm:style>
+  </dgm:styleLbl>
+  <dgm:styleLbl name="trAlignAcc1">
+    <dgm:scene3d>
+      <a:camera prst="orthographicFront"/>
+      <a:lightRig rig="threePt" dir="t"/>
+    </dgm:scene3d>
+    <dgm:sp3d/>
+    <dgm:txPr/>
+    <dgm:style>
+      <a:lnRef idx="1">
+        <a:scrgbClr r="0" g="0" b="0"/>
+      </a:lnRef>
+      <a:fillRef idx="1">
+        <a:scrgbClr r="0" g="0" b="0"/>
+      </a:fillRef>
+      <a:effectRef idx="0">
+        <a:scrgbClr r="0" g="0" b="0"/>
+      </a:effectRef>
+      <a:fontRef idx="minor"/>
+    </dgm:style>
+  </dgm:styleLbl>
+  <dgm:styleLbl name="bgAcc1">
+    <dgm:scene3d>
+      <a:camera prst="orthographicFront"/>
+      <a:lightRig rig="threePt" dir="t"/>
+    </dgm:scene3d>
+    <dgm:sp3d/>
+    <dgm:txPr/>
+    <dgm:style>
+      <a:lnRef idx="1">
+        <a:scrgbClr r="0" g="0" b="0"/>
+      </a:lnRef>
+      <a:fillRef idx="1">
+        <a:scrgbClr r="0" g="0" b="0"/>
+      </a:fillRef>
+      <a:effectRef idx="2">
+        <a:scrgbClr r="0" g="0" b="0"/>
+      </a:effectRef>
+      <a:fontRef idx="minor"/>
+    </dgm:style>
+  </dgm:styleLbl>
+  <dgm:styleLbl name="solidFgAcc1">
+    <dgm:scene3d>
+      <a:camera prst="orthographicFront"/>
+      <a:lightRig rig="threePt" dir="t"/>
+    </dgm:scene3d>
+    <dgm:sp3d/>
+    <dgm:txPr/>
+    <dgm:style>
+      <a:lnRef idx="1">
+        <a:scrgbClr r="0" g="0" b="0"/>
+      </a:lnRef>
+      <a:fillRef idx="1">
+        <a:scrgbClr r="0" g="0" b="0"/>
+      </a:fillRef>
+      <a:effectRef idx="2">
+        <a:scrgbClr r="0" g="0" b="0"/>
+      </a:effectRef>
+      <a:fontRef idx="minor"/>
+    </dgm:style>
+  </dgm:styleLbl>
+  <dgm:styleLbl name="solidAlignAcc1">
+    <dgm:scene3d>
+      <a:camera prst="orthographicFront"/>
+      <a:lightRig rig="threePt" dir="t"/>
+    </dgm:scene3d>
+    <dgm:sp3d/>
+    <dgm:txPr/>
+    <dgm:style>
+      <a:lnRef idx="1">
+        <a:scrgbClr r="0" g="0" b="0"/>
+      </a:lnRef>
+      <a:fillRef idx="1">
+        <a:scrgbClr r="0" g="0" b="0"/>
+      </a:fillRef>
+      <a:effectRef idx="3">
+        <a:scrgbClr r="0" g="0" b="0"/>
+      </a:effectRef>
+      <a:fontRef idx="minor"/>
+    </dgm:style>
+  </dgm:styleLbl>
+  <dgm:styleLbl name="solidBgAcc1">
+    <dgm:scene3d>
+      <a:camera prst="orthographicFront"/>
+      <a:lightRig rig="threePt" dir="t"/>
+    </dgm:scene3d>
+    <dgm:sp3d/>
+    <dgm:txPr/>
+    <dgm:style>
+      <a:lnRef idx="1">
+        <a:scrgbClr r="0" g="0" b="0"/>
+      </a:lnRef>
+      <a:fillRef idx="1">
+        <a:scrgbClr r="0" g="0" b="0"/>
+      </a:fillRef>
+      <a:effectRef idx="3">
+        <a:scrgbClr r="0" g="0" b="0"/>
+      </a:effectRef>
+      <a:fontRef idx="minor"/>
+    </dgm:style>
+  </dgm:styleLbl>
+  <dgm:styleLbl name="fgAccFollowNode1">
+    <dgm:scene3d>
+      <a:camera prst="orthographicFront"/>
+      <a:lightRig rig="threePt" dir="t"/>
+    </dgm:scene3d>
+    <dgm:sp3d/>
+    <dgm:txPr/>
+    <dgm:style>
+      <a:lnRef idx="1">
+        <a:scrgbClr r="0" g="0" b="0"/>
+      </a:lnRef>
+      <a:fillRef idx="1">
+        <a:scrgbClr r="0" g="0" b="0"/>
+      </a:fillRef>
+      <a:effectRef idx="2">
+        <a:scrgbClr r="0" g="0" b="0"/>
+      </a:effectRef>
+      <a:fontRef idx="minor"/>
+    </dgm:style>
+  </dgm:styleLbl>
+  <dgm:styleLbl name="alignAccFollowNode1">
+    <dgm:scene3d>
+      <a:camera prst="orthographicFront"/>
+      <a:lightRig rig="threePt" dir="t"/>
+    </dgm:scene3d>
+    <dgm:sp3d/>
+    <dgm:txPr/>
+    <dgm:style>
+      <a:lnRef idx="1">
+        <a:scrgbClr r="0" g="0" b="0"/>
+      </a:lnRef>
+      <a:fillRef idx="1">
+        <a:scrgbClr r="0" g="0" b="0"/>
+      </a:fillRef>
+      <a:effectRef idx="2">
+        <a:scrgbClr r="0" g="0" b="0"/>
+      </a:effectRef>
+      <a:fontRef idx="minor"/>
+    </dgm:style>
+  </dgm:styleLbl>
+  <dgm:styleLbl name="bgAccFollowNode1">
+    <dgm:scene3d>
+      <a:camera prst="orthographicFront"/>
+      <a:lightRig rig="threePt" dir="t"/>
+    </dgm:scene3d>
+    <dgm:sp3d/>
+    <dgm:txPr/>
+    <dgm:style>
+      <a:lnRef idx="1">
+        <a:scrgbClr r="0" g="0" b="0"/>
+      </a:lnRef>
+      <a:fillRef idx="1">
+        <a:scrgbClr r="0" g="0" b="0"/>
+      </a:fillRef>
+      <a:effectRef idx="2">
+        <a:scrgbClr r="0" g="0" b="0"/>
+      </a:effectRef>
+      <a:fontRef idx="minor"/>
+    </dgm:style>
+  </dgm:styleLbl>
+  <dgm:styleLbl name="fgAcc0">
+    <dgm:scene3d>
+      <a:camera prst="orthographicFront"/>
+      <a:lightRig rig="threePt" dir="t"/>
+    </dgm:scene3d>
+    <dgm:sp3d/>
+    <dgm:txPr/>
+    <dgm:style>
+      <a:lnRef idx="1">
+        <a:scrgbClr r="0" g="0" b="0"/>
+      </a:lnRef>
+      <a:fillRef idx="1">
+        <a:scrgbClr r="0" g="0" b="0"/>
+      </a:fillRef>
+      <a:effectRef idx="2">
+        <a:scrgbClr r="0" g="0" b="0"/>
+      </a:effectRef>
+      <a:fontRef idx="minor"/>
+    </dgm:style>
+  </dgm:styleLbl>
+  <dgm:styleLbl name="fgAcc2">
+    <dgm:scene3d>
+      <a:camera prst="orthographicFront"/>
+      <a:lightRig rig="threePt" dir="t"/>
+    </dgm:scene3d>
+    <dgm:sp3d/>
+    <dgm:txPr/>
+    <dgm:style>
+      <a:lnRef idx="1">
+        <a:scrgbClr r="0" g="0" b="0"/>
+      </a:lnRef>
+      <a:fillRef idx="1">
+        <a:scrgbClr r="0" g="0" b="0"/>
+      </a:fillRef>
+      <a:effectRef idx="2">
+        <a:scrgbClr r="0" g="0" b="0"/>
+      </a:effectRef>
+      <a:fontRef idx="minor"/>
+    </dgm:style>
+  </dgm:styleLbl>
+  <dgm:styleLbl name="fgAcc3">
+    <dgm:scene3d>
+      <a:camera prst="orthographicFront"/>
+      <a:lightRig rig="threePt" dir="t"/>
+    </dgm:scene3d>
+    <dgm:sp3d/>
+    <dgm:txPr/>
+    <dgm:style>
+      <a:lnRef idx="1">
+        <a:scrgbClr r="0" g="0" b="0"/>
+      </a:lnRef>
+      <a:fillRef idx="1">
+        <a:scrgbClr r="0" g="0" b="0"/>
+      </a:fillRef>
+      <a:effectRef idx="2">
+        <a:scrgbClr r="0" g="0" b="0"/>
+      </a:effectRef>
+      <a:fontRef idx="minor"/>
+    </dgm:style>
+  </dgm:styleLbl>
+  <dgm:styleLbl name="fgAcc4">
+    <dgm:scene3d>
+      <a:camera prst="orthographicFront"/>
+      <a:lightRig rig="threePt" dir="t"/>
+    </dgm:scene3d>
+    <dgm:sp3d/>
+    <dgm:txPr/>
+    <dgm:style>
+      <a:lnRef idx="1">
+        <a:scrgbClr r="0" g="0" b="0"/>
+      </a:lnRef>
+      <a:fillRef idx="1">
+        <a:scrgbClr r="0" g="0" b="0"/>
+      </a:fillRef>
+      <a:effectRef idx="2">
+        <a:scrgbClr r="0" g="0" b="0"/>
+      </a:effectRef>
+      <a:fontRef idx="minor"/>
+    </dgm:style>
+  </dgm:styleLbl>
+  <dgm:styleLbl name="bgShp">
+    <dgm:scene3d>
+      <a:camera prst="orthographicFront"/>
+      <a:lightRig rig="threePt" dir="t"/>
+    </dgm:scene3d>
+    <dgm:sp3d/>
+    <dgm:txPr/>
+    <dgm:style>
+      <a:lnRef idx="0">
+        <a:scrgbClr r="0" g="0" b="0"/>
+      </a:lnRef>
+      <a:fillRef idx="1">
+        <a:scrgbClr r="0" g="0" b="0"/>
+      </a:fillRef>
+      <a:effectRef idx="2">
+        <a:scrgbClr r="0" g="0" b="0"/>
+      </a:effectRef>
+      <a:fontRef idx="minor"/>
+    </dgm:style>
+  </dgm:styleLbl>
+  <dgm:styleLbl name="dkBgShp">
+    <dgm:scene3d>
+      <a:camera prst="orthographicFront"/>
+      <a:lightRig rig="threePt" dir="t"/>
+    </dgm:scene3d>
+    <dgm:sp3d/>
+    <dgm:txPr/>
+    <dgm:style>
+      <a:lnRef idx="0">
+        <a:scrgbClr r="0" g="0" b="0"/>
+      </a:lnRef>
+      <a:fillRef idx="1">
+        <a:scrgbClr r="0" g="0" b="0"/>
+      </a:fillRef>
+      <a:effectRef idx="3">
+        <a:scrgbClr r="0" g="0" b="0"/>
+      </a:effectRef>
+      <a:fontRef idx="minor"/>
+    </dgm:style>
+  </dgm:styleLbl>
+  <dgm:styleLbl name="trBgShp">
+    <dgm:scene3d>
+      <a:camera prst="orthographicFront"/>
+      <a:lightRig rig="threePt" dir="t"/>
+    </dgm:scene3d>
+    <dgm:sp3d/>
+    <dgm:txPr/>
+    <dgm:style>
+      <a:lnRef idx="0">
+        <a:scrgbClr r="0" g="0" b="0"/>
+      </a:lnRef>
+      <a:fillRef idx="1">
+        <a:scrgbClr r="0" g="0" b="0"/>
+      </a:fillRef>
+      <a:effectRef idx="0">
+        <a:scrgbClr r="0" g="0" b="0"/>
+      </a:effectRef>
+      <a:fontRef idx="minor"/>
+    </dgm:style>
+  </dgm:styleLbl>
+  <dgm:styleLbl name="fgShp">
+    <dgm:scene3d>
+      <a:camera prst="orthographicFront"/>
+      <a:lightRig rig="threePt" dir="t"/>
+    </dgm:scene3d>
+    <dgm:sp3d/>
+    <dgm:txPr/>
+    <dgm:style>
+      <a:lnRef idx="0">
+        <a:scrgbClr r="0" g="0" b="0"/>
+      </a:lnRef>
+      <a:fillRef idx="3">
+        <a:scrgbClr r="0" g="0" b="0"/>
+      </a:fillRef>
+      <a:effectRef idx="3">
+        <a:scrgbClr r="0" g="0" b="0"/>
+      </a:effectRef>
+      <a:fontRef idx="minor"/>
+    </dgm:style>
+  </dgm:styleLbl>
+  <dgm:styleLbl name="revTx">
+    <dgm:scene3d>
+      <a:camera prst="orthographicFront"/>
+      <a:lightRig rig="threePt" dir="t"/>
+    </dgm:scene3d>
+    <dgm:sp3d/>
+    <dgm:txPr/>
+    <dgm:style>
+      <a:lnRef idx="0">
+        <a:scrgbClr r="0" g="0" b="0"/>
+      </a:lnRef>
+      <a:fillRef idx="0">
+        <a:scrgbClr r="0" g="0" b="0"/>
+      </a:fillRef>
+      <a:effectRef idx="0">
+        <a:scrgbClr r="0" g="0" b="0"/>
+      </a:effectRef>
+      <a:fontRef idx="minor"/>
+    </dgm:style>
+  </dgm:styleLbl>
+</dgm:styleDef>
+</file>
+
+<file path=ppt/diagrams/quickStyle2.xml><?xml version="1.0" encoding="utf-8"?>
+<dgm:styleDef xmlns:dgm="http://schemas.openxmlformats.org/drawingml/2006/diagram" xmlns:a="http://schemas.openxmlformats.org/drawingml/2006/main" uniqueId="urn:microsoft.com/office/officeart/2005/8/quickstyle/simple2">
+  <dgm:title val=""/>
+  <dgm:desc val=""/>
+  <dgm:catLst>
+    <dgm:cat type="simple" pri="10200"/>
+  </dgm:catLst>
+  <dgm:scene3d>
+    <a:camera prst="orthographicFront"/>
+    <a:lightRig rig="threePt" dir="t"/>
+  </dgm:scene3d>
+  <dgm:styleLbl name="node0">
+    <dgm:scene3d>
+      <a:camera prst="orthographicFront"/>
+      <a:lightRig rig="threePt" dir="t"/>
+    </dgm:scene3d>
+    <dgm:sp3d/>
+    <dgm:txPr/>
+    <dgm:style>
+      <a:lnRef idx="3">
+        <a:scrgbClr r="0" g="0" b="0"/>
+      </a:lnRef>
+      <a:fillRef idx="1">
+        <a:scrgbClr r="0" g="0" b="0"/>
+      </a:fillRef>
+      <a:effectRef idx="1">
+        <a:scrgbClr r="0" g="0" b="0"/>
+      </a:effectRef>
+      <a:fontRef idx="minor">
+        <a:schemeClr val="lt1"/>
+      </a:fontRef>
+    </dgm:style>
+  </dgm:styleLbl>
+  <dgm:styleLbl name="lnNode1">
+    <dgm:scene3d>
+      <a:camera prst="orthographicFront"/>
+      <a:lightRig rig="threePt" dir="t"/>
+    </dgm:scene3d>
+    <dgm:sp3d/>
+    <dgm:txPr/>
+    <dgm:style>
+      <a:lnRef idx="3">
+        <a:scrgbClr r="0" g="0" b="0"/>
+      </a:lnRef>
+      <a:fillRef idx="1">
+        <a:scrgbClr r="0" g="0" b="0"/>
+      </a:fillRef>
+      <a:effectRef idx="1">
+        <a:scrgbClr r="0" g="0" b="0"/>
+      </a:effectRef>
+      <a:fontRef idx="minor">
+        <a:schemeClr val="lt1"/>
+      </a:fontRef>
+    </dgm:style>
+  </dgm:styleLbl>
+  <dgm:styleLbl name="vennNode1">
+    <dgm:scene3d>
+      <a:camera prst="orthographicFront"/>
+      <a:lightRig rig="threePt" dir="t"/>
+    </dgm:scene3d>
+    <dgm:sp3d/>
+    <dgm:txPr/>
+    <dgm:style>
+      <a:lnRef idx="3">
+        <a:scrgbClr r="0" g="0" b="0"/>
+      </a:lnRef>
+      <a:fillRef idx="1">
+        <a:scrgbClr r="0" g="0" b="0"/>
+      </a:fillRef>
+      <a:effectRef idx="0">
+        <a:scrgbClr r="0" g="0" b="0"/>
+      </a:effectRef>
+      <a:fontRef idx="minor">
+        <a:schemeClr val="tx1"/>
+      </a:fontRef>
+    </dgm:style>
+  </dgm:styleLbl>
+  <dgm:styleLbl name="alignNode1">
+    <dgm:scene3d>
+      <a:camera prst="orthographicFront"/>
+      <a:lightRig rig="threePt" dir="t"/>
+    </dgm:scene3d>
+    <dgm:sp3d/>
+    <dgm:txPr/>
+    <dgm:style>
+      <a:lnRef idx="2">
+        <a:scrgbClr r="0" g="0" b="0"/>
+      </a:lnRef>
+      <a:fillRef idx="1">
+        <a:scrgbClr r="0" g="0" b="0"/>
+      </a:fillRef>
+      <a:effectRef idx="1">
+        <a:scrgbClr r="0" g="0" b="0"/>
+      </a:effectRef>
+      <a:fontRef idx="minor">
+        <a:schemeClr val="lt1"/>
+      </a:fontRef>
+    </dgm:style>
+  </dgm:styleLbl>
+  <dgm:styleLbl name="node1">
+    <dgm:scene3d>
+      <a:camera prst="orthographicFront"/>
+      <a:lightRig rig="threePt" dir="t"/>
+    </dgm:scene3d>
+    <dgm:sp3d/>
+    <dgm:txPr/>
+    <dgm:style>
+      <a:lnRef idx="3">
+        <a:scrgbClr r="0" g="0" b="0"/>
+      </a:lnRef>
+      <a:fillRef idx="1">
+        <a:scrgbClr r="0" g="0" b="0"/>
+      </a:fillRef>
+      <a:effectRef idx="1">
+        <a:scrgbClr r="0" g="0" b="0"/>
+      </a:effectRef>
+      <a:fontRef idx="minor">
+        <a:schemeClr val="lt1"/>
+      </a:fontRef>
+    </dgm:style>
+  </dgm:styleLbl>
+  <dgm:styleLbl name="node2">
+    <dgm:scene3d>
+      <a:camera prst="orthographicFront"/>
+      <a:lightRig rig="threePt" dir="t"/>
+    </dgm:scene3d>
+    <dgm:sp3d/>
+    <dgm:txPr/>
+    <dgm:style>
+      <a:lnRef idx="3">
+        <a:scrgbClr r="0" g="0" b="0"/>
+      </a:lnRef>
+      <a:fillRef idx="1">
+        <a:scrgbClr r="0" g="0" b="0"/>
+      </a:fillRef>
+      <a:effectRef idx="1">
+        <a:scrgbClr r="0" g="0" b="0"/>
+      </a:effectRef>
+      <a:fontRef idx="minor">
+        <a:schemeClr val="lt1"/>
+      </a:fontRef>
+    </dgm:style>
+  </dgm:styleLbl>
+  <dgm:styleLbl name="node3">
+    <dgm:scene3d>
+      <a:camera prst="orthographicFront"/>
+      <a:lightRig rig="threePt" dir="t"/>
+    </dgm:scene3d>
+    <dgm:sp3d/>
+    <dgm:txPr/>
+    <dgm:style>
+      <a:lnRef idx="3">
+        <a:scrgbClr r="0" g="0" b="0"/>
+      </a:lnRef>
+      <a:fillRef idx="1">
+        <a:scrgbClr r="0" g="0" b="0"/>
+      </a:fillRef>
+      <a:effectRef idx="1">
+        <a:scrgbClr r="0" g="0" b="0"/>
+      </a:effectRef>
+      <a:fontRef idx="minor">
+        <a:schemeClr val="lt1"/>
+      </a:fontRef>
+    </dgm:style>
+  </dgm:styleLbl>
+  <dgm:styleLbl name="node4">
+    <dgm:scene3d>
+      <a:camera prst="orthographicFront"/>
+      <a:lightRig rig="threePt" dir="t"/>
+    </dgm:scene3d>
+    <dgm:sp3d/>
+    <dgm:txPr/>
+    <dgm:style>
+      <a:lnRef idx="3">
+        <a:scrgbClr r="0" g="0" b="0"/>
+      </a:lnRef>
+      <a:fillRef idx="1">
+        <a:scrgbClr r="0" g="0" b="0"/>
+      </a:fillRef>
+      <a:effectRef idx="1">
+        <a:scrgbClr r="0" g="0" b="0"/>
+      </a:effectRef>
+      <a:fontRef idx="minor">
+        <a:schemeClr val="lt1"/>
+      </a:fontRef>
+    </dgm:style>
+  </dgm:styleLbl>
+  <dgm:styleLbl name="fgImgPlace1">
+    <dgm:scene3d>
+      <a:camera prst="orthographicFront"/>
+      <a:lightRig rig="threePt" dir="t"/>
+    </dgm:scene3d>
+    <dgm:sp3d/>
+    <dgm:txPr/>
+    <dgm:style>
+      <a:lnRef idx="3">
+        <a:scrgbClr r="0" g="0" b="0"/>
+      </a:lnRef>
+      <a:fillRef idx="1">
+        <a:scrgbClr r="0" g="0" b="0"/>
+      </a:fillRef>
+      <a:effectRef idx="1">
+        <a:scrgbClr r="0" g="0" b="0"/>
+      </a:effectRef>
+      <a:fontRef idx="minor"/>
+    </dgm:style>
+  </dgm:styleLbl>
+  <dgm:styleLbl name="alignImgPlace1">
+    <dgm:scene3d>
+      <a:camera prst="orthographicFront"/>
+      <a:lightRig rig="threePt" dir="t"/>
+    </dgm:scene3d>
+    <dgm:sp3d/>
+    <dgm:txPr/>
+    <dgm:style>
+      <a:lnRef idx="3">
+        <a:scrgbClr r="0" g="0" b="0"/>
+      </a:lnRef>
+      <a:fillRef idx="1">
+        <a:scrgbClr r="0" g="0" b="0"/>
+      </a:fillRef>
+      <a:effectRef idx="1">
+        <a:scrgbClr r="0" g="0" b="0"/>
+      </a:effectRef>
+      <a:fontRef idx="minor"/>
+    </dgm:style>
+  </dgm:styleLbl>
+  <dgm:styleLbl name="bgImgPlace1">
+    <dgm:scene3d>
+      <a:camera prst="orthographicFront"/>
+      <a:lightRig rig="threePt" dir="t"/>
+    </dgm:scene3d>
+    <dgm:sp3d/>
+    <dgm:txPr/>
+    <dgm:style>
+      <a:lnRef idx="3">
+        <a:scrgbClr r="0" g="0" b="0"/>
+      </a:lnRef>
+      <a:fillRef idx="1">
+        <a:scrgbClr r="0" g="0" b="0"/>
+      </a:fillRef>
+      <a:effectRef idx="1">
+        <a:scrgbClr r="0" g="0" b="0"/>
+      </a:effectRef>
+      <a:fontRef idx="minor"/>
+    </dgm:style>
+  </dgm:styleLbl>
+  <dgm:styleLbl name="sibTrans2D1">
+    <dgm:scene3d>
+      <a:camera prst="orthographicFront"/>
+      <a:lightRig rig="threePt" dir="t"/>
+    </dgm:scene3d>
+    <dgm:sp3d/>
+    <dgm:txPr/>
+    <dgm:style>
+      <a:lnRef idx="0">
+        <a:scrgbClr r="0" g="0" b="0"/>
+      </a:lnRef>
+      <a:fillRef idx="1">
+        <a:scrgbClr r="0" g="0" b="0"/>
+      </a:fillRef>
+      <a:effectRef idx="1">
+        <a:scrgbClr r="0" g="0" b="0"/>
+      </a:effectRef>
+      <a:fontRef idx="minor">
+        <a:schemeClr val="lt1"/>
+      </a:fontRef>
+    </dgm:style>
+  </dgm:styleLbl>
+  <dgm:styleLbl name="fgSibTrans2D1">
+    <dgm:scene3d>
+      <a:camera prst="orthographicFront"/>
+      <a:lightRig rig="threePt" dir="t"/>
+    </dgm:scene3d>
+    <dgm:sp3d/>
+    <dgm:txPr/>
+    <dgm:style>
+      <a:lnRef idx="0">
+        <a:scrgbClr r="0" g="0" b="0"/>
+      </a:lnRef>
+      <a:fillRef idx="1">
+        <a:scrgbClr r="0" g="0" b="0"/>
+      </a:fillRef>
+      <a:effectRef idx="1">
+        <a:scrgbClr r="0" g="0" b="0"/>
+      </a:effectRef>
+      <a:fontRef idx="minor">
+        <a:schemeClr val="lt1"/>
+      </a:fontRef>
+    </dgm:style>
+  </dgm:styleLbl>
+  <dgm:styleLbl name="bgSibTrans2D1">
+    <dgm:scene3d>
+      <a:camera prst="orthographicFront"/>
+      <a:lightRig rig="threePt" dir="t"/>
+    </dgm:scene3d>
+    <dgm:sp3d/>
+    <dgm:txPr/>
+    <dgm:style>
+      <a:lnRef idx="0">
+        <a:scrgbClr r="0" g="0" b="0"/>
+      </a:lnRef>
+      <a:fillRef idx="1">
+        <a:scrgbClr r="0" g="0" b="0"/>
+      </a:fillRef>
+      <a:effectRef idx="1">
+        <a:scrgbClr r="0" g="0" b="0"/>
+      </a:effectRef>
+      <a:fontRef idx="minor">
+        <a:schemeClr val="lt1"/>
+      </a:fontRef>
+    </dgm:style>
+  </dgm:styleLbl>
+  <dgm:styleLbl name="sibTrans1D1">
+    <dgm:scene3d>
+      <a:camera prst="orthographicFront"/>
+      <a:lightRig rig="threePt" dir="t"/>
+    </dgm:scene3d>
+    <dgm:sp3d/>
+    <dgm:txPr/>
+    <dgm:style>
+      <a:lnRef idx="1">
+        <a:scrgbClr r="0" g="0" b="0"/>
+      </a:lnRef>
+      <a:fillRef idx="0">
+        <a:scrgbClr r="0" g="0" b="0"/>
+      </a:fillRef>
+      <a:effectRef idx="0">
+        <a:scrgbClr r="0" g="0" b="0"/>
+      </a:effectRef>
+      <a:fontRef idx="minor"/>
+    </dgm:style>
+  </dgm:styleLbl>
+  <dgm:styleLbl name="callout">
+    <dgm:scene3d>
+      <a:camera prst="orthographicFront"/>
+      <a:lightRig rig="threePt" dir="t"/>
+    </dgm:scene3d>
+    <dgm:sp3d/>
+    <dgm:txPr/>
+    <dgm:style>
+      <a:lnRef idx="2">
+        <a:scrgbClr r="0" g="0" b="0"/>
+      </a:lnRef>
+      <a:fillRef idx="1">
+        <a:scrgbClr r="0" g="0" b="0"/>
+      </a:fillRef>
+      <a:effectRef idx="1">
+        <a:scrgbClr r="0" g="0" b="0"/>
+      </a:effectRef>
+      <a:fontRef idx="minor"/>
+    </dgm:style>
+  </dgm:styleLbl>
+  <dgm:styleLbl name="asst0">
+    <dgm:scene3d>
+      <a:camera prst="orthographicFront"/>
+      <a:lightRig rig="threePt" dir="t"/>
+    </dgm:scene3d>
+    <dgm:sp3d/>
+    <dgm:txPr/>
+    <dgm:style>
+      <a:lnRef idx="3">
+        <a:scrgbClr r="0" g="0" b="0"/>
+      </a:lnRef>
+      <a:fillRef idx="1">
+        <a:scrgbClr r="0" g="0" b="0"/>
+      </a:fillRef>
+      <a:effectRef idx="1">
+        <a:scrgbClr r="0" g="0" b="0"/>
+      </a:effectRef>
+      <a:fontRef idx="minor">
+        <a:schemeClr val="lt1"/>
+      </a:fontRef>
+    </dgm:style>
+  </dgm:styleLbl>
+  <dgm:styleLbl name="asst1">
+    <dgm:scene3d>
+      <a:camera prst="orthographicFront"/>
+      <a:lightRig rig="threePt" dir="t"/>
+    </dgm:scene3d>
+    <dgm:sp3d/>
+    <dgm:txPr/>
+    <dgm:style>
+      <a:lnRef idx="3">
+        <a:scrgbClr r="0" g="0" b="0"/>
+      </a:lnRef>
+      <a:fillRef idx="1">
+        <a:scrgbClr r="0" g="0" b="0"/>
+      </a:fillRef>
+      <a:effectRef idx="1">
+        <a:scrgbClr r="0" g="0" b="0"/>
+      </a:effectRef>
+      <a:fontRef idx="minor">
+        <a:schemeClr val="lt1"/>
+      </a:fontRef>
+    </dgm:style>
+  </dgm:styleLbl>
+  <dgm:styleLbl name="asst2">
+    <dgm:scene3d>
+      <a:camera prst="orthographicFront"/>
+      <a:lightRig rig="threePt" dir="t"/>
+    </dgm:scene3d>
+    <dgm:sp3d/>
+    <dgm:txPr/>
+    <dgm:style>
+      <a:lnRef idx="3">
+        <a:scrgbClr r="0" g="0" b="0"/>
+      </a:lnRef>
+      <a:fillRef idx="1">
+        <a:scrgbClr r="0" g="0" b="0"/>
+      </a:fillRef>
+      <a:effectRef idx="1">
+        <a:scrgbClr r="0" g="0" b="0"/>
+      </a:effectRef>
+      <a:fontRef idx="minor">
+        <a:schemeClr val="lt1"/>
+      </a:fontRef>
+    </dgm:style>
+  </dgm:styleLbl>
+  <dgm:styleLbl name="asst3">
+    <dgm:scene3d>
+      <a:camera prst="orthographicFront"/>
+      <a:lightRig rig="threePt" dir="t"/>
+    </dgm:scene3d>
+    <dgm:sp3d/>
+    <dgm:txPr/>
+    <dgm:style>
+      <a:lnRef idx="3">
+        <a:scrgbClr r="0" g="0" b="0"/>
+      </a:lnRef>
+      <a:fillRef idx="1">
+        <a:scrgbClr r="0" g="0" b="0"/>
+      </a:fillRef>
+      <a:effectRef idx="1">
+        <a:scrgbClr r="0" g="0" b="0"/>
+      </a:effectRef>
+      <a:fontRef idx="minor">
+        <a:schemeClr val="lt1"/>
+      </a:fontRef>
+    </dgm:style>
+  </dgm:styleLbl>
+  <dgm:styleLbl name="asst4">
+    <dgm:scene3d>
+      <a:camera prst="orthographicFront"/>
+      <a:lightRig rig="threePt" dir="t"/>
+    </dgm:scene3d>
+    <dgm:sp3d/>
+    <dgm:txPr/>
+    <dgm:style>
+      <a:lnRef idx="3">
+        <a:scrgbClr r="0" g="0" b="0"/>
+      </a:lnRef>
+      <a:fillRef idx="1">
+        <a:scrgbClr r="0" g="0" b="0"/>
+      </a:fillRef>
+      <a:effectRef idx="1">
+        <a:scrgbClr r="0" g="0" b="0"/>
+      </a:effectRef>
+      <a:fontRef idx="minor">
+        <a:schemeClr val="lt1"/>
+      </a:fontRef>
+    </dgm:style>
+  </dgm:styleLbl>
+  <dgm:styleLbl name="parChTrans2D1">
+    <dgm:scene3d>
+      <a:camera prst="orthographicFront"/>
+      <a:lightRig rig="threePt" dir="t"/>
+    </dgm:scene3d>
+    <dgm:sp3d/>
+    <dgm:txPr/>
+    <dgm:style>
+      <a:lnRef idx="3">
+        <a:scrgbClr r="0" g="0" b="0"/>
+      </a:lnRef>
+      <a:fillRef idx="1">
+        <a:scrgbClr r="0" g="0" b="0"/>
+      </a:fillRef>
+      <a:effectRef idx="1">
+        <a:scrgbClr r="0" g="0" b="0"/>
+      </a:effectRef>
+      <a:fontRef idx="minor">
+        <a:schemeClr val="lt1"/>
+      </a:fontRef>
+    </dgm:style>
+  </dgm:styleLbl>
+  <dgm:styleLbl name="parChTrans2D2">
+    <dgm:scene3d>
+      <a:camera prst="orthographicFront"/>
+      <a:lightRig rig="threePt" dir="t"/>
+    </dgm:scene3d>
+    <dgm:sp3d/>
+    <dgm:txPr/>
+    <dgm:style>
+      <a:lnRef idx="3">
+        <a:scrgbClr r="0" g="0" b="0"/>
+      </a:lnRef>
+      <a:fillRef idx="1">
+        <a:scrgbClr r="0" g="0" b="0"/>
+      </a:fillRef>
+      <a:effectRef idx="1">
+        <a:scrgbClr r="0" g="0" b="0"/>
+      </a:effectRef>
+      <a:fontRef idx="minor">
+        <a:schemeClr val="lt1"/>
+      </a:fontRef>
+    </dgm:style>
+  </dgm:styleLbl>
+  <dgm:styleLbl name="parChTrans2D3">
+    <dgm:scene3d>
+      <a:camera prst="orthographicFront"/>
+      <a:lightRig rig="threePt" dir="t"/>
+    </dgm:scene3d>
+    <dgm:sp3d/>
+    <dgm:txPr/>
+    <dgm:style>
+      <a:lnRef idx="3">
+        <a:scrgbClr r="0" g="0" b="0"/>
+      </a:lnRef>
+      <a:fillRef idx="1">
+        <a:scrgbClr r="0" g="0" b="0"/>
+      </a:fillRef>
+      <a:effectRef idx="1">
+        <a:scrgbClr r="0" g="0" b="0"/>
+      </a:effectRef>
+      <a:fontRef idx="minor">
+        <a:schemeClr val="lt1"/>
+      </a:fontRef>
+    </dgm:style>
+  </dgm:styleLbl>
+  <dgm:styleLbl name="parChTrans2D4">
+    <dgm:scene3d>
+      <a:camera prst="orthographicFront"/>
+      <a:lightRig rig="threePt" dir="t"/>
+    </dgm:scene3d>
+    <dgm:sp3d/>
+    <dgm:txPr/>
+    <dgm:style>
+      <a:lnRef idx="3">
+        <a:scrgbClr r="0" g="0" b="0"/>
+      </a:lnRef>
+      <a:fillRef idx="1">
+        <a:scrgbClr r="0" g="0" b="0"/>
+      </a:fillRef>
+      <a:effectRef idx="1">
+        <a:scrgbClr r="0" g="0" b="0"/>
+      </a:effectRef>
+      <a:fontRef idx="minor">
+        <a:schemeClr val="lt1"/>
+      </a:fontRef>
+    </dgm:style>
+  </dgm:styleLbl>
+  <dgm:styleLbl name="parChTrans1D1">
+    <dgm:scene3d>
+      <a:camera prst="orthographicFront"/>
+      <a:lightRig rig="threePt" dir="t"/>
+    </dgm:scene3d>
+    <dgm:sp3d/>
+    <dgm:txPr/>
+    <dgm:style>
+      <a:lnRef idx="2">
+        <a:scrgbClr r="0" g="0" b="0"/>
+      </a:lnRef>
+      <a:fillRef idx="0">
+        <a:scrgbClr r="0" g="0" b="0"/>
+      </a:fillRef>
+      <a:effectRef idx="0">
+        <a:scrgbClr r="0" g="0" b="0"/>
+      </a:effectRef>
+      <a:fontRef idx="minor"/>
+    </dgm:style>
+  </dgm:styleLbl>
+  <dgm:styleLbl name="parChTrans1D2">
+    <dgm:scene3d>
+      <a:camera prst="orthographicFront"/>
+      <a:lightRig rig="threePt" dir="t"/>
+    </dgm:scene3d>
+    <dgm:sp3d/>
+    <dgm:txPr/>
+    <dgm:style>
+      <a:lnRef idx="2">
+        <a:scrgbClr r="0" g="0" b="0"/>
+      </a:lnRef>
+      <a:fillRef idx="0">
+        <a:scrgbClr r="0" g="0" b="0"/>
+      </a:fillRef>
+      <a:effectRef idx="0">
+        <a:scrgbClr r="0" g="0" b="0"/>
+      </a:effectRef>
+      <a:fontRef idx="minor"/>
+    </dgm:style>
+  </dgm:styleLbl>
+  <dgm:styleLbl name="parChTrans1D3">
+    <dgm:scene3d>
+      <a:camera prst="orthographicFront"/>
+      <a:lightRig rig="threePt" dir="t"/>
+    </dgm:scene3d>
+    <dgm:sp3d/>
+    <dgm:txPr/>
+    <dgm:style>
+      <a:lnRef idx="2">
+        <a:scrgbClr r="0" g="0" b="0"/>
+      </a:lnRef>
+      <a:fillRef idx="0">
+        <a:scrgbClr r="0" g="0" b="0"/>
+      </a:fillRef>
+      <a:effectRef idx="0">
+        <a:scrgbClr r="0" g="0" b="0"/>
+      </a:effectRef>
+      <a:fontRef idx="minor"/>
+    </dgm:style>
+  </dgm:styleLbl>
+  <dgm:styleLbl name="parChTrans1D4">
+    <dgm:scene3d>
+      <a:camera prst="orthographicFront"/>
+      <a:lightRig rig="threePt" dir="t"/>
+    </dgm:scene3d>
+    <dgm:sp3d/>
+    <dgm:txPr/>
+    <dgm:style>
+      <a:lnRef idx="2">
+        <a:scrgbClr r="0" g="0" b="0"/>
+      </a:lnRef>
+      <a:fillRef idx="0">
+        <a:scrgbClr r="0" g="0" b="0"/>
+      </a:fillRef>
+      <a:effectRef idx="0">
+        <a:scrgbClr r="0" g="0" b="0"/>
+      </a:effectRef>
+      <a:fontRef idx="minor"/>
+    </dgm:style>
+  </dgm:styleLbl>
+  <dgm:styleLbl name="fgAcc1">
+    <dgm:scene3d>
+      <a:camera prst="orthographicFront"/>
+      <a:lightRig rig="threePt" dir="t"/>
+    </dgm:scene3d>
+    <dgm:sp3d/>
+    <dgm:txPr/>
+    <dgm:style>
+      <a:lnRef idx="2">
+        <a:scrgbClr r="0" g="0" b="0"/>
+      </a:lnRef>
+      <a:fillRef idx="1">
+        <a:scrgbClr r="0" g="0" b="0"/>
+      </a:fillRef>
+      <a:effectRef idx="0">
+        <a:scrgbClr r="0" g="0" b="0"/>
+      </a:effectRef>
+      <a:fontRef idx="minor"/>
+    </dgm:style>
+  </dgm:styleLbl>
+  <dgm:styleLbl name="conFgAcc1">
+    <dgm:scene3d>
+      <a:camera prst="orthographicFront"/>
+      <a:lightRig rig="threePt" dir="t"/>
+    </dgm:scene3d>
+    <dgm:sp3d/>
+    <dgm:txPr/>
+    <dgm:style>
+      <a:lnRef idx="2">
+        <a:scrgbClr r="0" g="0" b="0"/>
+      </a:lnRef>
+      <a:fillRef idx="1">
+        <a:scrgbClr r="0" g="0" b="0"/>
+      </a:fillRef>
+      <a:effectRef idx="0">
+        <a:scrgbClr r="0" g="0" b="0"/>
+      </a:effectRef>
+      <a:fontRef idx="minor"/>
+    </dgm:style>
+  </dgm:styleLbl>
+  <dgm:styleLbl name="alignAcc1">
+    <dgm:scene3d>
+      <a:camera prst="orthographicFront"/>
+      <a:lightRig rig="threePt" dir="t"/>
+    </dgm:scene3d>
+    <dgm:sp3d/>
+    <dgm:txPr/>
+    <dgm:style>
+      <a:lnRef idx="2">
+        <a:scrgbClr r="0" g="0" b="0"/>
+      </a:lnRef>
+      <a:fillRef idx="1">
+        <a:scrgbClr r="0" g="0" b="0"/>
+      </a:fillRef>
+      <a:effectRef idx="0">
+        <a:scrgbClr r="0" g="0" b="0"/>
+      </a:effectRef>
+      <a:fontRef idx="minor"/>
+    </dgm:style>
+  </dgm:styleLbl>
+  <dgm:styleLbl name="trAlignAcc1">
+    <dgm:scene3d>
+      <a:camera prst="orthographicFront"/>
+      <a:lightRig rig="threePt" dir="t"/>
+    </dgm:scene3d>
+    <dgm:sp3d/>
+    <dgm:txPr/>
+    <dgm:style>
+      <a:lnRef idx="1">
+        <a:scrgbClr r="0" g="0" b="0"/>
+      </a:lnRef>
+      <a:fillRef idx="1">
+        <a:scrgbClr r="0" g="0" b="0"/>
+      </a:fillRef>
+      <a:effectRef idx="0">
+        <a:scrgbClr r="0" g="0" b="0"/>
+      </a:effectRef>
+      <a:fontRef idx="minor"/>
+    </dgm:style>
+  </dgm:styleLbl>
+  <dgm:styleLbl name="bgAcc1">
+    <dgm:scene3d>
+      <a:camera prst="orthographicFront"/>
+      <a:lightRig rig="threePt" dir="t"/>
+    </dgm:scene3d>
+    <dgm:sp3d/>
+    <dgm:txPr/>
+    <dgm:style>
+      <a:lnRef idx="2">
+        <a:scrgbClr r="0" g="0" b="0"/>
+      </a:lnRef>
+      <a:fillRef idx="1">
+        <a:scrgbClr r="0" g="0" b="0"/>
+      </a:fillRef>
+      <a:effectRef idx="0">
+        <a:scrgbClr r="0" g="0" b="0"/>
+      </a:effectRef>
+      <a:fontRef idx="minor"/>
+    </dgm:style>
+  </dgm:styleLbl>
+  <dgm:styleLbl name="solidFgAcc1">
+    <dgm:scene3d>
+      <a:camera prst="orthographicFront"/>
+      <a:lightRig rig="threePt" dir="t"/>
+    </dgm:scene3d>
+    <dgm:sp3d/>
+    <dgm:txPr/>
+    <dgm:style>
+      <a:lnRef idx="2">
+        <a:scrgbClr r="0" g="0" b="0"/>
+      </a:lnRef>
+      <a:fillRef idx="1">
+        <a:scrgbClr r="0" g="0" b="0"/>
+      </a:fillRef>
+      <a:effectRef idx="0">
+        <a:scrgbClr r="0" g="0" b="0"/>
+      </a:effectRef>
+      <a:fontRef idx="minor"/>
+    </dgm:style>
+  </dgm:styleLbl>
+  <dgm:styleLbl name="solidAlignAcc1">
+    <dgm:scene3d>
+      <a:camera prst="orthographicFront"/>
+      <a:lightRig rig="threePt" dir="t"/>
+    </dgm:scene3d>
+    <dgm:sp3d/>
+    <dgm:txPr/>
+    <dgm:style>
+      <a:lnRef idx="2">
+        <a:scrgbClr r="0" g="0" b="0"/>
+      </a:lnRef>
+      <a:fillRef idx="1">
+        <a:scrgbClr r="0" g="0" b="0"/>
+      </a:fillRef>
+      <a:effectRef idx="0">
+        <a:scrgbClr r="0" g="0" b="0"/>
+      </a:effectRef>
+      <a:fontRef idx="minor"/>
+    </dgm:style>
+  </dgm:styleLbl>
+  <dgm:styleLbl name="solidBgAcc1">
+    <dgm:scene3d>
+      <a:camera prst="orthographicFront"/>
+      <a:lightRig rig="threePt" dir="t"/>
+    </dgm:scene3d>
+    <dgm:sp3d/>
+    <dgm:txPr/>
+    <dgm:style>
+      <a:lnRef idx="2">
+        <a:scrgbClr r="0" g="0" b="0"/>
+      </a:lnRef>
+      <a:fillRef idx="1">
+        <a:scrgbClr r="0" g="0" b="0"/>
+      </a:fillRef>
+      <a:effectRef idx="0">
+        <a:scrgbClr r="0" g="0" b="0"/>
+      </a:effectRef>
+      <a:fontRef idx="minor"/>
+    </dgm:style>
+  </dgm:styleLbl>
+  <dgm:styleLbl name="fgAccFollowNode1">
+    <dgm:scene3d>
+      <a:camera prst="orthographicFront"/>
+      <a:lightRig rig="threePt" dir="t"/>
+    </dgm:scene3d>
+    <dgm:sp3d/>
+    <dgm:txPr/>
+    <dgm:style>
+      <a:lnRef idx="2">
+        <a:scrgbClr r="0" g="0" b="0"/>
+      </a:lnRef>
+      <a:fillRef idx="1">
+        <a:scrgbClr r="0" g="0" b="0"/>
+      </a:fillRef>
+      <a:effectRef idx="0">
+        <a:scrgbClr r="0" g="0" b="0"/>
+      </a:effectRef>
+      <a:fontRef idx="minor"/>
+    </dgm:style>
+  </dgm:styleLbl>
+  <dgm:styleLbl name="alignAccFollowNode1">
+    <dgm:scene3d>
+      <a:camera prst="orthographicFront"/>
+      <a:lightRig rig="threePt" dir="t"/>
+    </dgm:scene3d>
+    <dgm:sp3d/>
+    <dgm:txPr/>
+    <dgm:style>
+      <a:lnRef idx="2">
+        <a:scrgbClr r="0" g="0" b="0"/>
+      </a:lnRef>
+      <a:fillRef idx="1">
+        <a:scrgbClr r="0" g="0" b="0"/>
+      </a:fillRef>
+      <a:effectRef idx="0">
+        <a:scrgbClr r="0" g="0" b="0"/>
+      </a:effectRef>
+      <a:fontRef idx="minor"/>
+    </dgm:style>
+  </dgm:styleLbl>
+  <dgm:styleLbl name="bgAccFollowNode1">
+    <dgm:scene3d>
+      <a:camera prst="orthographicFront"/>
+      <a:lightRig rig="threePt" dir="t"/>
+    </dgm:scene3d>
+    <dgm:sp3d/>
+    <dgm:txPr/>
+    <dgm:style>
+      <a:lnRef idx="2">
+        <a:scrgbClr r="0" g="0" b="0"/>
+      </a:lnRef>
+      <a:fillRef idx="1">
+        <a:scrgbClr r="0" g="0" b="0"/>
+      </a:fillRef>
+      <a:effectRef idx="0">
+        <a:scrgbClr r="0" g="0" b="0"/>
+      </a:effectRef>
+      <a:fontRef idx="minor"/>
+    </dgm:style>
+  </dgm:styleLbl>
+  <dgm:styleLbl name="fgAcc0">
+    <dgm:scene3d>
+      <a:camera prst="orthographicFront"/>
+      <a:lightRig rig="threePt" dir="t"/>
+    </dgm:scene3d>
+    <dgm:sp3d/>
+    <dgm:txPr/>
+    <dgm:style>
+      <a:lnRef idx="2">
+        <a:scrgbClr r="0" g="0" b="0"/>
+      </a:lnRef>
+      <a:fillRef idx="1">
+        <a:scrgbClr r="0" g="0" b="0"/>
+      </a:fillRef>
+      <a:effectRef idx="0">
+        <a:scrgbClr r="0" g="0" b="0"/>
+      </a:effectRef>
+      <a:fontRef idx="minor"/>
+    </dgm:style>
+  </dgm:styleLbl>
+  <dgm:styleLbl name="fgAcc2">
+    <dgm:scene3d>
+      <a:camera prst="orthographicFront"/>
+      <a:lightRig rig="threePt" dir="t"/>
+    </dgm:scene3d>
+    <dgm:sp3d/>
+    <dgm:txPr/>
+    <dgm:style>
+      <a:lnRef idx="2">
+        <a:scrgbClr r="0" g="0" b="0"/>
+      </a:lnRef>
+      <a:fillRef idx="1">
+        <a:scrgbClr r="0" g="0" b="0"/>
+      </a:fillRef>
+      <a:effectRef idx="0">
+        <a:scrgbClr r="0" g="0" b="0"/>
+      </a:effectRef>
+      <a:fontRef idx="minor"/>
+    </dgm:style>
+  </dgm:styleLbl>
+  <dgm:styleLbl name="fgAcc3">
+    <dgm:scene3d>
+      <a:camera prst="orthographicFront"/>
+      <a:lightRig rig="threePt" dir="t"/>
+    </dgm:scene3d>
+    <dgm:sp3d/>
+    <dgm:txPr/>
+    <dgm:style>
+      <a:lnRef idx="2">
+        <a:scrgbClr r="0" g="0" b="0"/>
+      </a:lnRef>
+      <a:fillRef idx="1">
+        <a:scrgbClr r="0" g="0" b="0"/>
+      </a:fillRef>
+      <a:effectRef idx="0">
+        <a:scrgbClr r="0" g="0" b="0"/>
+      </a:effectRef>
+      <a:fontRef idx="minor"/>
+    </dgm:style>
+  </dgm:styleLbl>
+  <dgm:styleLbl name="fgAcc4">
+    <dgm:scene3d>
+      <a:camera prst="orthographicFront"/>
+      <a:lightRig rig="threePt" dir="t"/>
+    </dgm:scene3d>
+    <dgm:sp3d/>
+    <dgm:txPr/>
+    <dgm:style>
+      <a:lnRef idx="2">
+        <a:scrgbClr r="0" g="0" b="0"/>
+      </a:lnRef>
+      <a:fillRef idx="1">
+        <a:scrgbClr r="0" g="0" b="0"/>
+      </a:fillRef>
+      <a:effectRef idx="0">
+        <a:scrgbClr r="0" g="0" b="0"/>
+      </a:effectRef>
+      <a:fontRef idx="minor"/>
+    </dgm:style>
+  </dgm:styleLbl>
+  <dgm:styleLbl name="bgShp">
+    <dgm:scene3d>
+      <a:camera prst="orthographicFront"/>
+      <a:lightRig rig="threePt" dir="t"/>
+    </dgm:scene3d>
+    <dgm:sp3d/>
+    <dgm:txPr/>
+    <dgm:style>
+      <a:lnRef idx="0">
+        <a:scrgbClr r="0" g="0" b="0"/>
+      </a:lnRef>
+      <a:fillRef idx="1">
+        <a:scrgbClr r="0" g="0" b="0"/>
+      </a:fillRef>
+      <a:effectRef idx="0">
+        <a:scrgbClr r="0" g="0" b="0"/>
+      </a:effectRef>
+      <a:fontRef idx="minor"/>
+    </dgm:style>
+  </dgm:styleLbl>
+  <dgm:styleLbl name="dkBgShp">
+    <dgm:scene3d>
+      <a:camera prst="orthographicFront"/>
+      <a:lightRig rig="threePt" dir="t"/>
+    </dgm:scene3d>
+    <dgm:sp3d/>
+    <dgm:txPr/>
+    <dgm:style>
+      <a:lnRef idx="0">
+        <a:scrgbClr r="0" g="0" b="0"/>
+      </a:lnRef>
+      <a:fillRef idx="1">
+        <a:scrgbClr r="0" g="0" b="0"/>
+      </a:fillRef>
+      <a:effectRef idx="0">
+        <a:scrgbClr r="0" g="0" b="0"/>
+      </a:effectRef>
+      <a:fontRef idx="minor"/>
+    </dgm:style>
+  </dgm:styleLbl>
+  <dgm:styleLbl name="trBgShp">
+    <dgm:scene3d>
+      <a:camera prst="orthographicFront"/>
+      <a:lightRig rig="threePt" dir="t"/>
+    </dgm:scene3d>
+    <dgm:sp3d/>
+    <dgm:txPr/>
+    <dgm:style>
+      <a:lnRef idx="0">
+        <a:scrgbClr r="0" g="0" b="0"/>
+      </a:lnRef>
+      <a:fillRef idx="1">
+        <a:scrgbClr r="0" g="0" b="0"/>
+      </a:fillRef>
+      <a:effectRef idx="0">
+        <a:scrgbClr r="0" g="0" b="0"/>
+      </a:effectRef>
+      <a:fontRef idx="minor"/>
+    </dgm:style>
+  </dgm:styleLbl>
+  <dgm:styleLbl name="fgShp">
+    <dgm:scene3d>
+      <a:camera prst="orthographicFront"/>
+      <a:lightRig rig="threePt" dir="t"/>
+    </dgm:scene3d>
+    <dgm:sp3d/>
+    <dgm:txPr/>
+    <dgm:style>
+      <a:lnRef idx="3">
+        <a:scrgbClr r="0" g="0" b="0"/>
+      </a:lnRef>
+      <a:fillRef idx="1">
+        <a:scrgbClr r="0" g="0" b="0"/>
+      </a:fillRef>
+      <a:effectRef idx="1">
+        <a:scrgbClr r="0" g="0" b="0"/>
+      </a:effectRef>
+      <a:fontRef idx="minor"/>
+    </dgm:style>
+  </dgm:styleLbl>
+  <dgm:styleLbl name="revTx">
+    <dgm:scene3d>
+      <a:camera prst="orthographicFront"/>
+      <a:lightRig rig="threePt" dir="t"/>
+    </dgm:scene3d>
+    <dgm:sp3d/>
+    <dgm:txPr/>
+    <dgm:style>
+      <a:lnRef idx="0">
+        <a:scrgbClr r="0" g="0" b="0"/>
+      </a:lnRef>
+      <a:fillRef idx="0">
+        <a:scrgbClr r="0" g="0" b="0"/>
+      </a:fillRef>
+      <a:effectRef idx="0">
+        <a:scrgbClr r="0" g="0" b="0"/>
+      </a:effectRef>
+      <a:fontRef idx="minor"/>
+    </dgm:style>
+  </dgm:styleLbl>
+</dgm:styleDef>
 </file>
 
 <file path=ppt/slideLayouts/slideLayout1.xml><?xml version="1.0" encoding="utf-8"?>
@@ -3316,6 +8771,14 @@
 <file path=ppt/slides/slide1.xml><?xml version="1.0" encoding="utf-8"?>
 <p:sld xmlns:a="http://schemas.openxmlformats.org/drawingml/2006/main" xmlns:r="http://schemas.openxmlformats.org/officeDocument/2006/relationships" xmlns:p="http://schemas.openxmlformats.org/presentationml/2006/main">
   <p:cSld>
+    <p:bg>
+      <p:bgPr>
+        <a:solidFill>
+          <a:schemeClr val="bg1"/>
+        </a:solidFill>
+        <a:effectLst/>
+      </p:bgPr>
+    </p:bg>
     <p:spTree>
       <p:nvGrpSpPr>
         <p:cNvPr id="1" name=""/>
@@ -3330,6 +8793,122 @@
           <a:chExt cx="0" cy="0"/>
         </a:xfrm>
       </p:grpSpPr>
+      <p:pic>
+        <p:nvPicPr>
+          <p:cNvPr id="6" name="Picture 5">
+            <a:extLst>
+              <a:ext uri="{FF2B5EF4-FFF2-40B4-BE49-F238E27FC236}">
+                <a16:creationId xmlns:a16="http://schemas.microsoft.com/office/drawing/2014/main" id="{4A88E096-526E-A1F9-8570-53E33E53EE9F}"/>
+              </a:ext>
+            </a:extLst>
+          </p:cNvPr>
+          <p:cNvPicPr>
+            <a:picLocks noChangeAspect="1"/>
+          </p:cNvPicPr>
+          <p:nvPr/>
+        </p:nvPicPr>
+        <p:blipFill>
+          <a:blip r:embed="rId2">
+            <a:duotone>
+              <a:schemeClr val="bg2">
+                <a:shade val="45000"/>
+                <a:satMod val="135000"/>
+              </a:schemeClr>
+              <a:prstClr val="white"/>
+            </a:duotone>
+          </a:blip>
+          <a:srcRect b="6250"/>
+          <a:stretch>
+            <a:fillRect/>
+          </a:stretch>
+        </p:blipFill>
+        <p:spPr>
+          <a:xfrm>
+            <a:off x="20" y="10"/>
+            <a:ext cx="12191980" cy="6857990"/>
+          </a:xfrm>
+          <a:prstGeom prst="rect">
+            <a:avLst/>
+          </a:prstGeom>
+        </p:spPr>
+      </p:pic>
+      <p:sp>
+        <p:nvSpPr>
+          <p:cNvPr id="10" name="Rectangle 9">
+            <a:extLst>
+              <a:ext uri="{FF2B5EF4-FFF2-40B4-BE49-F238E27FC236}">
+                <a16:creationId xmlns:a16="http://schemas.microsoft.com/office/drawing/2014/main" id="{B50AB553-2A96-4A92-96F2-93548E096954}"/>
+              </a:ext>
+              <a:ext uri="{C183D7F6-B498-43B3-948B-1728B52AA6E4}">
+                <adec:decorative xmlns:adec="http://schemas.microsoft.com/office/drawing/2017/decorative" val="1"/>
+              </a:ext>
+            </a:extLst>
+          </p:cNvPr>
+          <p:cNvSpPr>
+            <a:spLocks noGrp="1" noRot="1" noChangeAspect="1" noMove="1" noResize="1" noEditPoints="1" noAdjustHandles="1" noChangeArrowheads="1" noChangeShapeType="1" noTextEdit="1"/>
+          </p:cNvSpPr>
+          <p:nvPr>
+            <p:extLst>
+              <p:ext uri="{386F3935-93C4-4BCD-93E2-E3B085C9AB24}">
+                <p16:designElem xmlns:p16="http://schemas.microsoft.com/office/powerpoint/2015/main" val="1"/>
+              </p:ext>
+            </p:extLst>
+          </p:nvPr>
+        </p:nvSpPr>
+        <p:spPr>
+          <a:xfrm>
+            <a:off x="0" y="0"/>
+            <a:ext cx="12192000" cy="6858000"/>
+          </a:xfrm>
+          <a:prstGeom prst="rect">
+            <a:avLst/>
+          </a:prstGeom>
+          <a:gradFill>
+            <a:gsLst>
+              <a:gs pos="10000">
+                <a:schemeClr val="bg2">
+                  <a:alpha val="68000"/>
+                </a:schemeClr>
+              </a:gs>
+              <a:gs pos="85000">
+                <a:schemeClr val="bg2">
+                  <a:alpha val="97000"/>
+                </a:schemeClr>
+              </a:gs>
+            </a:gsLst>
+            <a:path path="circle">
+              <a:fillToRect l="50000" t="50000" r="50000" b="50000"/>
+            </a:path>
+          </a:gradFill>
+          <a:ln>
+            <a:noFill/>
+          </a:ln>
+        </p:spPr>
+        <p:style>
+          <a:lnRef idx="2">
+            <a:schemeClr val="accent1">
+              <a:shade val="50000"/>
+            </a:schemeClr>
+          </a:lnRef>
+          <a:fillRef idx="1">
+            <a:schemeClr val="accent1"/>
+          </a:fillRef>
+          <a:effectRef idx="0">
+            <a:schemeClr val="accent1"/>
+          </a:effectRef>
+          <a:fontRef idx="minor">
+            <a:schemeClr val="lt1"/>
+          </a:fontRef>
+        </p:style>
+        <p:txBody>
+          <a:bodyPr rtlCol="0" anchor="ctr"/>
+          <a:lstStyle/>
+          <a:p>
+            <a:pPr algn="ctr"/>
+            <a:endParaRPr lang="en-US"/>
+          </a:p>
+        </p:txBody>
+      </p:sp>
       <p:sp>
         <p:nvSpPr>
           <p:cNvPr id="2" name="Title 1">
@@ -3346,59 +8925,57 @@
             <p:ph type="title"/>
           </p:nvPr>
         </p:nvSpPr>
-        <p:spPr/>
+        <p:spPr>
+          <a:xfrm>
+            <a:off x="838200" y="365125"/>
+            <a:ext cx="10515600" cy="1325563"/>
+          </a:xfrm>
+        </p:spPr>
         <p:txBody>
-          <a:bodyPr/>
+          <a:bodyPr>
+            <a:normAutofit/>
+          </a:bodyPr>
           <a:lstStyle/>
           <a:p>
-            <a:pPr algn="ctr"/>
             <a:r>
               <a:rPr lang="en-GB" dirty="0"/>
               <a:t>Character Controller Overview</a:t>
             </a:r>
+            <a:endParaRPr lang="en-GB"/>
           </a:p>
         </p:txBody>
       </p:sp>
-      <p:sp>
-        <p:nvSpPr>
-          <p:cNvPr id="3" name="Content Placeholder 2">
+      <p:graphicFrame>
+        <p:nvGraphicFramePr>
+          <p:cNvPr id="5" name="Content Placeholder 2">
             <a:extLst>
               <a:ext uri="{FF2B5EF4-FFF2-40B4-BE49-F238E27FC236}">
-                <a16:creationId xmlns:a16="http://schemas.microsoft.com/office/drawing/2014/main" id="{E155D41D-EDF8-E1F5-2964-550D92F33EFC}"/>
+                <a16:creationId xmlns:a16="http://schemas.microsoft.com/office/drawing/2014/main" id="{E44FF556-4801-45F7-B3E6-01F9196BBCC4}"/>
               </a:ext>
             </a:extLst>
           </p:cNvPr>
-          <p:cNvSpPr>
-            <a:spLocks noGrp="1"/>
-          </p:cNvSpPr>
+          <p:cNvGraphicFramePr>
+            <a:graphicFrameLocks noGrp="1"/>
+          </p:cNvGraphicFramePr>
           <p:nvPr>
             <p:ph idx="1"/>
+            <p:extLst>
+              <p:ext uri="{D42A27DB-BD31-4B8C-83A1-F6EECF244321}">
+                <p14:modId xmlns:p14="http://schemas.microsoft.com/office/powerpoint/2010/main" val="1235455489"/>
+              </p:ext>
+            </p:extLst>
           </p:nvPr>
-        </p:nvSpPr>
-        <p:spPr/>
-        <p:txBody>
-          <a:bodyPr/>
-          <a:lstStyle/>
-          <a:p>
-            <a:r>
-              <a:rPr lang="en-GB" dirty="0"/>
-              <a:t>Component composition</a:t>
-            </a:r>
-          </a:p>
-          <a:p>
-            <a:r>
-              <a:rPr lang="en-GB" dirty="0"/>
-              <a:t>Class inheritance</a:t>
-            </a:r>
-          </a:p>
-          <a:p>
-            <a:r>
-              <a:rPr lang="en-GB" dirty="0"/>
-              <a:t>Interface modules</a:t>
-            </a:r>
-          </a:p>
-        </p:txBody>
-      </p:sp>
+        </p:nvGraphicFramePr>
+        <p:xfrm>
+          <a:off x="838200" y="1825625"/>
+          <a:ext cx="10515600" cy="4351338"/>
+        </p:xfrm>
+        <a:graphic>
+          <a:graphicData uri="http://schemas.openxmlformats.org/drawingml/2006/diagram">
+            <dgm:relIds xmlns:dgm="http://schemas.openxmlformats.org/drawingml/2006/diagram" xmlns:r="http://schemas.openxmlformats.org/officeDocument/2006/relationships" r:dm="rId3" r:lo="rId4" r:qs="rId5" r:cs="rId6"/>
+          </a:graphicData>
+        </a:graphic>
+      </p:graphicFrame>
     </p:spTree>
     <p:extLst>
       <p:ext uri="{BB962C8B-B14F-4D97-AF65-F5344CB8AC3E}">
@@ -3415,6 +8992,14 @@
 <file path=ppt/slides/slide2.xml><?xml version="1.0" encoding="utf-8"?>
 <p:sld xmlns:a="http://schemas.openxmlformats.org/drawingml/2006/main" xmlns:r="http://schemas.openxmlformats.org/officeDocument/2006/relationships" xmlns:p="http://schemas.openxmlformats.org/presentationml/2006/main">
   <p:cSld>
+    <p:bg>
+      <p:bgPr>
+        <a:solidFill>
+          <a:schemeClr val="bg1"/>
+        </a:solidFill>
+        <a:effectLst/>
+      </p:bgPr>
+    </p:bg>
     <p:spTree>
       <p:nvGrpSpPr>
         <p:cNvPr id="1" name=""/>
@@ -3429,6 +9014,142 @@
           <a:chExt cx="0" cy="0"/>
         </a:xfrm>
       </p:grpSpPr>
+      <p:pic>
+        <p:nvPicPr>
+          <p:cNvPr id="6" name="Picture 5">
+            <a:extLst>
+              <a:ext uri="{FF2B5EF4-FFF2-40B4-BE49-F238E27FC236}">
+                <a16:creationId xmlns:a16="http://schemas.microsoft.com/office/drawing/2014/main" id="{27A6A1AE-8642-CBD0-51CB-06890A740E69}"/>
+              </a:ext>
+            </a:extLst>
+          </p:cNvPr>
+          <p:cNvPicPr>
+            <a:picLocks noChangeAspect="1"/>
+          </p:cNvPicPr>
+          <p:nvPr/>
+        </p:nvPicPr>
+        <p:blipFill>
+          <a:blip r:embed="rId2"/>
+          <a:srcRect b="15730"/>
+          <a:stretch>
+            <a:fillRect/>
+          </a:stretch>
+        </p:blipFill>
+        <p:spPr>
+          <a:xfrm>
+            <a:off x="20" y="10"/>
+            <a:ext cx="12191980" cy="6857990"/>
+          </a:xfrm>
+          <a:prstGeom prst="rect">
+            <a:avLst/>
+          </a:prstGeom>
+        </p:spPr>
+      </p:pic>
+      <p:sp>
+        <p:nvSpPr>
+          <p:cNvPr id="10" name="Rectangle 9">
+            <a:extLst>
+              <a:ext uri="{FF2B5EF4-FFF2-40B4-BE49-F238E27FC236}">
+                <a16:creationId xmlns:a16="http://schemas.microsoft.com/office/drawing/2014/main" id="{257363FD-7E77-4145-9483-331A807ADF0E}"/>
+              </a:ext>
+              <a:ext uri="{C183D7F6-B498-43B3-948B-1728B52AA6E4}">
+                <adec:decorative xmlns:adec="http://schemas.microsoft.com/office/drawing/2017/decorative" val="1"/>
+              </a:ext>
+            </a:extLst>
+          </p:cNvPr>
+          <p:cNvSpPr>
+            <a:spLocks noGrp="1" noRot="1" noChangeAspect="1" noMove="1" noResize="1" noEditPoints="1" noAdjustHandles="1" noChangeArrowheads="1" noChangeShapeType="1" noTextEdit="1"/>
+          </p:cNvSpPr>
+          <p:nvPr>
+            <p:extLst>
+              <p:ext uri="{386F3935-93C4-4BCD-93E2-E3B085C9AB24}">
+                <p16:designElem xmlns:p16="http://schemas.microsoft.com/office/powerpoint/2015/main" val="1"/>
+              </p:ext>
+            </p:extLst>
+          </p:nvPr>
+        </p:nvSpPr>
+        <p:spPr>
+          <a:xfrm>
+            <a:off x="0" y="0"/>
+            <a:ext cx="12196802" cy="6858000"/>
+          </a:xfrm>
+          <a:prstGeom prst="rect">
+            <a:avLst/>
+          </a:prstGeom>
+          <a:gradFill flip="none" rotWithShape="1">
+            <a:gsLst>
+              <a:gs pos="28000">
+                <a:schemeClr val="bg2">
+                  <a:alpha val="84000"/>
+                </a:schemeClr>
+              </a:gs>
+              <a:gs pos="74000">
+                <a:schemeClr val="bg1"/>
+              </a:gs>
+            </a:gsLst>
+            <a:path path="circle">
+              <a:fillToRect l="100000" t="100000"/>
+            </a:path>
+            <a:tileRect r="-100000" b="-100000"/>
+          </a:gradFill>
+          <a:ln>
+            <a:noFill/>
+          </a:ln>
+        </p:spPr>
+        <p:style>
+          <a:lnRef idx="2">
+            <a:schemeClr val="accent1">
+              <a:shade val="50000"/>
+            </a:schemeClr>
+          </a:lnRef>
+          <a:fillRef idx="1">
+            <a:schemeClr val="accent1"/>
+          </a:fillRef>
+          <a:effectRef idx="0">
+            <a:schemeClr val="accent1"/>
+          </a:effectRef>
+          <a:fontRef idx="minor">
+            <a:schemeClr val="lt1"/>
+          </a:fontRef>
+        </p:style>
+        <p:txBody>
+          <a:bodyPr rtlCol="0" anchor="ctr"/>
+          <a:lstStyle/>
+          <a:p>
+            <a:pPr marL="0" marR="0" lvl="0" indent="0" algn="ctr" defTabSz="914400" rtl="0" eaLnBrk="1" fontAlgn="auto" latinLnBrk="0" hangingPunct="1">
+              <a:lnSpc>
+                <a:spcPct val="100000"/>
+              </a:lnSpc>
+              <a:spcBef>
+                <a:spcPts val="0"/>
+              </a:spcBef>
+              <a:spcAft>
+                <a:spcPts val="0"/>
+              </a:spcAft>
+              <a:buClrTx/>
+              <a:buSzTx/>
+              <a:buFontTx/>
+              <a:buNone/>
+              <a:tabLst/>
+              <a:defRPr/>
+            </a:pPr>
+            <a:endParaRPr kumimoji="0" lang="en-US" sz="1800" b="0" i="0" u="none" strike="noStrike" kern="1200" cap="none" spc="0" normalizeH="0" baseline="0" noProof="0">
+              <a:ln>
+                <a:noFill/>
+              </a:ln>
+              <a:solidFill>
+                <a:prstClr val="white"/>
+              </a:solidFill>
+              <a:effectLst/>
+              <a:uLnTx/>
+              <a:uFillTx/>
+              <a:latin typeface="Calibri" panose="020F0502020204030204"/>
+              <a:ea typeface="+mn-ea"/>
+              <a:cs typeface="+mn-cs"/>
+            </a:endParaRPr>
+          </a:p>
+        </p:txBody>
+      </p:sp>
       <p:sp>
         <p:nvSpPr>
           <p:cNvPr id="2" name="Title 1">
@@ -3445,59 +9166,57 @@
             <p:ph type="title"/>
           </p:nvPr>
         </p:nvSpPr>
-        <p:spPr/>
+        <p:spPr>
+          <a:xfrm>
+            <a:off x="838200" y="365125"/>
+            <a:ext cx="10515600" cy="1325563"/>
+          </a:xfrm>
+        </p:spPr>
         <p:txBody>
-          <a:bodyPr/>
+          <a:bodyPr>
+            <a:normAutofit/>
+          </a:bodyPr>
           <a:lstStyle/>
           <a:p>
-            <a:pPr algn="ctr"/>
             <a:r>
               <a:rPr lang="en-GB" dirty="0"/>
               <a:t>Objectives</a:t>
             </a:r>
+            <a:endParaRPr lang="en-GB"/>
           </a:p>
         </p:txBody>
       </p:sp>
-      <p:sp>
-        <p:nvSpPr>
-          <p:cNvPr id="3" name="Content Placeholder 2">
+      <p:graphicFrame>
+        <p:nvGraphicFramePr>
+          <p:cNvPr id="5" name="Content Placeholder 2">
             <a:extLst>
               <a:ext uri="{FF2B5EF4-FFF2-40B4-BE49-F238E27FC236}">
-                <a16:creationId xmlns:a16="http://schemas.microsoft.com/office/drawing/2014/main" id="{FA65C372-0863-93A2-C13F-91627043E14C}"/>
+                <a16:creationId xmlns:a16="http://schemas.microsoft.com/office/drawing/2014/main" id="{6E44176B-FD66-6463-8E8F-EA0EA1FD16FB}"/>
               </a:ext>
             </a:extLst>
           </p:cNvPr>
-          <p:cNvSpPr>
-            <a:spLocks noGrp="1"/>
-          </p:cNvSpPr>
+          <p:cNvGraphicFramePr>
+            <a:graphicFrameLocks noGrp="1"/>
+          </p:cNvGraphicFramePr>
           <p:nvPr>
             <p:ph idx="1"/>
+            <p:extLst>
+              <p:ext uri="{D42A27DB-BD31-4B8C-83A1-F6EECF244321}">
+                <p14:modId xmlns:p14="http://schemas.microsoft.com/office/powerpoint/2010/main" val="1638631036"/>
+              </p:ext>
+            </p:extLst>
           </p:nvPr>
-        </p:nvSpPr>
-        <p:spPr/>
-        <p:txBody>
-          <a:bodyPr/>
-          <a:lstStyle/>
-          <a:p>
-            <a:r>
-              <a:rPr lang="en-GB" dirty="0"/>
-              <a:t>Build a Character controller with modular functionality capable of fitting the vast majority of use cases</a:t>
-            </a:r>
-          </a:p>
-          <a:p>
-            <a:r>
-              <a:rPr lang="en-GB" dirty="0"/>
-              <a:t>Avoid having to load large unnecessary code </a:t>
-            </a:r>
-          </a:p>
-          <a:p>
-            <a:r>
-              <a:rPr lang="en-GB" dirty="0"/>
-              <a:t>Avoid complex switching logic</a:t>
-            </a:r>
-          </a:p>
-        </p:txBody>
-      </p:sp>
+        </p:nvGraphicFramePr>
+        <p:xfrm>
+          <a:off x="838200" y="1825625"/>
+          <a:ext cx="10515600" cy="4351338"/>
+        </p:xfrm>
+        <a:graphic>
+          <a:graphicData uri="http://schemas.openxmlformats.org/drawingml/2006/diagram">
+            <dgm:relIds xmlns:dgm="http://schemas.openxmlformats.org/drawingml/2006/diagram" xmlns:r="http://schemas.openxmlformats.org/officeDocument/2006/relationships" r:dm="rId3" r:lo="rId4" r:qs="rId5" r:cs="rId6"/>
+          </a:graphicData>
+        </a:graphic>
+      </p:graphicFrame>
     </p:spTree>
     <p:extLst>
       <p:ext uri="{BB962C8B-B14F-4D97-AF65-F5344CB8AC3E}">
@@ -4084,8 +9803,8 @@
         </p:nvSpPr>
         <p:spPr>
           <a:xfrm>
-            <a:off x="352337" y="5146646"/>
-            <a:ext cx="7668891" cy="1200329"/>
+            <a:off x="352344" y="4968465"/>
+            <a:ext cx="8036815" cy="1569660"/>
           </a:xfrm>
           <a:prstGeom prst="rect">
             <a:avLst/>
@@ -4099,90 +9818,165 @@
           <a:lstStyle/>
           <a:p>
             <a:r>
-              <a:rPr lang="en-GB" dirty="0"/>
-              <a:t>Base class for the </a:t>
+              <a:rPr lang="en-GB" sz="1600" dirty="0"/>
+              <a:t>The base </a:t>
             </a:r>
             <a:r>
+              <a:rPr lang="en-GB" sz="1600" dirty="0" err="1"/>
+              <a:t>CharacterController</a:t>
+            </a:r>
+            <a:r>
+              <a:rPr lang="en-GB" sz="1600" dirty="0"/>
+              <a:t> class contains no decision-making logic.</a:t>
+            </a:r>
+          </a:p>
+          <a:p>
+            <a:r>
+              <a:rPr lang="en-GB" sz="1600" dirty="0"/>
+              <a:t>It only coordinates communication between </a:t>
+            </a:r>
+            <a:r>
+              <a:rPr lang="en-GB" sz="1600" b="1" dirty="0"/>
+              <a:t>components</a:t>
+            </a:r>
+            <a:r>
+              <a:rPr lang="en-GB" sz="1600" dirty="0"/>
+              <a:t> and </a:t>
+            </a:r>
+            <a:r>
+              <a:rPr lang="en-GB" sz="1600" b="1" dirty="0"/>
+              <a:t>interface modules</a:t>
+            </a:r>
+            <a:r>
+              <a:rPr lang="en-GB" sz="1600" dirty="0"/>
+              <a:t>. </a:t>
+            </a:r>
+          </a:p>
+          <a:p>
+            <a:r>
+              <a:rPr lang="en-GB" sz="1600" b="1" dirty="0"/>
+              <a:t>Derived classes </a:t>
+            </a:r>
+            <a:r>
+              <a:rPr lang="en-GB" sz="1600" dirty="0"/>
+              <a:t>(</a:t>
+            </a:r>
+            <a:r>
+              <a:rPr lang="en-GB" sz="1600" dirty="0" err="1"/>
+              <a:t>PlayerController</a:t>
+            </a:r>
+            <a:r>
+              <a:rPr lang="en-GB" sz="1600" dirty="0"/>
+              <a:t>, </a:t>
+            </a:r>
+            <a:r>
+              <a:rPr lang="en-GB" sz="1600" dirty="0" err="1"/>
+              <a:t>EnemyController</a:t>
+            </a:r>
+            <a:r>
+              <a:rPr lang="en-GB" sz="1600" dirty="0"/>
+              <a:t>, etc.) implement the </a:t>
+            </a:r>
+            <a:r>
+              <a:rPr lang="en-GB" sz="1600" b="1" dirty="0"/>
+              <a:t>decision-making </a:t>
+            </a:r>
+            <a:r>
+              <a:rPr lang="en-GB" sz="1600" dirty="0"/>
+              <a:t>layer (e.g., player input or AI).</a:t>
+            </a:r>
+          </a:p>
+          <a:p>
+            <a:r>
+              <a:rPr lang="en-GB" sz="1600" dirty="0"/>
+              <a:t>Shared data is exposed through common variables and interfaces on the Character Controller.</a:t>
+            </a:r>
+          </a:p>
+        </p:txBody>
+      </p:sp>
+      <p:sp>
+        <p:nvSpPr>
+          <p:cNvPr id="2" name="TextBox 1">
+            <a:extLst>
+              <a:ext uri="{FF2B5EF4-FFF2-40B4-BE49-F238E27FC236}">
+                <a16:creationId xmlns:a16="http://schemas.microsoft.com/office/drawing/2014/main" id="{3DA9F0D8-C7A3-9192-3D69-1B16F85ED511}"/>
+              </a:ext>
+            </a:extLst>
+          </p:cNvPr>
+          <p:cNvSpPr txBox="1"/>
+          <p:nvPr/>
+        </p:nvSpPr>
+        <p:spPr>
+          <a:xfrm>
+            <a:off x="6834400" y="1497352"/>
+            <a:ext cx="4340917" cy="646331"/>
+          </a:xfrm>
+          <a:prstGeom prst="rect">
+            <a:avLst/>
+          </a:prstGeom>
+          <a:noFill/>
+        </p:spPr>
+        <p:txBody>
+          <a:bodyPr wrap="square" rtlCol="0">
+            <a:spAutoFit/>
+          </a:bodyPr>
+          <a:lstStyle/>
+          <a:p>
+            <a:r>
               <a:rPr lang="en-GB" b="1" dirty="0"/>
-              <a:t>character controller </a:t>
+              <a:t>Base Class</a:t>
             </a:r>
             <a:r>
               <a:rPr lang="en-GB" dirty="0"/>
-              <a:t>handles all </a:t>
+              <a:t> (not Unity’s built-in </a:t>
             </a:r>
             <a:r>
-              <a:rPr lang="en-GB" b="1" dirty="0"/>
-              <a:t>implementation</a:t>
+              <a:rPr lang="en-GB" dirty="0" err="1"/>
+              <a:t>CharacterController</a:t>
             </a:r>
             <a:r>
               <a:rPr lang="en-GB" dirty="0"/>
-              <a:t> and communication with other </a:t>
+              <a:t>): </a:t>
             </a:r>
             <a:r>
-              <a:rPr lang="en-GB" b="1" dirty="0"/>
-              <a:t>components</a:t>
+              <a:rPr lang="en-GB" i="1" dirty="0"/>
+              <a:t>Central Coordinator</a:t>
             </a:r>
+            <a:endParaRPr lang="en-GB" dirty="0"/>
+          </a:p>
+        </p:txBody>
+      </p:sp>
+      <p:sp>
+        <p:nvSpPr>
+          <p:cNvPr id="3" name="TextBox 2">
+            <a:extLst>
+              <a:ext uri="{FF2B5EF4-FFF2-40B4-BE49-F238E27FC236}">
+                <a16:creationId xmlns:a16="http://schemas.microsoft.com/office/drawing/2014/main" id="{5B8A4A59-CBB3-529D-35F6-4C91EF4F442A}"/>
+              </a:ext>
+            </a:extLst>
+          </p:cNvPr>
+          <p:cNvSpPr txBox="1"/>
+          <p:nvPr/>
+        </p:nvSpPr>
+        <p:spPr>
+          <a:xfrm>
+            <a:off x="4108633" y="3244334"/>
+            <a:ext cx="4628337" cy="369332"/>
+          </a:xfrm>
+          <a:prstGeom prst="rect">
+            <a:avLst/>
+          </a:prstGeom>
+          <a:noFill/>
+        </p:spPr>
+        <p:txBody>
+          <a:bodyPr wrap="square" rtlCol="0">
+            <a:spAutoFit/>
+          </a:bodyPr>
+          <a:lstStyle/>
+          <a:p>
             <a:r>
               <a:rPr lang="en-GB" dirty="0"/>
-              <a:t> and modules.</a:t>
-            </a:r>
-          </a:p>
-          <a:p>
-            <a:r>
-              <a:rPr lang="en-GB" b="1" dirty="0" err="1"/>
-              <a:t>Subclassess</a:t>
-            </a:r>
-            <a:r>
-              <a:rPr lang="en-GB" dirty="0"/>
-              <a:t> handle </a:t>
-            </a:r>
-            <a:r>
-              <a:rPr lang="en-GB" b="1" dirty="0"/>
-              <a:t>decision making</a:t>
-            </a:r>
-            <a:r>
-              <a:rPr lang="en-GB" dirty="0"/>
-              <a:t>, for </a:t>
-            </a:r>
-            <a:r>
-              <a:rPr lang="en-GB" b="1" dirty="0"/>
-              <a:t>player</a:t>
-            </a:r>
-            <a:r>
-              <a:rPr lang="en-GB" dirty="0"/>
-              <a:t> this is an </a:t>
-            </a:r>
-            <a:r>
-              <a:rPr lang="en-GB" b="1" dirty="0"/>
-              <a:t>input system</a:t>
-            </a:r>
-            <a:r>
-              <a:rPr lang="en-GB" dirty="0"/>
-              <a:t>, for </a:t>
-            </a:r>
-            <a:r>
-              <a:rPr lang="en-GB" b="1" dirty="0"/>
-              <a:t>enemy</a:t>
-            </a:r>
-            <a:r>
-              <a:rPr lang="en-GB" dirty="0"/>
-              <a:t> it is </a:t>
-            </a:r>
-            <a:r>
-              <a:rPr lang="en-GB" b="1" dirty="0"/>
-              <a:t>AI</a:t>
-            </a:r>
-            <a:r>
-              <a:rPr lang="en-GB" dirty="0"/>
-              <a:t>. These pass data via </a:t>
-            </a:r>
-            <a:r>
-              <a:rPr lang="en-GB" b="1" dirty="0"/>
-              <a:t>common variables </a:t>
-            </a:r>
-            <a:r>
-              <a:rPr lang="en-GB" dirty="0"/>
-              <a:t>on the CC.</a:t>
+              <a:t>Derived Classes, handle decision making</a:t>
             </a:r>
           </a:p>
         </p:txBody>
@@ -4241,7 +10035,7 @@
             <a:pPr algn="ctr"/>
             <a:r>
               <a:rPr lang="en-GB" dirty="0"/>
-              <a:t>Interface Modules</a:t>
+              <a:t>Interface Module Components</a:t>
             </a:r>
           </a:p>
         </p:txBody>
@@ -5019,6 +10813,14 @@
 <file path=ppt/slides/slide5.xml><?xml version="1.0" encoding="utf-8"?>
 <p:sld xmlns:a="http://schemas.openxmlformats.org/drawingml/2006/main" xmlns:r="http://schemas.openxmlformats.org/officeDocument/2006/relationships" xmlns:p="http://schemas.openxmlformats.org/presentationml/2006/main">
   <p:cSld>
+    <p:bg>
+      <p:bgPr>
+        <a:solidFill>
+          <a:schemeClr val="bg1"/>
+        </a:solidFill>
+        <a:effectLst/>
+      </p:bgPr>
+    </p:bg>
     <p:spTree>
       <p:nvGrpSpPr>
         <p:cNvPr id="1" name=""/>
@@ -5033,6 +10835,308 @@
           <a:chExt cx="0" cy="0"/>
         </a:xfrm>
       </p:grpSpPr>
+      <p:sp useBgFill="1">
+        <p:nvSpPr>
+          <p:cNvPr id="17" name="Rectangle 16">
+            <a:extLst>
+              <a:ext uri="{FF2B5EF4-FFF2-40B4-BE49-F238E27FC236}">
+                <a16:creationId xmlns:a16="http://schemas.microsoft.com/office/drawing/2014/main" id="{BACC6370-2D7E-4714-9D71-7542949D7D5D}"/>
+              </a:ext>
+              <a:ext uri="{C183D7F6-B498-43B3-948B-1728B52AA6E4}">
+                <adec:decorative xmlns:adec="http://schemas.microsoft.com/office/drawing/2017/decorative" val="1"/>
+              </a:ext>
+            </a:extLst>
+          </p:cNvPr>
+          <p:cNvSpPr>
+            <a:spLocks noGrp="1" noRot="1" noChangeAspect="1" noMove="1" noResize="1" noEditPoints="1" noAdjustHandles="1" noChangeArrowheads="1" noChangeShapeType="1" noTextEdit="1"/>
+          </p:cNvSpPr>
+          <p:nvPr>
+            <p:extLst>
+              <p:ext uri="{386F3935-93C4-4BCD-93E2-E3B085C9AB24}">
+                <p16:designElem xmlns:p16="http://schemas.microsoft.com/office/powerpoint/2015/main" val="1"/>
+              </p:ext>
+            </p:extLst>
+          </p:nvPr>
+        </p:nvSpPr>
+        <p:spPr>
+          <a:xfrm>
+            <a:off x="0" y="0"/>
+            <a:ext cx="12192000" cy="6858000"/>
+          </a:xfrm>
+          <a:prstGeom prst="rect">
+            <a:avLst/>
+          </a:prstGeom>
+          <a:ln w="12700" cap="flat" cmpd="sng" algn="ctr">
+            <a:noFill/>
+            <a:prstDash val="solid"/>
+            <a:miter lim="800000"/>
+          </a:ln>
+          <a:effectLst/>
+          <a:extLst>
+            <a:ext uri="{91240B29-F687-4F45-9708-019B960494DF}">
+              <a14:hiddenLine xmlns:a14="http://schemas.microsoft.com/office/drawing/2010/main" w="12700" cap="flat" cmpd="sng" algn="ctr">
+                <a:solidFill>
+                  <a:schemeClr val="accent1">
+                    <a:shade val="50000"/>
+                  </a:schemeClr>
+                </a:solidFill>
+                <a:prstDash val="solid"/>
+                <a:miter lim="800000"/>
+              </a14:hiddenLine>
+            </a:ext>
+          </a:extLst>
+        </p:spPr>
+        <p:style>
+          <a:lnRef idx="2">
+            <a:schemeClr val="accent1">
+              <a:shade val="50000"/>
+            </a:schemeClr>
+          </a:lnRef>
+          <a:fillRef idx="1">
+            <a:schemeClr val="accent1"/>
+          </a:fillRef>
+          <a:effectRef idx="0">
+            <a:schemeClr val="accent1"/>
+          </a:effectRef>
+          <a:fontRef idx="minor">
+            <a:schemeClr val="lt1"/>
+          </a:fontRef>
+        </p:style>
+        <p:txBody>
+          <a:bodyPr rtlCol="0" anchor="ctr"/>
+          <a:lstStyle/>
+          <a:p>
+            <a:pPr algn="ctr"/>
+            <a:endParaRPr lang="en-US"/>
+          </a:p>
+        </p:txBody>
+      </p:sp>
+      <p:sp>
+        <p:nvSpPr>
+          <p:cNvPr id="19" name="Rectangle 18">
+            <a:extLst>
+              <a:ext uri="{FF2B5EF4-FFF2-40B4-BE49-F238E27FC236}">
+                <a16:creationId xmlns:a16="http://schemas.microsoft.com/office/drawing/2014/main" id="{F68B3F68-107C-434F-AA38-110D5EA91B85}"/>
+              </a:ext>
+              <a:ext uri="{C183D7F6-B498-43B3-948B-1728B52AA6E4}">
+                <adec:decorative xmlns:adec="http://schemas.microsoft.com/office/drawing/2017/decorative" val="1"/>
+              </a:ext>
+            </a:extLst>
+          </p:cNvPr>
+          <p:cNvSpPr>
+            <a:spLocks noGrp="1" noRot="1" noChangeAspect="1" noMove="1" noResize="1" noEditPoints="1" noAdjustHandles="1" noChangeArrowheads="1" noChangeShapeType="1" noTextEdit="1"/>
+          </p:cNvSpPr>
+          <p:nvPr>
+            <p:extLst>
+              <p:ext uri="{386F3935-93C4-4BCD-93E2-E3B085C9AB24}">
+                <p16:designElem xmlns:p16="http://schemas.microsoft.com/office/powerpoint/2015/main" val="1"/>
+              </p:ext>
+            </p:extLst>
+          </p:nvPr>
+        </p:nvSpPr>
+        <p:spPr>
+          <a:xfrm flipH="1">
+            <a:off x="2" y="0"/>
+            <a:ext cx="12191998" cy="1575955"/>
+          </a:xfrm>
+          <a:prstGeom prst="rect">
+            <a:avLst/>
+          </a:prstGeom>
+          <a:gradFill>
+            <a:gsLst>
+              <a:gs pos="0">
+                <a:srgbClr val="000000">
+                  <a:alpha val="96000"/>
+                </a:srgbClr>
+              </a:gs>
+              <a:gs pos="100000">
+                <a:schemeClr val="accent1">
+                  <a:lumMod val="75000"/>
+                </a:schemeClr>
+              </a:gs>
+            </a:gsLst>
+            <a:lin ang="8400000" scaled="0"/>
+          </a:gradFill>
+          <a:ln>
+            <a:noFill/>
+          </a:ln>
+        </p:spPr>
+        <p:style>
+          <a:lnRef idx="2">
+            <a:schemeClr val="accent1">
+              <a:shade val="50000"/>
+            </a:schemeClr>
+          </a:lnRef>
+          <a:fillRef idx="1">
+            <a:schemeClr val="accent1"/>
+          </a:fillRef>
+          <a:effectRef idx="0">
+            <a:schemeClr val="accent1"/>
+          </a:effectRef>
+          <a:fontRef idx="minor">
+            <a:schemeClr val="lt1"/>
+          </a:fontRef>
+        </p:style>
+        <p:txBody>
+          <a:bodyPr rtlCol="0" anchor="ctr"/>
+          <a:lstStyle/>
+          <a:p>
+            <a:pPr algn="ctr"/>
+            <a:endParaRPr lang="en-US"/>
+          </a:p>
+        </p:txBody>
+      </p:sp>
+      <p:sp>
+        <p:nvSpPr>
+          <p:cNvPr id="26" name="Rectangle 25">
+            <a:extLst>
+              <a:ext uri="{FF2B5EF4-FFF2-40B4-BE49-F238E27FC236}">
+                <a16:creationId xmlns:a16="http://schemas.microsoft.com/office/drawing/2014/main" id="{AAD0DBB9-1A4B-4391-81D4-CB19F9AB918A}"/>
+              </a:ext>
+              <a:ext uri="{C183D7F6-B498-43B3-948B-1728B52AA6E4}">
+                <adec:decorative xmlns:adec="http://schemas.microsoft.com/office/drawing/2017/decorative" val="1"/>
+              </a:ext>
+            </a:extLst>
+          </p:cNvPr>
+          <p:cNvSpPr>
+            <a:spLocks noGrp="1" noRot="1" noChangeAspect="1" noMove="1" noResize="1" noEditPoints="1" noAdjustHandles="1" noChangeArrowheads="1" noChangeShapeType="1" noTextEdit="1"/>
+          </p:cNvSpPr>
+          <p:nvPr>
+            <p:extLst>
+              <p:ext uri="{386F3935-93C4-4BCD-93E2-E3B085C9AB24}">
+                <p16:designElem xmlns:p16="http://schemas.microsoft.com/office/powerpoint/2015/main" val="1"/>
+              </p:ext>
+            </p:extLst>
+          </p:nvPr>
+        </p:nvSpPr>
+        <p:spPr>
+          <a:xfrm rot="10800000" flipH="1">
+            <a:off x="8128857" y="0"/>
+            <a:ext cx="4063143" cy="1576412"/>
+          </a:xfrm>
+          <a:prstGeom prst="rect">
+            <a:avLst/>
+          </a:prstGeom>
+          <a:gradFill>
+            <a:gsLst>
+              <a:gs pos="19000">
+                <a:schemeClr val="accent1">
+                  <a:lumMod val="50000"/>
+                  <a:alpha val="68000"/>
+                </a:schemeClr>
+              </a:gs>
+              <a:gs pos="100000">
+                <a:schemeClr val="accent1">
+                  <a:alpha val="79000"/>
+                </a:schemeClr>
+              </a:gs>
+            </a:gsLst>
+            <a:lin ang="19200000" scaled="0"/>
+          </a:gradFill>
+          <a:ln>
+            <a:noFill/>
+          </a:ln>
+        </p:spPr>
+        <p:style>
+          <a:lnRef idx="2">
+            <a:schemeClr val="accent1">
+              <a:shade val="50000"/>
+            </a:schemeClr>
+          </a:lnRef>
+          <a:fillRef idx="1">
+            <a:schemeClr val="accent1"/>
+          </a:fillRef>
+          <a:effectRef idx="0">
+            <a:schemeClr val="accent1"/>
+          </a:effectRef>
+          <a:fontRef idx="minor">
+            <a:schemeClr val="lt1"/>
+          </a:fontRef>
+        </p:style>
+        <p:txBody>
+          <a:bodyPr rtlCol="0" anchor="ctr"/>
+          <a:lstStyle/>
+          <a:p>
+            <a:pPr algn="ctr"/>
+            <a:endParaRPr lang="en-US"/>
+          </a:p>
+        </p:txBody>
+      </p:sp>
+      <p:sp>
+        <p:nvSpPr>
+          <p:cNvPr id="27" name="Rectangle 26">
+            <a:extLst>
+              <a:ext uri="{FF2B5EF4-FFF2-40B4-BE49-F238E27FC236}">
+                <a16:creationId xmlns:a16="http://schemas.microsoft.com/office/drawing/2014/main" id="{063BBA22-50EA-4C4D-BE05-F1CE4E63AA56}"/>
+              </a:ext>
+              <a:ext uri="{C183D7F6-B498-43B3-948B-1728B52AA6E4}">
+                <adec:decorative xmlns:adec="http://schemas.microsoft.com/office/drawing/2017/decorative" val="1"/>
+              </a:ext>
+            </a:extLst>
+          </p:cNvPr>
+          <p:cNvSpPr>
+            <a:spLocks noGrp="1" noRot="1" noChangeAspect="1" noMove="1" noResize="1" noEditPoints="1" noAdjustHandles="1" noChangeArrowheads="1" noChangeShapeType="1" noTextEdit="1"/>
+          </p:cNvSpPr>
+          <p:nvPr>
+            <p:extLst>
+              <p:ext uri="{386F3935-93C4-4BCD-93E2-E3B085C9AB24}">
+                <p16:designElem xmlns:p16="http://schemas.microsoft.com/office/powerpoint/2015/main" val="1"/>
+              </p:ext>
+            </p:extLst>
+          </p:nvPr>
+        </p:nvSpPr>
+        <p:spPr>
+          <a:xfrm rot="5400000">
+            <a:off x="5307777" y="-5307778"/>
+            <a:ext cx="1576446" cy="12192002"/>
+          </a:xfrm>
+          <a:prstGeom prst="rect">
+            <a:avLst/>
+          </a:prstGeom>
+          <a:gradFill>
+            <a:gsLst>
+              <a:gs pos="23000">
+                <a:schemeClr val="accent1">
+                  <a:alpha val="0"/>
+                </a:schemeClr>
+              </a:gs>
+              <a:gs pos="99000">
+                <a:srgbClr val="000000">
+                  <a:alpha val="74000"/>
+                </a:srgbClr>
+              </a:gs>
+            </a:gsLst>
+            <a:lin ang="20400000" scaled="0"/>
+          </a:gradFill>
+          <a:ln>
+            <a:noFill/>
+          </a:ln>
+        </p:spPr>
+        <p:style>
+          <a:lnRef idx="2">
+            <a:schemeClr val="accent1">
+              <a:shade val="50000"/>
+            </a:schemeClr>
+          </a:lnRef>
+          <a:fillRef idx="1">
+            <a:schemeClr val="accent1"/>
+          </a:fillRef>
+          <a:effectRef idx="0">
+            <a:schemeClr val="accent1"/>
+          </a:effectRef>
+          <a:fontRef idx="minor">
+            <a:schemeClr val="lt1"/>
+          </a:fontRef>
+        </p:style>
+        <p:txBody>
+          <a:bodyPr rtlCol="0" anchor="ctr"/>
+          <a:lstStyle/>
+          <a:p>
+            <a:pPr algn="ctr"/>
+            <a:endParaRPr lang="en-US" dirty="0"/>
+          </a:p>
+        </p:txBody>
+      </p:sp>
       <p:sp>
         <p:nvSpPr>
           <p:cNvPr id="2" name="Title 1">
@@ -5049,436 +11153,703 @@
             <p:ph type="title"/>
           </p:nvPr>
         </p:nvSpPr>
-        <p:spPr/>
+        <p:spPr>
+          <a:xfrm>
+            <a:off x="1371597" y="348865"/>
+            <a:ext cx="10044023" cy="877729"/>
+          </a:xfrm>
+        </p:spPr>
         <p:txBody>
-          <a:bodyPr/>
+          <a:bodyPr vert="horz" lIns="91440" tIns="45720" rIns="91440" bIns="45720" rtlCol="0" anchor="ctr">
+            <a:normAutofit/>
+          </a:bodyPr>
           <a:lstStyle/>
           <a:p>
-            <a:pPr algn="ctr"/>
             <a:r>
-              <a:rPr lang="en-GB" dirty="0"/>
+              <a:rPr lang="en-US" sz="4000" kern="1200">
+                <a:solidFill>
+                  <a:srgbClr val="FFFFFF"/>
+                </a:solidFill>
+                <a:latin typeface="+mj-lt"/>
+                <a:ea typeface="+mj-ea"/>
+                <a:cs typeface="+mj-cs"/>
+              </a:rPr>
               <a:t>Component Composition</a:t>
             </a:r>
           </a:p>
         </p:txBody>
       </p:sp>
-      <p:sp>
-        <p:nvSpPr>
-          <p:cNvPr id="3" name="Rectangle 2">
+      <p:grpSp>
+        <p:nvGrpSpPr>
+          <p:cNvPr id="4" name="Group 3">
             <a:extLst>
               <a:ext uri="{FF2B5EF4-FFF2-40B4-BE49-F238E27FC236}">
-                <a16:creationId xmlns:a16="http://schemas.microsoft.com/office/drawing/2014/main" id="{6FF7CE55-54A1-26D0-B58B-FC311716C817}"/>
+                <a16:creationId xmlns:a16="http://schemas.microsoft.com/office/drawing/2014/main" id="{A32FB9B2-844B-0827-EF4C-CB3C9A47BC68}"/>
               </a:ext>
             </a:extLst>
           </p:cNvPr>
-          <p:cNvSpPr/>
+          <p:cNvGrpSpPr/>
           <p:nvPr/>
-        </p:nvSpPr>
-        <p:spPr>
+        </p:nvGrpSpPr>
+        <p:grpSpPr>
           <a:xfrm>
-            <a:off x="2780021" y="2260833"/>
-            <a:ext cx="6554223" cy="3586294"/>
+            <a:off x="2276636" y="2112579"/>
+            <a:ext cx="7662668" cy="4192805"/>
+            <a:chOff x="2780021" y="2260833"/>
+            <a:chExt cx="6554223" cy="3586294"/>
           </a:xfrm>
-          <a:prstGeom prst="rect">
-            <a:avLst/>
-          </a:prstGeom>
-        </p:spPr>
-        <p:style>
-          <a:lnRef idx="1">
-            <a:schemeClr val="accent5"/>
-          </a:lnRef>
-          <a:fillRef idx="2">
-            <a:schemeClr val="accent5"/>
-          </a:fillRef>
-          <a:effectRef idx="1">
-            <a:schemeClr val="accent5"/>
-          </a:effectRef>
-          <a:fontRef idx="minor">
-            <a:schemeClr val="dk1"/>
-          </a:fontRef>
-        </p:style>
-        <p:txBody>
-          <a:bodyPr rtlCol="0" anchor="ctr"/>
-          <a:lstStyle/>
-          <a:p>
-            <a:pPr algn="ctr"/>
-            <a:r>
-              <a:rPr lang="en-GB" dirty="0"/>
-              <a:t>Player Game Object</a:t>
-            </a:r>
-          </a:p>
-          <a:p>
-            <a:pPr algn="ctr"/>
-            <a:endParaRPr lang="en-GB" dirty="0"/>
-          </a:p>
-          <a:p>
-            <a:pPr algn="ctr"/>
-            <a:endParaRPr lang="en-GB" dirty="0"/>
-          </a:p>
-          <a:p>
-            <a:pPr algn="ctr"/>
-            <a:endParaRPr lang="en-GB" dirty="0"/>
-          </a:p>
-          <a:p>
-            <a:pPr algn="ctr"/>
-            <a:endParaRPr lang="en-GB" dirty="0"/>
-          </a:p>
-          <a:p>
-            <a:pPr algn="ctr"/>
-            <a:endParaRPr lang="en-GB" dirty="0"/>
-          </a:p>
-          <a:p>
-            <a:pPr algn="ctr"/>
-            <a:endParaRPr lang="en-GB" dirty="0"/>
-          </a:p>
-          <a:p>
-            <a:pPr algn="ctr"/>
-            <a:endParaRPr lang="en-GB" dirty="0"/>
-          </a:p>
-          <a:p>
-            <a:pPr algn="ctr"/>
-            <a:endParaRPr lang="en-GB" dirty="0"/>
-          </a:p>
-          <a:p>
-            <a:pPr algn="ctr"/>
-            <a:endParaRPr lang="en-GB" dirty="0"/>
-          </a:p>
-          <a:p>
-            <a:pPr algn="ctr"/>
-            <a:endParaRPr lang="en-GB" dirty="0"/>
-          </a:p>
-          <a:p>
-            <a:pPr algn="ctr"/>
-            <a:endParaRPr lang="en-GB" dirty="0"/>
-          </a:p>
-          <a:p>
-            <a:pPr algn="ctr"/>
-            <a:endParaRPr lang="en-GB" dirty="0"/>
-          </a:p>
-        </p:txBody>
-      </p:sp>
-      <p:sp>
-        <p:nvSpPr>
-          <p:cNvPr id="5" name="Rectangle: Rounded Corners 4">
-            <a:extLst>
-              <a:ext uri="{FF2B5EF4-FFF2-40B4-BE49-F238E27FC236}">
-                <a16:creationId xmlns:a16="http://schemas.microsoft.com/office/drawing/2014/main" id="{B2261ED9-82CF-B8F4-2B0C-3BA4E05429D5}"/>
-              </a:ext>
-            </a:extLst>
-          </p:cNvPr>
-          <p:cNvSpPr/>
-          <p:nvPr/>
-        </p:nvSpPr>
-        <p:spPr>
-          <a:xfrm>
-            <a:off x="5265902" y="2947335"/>
-            <a:ext cx="1586094" cy="1153569"/>
-          </a:xfrm>
-          <a:prstGeom prst="roundRect">
-            <a:avLst/>
-          </a:prstGeom>
-        </p:spPr>
-        <p:style>
-          <a:lnRef idx="2">
-            <a:schemeClr val="accent1">
-              <a:shade val="15000"/>
-            </a:schemeClr>
-          </a:lnRef>
-          <a:fillRef idx="1">
-            <a:schemeClr val="accent1"/>
-          </a:fillRef>
-          <a:effectRef idx="0">
-            <a:schemeClr val="accent1"/>
-          </a:effectRef>
-          <a:fontRef idx="minor">
-            <a:schemeClr val="lt1"/>
-          </a:fontRef>
-        </p:style>
-        <p:txBody>
-          <a:bodyPr rtlCol="0" anchor="ctr"/>
-          <a:lstStyle/>
-          <a:p>
-            <a:pPr algn="ctr"/>
-            <a:r>
-              <a:rPr lang="en-GB" dirty="0"/>
-              <a:t>Player Controller</a:t>
-            </a:r>
-          </a:p>
-        </p:txBody>
-      </p:sp>
-      <p:sp>
-        <p:nvSpPr>
-          <p:cNvPr id="6" name="Rectangle: Rounded Corners 5">
-            <a:extLst>
-              <a:ext uri="{FF2B5EF4-FFF2-40B4-BE49-F238E27FC236}">
-                <a16:creationId xmlns:a16="http://schemas.microsoft.com/office/drawing/2014/main" id="{F5712A53-5352-7E24-B805-3785A4DF5004}"/>
-              </a:ext>
-            </a:extLst>
-          </p:cNvPr>
-          <p:cNvSpPr/>
-          <p:nvPr/>
-        </p:nvSpPr>
-        <p:spPr>
-          <a:xfrm>
-            <a:off x="3265699" y="2947335"/>
-            <a:ext cx="1586094" cy="1153569"/>
-          </a:xfrm>
-          <a:prstGeom prst="roundRect">
-            <a:avLst/>
-          </a:prstGeom>
-        </p:spPr>
-        <p:style>
-          <a:lnRef idx="2">
-            <a:schemeClr val="accent1">
-              <a:shade val="15000"/>
-            </a:schemeClr>
-          </a:lnRef>
-          <a:fillRef idx="1">
-            <a:schemeClr val="accent1"/>
-          </a:fillRef>
-          <a:effectRef idx="0">
-            <a:schemeClr val="accent1"/>
-          </a:effectRef>
-          <a:fontRef idx="minor">
-            <a:schemeClr val="lt1"/>
-          </a:fontRef>
-        </p:style>
-        <p:txBody>
-          <a:bodyPr rtlCol="0" anchor="ctr"/>
-          <a:lstStyle/>
-          <a:p>
-            <a:pPr algn="ctr"/>
-            <a:r>
-              <a:rPr lang="en-GB" dirty="0"/>
-              <a:t>Player</a:t>
-            </a:r>
-          </a:p>
-        </p:txBody>
-      </p:sp>
-      <p:sp>
-        <p:nvSpPr>
-          <p:cNvPr id="7" name="Rectangle: Rounded Corners 6">
-            <a:extLst>
-              <a:ext uri="{FF2B5EF4-FFF2-40B4-BE49-F238E27FC236}">
-                <a16:creationId xmlns:a16="http://schemas.microsoft.com/office/drawing/2014/main" id="{EA94644A-FE4C-8E30-15E1-24F1C003D6AB}"/>
-              </a:ext>
-            </a:extLst>
-          </p:cNvPr>
-          <p:cNvSpPr/>
-          <p:nvPr/>
-        </p:nvSpPr>
-        <p:spPr>
-          <a:xfrm>
-            <a:off x="7266105" y="2947335"/>
-            <a:ext cx="1586094" cy="1153569"/>
-          </a:xfrm>
-          <a:prstGeom prst="roundRect">
-            <a:avLst/>
-          </a:prstGeom>
-        </p:spPr>
-        <p:style>
-          <a:lnRef idx="2">
-            <a:schemeClr val="accent1">
-              <a:shade val="15000"/>
-            </a:schemeClr>
-          </a:lnRef>
-          <a:fillRef idx="1">
-            <a:schemeClr val="accent1"/>
-          </a:fillRef>
-          <a:effectRef idx="0">
-            <a:schemeClr val="accent1"/>
-          </a:effectRef>
-          <a:fontRef idx="minor">
-            <a:schemeClr val="lt1"/>
-          </a:fontRef>
-        </p:style>
-        <p:txBody>
-          <a:bodyPr rtlCol="0" anchor="ctr"/>
-          <a:lstStyle/>
-          <a:p>
-            <a:pPr algn="ctr"/>
-            <a:r>
-              <a:rPr lang="en-GB" dirty="0"/>
-              <a:t>Health</a:t>
-            </a:r>
-          </a:p>
-        </p:txBody>
-      </p:sp>
-      <p:sp>
-        <p:nvSpPr>
-          <p:cNvPr id="8" name="Rectangle: Rounded Corners 7">
-            <a:extLst>
-              <a:ext uri="{FF2B5EF4-FFF2-40B4-BE49-F238E27FC236}">
-                <a16:creationId xmlns:a16="http://schemas.microsoft.com/office/drawing/2014/main" id="{F8A87ACF-D590-7A3F-342F-4DD0068CD30C}"/>
-              </a:ext>
-            </a:extLst>
-          </p:cNvPr>
-          <p:cNvSpPr/>
-          <p:nvPr/>
-        </p:nvSpPr>
-        <p:spPr>
-          <a:xfrm>
-            <a:off x="3265699" y="4397231"/>
-            <a:ext cx="1586094" cy="1153569"/>
-          </a:xfrm>
-          <a:prstGeom prst="roundRect">
-            <a:avLst/>
-          </a:prstGeom>
-        </p:spPr>
-        <p:style>
-          <a:lnRef idx="2">
-            <a:schemeClr val="accent1">
-              <a:shade val="15000"/>
-            </a:schemeClr>
-          </a:lnRef>
-          <a:fillRef idx="1">
-            <a:schemeClr val="accent1"/>
-          </a:fillRef>
-          <a:effectRef idx="0">
-            <a:schemeClr val="accent1"/>
-          </a:effectRef>
-          <a:fontRef idx="minor">
-            <a:schemeClr val="lt1"/>
-          </a:fontRef>
-        </p:style>
-        <p:txBody>
-          <a:bodyPr rtlCol="0" anchor="ctr"/>
-          <a:lstStyle/>
-          <a:p>
-            <a:pPr algn="ctr"/>
-            <a:r>
-              <a:rPr lang="en-GB" dirty="0"/>
-              <a:t>Inventory</a:t>
-            </a:r>
-          </a:p>
-        </p:txBody>
-      </p:sp>
-      <p:sp>
-        <p:nvSpPr>
-          <p:cNvPr id="9" name="Rectangle: Rounded Corners 8">
-            <a:extLst>
-              <a:ext uri="{FF2B5EF4-FFF2-40B4-BE49-F238E27FC236}">
-                <a16:creationId xmlns:a16="http://schemas.microsoft.com/office/drawing/2014/main" id="{3CF5EF90-1623-7A89-91AB-3BC5C9069B14}"/>
-              </a:ext>
-            </a:extLst>
-          </p:cNvPr>
-          <p:cNvSpPr/>
-          <p:nvPr/>
-        </p:nvSpPr>
-        <p:spPr>
-          <a:xfrm>
-            <a:off x="7266105" y="4397231"/>
-            <a:ext cx="1586094" cy="1153569"/>
-          </a:xfrm>
-          <a:prstGeom prst="roundRect">
-            <a:avLst/>
-          </a:prstGeom>
-        </p:spPr>
-        <p:style>
-          <a:lnRef idx="2">
-            <a:schemeClr val="accent1">
-              <a:shade val="15000"/>
-            </a:schemeClr>
-          </a:lnRef>
-          <a:fillRef idx="1">
-            <a:schemeClr val="accent1"/>
-          </a:fillRef>
-          <a:effectRef idx="0">
-            <a:schemeClr val="accent1"/>
-          </a:effectRef>
-          <a:fontRef idx="minor">
-            <a:schemeClr val="lt1"/>
-          </a:fontRef>
-        </p:style>
-        <p:txBody>
-          <a:bodyPr rtlCol="0" anchor="ctr"/>
-          <a:lstStyle/>
-          <a:p>
-            <a:pPr algn="ctr"/>
-            <a:r>
-              <a:rPr lang="en-GB" dirty="0"/>
-              <a:t>Player Stats Manager</a:t>
-            </a:r>
-          </a:p>
-        </p:txBody>
-      </p:sp>
-      <p:cxnSp>
-        <p:nvCxnSpPr>
-          <p:cNvPr id="11" name="Straight Arrow Connector 10">
-            <a:extLst>
-              <a:ext uri="{FF2B5EF4-FFF2-40B4-BE49-F238E27FC236}">
-                <a16:creationId xmlns:a16="http://schemas.microsoft.com/office/drawing/2014/main" id="{60175994-7E24-B723-63B1-9E5DC15C2F9E}"/>
-              </a:ext>
-            </a:extLst>
-          </p:cNvPr>
-          <p:cNvCxnSpPr>
-            <a:stCxn id="8" idx="3"/>
-            <a:endCxn id="5" idx="2"/>
-          </p:cNvCxnSpPr>
-          <p:nvPr/>
-        </p:nvCxnSpPr>
-        <p:spPr>
-          <a:xfrm flipV="1">
-            <a:off x="4851793" y="4100904"/>
-            <a:ext cx="1207156" cy="873112"/>
-          </a:xfrm>
-          <a:prstGeom prst="straightConnector1">
-            <a:avLst/>
-          </a:prstGeom>
-          <a:ln>
-            <a:tailEnd type="triangle"/>
-          </a:ln>
-        </p:spPr>
-        <p:style>
-          <a:lnRef idx="2">
-            <a:schemeClr val="accent1"/>
-          </a:lnRef>
-          <a:fillRef idx="0">
-            <a:schemeClr val="accent1"/>
-          </a:fillRef>
-          <a:effectRef idx="1">
-            <a:schemeClr val="accent1"/>
-          </a:effectRef>
-          <a:fontRef idx="minor">
-            <a:schemeClr val="tx1"/>
-          </a:fontRef>
-        </p:style>
-      </p:cxnSp>
-      <p:sp>
-        <p:nvSpPr>
-          <p:cNvPr id="12" name="TextBox 11">
-            <a:extLst>
-              <a:ext uri="{FF2B5EF4-FFF2-40B4-BE49-F238E27FC236}">
-                <a16:creationId xmlns:a16="http://schemas.microsoft.com/office/drawing/2014/main" id="{333CA1F4-13DE-615A-22A0-ED6849169DE1}"/>
-              </a:ext>
-            </a:extLst>
-          </p:cNvPr>
-          <p:cNvSpPr txBox="1"/>
-          <p:nvPr/>
-        </p:nvSpPr>
-        <p:spPr>
-          <a:xfrm>
-            <a:off x="5023494" y="4719286"/>
-            <a:ext cx="1276478" cy="646331"/>
-          </a:xfrm>
-          <a:prstGeom prst="rect">
-            <a:avLst/>
-          </a:prstGeom>
-          <a:noFill/>
-        </p:spPr>
-        <p:txBody>
-          <a:bodyPr wrap="square" rtlCol="0">
-            <a:spAutoFit/>
-          </a:bodyPr>
-          <a:lstStyle/>
-          <a:p>
-            <a:r>
-              <a:rPr lang="en-GB" dirty="0"/>
-              <a:t>Subscribe to signal</a:t>
-            </a:r>
-          </a:p>
-        </p:txBody>
-      </p:sp>
+        </p:grpSpPr>
+        <p:sp>
+          <p:nvSpPr>
+            <p:cNvPr id="3" name="Rectangle 2">
+              <a:extLst>
+                <a:ext uri="{FF2B5EF4-FFF2-40B4-BE49-F238E27FC236}">
+                  <a16:creationId xmlns:a16="http://schemas.microsoft.com/office/drawing/2014/main" id="{6FF7CE55-54A1-26D0-B58B-FC311716C817}"/>
+                </a:ext>
+              </a:extLst>
+            </p:cNvPr>
+            <p:cNvSpPr/>
+            <p:nvPr/>
+          </p:nvSpPr>
+          <p:spPr>
+            <a:xfrm>
+              <a:off x="2780021" y="2260833"/>
+              <a:ext cx="6554223" cy="3586294"/>
+            </a:xfrm>
+            <a:prstGeom prst="rect">
+              <a:avLst/>
+            </a:prstGeom>
+          </p:spPr>
+          <p:style>
+            <a:lnRef idx="1">
+              <a:schemeClr val="accent5"/>
+            </a:lnRef>
+            <a:fillRef idx="2">
+              <a:schemeClr val="accent5"/>
+            </a:fillRef>
+            <a:effectRef idx="1">
+              <a:schemeClr val="accent5"/>
+            </a:effectRef>
+            <a:fontRef idx="minor">
+              <a:schemeClr val="dk1"/>
+            </a:fontRef>
+          </p:style>
+          <p:txBody>
+            <a:bodyPr rtlCol="0" anchor="ctr"/>
+            <a:lstStyle/>
+            <a:p>
+              <a:pPr algn="ctr" defTabSz="1060704">
+                <a:spcAft>
+                  <a:spcPts val="600"/>
+                </a:spcAft>
+              </a:pPr>
+              <a:r>
+                <a:rPr lang="en-GB" sz="2088" kern="1200">
+                  <a:solidFill>
+                    <a:schemeClr val="bg1"/>
+                  </a:solidFill>
+                  <a:latin typeface="+mn-lt"/>
+                  <a:ea typeface="+mn-ea"/>
+                  <a:cs typeface="+mn-cs"/>
+                </a:rPr>
+                <a:t>Player Game Object</a:t>
+              </a:r>
+            </a:p>
+            <a:p>
+              <a:pPr algn="ctr" defTabSz="1060704">
+                <a:spcAft>
+                  <a:spcPts val="600"/>
+                </a:spcAft>
+              </a:pPr>
+              <a:endParaRPr lang="en-GB" sz="2088" kern="1200">
+                <a:solidFill>
+                  <a:schemeClr val="bg1"/>
+                </a:solidFill>
+                <a:latin typeface="+mn-lt"/>
+                <a:ea typeface="+mn-ea"/>
+                <a:cs typeface="+mn-cs"/>
+              </a:endParaRPr>
+            </a:p>
+            <a:p>
+              <a:pPr algn="ctr" defTabSz="1060704">
+                <a:spcAft>
+                  <a:spcPts val="600"/>
+                </a:spcAft>
+              </a:pPr>
+              <a:endParaRPr lang="en-GB" sz="2088" kern="1200">
+                <a:solidFill>
+                  <a:schemeClr val="bg1"/>
+                </a:solidFill>
+                <a:latin typeface="+mn-lt"/>
+                <a:ea typeface="+mn-ea"/>
+                <a:cs typeface="+mn-cs"/>
+              </a:endParaRPr>
+            </a:p>
+            <a:p>
+              <a:pPr algn="ctr" defTabSz="1060704">
+                <a:spcAft>
+                  <a:spcPts val="600"/>
+                </a:spcAft>
+              </a:pPr>
+              <a:endParaRPr lang="en-GB" sz="2088" kern="1200">
+                <a:solidFill>
+                  <a:schemeClr val="bg1"/>
+                </a:solidFill>
+                <a:latin typeface="+mn-lt"/>
+                <a:ea typeface="+mn-ea"/>
+                <a:cs typeface="+mn-cs"/>
+              </a:endParaRPr>
+            </a:p>
+            <a:p>
+              <a:pPr algn="ctr" defTabSz="1060704">
+                <a:spcAft>
+                  <a:spcPts val="600"/>
+                </a:spcAft>
+              </a:pPr>
+              <a:endParaRPr lang="en-GB" sz="2088" kern="1200">
+                <a:solidFill>
+                  <a:schemeClr val="bg1"/>
+                </a:solidFill>
+                <a:latin typeface="+mn-lt"/>
+                <a:ea typeface="+mn-ea"/>
+                <a:cs typeface="+mn-cs"/>
+              </a:endParaRPr>
+            </a:p>
+            <a:p>
+              <a:pPr algn="ctr" defTabSz="1060704">
+                <a:spcAft>
+                  <a:spcPts val="600"/>
+                </a:spcAft>
+              </a:pPr>
+              <a:endParaRPr lang="en-GB" sz="2088" kern="1200">
+                <a:solidFill>
+                  <a:schemeClr val="bg1"/>
+                </a:solidFill>
+                <a:latin typeface="+mn-lt"/>
+                <a:ea typeface="+mn-ea"/>
+                <a:cs typeface="+mn-cs"/>
+              </a:endParaRPr>
+            </a:p>
+            <a:p>
+              <a:pPr algn="ctr" defTabSz="1060704">
+                <a:spcAft>
+                  <a:spcPts val="600"/>
+                </a:spcAft>
+              </a:pPr>
+              <a:endParaRPr lang="en-GB" sz="2088" kern="1200">
+                <a:solidFill>
+                  <a:schemeClr val="bg1"/>
+                </a:solidFill>
+                <a:latin typeface="+mn-lt"/>
+                <a:ea typeface="+mn-ea"/>
+                <a:cs typeface="+mn-cs"/>
+              </a:endParaRPr>
+            </a:p>
+            <a:p>
+              <a:pPr algn="ctr" defTabSz="1060704">
+                <a:spcAft>
+                  <a:spcPts val="600"/>
+                </a:spcAft>
+              </a:pPr>
+              <a:endParaRPr lang="en-GB" sz="2088" kern="1200">
+                <a:solidFill>
+                  <a:schemeClr val="bg1"/>
+                </a:solidFill>
+                <a:latin typeface="+mn-lt"/>
+                <a:ea typeface="+mn-ea"/>
+                <a:cs typeface="+mn-cs"/>
+              </a:endParaRPr>
+            </a:p>
+            <a:p>
+              <a:pPr algn="ctr" defTabSz="1060704">
+                <a:spcAft>
+                  <a:spcPts val="600"/>
+                </a:spcAft>
+              </a:pPr>
+              <a:endParaRPr lang="en-GB" sz="2088" kern="1200">
+                <a:solidFill>
+                  <a:schemeClr val="bg1"/>
+                </a:solidFill>
+                <a:latin typeface="+mn-lt"/>
+                <a:ea typeface="+mn-ea"/>
+                <a:cs typeface="+mn-cs"/>
+              </a:endParaRPr>
+            </a:p>
+            <a:p>
+              <a:pPr algn="ctr" defTabSz="1060704">
+                <a:spcAft>
+                  <a:spcPts val="600"/>
+                </a:spcAft>
+              </a:pPr>
+              <a:endParaRPr lang="en-GB" sz="2088" kern="1200">
+                <a:solidFill>
+                  <a:schemeClr val="bg1"/>
+                </a:solidFill>
+                <a:latin typeface="+mn-lt"/>
+                <a:ea typeface="+mn-ea"/>
+                <a:cs typeface="+mn-cs"/>
+              </a:endParaRPr>
+            </a:p>
+            <a:p>
+              <a:pPr algn="ctr" defTabSz="1060704">
+                <a:spcAft>
+                  <a:spcPts val="600"/>
+                </a:spcAft>
+              </a:pPr>
+              <a:endParaRPr lang="en-GB" sz="2088" kern="1200">
+                <a:solidFill>
+                  <a:schemeClr val="bg1"/>
+                </a:solidFill>
+                <a:latin typeface="+mn-lt"/>
+                <a:ea typeface="+mn-ea"/>
+                <a:cs typeface="+mn-cs"/>
+              </a:endParaRPr>
+            </a:p>
+            <a:p>
+              <a:pPr algn="ctr" defTabSz="1060704">
+                <a:spcAft>
+                  <a:spcPts val="600"/>
+                </a:spcAft>
+              </a:pPr>
+              <a:endParaRPr lang="en-GB" sz="2088" kern="1200">
+                <a:solidFill>
+                  <a:schemeClr val="bg1"/>
+                </a:solidFill>
+                <a:latin typeface="+mn-lt"/>
+                <a:ea typeface="+mn-ea"/>
+                <a:cs typeface="+mn-cs"/>
+              </a:endParaRPr>
+            </a:p>
+            <a:p>
+              <a:pPr algn="ctr">
+                <a:spcAft>
+                  <a:spcPts val="600"/>
+                </a:spcAft>
+              </a:pPr>
+              <a:endParaRPr lang="en-GB">
+                <a:solidFill>
+                  <a:schemeClr val="bg1"/>
+                </a:solidFill>
+              </a:endParaRPr>
+            </a:p>
+          </p:txBody>
+        </p:sp>
+        <p:sp>
+          <p:nvSpPr>
+            <p:cNvPr id="5" name="Rectangle: Rounded Corners 4">
+              <a:extLst>
+                <a:ext uri="{FF2B5EF4-FFF2-40B4-BE49-F238E27FC236}">
+                  <a16:creationId xmlns:a16="http://schemas.microsoft.com/office/drawing/2014/main" id="{B2261ED9-82CF-B8F4-2B0C-3BA4E05429D5}"/>
+                </a:ext>
+              </a:extLst>
+            </p:cNvPr>
+            <p:cNvSpPr/>
+            <p:nvPr/>
+          </p:nvSpPr>
+          <p:spPr>
+            <a:xfrm>
+              <a:off x="5265902" y="2947335"/>
+              <a:ext cx="1586094" cy="1153569"/>
+            </a:xfrm>
+            <a:prstGeom prst="roundRect">
+              <a:avLst/>
+            </a:prstGeom>
+          </p:spPr>
+          <p:style>
+            <a:lnRef idx="2">
+              <a:schemeClr val="accent1">
+                <a:shade val="15000"/>
+              </a:schemeClr>
+            </a:lnRef>
+            <a:fillRef idx="1">
+              <a:schemeClr val="accent1"/>
+            </a:fillRef>
+            <a:effectRef idx="0">
+              <a:schemeClr val="accent1"/>
+            </a:effectRef>
+            <a:fontRef idx="minor">
+              <a:schemeClr val="lt1"/>
+            </a:fontRef>
+          </p:style>
+          <p:txBody>
+            <a:bodyPr rtlCol="0" anchor="ctr"/>
+            <a:lstStyle/>
+            <a:p>
+              <a:pPr algn="ctr" defTabSz="1060704">
+                <a:spcAft>
+                  <a:spcPts val="600"/>
+                </a:spcAft>
+              </a:pPr>
+              <a:r>
+                <a:rPr lang="en-GB" sz="2088" kern="1200" dirty="0">
+                  <a:solidFill>
+                    <a:schemeClr val="bg1"/>
+                  </a:solidFill>
+                  <a:latin typeface="+mn-lt"/>
+                  <a:ea typeface="+mn-ea"/>
+                  <a:cs typeface="+mn-cs"/>
+                </a:rPr>
+                <a:t>Player Controller (class)</a:t>
+              </a:r>
+              <a:endParaRPr lang="en-GB" dirty="0">
+                <a:solidFill>
+                  <a:schemeClr val="bg1"/>
+                </a:solidFill>
+              </a:endParaRPr>
+            </a:p>
+          </p:txBody>
+        </p:sp>
+        <p:sp>
+          <p:nvSpPr>
+            <p:cNvPr id="6" name="Rectangle: Rounded Corners 5">
+              <a:extLst>
+                <a:ext uri="{FF2B5EF4-FFF2-40B4-BE49-F238E27FC236}">
+                  <a16:creationId xmlns:a16="http://schemas.microsoft.com/office/drawing/2014/main" id="{F5712A53-5352-7E24-B805-3785A4DF5004}"/>
+                </a:ext>
+              </a:extLst>
+            </p:cNvPr>
+            <p:cNvSpPr/>
+            <p:nvPr/>
+          </p:nvSpPr>
+          <p:spPr>
+            <a:xfrm>
+              <a:off x="3265699" y="2947335"/>
+              <a:ext cx="1586094" cy="1153569"/>
+            </a:xfrm>
+            <a:prstGeom prst="roundRect">
+              <a:avLst/>
+            </a:prstGeom>
+          </p:spPr>
+          <p:style>
+            <a:lnRef idx="2">
+              <a:schemeClr val="accent1">
+                <a:shade val="15000"/>
+              </a:schemeClr>
+            </a:lnRef>
+            <a:fillRef idx="1">
+              <a:schemeClr val="accent1"/>
+            </a:fillRef>
+            <a:effectRef idx="0">
+              <a:schemeClr val="accent1"/>
+            </a:effectRef>
+            <a:fontRef idx="minor">
+              <a:schemeClr val="lt1"/>
+            </a:fontRef>
+          </p:style>
+          <p:txBody>
+            <a:bodyPr rtlCol="0" anchor="ctr"/>
+            <a:lstStyle/>
+            <a:p>
+              <a:pPr algn="ctr" defTabSz="1060704">
+                <a:spcAft>
+                  <a:spcPts val="600"/>
+                </a:spcAft>
+              </a:pPr>
+              <a:r>
+                <a:rPr lang="en-GB" sz="2088" kern="1200">
+                  <a:solidFill>
+                    <a:schemeClr val="bg1"/>
+                  </a:solidFill>
+                  <a:latin typeface="+mn-lt"/>
+                  <a:ea typeface="+mn-ea"/>
+                  <a:cs typeface="+mn-cs"/>
+                </a:rPr>
+                <a:t>Player (Class)</a:t>
+              </a:r>
+              <a:endParaRPr lang="en-GB">
+                <a:solidFill>
+                  <a:schemeClr val="bg1"/>
+                </a:solidFill>
+              </a:endParaRPr>
+            </a:p>
+          </p:txBody>
+        </p:sp>
+        <p:sp>
+          <p:nvSpPr>
+            <p:cNvPr id="7" name="Rectangle: Rounded Corners 6">
+              <a:extLst>
+                <a:ext uri="{FF2B5EF4-FFF2-40B4-BE49-F238E27FC236}">
+                  <a16:creationId xmlns:a16="http://schemas.microsoft.com/office/drawing/2014/main" id="{EA94644A-FE4C-8E30-15E1-24F1C003D6AB}"/>
+                </a:ext>
+              </a:extLst>
+            </p:cNvPr>
+            <p:cNvSpPr/>
+            <p:nvPr/>
+          </p:nvSpPr>
+          <p:spPr>
+            <a:xfrm>
+              <a:off x="7266105" y="2947335"/>
+              <a:ext cx="1586094" cy="1153569"/>
+            </a:xfrm>
+            <a:prstGeom prst="roundRect">
+              <a:avLst/>
+            </a:prstGeom>
+          </p:spPr>
+          <p:style>
+            <a:lnRef idx="2">
+              <a:schemeClr val="accent1">
+                <a:shade val="15000"/>
+              </a:schemeClr>
+            </a:lnRef>
+            <a:fillRef idx="1">
+              <a:schemeClr val="accent1"/>
+            </a:fillRef>
+            <a:effectRef idx="0">
+              <a:schemeClr val="accent1"/>
+            </a:effectRef>
+            <a:fontRef idx="minor">
+              <a:schemeClr val="lt1"/>
+            </a:fontRef>
+          </p:style>
+          <p:txBody>
+            <a:bodyPr rtlCol="0" anchor="ctr"/>
+            <a:lstStyle/>
+            <a:p>
+              <a:pPr algn="ctr" defTabSz="1060704">
+                <a:spcAft>
+                  <a:spcPts val="600"/>
+                </a:spcAft>
+              </a:pPr>
+              <a:r>
+                <a:rPr lang="en-GB" sz="2088" kern="1200">
+                  <a:solidFill>
+                    <a:schemeClr val="bg1"/>
+                  </a:solidFill>
+                  <a:latin typeface="+mn-lt"/>
+                  <a:ea typeface="+mn-ea"/>
+                  <a:cs typeface="+mn-cs"/>
+                </a:rPr>
+                <a:t>Health</a:t>
+              </a:r>
+              <a:endParaRPr lang="en-GB">
+                <a:solidFill>
+                  <a:schemeClr val="bg1"/>
+                </a:solidFill>
+              </a:endParaRPr>
+            </a:p>
+          </p:txBody>
+        </p:sp>
+        <p:sp>
+          <p:nvSpPr>
+            <p:cNvPr id="8" name="Rectangle: Rounded Corners 7">
+              <a:extLst>
+                <a:ext uri="{FF2B5EF4-FFF2-40B4-BE49-F238E27FC236}">
+                  <a16:creationId xmlns:a16="http://schemas.microsoft.com/office/drawing/2014/main" id="{F8A87ACF-D590-7A3F-342F-4DD0068CD30C}"/>
+                </a:ext>
+              </a:extLst>
+            </p:cNvPr>
+            <p:cNvSpPr/>
+            <p:nvPr/>
+          </p:nvSpPr>
+          <p:spPr>
+            <a:xfrm>
+              <a:off x="3265699" y="4397231"/>
+              <a:ext cx="1586094" cy="1153569"/>
+            </a:xfrm>
+            <a:prstGeom prst="roundRect">
+              <a:avLst/>
+            </a:prstGeom>
+          </p:spPr>
+          <p:style>
+            <a:lnRef idx="2">
+              <a:schemeClr val="accent1">
+                <a:shade val="15000"/>
+              </a:schemeClr>
+            </a:lnRef>
+            <a:fillRef idx="1">
+              <a:schemeClr val="accent1"/>
+            </a:fillRef>
+            <a:effectRef idx="0">
+              <a:schemeClr val="accent1"/>
+            </a:effectRef>
+            <a:fontRef idx="minor">
+              <a:schemeClr val="lt1"/>
+            </a:fontRef>
+          </p:style>
+          <p:txBody>
+            <a:bodyPr rtlCol="0" anchor="ctr"/>
+            <a:lstStyle/>
+            <a:p>
+              <a:pPr algn="ctr" defTabSz="1060704">
+                <a:spcAft>
+                  <a:spcPts val="600"/>
+                </a:spcAft>
+              </a:pPr>
+              <a:r>
+                <a:rPr lang="en-GB" sz="2088" kern="1200">
+                  <a:solidFill>
+                    <a:schemeClr val="bg1"/>
+                  </a:solidFill>
+                  <a:latin typeface="+mn-lt"/>
+                  <a:ea typeface="+mn-ea"/>
+                  <a:cs typeface="+mn-cs"/>
+                </a:rPr>
+                <a:t>Inventory</a:t>
+              </a:r>
+              <a:endParaRPr lang="en-GB">
+                <a:solidFill>
+                  <a:schemeClr val="bg1"/>
+                </a:solidFill>
+              </a:endParaRPr>
+            </a:p>
+          </p:txBody>
+        </p:sp>
+        <p:sp>
+          <p:nvSpPr>
+            <p:cNvPr id="9" name="Rectangle: Rounded Corners 8">
+              <a:extLst>
+                <a:ext uri="{FF2B5EF4-FFF2-40B4-BE49-F238E27FC236}">
+                  <a16:creationId xmlns:a16="http://schemas.microsoft.com/office/drawing/2014/main" id="{3CF5EF90-1623-7A89-91AB-3BC5C9069B14}"/>
+                </a:ext>
+              </a:extLst>
+            </p:cNvPr>
+            <p:cNvSpPr/>
+            <p:nvPr/>
+          </p:nvSpPr>
+          <p:spPr>
+            <a:xfrm>
+              <a:off x="7266105" y="4397231"/>
+              <a:ext cx="1586094" cy="1153569"/>
+            </a:xfrm>
+            <a:prstGeom prst="roundRect">
+              <a:avLst/>
+            </a:prstGeom>
+          </p:spPr>
+          <p:style>
+            <a:lnRef idx="2">
+              <a:schemeClr val="accent1">
+                <a:shade val="15000"/>
+              </a:schemeClr>
+            </a:lnRef>
+            <a:fillRef idx="1">
+              <a:schemeClr val="accent1"/>
+            </a:fillRef>
+            <a:effectRef idx="0">
+              <a:schemeClr val="accent1"/>
+            </a:effectRef>
+            <a:fontRef idx="minor">
+              <a:schemeClr val="lt1"/>
+            </a:fontRef>
+          </p:style>
+          <p:txBody>
+            <a:bodyPr rtlCol="0" anchor="ctr"/>
+            <a:lstStyle/>
+            <a:p>
+              <a:pPr algn="ctr" defTabSz="1060704">
+                <a:spcAft>
+                  <a:spcPts val="600"/>
+                </a:spcAft>
+              </a:pPr>
+              <a:r>
+                <a:rPr lang="en-GB" sz="2088" kern="1200">
+                  <a:solidFill>
+                    <a:schemeClr val="bg1"/>
+                  </a:solidFill>
+                  <a:latin typeface="+mn-lt"/>
+                  <a:ea typeface="+mn-ea"/>
+                  <a:cs typeface="+mn-cs"/>
+                </a:rPr>
+                <a:t>Player Stats Manager</a:t>
+              </a:r>
+              <a:endParaRPr lang="en-GB">
+                <a:solidFill>
+                  <a:schemeClr val="bg1"/>
+                </a:solidFill>
+              </a:endParaRPr>
+            </a:p>
+          </p:txBody>
+        </p:sp>
+        <p:cxnSp>
+          <p:nvCxnSpPr>
+            <p:cNvPr id="11" name="Straight Arrow Connector 10">
+              <a:extLst>
+                <a:ext uri="{FF2B5EF4-FFF2-40B4-BE49-F238E27FC236}">
+                  <a16:creationId xmlns:a16="http://schemas.microsoft.com/office/drawing/2014/main" id="{60175994-7E24-B723-63B1-9E5DC15C2F9E}"/>
+                </a:ext>
+              </a:extLst>
+            </p:cNvPr>
+            <p:cNvCxnSpPr>
+              <a:stCxn id="8" idx="3"/>
+              <a:endCxn id="5" idx="2"/>
+            </p:cNvCxnSpPr>
+            <p:nvPr/>
+          </p:nvCxnSpPr>
+          <p:spPr>
+            <a:xfrm flipV="1">
+              <a:off x="4851793" y="4100904"/>
+              <a:ext cx="1207156" cy="873112"/>
+            </a:xfrm>
+            <a:prstGeom prst="straightConnector1">
+              <a:avLst/>
+            </a:prstGeom>
+            <a:ln>
+              <a:tailEnd type="triangle"/>
+            </a:ln>
+          </p:spPr>
+          <p:style>
+            <a:lnRef idx="2">
+              <a:schemeClr val="accent1"/>
+            </a:lnRef>
+            <a:fillRef idx="0">
+              <a:schemeClr val="accent1"/>
+            </a:fillRef>
+            <a:effectRef idx="1">
+              <a:schemeClr val="accent1"/>
+            </a:effectRef>
+            <a:fontRef idx="minor">
+              <a:schemeClr val="tx1"/>
+            </a:fontRef>
+          </p:style>
+        </p:cxnSp>
+        <p:sp>
+          <p:nvSpPr>
+            <p:cNvPr id="12" name="TextBox 11">
+              <a:extLst>
+                <a:ext uri="{FF2B5EF4-FFF2-40B4-BE49-F238E27FC236}">
+                  <a16:creationId xmlns:a16="http://schemas.microsoft.com/office/drawing/2014/main" id="{333CA1F4-13DE-615A-22A0-ED6849169DE1}"/>
+                </a:ext>
+              </a:extLst>
+            </p:cNvPr>
+            <p:cNvSpPr txBox="1"/>
+            <p:nvPr/>
+          </p:nvSpPr>
+          <p:spPr>
+            <a:xfrm>
+              <a:off x="5023494" y="4719286"/>
+              <a:ext cx="1276478" cy="923330"/>
+            </a:xfrm>
+            <a:prstGeom prst="rect">
+              <a:avLst/>
+            </a:prstGeom>
+            <a:noFill/>
+          </p:spPr>
+          <p:txBody>
+            <a:bodyPr wrap="square" rtlCol="0">
+              <a:spAutoFit/>
+            </a:bodyPr>
+            <a:lstStyle/>
+            <a:p>
+              <a:pPr defTabSz="1060704">
+                <a:spcAft>
+                  <a:spcPts val="600"/>
+                </a:spcAft>
+              </a:pPr>
+              <a:r>
+                <a:rPr lang="en-GB" sz="2088" kern="1200">
+                  <a:solidFill>
+                    <a:schemeClr val="tx1"/>
+                  </a:solidFill>
+                  <a:latin typeface="+mn-lt"/>
+                  <a:ea typeface="+mn-ea"/>
+                  <a:cs typeface="+mn-cs"/>
+                </a:rPr>
+                <a:t>Subscribe to event action</a:t>
+              </a:r>
+              <a:endParaRPr lang="en-GB"/>
+            </a:p>
+          </p:txBody>
+        </p:sp>
+      </p:grpSp>
     </p:spTree>
     <p:extLst>
       <p:ext uri="{BB962C8B-B14F-4D97-AF65-F5344CB8AC3E}">

--- a/Documentation/Character Controller Architecture.pptx
+++ b/Documentation/Character Controller Architecture.pptx
@@ -1884,7 +1884,7 @@
 <dgm:dataModel xmlns:dgm="http://schemas.openxmlformats.org/drawingml/2006/diagram" xmlns:a="http://schemas.openxmlformats.org/drawingml/2006/main">
   <dgm:ptLst>
     <dgm:pt modelId="{705FA889-2D7E-4B02-8EBA-35A600213028}" type="doc">
-      <dgm:prSet loTypeId="urn:microsoft.com/office/officeart/2016/7/layout/HorizontalActionList" loCatId="List" qsTypeId="urn:microsoft.com/office/officeart/2005/8/quickstyle/simple2" qsCatId="simple" csTypeId="urn:microsoft.com/office/officeart/2005/8/colors/colorful2" csCatId="colorful"/>
+      <dgm:prSet loTypeId="urn:microsoft.com/office/officeart/2016/7/layout/HorizontalActionList" loCatId="List" qsTypeId="urn:microsoft.com/office/officeart/2005/8/quickstyle/simple2" qsCatId="simple" csTypeId="urn:microsoft.com/office/officeart/2005/8/colors/colorful2" csCatId="colorful" phldr="1"/>
       <dgm:spPr/>
       <dgm:t>
         <a:bodyPr/>
@@ -1938,8 +1938,8 @@
         <a:lstStyle/>
         <a:p>
           <a:r>
-            <a:rPr lang="en-US"/>
-            <a:t>Build a Character controller with modular functionality capable of fitting the vast majority of use cases</a:t>
+            <a:rPr lang="en-US" dirty="0"/>
+            <a:t>Build a Character controller with modular functionality capable of fitting the majority of use cases</a:t>
           </a:r>
         </a:p>
       </dgm:t>
@@ -2010,8 +2010,8 @@
         <a:lstStyle/>
         <a:p>
           <a:r>
-            <a:rPr lang="en-US"/>
-            <a:t>Avoid load large, unnecessary code, for maintainability and efficiency</a:t>
+            <a:rPr lang="en-US" dirty="0"/>
+            <a:t>Avoid loading large, unnecessary code, for maintainability and efficiency</a:t>
           </a:r>
         </a:p>
       </dgm:t>
@@ -2714,8 +2714,8 @@
             <a:buNone/>
           </a:pPr>
           <a:r>
-            <a:rPr lang="en-US" sz="2600" kern="1200"/>
-            <a:t>Build a Character controller with modular functionality capable of fitting the vast majority of use cases</a:t>
+            <a:rPr lang="en-US" sz="2600" kern="1200" dirty="0"/>
+            <a:t>Build a Character controller with modular functionality capable of fitting the majority of use cases</a:t>
           </a:r>
         </a:p>
       </dsp:txBody>
@@ -2872,8 +2872,8 @@
             <a:buNone/>
           </a:pPr>
           <a:r>
-            <a:rPr lang="en-US" sz="2600" kern="1200"/>
-            <a:t>Avoid load large, unnecessary code, for maintainability and efficiency</a:t>
+            <a:rPr lang="en-US" sz="2600" kern="1200" dirty="0"/>
+            <a:t>Avoid loading large, unnecessary code, for maintainability and efficiency</a:t>
           </a:r>
         </a:p>
       </dsp:txBody>
@@ -5718,7 +5718,7 @@
           <a:p>
             <a:fld id="{803EEF15-3224-4E6A-86AF-A482FB815B50}" type="datetimeFigureOut">
               <a:rPr lang="en-GB" smtClean="0"/>
-              <a:t>20/11/2025</a:t>
+              <a:t>23/11/2025</a:t>
             </a:fld>
             <a:endParaRPr lang="en-GB"/>
           </a:p>
@@ -5916,7 +5916,7 @@
           <a:p>
             <a:fld id="{803EEF15-3224-4E6A-86AF-A482FB815B50}" type="datetimeFigureOut">
               <a:rPr lang="en-GB" smtClean="0"/>
-              <a:t>20/11/2025</a:t>
+              <a:t>23/11/2025</a:t>
             </a:fld>
             <a:endParaRPr lang="en-GB"/>
           </a:p>
@@ -6124,7 +6124,7 @@
           <a:p>
             <a:fld id="{803EEF15-3224-4E6A-86AF-A482FB815B50}" type="datetimeFigureOut">
               <a:rPr lang="en-GB" smtClean="0"/>
-              <a:t>20/11/2025</a:t>
+              <a:t>23/11/2025</a:t>
             </a:fld>
             <a:endParaRPr lang="en-GB"/>
           </a:p>
@@ -6322,7 +6322,7 @@
           <a:p>
             <a:fld id="{803EEF15-3224-4E6A-86AF-A482FB815B50}" type="datetimeFigureOut">
               <a:rPr lang="en-GB" smtClean="0"/>
-              <a:t>20/11/2025</a:t>
+              <a:t>23/11/2025</a:t>
             </a:fld>
             <a:endParaRPr lang="en-GB"/>
           </a:p>
@@ -6597,7 +6597,7 @@
           <a:p>
             <a:fld id="{803EEF15-3224-4E6A-86AF-A482FB815B50}" type="datetimeFigureOut">
               <a:rPr lang="en-GB" smtClean="0"/>
-              <a:t>20/11/2025</a:t>
+              <a:t>23/11/2025</a:t>
             </a:fld>
             <a:endParaRPr lang="en-GB"/>
           </a:p>
@@ -6862,7 +6862,7 @@
           <a:p>
             <a:fld id="{803EEF15-3224-4E6A-86AF-A482FB815B50}" type="datetimeFigureOut">
               <a:rPr lang="en-GB" smtClean="0"/>
-              <a:t>20/11/2025</a:t>
+              <a:t>23/11/2025</a:t>
             </a:fld>
             <a:endParaRPr lang="en-GB"/>
           </a:p>
@@ -7274,7 +7274,7 @@
           <a:p>
             <a:fld id="{803EEF15-3224-4E6A-86AF-A482FB815B50}" type="datetimeFigureOut">
               <a:rPr lang="en-GB" smtClean="0"/>
-              <a:t>20/11/2025</a:t>
+              <a:t>23/11/2025</a:t>
             </a:fld>
             <a:endParaRPr lang="en-GB"/>
           </a:p>
@@ -7415,7 +7415,7 @@
           <a:p>
             <a:fld id="{803EEF15-3224-4E6A-86AF-A482FB815B50}" type="datetimeFigureOut">
               <a:rPr lang="en-GB" smtClean="0"/>
-              <a:t>20/11/2025</a:t>
+              <a:t>23/11/2025</a:t>
             </a:fld>
             <a:endParaRPr lang="en-GB"/>
           </a:p>
@@ -7528,7 +7528,7 @@
           <a:p>
             <a:fld id="{803EEF15-3224-4E6A-86AF-A482FB815B50}" type="datetimeFigureOut">
               <a:rPr lang="en-GB" smtClean="0"/>
-              <a:t>20/11/2025</a:t>
+              <a:t>23/11/2025</a:t>
             </a:fld>
             <a:endParaRPr lang="en-GB"/>
           </a:p>
@@ -7839,7 +7839,7 @@
           <a:p>
             <a:fld id="{803EEF15-3224-4E6A-86AF-A482FB815B50}" type="datetimeFigureOut">
               <a:rPr lang="en-GB" smtClean="0"/>
-              <a:t>20/11/2025</a:t>
+              <a:t>23/11/2025</a:t>
             </a:fld>
             <a:endParaRPr lang="en-GB"/>
           </a:p>
@@ -8127,7 +8127,7 @@
           <a:p>
             <a:fld id="{803EEF15-3224-4E6A-86AF-A482FB815B50}" type="datetimeFigureOut">
               <a:rPr lang="en-GB" smtClean="0"/>
-              <a:t>20/11/2025</a:t>
+              <a:t>23/11/2025</a:t>
             </a:fld>
             <a:endParaRPr lang="en-GB"/>
           </a:p>
@@ -8368,7 +8368,7 @@
           <a:p>
             <a:fld id="{803EEF15-3224-4E6A-86AF-A482FB815B50}" type="datetimeFigureOut">
               <a:rPr lang="en-GB" smtClean="0"/>
-              <a:t>20/11/2025</a:t>
+              <a:t>23/11/2025</a:t>
             </a:fld>
             <a:endParaRPr lang="en-GB"/>
           </a:p>
@@ -9202,7 +9202,7 @@
             <p:ph idx="1"/>
             <p:extLst>
               <p:ext uri="{D42A27DB-BD31-4B8C-83A1-F6EECF244321}">
-                <p14:modId xmlns:p14="http://schemas.microsoft.com/office/powerpoint/2010/main" val="1638631036"/>
+                <p14:modId xmlns:p14="http://schemas.microsoft.com/office/powerpoint/2010/main" val="518758557"/>
               </p:ext>
             </p:extLst>
           </p:nvPr>
@@ -10793,6 +10793,56 @@
             <a:r>
               <a:rPr lang="en-GB" dirty="0"/>
               <a:t>Additional Modules</a:t>
+            </a:r>
+          </a:p>
+        </p:txBody>
+      </p:sp>
+      <p:sp>
+        <p:nvSpPr>
+          <p:cNvPr id="13" name="TextBox 12">
+            <a:extLst>
+              <a:ext uri="{FF2B5EF4-FFF2-40B4-BE49-F238E27FC236}">
+                <a16:creationId xmlns:a16="http://schemas.microsoft.com/office/drawing/2014/main" id="{01D62FCA-9129-98E7-437B-B5A91D60004C}"/>
+              </a:ext>
+            </a:extLst>
+          </p:cNvPr>
+          <p:cNvSpPr txBox="1"/>
+          <p:nvPr/>
+        </p:nvSpPr>
+        <p:spPr>
+          <a:xfrm>
+            <a:off x="461394" y="6017027"/>
+            <a:ext cx="5807359" cy="646331"/>
+          </a:xfrm>
+          <a:prstGeom prst="rect">
+            <a:avLst/>
+          </a:prstGeom>
+          <a:noFill/>
+        </p:spPr>
+        <p:txBody>
+          <a:bodyPr wrap="none" rtlCol="0">
+            <a:spAutoFit/>
+          </a:bodyPr>
+          <a:lstStyle/>
+          <a:p>
+            <a:r>
+              <a:rPr lang="en-GB" dirty="0"/>
+              <a:t>Fully decoupled, communicate only via events on the CC</a:t>
+            </a:r>
+          </a:p>
+          <a:p>
+            <a:pPr algn="ctr"/>
+            <a:r>
+              <a:rPr lang="en-GB" dirty="0"/>
+              <a:t>Not </a:t>
+            </a:r>
+            <a:r>
+              <a:rPr lang="en-GB" dirty="0" err="1"/>
+              <a:t>parralelized</a:t>
+            </a:r>
+            <a:r>
+              <a:rPr lang="en-GB" dirty="0"/>
+              <a:t>, but planned</a:t>
             </a:r>
           </a:p>
         </p:txBody>
